--- a/output/wordlabs-play-3day.pptx
+++ b/output/wordlabs-play-3day.pptx
@@ -4240,7 +4240,7 @@
                 <a:ea typeface="Calibri" pitchFamily="34" charset="-122"/>
                 <a:cs typeface="Calibri" pitchFamily="34" charset="-120"/>
               </a:rPr>
-              <a:t>"engage in fun activity"</a:t>
+              <a:t>"to engage in fun activity"</a:t>
             </a:r>
             <a:endParaRPr lang="en-US" sz="2200" dirty="0"/>
           </a:p>
@@ -4279,7 +4279,7 @@
                 <a:ea typeface="Calibri" pitchFamily="34" charset="-122"/>
                 <a:cs typeface="Calibri" pitchFamily="34" charset="-120"/>
               </a:rPr>
-              <a:t>Origin: Latin: placere</a:t>
+              <a:t>Origin: Latin: plagiare</a:t>
             </a:r>
             <a:endParaRPr lang="en-US" sz="1300" dirty="0"/>
           </a:p>
@@ -5288,7 +5288,7 @@
                 <a:ea typeface="Calibri" pitchFamily="34" charset="-122"/>
                 <a:cs typeface="Calibri" pitchFamily="34" charset="-120"/>
               </a:rPr>
-              <a:t>Word Labs  •  wordlabs.app  •  Root: 'play' = engage in fun activity</a:t>
+              <a:t>Word Labs  •  wordlabs.app  •  Root: 'play' = to engage in fun activity</a:t>
             </a:r>
             <a:endParaRPr lang="en-US" sz="800" dirty="0"/>
           </a:p>
@@ -5622,7 +5622,7 @@
                 <a:ea typeface="Trebuchet MS" pitchFamily="34" charset="-122"/>
                 <a:cs typeface="Trebuchet MS" pitchFamily="34" charset="-120"/>
               </a:rPr>
-              <a:t>0</a:t>
+              <a:t>1</a:t>
             </a:r>
             <a:pPr algn="ctr" indent="0" marL="0">
               <a:buNone/>
@@ -5928,7 +5928,7 @@
                 <a:ea typeface="Calibri" pitchFamily="34" charset="-122"/>
                 <a:cs typeface="Calibri" pitchFamily="34" charset="-120"/>
               </a:rPr>
-              <a:t>Word Labs  •  wordlabs.app  •  Root: 'play' = engage in fun activity</a:t>
+              <a:t>Word Labs  •  wordlabs.app  •  Root: 'play' = to engage in fun activity</a:t>
             </a:r>
             <a:endParaRPr lang="en-US" sz="800" dirty="0"/>
           </a:p>
@@ -6071,7 +6071,7 @@
                 <a:ea typeface="Calibri" pitchFamily="34" charset="-122"/>
                 <a:cs typeface="Calibri" pitchFamily="34" charset="-120"/>
               </a:rPr>
-              <a:t> children enjoyed a long session of </a:t>
+              <a:t> kitten entertained the crowd, and the trainer asked everyone to </a:t>
             </a:r>
             <a:pPr algn="l" indent="0" marL="0">
               <a:buNone/>
@@ -6088,7 +6088,7 @@
                 <a:ea typeface="Calibri" pitchFamily="34" charset="-122"/>
                 <a:cs typeface="Calibri" pitchFamily="34" charset="-120"/>
               </a:rPr>
-              <a:t>wordplay</a:t>
+              <a:t>replay</a:t>
             </a:r>
             <a:pPr algn="l" indent="0" marL="0">
               <a:buNone/>
@@ -6102,7 +6102,7 @@
                 <a:ea typeface="Calibri" pitchFamily="34" charset="-122"/>
                 <a:cs typeface="Calibri" pitchFamily="34" charset="-120"/>
               </a:rPr>
-              <a:t> during the English lesson.</a:t>
+              <a:t> the trick.</a:t>
             </a:r>
             <a:endParaRPr lang="en-US" sz="1800" dirty="0"/>
           </a:p>
@@ -6385,7 +6385,7 @@
                 <a:ea typeface="Trebuchet MS" pitchFamily="34" charset="-122"/>
                 <a:cs typeface="Trebuchet MS" pitchFamily="34" charset="-120"/>
               </a:rPr>
-              <a:t>wordplay</a:t>
+              <a:t>replay</a:t>
             </a:r>
             <a:endParaRPr lang="en-US" sz="1400" dirty="0"/>
           </a:p>
@@ -6716,7 +6716,7 @@
                 <a:ea typeface="Calibri" pitchFamily="34" charset="-122"/>
                 <a:cs typeface="Calibri" pitchFamily="34" charset="-120"/>
               </a:rPr>
-              <a:t>Word Labs  •  wordlabs.app  •  Root: 'play' = engage in fun activity</a:t>
+              <a:t>Word Labs  •  wordlabs.app  •  Root: 'play' = to engage in fun activity</a:t>
             </a:r>
             <a:endParaRPr lang="en-US" sz="800" dirty="0"/>
           </a:p>
@@ -7543,7 +7543,7 @@
                 <a:ea typeface="Calibri" pitchFamily="34" charset="-122"/>
                 <a:cs typeface="Calibri" pitchFamily="34" charset="-120"/>
               </a:rPr>
-              <a:t>Word Labs  •  wordlabs.app  •  Root: 'play' = engage in fun activity</a:t>
+              <a:t>Word Labs  •  wordlabs.app  •  Root: 'play' = to engage in fun activity</a:t>
             </a:r>
             <a:endParaRPr lang="en-US" sz="800" dirty="0"/>
           </a:p>
@@ -7860,7 +7860,7 @@
                 <a:ea typeface="Calibri" pitchFamily="34" charset="-122"/>
                 <a:cs typeface="Calibri" pitchFamily="34" charset="-120"/>
               </a:rPr>
-              <a:t>engage in fun activity</a:t>
+              <a:t>to engage in fun activity</a:t>
             </a:r>
             <a:endParaRPr lang="en-US" sz="850" dirty="0"/>
           </a:p>
@@ -7972,7 +7972,7 @@
                 <a:ea typeface="Calibri" pitchFamily="34" charset="-122"/>
                 <a:cs typeface="Calibri" pitchFamily="34" charset="-120"/>
               </a:rPr>
-              <a:t>full of</a:t>
+              <a:t>full of, having the quality of</a:t>
             </a:r>
             <a:endParaRPr lang="en-US" sz="850" dirty="0"/>
           </a:p>
@@ -8528,7 +8528,7 @@
                 <a:ea typeface="Calibri" pitchFamily="34" charset="-122"/>
                 <a:cs typeface="Calibri" pitchFamily="34" charset="-120"/>
               </a:rPr>
-              <a:t>Word Labs  •  wordlabs.app  •  Root: 'play' = engage in fun activity</a:t>
+              <a:t>Word Labs  •  wordlabs.app  •  Root: 'play' = to engage in fun activity</a:t>
             </a:r>
             <a:endParaRPr lang="en-US" sz="800" dirty="0"/>
           </a:p>
@@ -8845,7 +8845,7 @@
                 <a:ea typeface="Calibri" pitchFamily="34" charset="-122"/>
                 <a:cs typeface="Calibri" pitchFamily="34" charset="-120"/>
               </a:rPr>
-              <a:t>engage in fun activity</a:t>
+              <a:t>to engage in fun activity</a:t>
             </a:r>
             <a:endParaRPr lang="en-US" sz="850" dirty="0"/>
           </a:p>
@@ -8957,7 +8957,7 @@
                 <a:ea typeface="Calibri" pitchFamily="34" charset="-122"/>
                 <a:cs typeface="Calibri" pitchFamily="34" charset="-120"/>
               </a:rPr>
-              <a:t>full of</a:t>
+              <a:t>full of, having the quality of</a:t>
             </a:r>
             <a:endParaRPr lang="en-US" sz="850" dirty="0"/>
           </a:p>
@@ -9645,7 +9645,7 @@
                 <a:ea typeface="Calibri" pitchFamily="34" charset="-122"/>
                 <a:cs typeface="Calibri" pitchFamily="34" charset="-120"/>
               </a:rPr>
-              <a:t>Word Labs  •  wordlabs.app  •  Root: 'play' = engage in fun activity</a:t>
+              <a:t>Word Labs  •  wordlabs.app  •  Root: 'play' = to engage in fun activity</a:t>
             </a:r>
             <a:endParaRPr lang="en-US" sz="800" dirty="0"/>
           </a:p>
@@ -9962,7 +9962,7 @@
                 <a:ea typeface="Calibri" pitchFamily="34" charset="-122"/>
                 <a:cs typeface="Calibri" pitchFamily="34" charset="-120"/>
               </a:rPr>
-              <a:t>engage in fun activity</a:t>
+              <a:t>to engage in fun activity</a:t>
             </a:r>
             <a:endParaRPr lang="en-US" sz="850" dirty="0"/>
           </a:p>
@@ -10074,7 +10074,7 @@
                 <a:ea typeface="Calibri" pitchFamily="34" charset="-122"/>
                 <a:cs typeface="Calibri" pitchFamily="34" charset="-120"/>
               </a:rPr>
-              <a:t>full of</a:t>
+              <a:t>full of, having the quality of</a:t>
             </a:r>
             <a:endParaRPr lang="en-US" sz="850" dirty="0"/>
           </a:p>
@@ -11053,7 +11053,7 @@
                 <a:ea typeface="Calibri" pitchFamily="34" charset="-122"/>
                 <a:cs typeface="Calibri" pitchFamily="34" charset="-120"/>
               </a:rPr>
-              <a:t>Word Labs  •  wordlabs.app  •  Root: 'play' = engage in fun activity</a:t>
+              <a:t>Word Labs  •  wordlabs.app  •  Root: 'play' = to engage in fun activity</a:t>
             </a:r>
             <a:endParaRPr lang="en-US" sz="800" dirty="0"/>
           </a:p>
@@ -11192,7 +11192,7 @@
                 <a:ea typeface="Trebuchet MS" pitchFamily="34" charset="-122"/>
                 <a:cs typeface="Trebuchet MS" pitchFamily="34" charset="-120"/>
               </a:rPr>
-              <a:t>wordplay</a:t>
+              <a:t>replay</a:t>
             </a:r>
             <a:endParaRPr lang="en-US" sz="2800" dirty="0"/>
           </a:p>
@@ -11880,7 +11880,7 @@
                 <a:ea typeface="Calibri" pitchFamily="34" charset="-122"/>
                 <a:cs typeface="Calibri" pitchFamily="34" charset="-120"/>
               </a:rPr>
-              <a:t>Word Labs  •  wordlabs.app  •  Root: 'play' = engage in fun activity</a:t>
+              <a:t>Word Labs  •  wordlabs.app  •  Root: 'play' = to engage in fun activity</a:t>
             </a:r>
             <a:endParaRPr lang="en-US" sz="800" dirty="0"/>
           </a:p>
@@ -12019,7 +12019,7 @@
                 <a:ea typeface="Trebuchet MS" pitchFamily="34" charset="-122"/>
                 <a:cs typeface="Trebuchet MS" pitchFamily="34" charset="-120"/>
               </a:rPr>
-              <a:t>wordplay</a:t>
+              <a:t>replay</a:t>
             </a:r>
             <a:endParaRPr lang="en-US" sz="2800" dirty="0"/>
           </a:p>
@@ -12158,7 +12158,7 @@
                 <a:ea typeface="Trebuchet MS" pitchFamily="34" charset="-122"/>
                 <a:cs typeface="Trebuchet MS" pitchFamily="34" charset="-120"/>
               </a:rPr>
-              <a:t>word</a:t>
+              <a:t>re</a:t>
             </a:r>
             <a:endParaRPr lang="en-US" sz="1300" dirty="0"/>
           </a:p>
@@ -12197,7 +12197,7 @@
                 <a:ea typeface="Calibri" pitchFamily="34" charset="-122"/>
                 <a:cs typeface="Calibri" pitchFamily="34" charset="-120"/>
               </a:rPr>
-              <a:t>a unit of language</a:t>
+              <a:t>again</a:t>
             </a:r>
             <a:endParaRPr lang="en-US" sz="850" dirty="0"/>
           </a:p>
@@ -12309,7 +12309,7 @@
                 <a:ea typeface="Calibri" pitchFamily="34" charset="-122"/>
                 <a:cs typeface="Calibri" pitchFamily="34" charset="-120"/>
               </a:rPr>
-              <a:t>engage in fun activity</a:t>
+              <a:t>to engage in fun activity</a:t>
             </a:r>
             <a:endParaRPr lang="en-US" sz="850" dirty="0"/>
           </a:p>
@@ -12865,7 +12865,7 @@
                 <a:ea typeface="Calibri" pitchFamily="34" charset="-122"/>
                 <a:cs typeface="Calibri" pitchFamily="34" charset="-120"/>
               </a:rPr>
-              <a:t>Word Labs  •  wordlabs.app  •  Root: 'play' = engage in fun activity</a:t>
+              <a:t>Word Labs  •  wordlabs.app  •  Root: 'play' = to engage in fun activity</a:t>
             </a:r>
             <a:endParaRPr lang="en-US" sz="800" dirty="0"/>
           </a:p>
@@ -13004,7 +13004,7 @@
                 <a:ea typeface="Trebuchet MS" pitchFamily="34" charset="-122"/>
                 <a:cs typeface="Trebuchet MS" pitchFamily="34" charset="-120"/>
               </a:rPr>
-              <a:t>wordplay</a:t>
+              <a:t>replay</a:t>
             </a:r>
             <a:endParaRPr lang="en-US" sz="2800" dirty="0"/>
           </a:p>
@@ -13143,7 +13143,7 @@
                 <a:ea typeface="Trebuchet MS" pitchFamily="34" charset="-122"/>
                 <a:cs typeface="Trebuchet MS" pitchFamily="34" charset="-120"/>
               </a:rPr>
-              <a:t>word</a:t>
+              <a:t>re</a:t>
             </a:r>
             <a:endParaRPr lang="en-US" sz="1300" dirty="0"/>
           </a:p>
@@ -13182,7 +13182,7 @@
                 <a:ea typeface="Calibri" pitchFamily="34" charset="-122"/>
                 <a:cs typeface="Calibri" pitchFamily="34" charset="-120"/>
               </a:rPr>
-              <a:t>a unit of language</a:t>
+              <a:t>again</a:t>
             </a:r>
             <a:endParaRPr lang="en-US" sz="850" dirty="0"/>
           </a:p>
@@ -13294,7 +13294,7 @@
                 <a:ea typeface="Calibri" pitchFamily="34" charset="-122"/>
                 <a:cs typeface="Calibri" pitchFamily="34" charset="-120"/>
               </a:rPr>
-              <a:t>engage in fun activity</a:t>
+              <a:t>to engage in fun activity</a:t>
             </a:r>
             <a:endParaRPr lang="en-US" sz="850" dirty="0"/>
           </a:p>
@@ -13453,7 +13453,7 @@
                 <a:ea typeface="Trebuchet MS" pitchFamily="34" charset="-122"/>
                 <a:cs typeface="Trebuchet MS" pitchFamily="34" charset="-120"/>
               </a:rPr>
-              <a:t>word</a:t>
+              <a:t>re</a:t>
             </a:r>
             <a:endParaRPr lang="en-US" sz="1400" dirty="0"/>
           </a:p>
@@ -13891,7 +13891,7 @@
                 <a:ea typeface="Calibri" pitchFamily="34" charset="-122"/>
                 <a:cs typeface="Calibri" pitchFamily="34" charset="-120"/>
               </a:rPr>
-              <a:t>Root 'play' — engage in fun activity</a:t>
+              <a:t>Root 'play' — to engage in fun activity</a:t>
             </a:r>
             <a:endParaRPr lang="en-US" sz="1600" dirty="0"/>
           </a:p>
@@ -14247,7 +14247,7 @@
                 <a:ea typeface="Calibri" pitchFamily="34" charset="-122"/>
                 <a:cs typeface="Calibri" pitchFamily="34" charset="-120"/>
               </a:rPr>
-              <a:t>Word Labs  •  wordlabs.app  •  Root: 'play' = engage in fun activity</a:t>
+              <a:t>Word Labs  •  wordlabs.app  •  Root: 'play' = to engage in fun activity</a:t>
             </a:r>
             <a:endParaRPr lang="en-US" sz="800" dirty="0"/>
           </a:p>
@@ -14386,7 +14386,7 @@
                 <a:ea typeface="Trebuchet MS" pitchFamily="34" charset="-122"/>
                 <a:cs typeface="Trebuchet MS" pitchFamily="34" charset="-120"/>
               </a:rPr>
-              <a:t>wordplay</a:t>
+              <a:t>replay</a:t>
             </a:r>
             <a:endParaRPr lang="en-US" sz="2800" dirty="0"/>
           </a:p>
@@ -14525,7 +14525,7 @@
                 <a:ea typeface="Trebuchet MS" pitchFamily="34" charset="-122"/>
                 <a:cs typeface="Trebuchet MS" pitchFamily="34" charset="-120"/>
               </a:rPr>
-              <a:t>word</a:t>
+              <a:t>re</a:t>
             </a:r>
             <a:endParaRPr lang="en-US" sz="1300" dirty="0"/>
           </a:p>
@@ -14564,7 +14564,7 @@
                 <a:ea typeface="Calibri" pitchFamily="34" charset="-122"/>
                 <a:cs typeface="Calibri" pitchFamily="34" charset="-120"/>
               </a:rPr>
-              <a:t>a unit of language</a:t>
+              <a:t>again</a:t>
             </a:r>
             <a:endParaRPr lang="en-US" sz="850" dirty="0"/>
           </a:p>
@@ -14676,7 +14676,7 @@
                 <a:ea typeface="Calibri" pitchFamily="34" charset="-122"/>
                 <a:cs typeface="Calibri" pitchFamily="34" charset="-120"/>
               </a:rPr>
-              <a:t>engage in fun activity</a:t>
+              <a:t>to engage in fun activity</a:t>
             </a:r>
             <a:endParaRPr lang="en-US" sz="850" dirty="0"/>
           </a:p>
@@ -14835,7 +14835,7 @@
                 <a:ea typeface="Trebuchet MS" pitchFamily="34" charset="-122"/>
                 <a:cs typeface="Trebuchet MS" pitchFamily="34" charset="-120"/>
               </a:rPr>
-              <a:t>word</a:t>
+              <a:t>re</a:t>
             </a:r>
             <a:endParaRPr lang="en-US" sz="1400" dirty="0"/>
           </a:p>
@@ -15047,7 +15047,7 @@
         </p:nvSpPr>
         <p:spPr>
           <a:xfrm>
-            <a:off x="2427732" y="4169664"/>
+            <a:off x="2670048" y="4169664"/>
             <a:ext cx="685800" cy="475488"/>
           </a:xfrm>
           <a:prstGeom prst="rect">
@@ -15074,7 +15074,7 @@
         </p:nvSpPr>
         <p:spPr>
           <a:xfrm>
-            <a:off x="2427732" y="4169664"/>
+            <a:off x="2670048" y="4169664"/>
             <a:ext cx="685800" cy="475488"/>
           </a:xfrm>
           <a:prstGeom prst="rect">
@@ -15099,7 +15099,7 @@
                 <a:ea typeface="Trebuchet MS" pitchFamily="34" charset="-122"/>
                 <a:cs typeface="Trebuchet MS" pitchFamily="34" charset="-120"/>
               </a:rPr>
-              <a:t>w</a:t>
+              <a:t>r</a:t>
             </a:r>
             <a:endParaRPr lang="en-US" sz="900" dirty="0"/>
           </a:p>
@@ -15113,7 +15113,7 @@
         </p:nvSpPr>
         <p:spPr>
           <a:xfrm>
-            <a:off x="3639312" y="4169664"/>
+            <a:off x="4123944" y="4169664"/>
             <a:ext cx="685800" cy="475488"/>
           </a:xfrm>
           <a:prstGeom prst="rect">
@@ -15140,7 +15140,7 @@
         </p:nvSpPr>
         <p:spPr>
           <a:xfrm>
-            <a:off x="3639312" y="4169664"/>
+            <a:off x="4123944" y="4169664"/>
             <a:ext cx="685800" cy="475488"/>
           </a:xfrm>
           <a:prstGeom prst="rect">
@@ -15165,7 +15165,7 @@
                 <a:ea typeface="Trebuchet MS" pitchFamily="34" charset="-122"/>
                 <a:cs typeface="Trebuchet MS" pitchFamily="34" charset="-120"/>
               </a:rPr>
-              <a:t>or</a:t>
+              <a:t>e</a:t>
             </a:r>
             <a:endParaRPr lang="en-US" sz="900" dirty="0"/>
           </a:p>
@@ -15179,7 +15179,7 @@
         </p:nvSpPr>
         <p:spPr>
           <a:xfrm>
-            <a:off x="4850892" y="4169664"/>
+            <a:off x="5577840" y="4169664"/>
             <a:ext cx="685800" cy="475488"/>
           </a:xfrm>
           <a:prstGeom prst="rect">
@@ -15206,7 +15206,7 @@
         </p:nvSpPr>
         <p:spPr>
           <a:xfrm>
-            <a:off x="4850892" y="4169664"/>
+            <a:off x="5577840" y="4169664"/>
             <a:ext cx="685800" cy="475488"/>
           </a:xfrm>
           <a:prstGeom prst="rect">
@@ -15231,7 +15231,7 @@
                 <a:ea typeface="Trebuchet MS" pitchFamily="34" charset="-122"/>
                 <a:cs typeface="Trebuchet MS" pitchFamily="34" charset="-120"/>
               </a:rPr>
-              <a:t>d</a:t>
+              <a:t>pl</a:t>
             </a:r>
             <a:endParaRPr lang="en-US" sz="900" dirty="0"/>
           </a:p>
@@ -15245,7 +15245,7 @@
         </p:nvSpPr>
         <p:spPr>
           <a:xfrm>
-            <a:off x="6062472" y="4169664"/>
+            <a:off x="7031736" y="4169664"/>
             <a:ext cx="685800" cy="475488"/>
           </a:xfrm>
           <a:prstGeom prst="rect">
@@ -15272,73 +15272,7 @@
         </p:nvSpPr>
         <p:spPr>
           <a:xfrm>
-            <a:off x="6062472" y="4169664"/>
-            <a:ext cx="685800" cy="475488"/>
-          </a:xfrm>
-          <a:prstGeom prst="rect">
-            <a:avLst/>
-          </a:prstGeom>
-          <a:noFill/>
-          <a:ln/>
-        </p:spPr>
-        <p:txBody>
-          <a:bodyPr wrap="square" lIns="0" tIns="0" rIns="0" bIns="0" rtlCol="0" anchor="ctr"/>
-          <a:lstStyle/>
-          <a:p>
-            <a:pPr algn="ctr" indent="0" marL="0">
-              <a:buNone/>
-            </a:pPr>
-            <a:r>
-              <a:rPr lang="en-US" sz="900" b="1" dirty="0">
-                <a:solidFill>
-                  <a:srgbClr val="9D174D"/>
-                </a:solidFill>
-                <a:latin typeface="Trebuchet MS" pitchFamily="34" charset="0"/>
-                <a:ea typeface="Trebuchet MS" pitchFamily="34" charset="-122"/>
-                <a:cs typeface="Trebuchet MS" pitchFamily="34" charset="-120"/>
-              </a:rPr>
-              <a:t>pl</a:t>
-            </a:r>
-            <a:endParaRPr lang="en-US" sz="900" dirty="0"/>
-          </a:p>
-        </p:txBody>
-      </p:sp>
-      <p:sp>
-        <p:nvSpPr>
-          <p:cNvPr id="41" name="Shape 39"/>
-          <p:cNvSpPr/>
-          <p:nvPr/>
-        </p:nvSpPr>
-        <p:spPr>
-          <a:xfrm>
-            <a:off x="7274052" y="4169664"/>
-            <a:ext cx="685800" cy="475488"/>
-          </a:xfrm>
-          <a:prstGeom prst="rect">
-            <a:avLst>
-              <a:gd name="adj" fmla="val 7692"/>
-            </a:avLst>
-          </a:prstGeom>
-          <a:solidFill>
-            <a:srgbClr val="FFFFFF"/>
-          </a:solidFill>
-          <a:ln w="12700">
-            <a:solidFill>
-              <a:srgbClr val="DB2777"/>
-            </a:solidFill>
-            <a:prstDash val="solid"/>
-          </a:ln>
-        </p:spPr>
-      </p:sp>
-      <p:sp>
-        <p:nvSpPr>
-          <p:cNvPr id="42" name="Text 40"/>
-          <p:cNvSpPr/>
-          <p:nvPr/>
-        </p:nvSpPr>
-        <p:spPr>
-          <a:xfrm>
-            <a:off x="7274052" y="4169664"/>
+            <a:off x="7031736" y="4169664"/>
             <a:ext cx="685800" cy="475488"/>
           </a:xfrm>
           <a:prstGeom prst="rect">
@@ -15937,7 +15871,7 @@
                 <a:ea typeface="Calibri" pitchFamily="34" charset="-122"/>
                 <a:cs typeface="Calibri" pitchFamily="34" charset="-120"/>
               </a:rPr>
-              <a:t>Word Labs  •  wordlabs.app  •  Root: 'play' = engage in fun activity</a:t>
+              <a:t>Word Labs  •  wordlabs.app  •  Root: 'play' = to engage in fun activity</a:t>
             </a:r>
             <a:endParaRPr lang="en-US" sz="800" dirty="0"/>
           </a:p>
@@ -16271,7 +16205,7 @@
                 <a:ea typeface="Trebuchet MS" pitchFamily="34" charset="-122"/>
                 <a:cs typeface="Trebuchet MS" pitchFamily="34" charset="-120"/>
               </a:rPr>
-              <a:t>1</a:t>
+              <a:t>2</a:t>
             </a:r>
             <a:pPr algn="ctr" indent="0" marL="0">
               <a:buNone/>
@@ -16285,7 +16219,7 @@
                 <a:ea typeface="Trebuchet MS" pitchFamily="34" charset="-122"/>
                 <a:cs typeface="Trebuchet MS" pitchFamily="34" charset="-120"/>
               </a:rPr>
-              <a:t>  punctuation mark</a:t>
+              <a:t>  punctuation marks</a:t>
             </a:r>
             <a:endParaRPr lang="en-US" sz="2800" dirty="0"/>
           </a:p>
@@ -16577,7 +16511,7 @@
                 <a:ea typeface="Calibri" pitchFamily="34" charset="-122"/>
                 <a:cs typeface="Calibri" pitchFamily="34" charset="-120"/>
               </a:rPr>
-              <a:t>Word Labs  •  wordlabs.app  •  Root: 'play' = engage in fun activity</a:t>
+              <a:t>Word Labs  •  wordlabs.app  •  Root: 'play' = to engage in fun activity</a:t>
             </a:r>
             <a:endParaRPr lang="en-US" sz="800" dirty="0"/>
           </a:p>
@@ -16689,7 +16623,7 @@
                 <a:ea typeface="Calibri" pitchFamily="34" charset="-122"/>
                 <a:cs typeface="Calibri" pitchFamily="34" charset="-120"/>
               </a:rPr>
-              <a:t>During </a:t>
+              <a:t>The </a:t>
             </a:r>
             <a:pPr algn="l" indent="0" marL="0">
               <a:buNone/>
@@ -16706,7 +16640,7 @@
                 <a:ea typeface="Calibri" pitchFamily="34" charset="-122"/>
                 <a:cs typeface="Calibri" pitchFamily="34" charset="-120"/>
               </a:rPr>
-              <a:t>playing</a:t>
+              <a:t>playwright</a:t>
             </a:r>
             <a:pPr algn="l" indent="0" marL="0">
               <a:buNone/>
@@ -16720,7 +16654,7 @@
                 <a:ea typeface="Calibri" pitchFamily="34" charset="-122"/>
                 <a:cs typeface="Calibri" pitchFamily="34" charset="-120"/>
               </a:rPr>
-              <a:t> time, the </a:t>
+              <a:t> wrote a scene where the </a:t>
             </a:r>
             <a:pPr algn="l" indent="0" marL="0">
               <a:buNone/>
@@ -16751,7 +16685,7 @@
                 <a:ea typeface="Calibri" pitchFamily="34" charset="-122"/>
                 <a:cs typeface="Calibri" pitchFamily="34" charset="-120"/>
               </a:rPr>
-              <a:t> on the </a:t>
+              <a:t> performed on the school's new </a:t>
             </a:r>
             <a:pPr algn="l" indent="0" marL="0">
               <a:buNone/>
@@ -16782,7 +16716,7 @@
                 <a:ea typeface="Calibri" pitchFamily="34" charset="-122"/>
                 <a:cs typeface="Calibri" pitchFamily="34" charset="-120"/>
               </a:rPr>
-              <a:t> invented a brand new game together.</a:t>
+              <a:t>.</a:t>
             </a:r>
             <a:endParaRPr lang="en-US" sz="1800" dirty="0"/>
           </a:p>
@@ -16937,7 +16871,7 @@
                 <a:ea typeface="Trebuchet MS" pitchFamily="34" charset="-122"/>
                 <a:cs typeface="Trebuchet MS" pitchFamily="34" charset="-120"/>
               </a:rPr>
-              <a:t>playing</a:t>
+              <a:t>playwright</a:t>
             </a:r>
             <a:endParaRPr lang="en-US" sz="1400" dirty="0"/>
           </a:p>
@@ -17524,7 +17458,7 @@
                 <a:ea typeface="Calibri" pitchFamily="34" charset="-122"/>
                 <a:cs typeface="Calibri" pitchFamily="34" charset="-120"/>
               </a:rPr>
-              <a:t>Word Labs  •  wordlabs.app  •  Root: 'play' = engage in fun activity</a:t>
+              <a:t>Word Labs  •  wordlabs.app  •  Root: 'play' = to engage in fun activity</a:t>
             </a:r>
             <a:endParaRPr lang="en-US" sz="800" dirty="0"/>
           </a:p>
@@ -17663,7 +17597,7 @@
                 <a:ea typeface="Trebuchet MS" pitchFamily="34" charset="-122"/>
                 <a:cs typeface="Trebuchet MS" pitchFamily="34" charset="-120"/>
               </a:rPr>
-              <a:t>playing</a:t>
+              <a:t>playwright</a:t>
             </a:r>
             <a:endParaRPr lang="en-US" sz="2800" dirty="0"/>
           </a:p>
@@ -18351,7 +18285,7 @@
                 <a:ea typeface="Calibri" pitchFamily="34" charset="-122"/>
                 <a:cs typeface="Calibri" pitchFamily="34" charset="-120"/>
               </a:rPr>
-              <a:t>Word Labs  •  wordlabs.app  •  Root: 'play' = engage in fun activity</a:t>
+              <a:t>Word Labs  •  wordlabs.app  •  Root: 'play' = to engage in fun activity</a:t>
             </a:r>
             <a:endParaRPr lang="en-US" sz="800" dirty="0"/>
           </a:p>
@@ -18490,7 +18424,7 @@
                 <a:ea typeface="Trebuchet MS" pitchFamily="34" charset="-122"/>
                 <a:cs typeface="Trebuchet MS" pitchFamily="34" charset="-120"/>
               </a:rPr>
-              <a:t>playing</a:t>
+              <a:t>playwright</a:t>
             </a:r>
             <a:endParaRPr lang="en-US" sz="2800" dirty="0"/>
           </a:p>
@@ -18668,7 +18602,7 @@
                 <a:ea typeface="Calibri" pitchFamily="34" charset="-122"/>
                 <a:cs typeface="Calibri" pitchFamily="34" charset="-120"/>
               </a:rPr>
-              <a:t>engage in fun activity</a:t>
+              <a:t>to engage in fun activity</a:t>
             </a:r>
             <a:endParaRPr lang="en-US" sz="850" dirty="0"/>
           </a:p>
@@ -18741,7 +18675,7 @@
                 <a:ea typeface="Trebuchet MS" pitchFamily="34" charset="-122"/>
                 <a:cs typeface="Trebuchet MS" pitchFamily="34" charset="-120"/>
               </a:rPr>
-              <a:t>ing</a:t>
+              <a:t>wright</a:t>
             </a:r>
             <a:endParaRPr lang="en-US" sz="1300" dirty="0"/>
           </a:p>
@@ -18780,7 +18714,7 @@
                 <a:ea typeface="Calibri" pitchFamily="34" charset="-122"/>
                 <a:cs typeface="Calibri" pitchFamily="34" charset="-120"/>
               </a:rPr>
-              <a:t>action happening now</a:t>
+              <a:t>a maker or builder of something</a:t>
             </a:r>
             <a:endParaRPr lang="en-US" sz="850" dirty="0"/>
           </a:p>
@@ -19336,7 +19270,7 @@
                 <a:ea typeface="Calibri" pitchFamily="34" charset="-122"/>
                 <a:cs typeface="Calibri" pitchFamily="34" charset="-120"/>
               </a:rPr>
-              <a:t>Word Labs  •  wordlabs.app  •  Root: 'play' = engage in fun activity</a:t>
+              <a:t>Word Labs  •  wordlabs.app  •  Root: 'play' = to engage in fun activity</a:t>
             </a:r>
             <a:endParaRPr lang="en-US" sz="800" dirty="0"/>
           </a:p>
@@ -19475,7 +19409,7 @@
                 <a:ea typeface="Trebuchet MS" pitchFamily="34" charset="-122"/>
                 <a:cs typeface="Trebuchet MS" pitchFamily="34" charset="-120"/>
               </a:rPr>
-              <a:t>playing</a:t>
+              <a:t>playwright</a:t>
             </a:r>
             <a:endParaRPr lang="en-US" sz="2800" dirty="0"/>
           </a:p>
@@ -19653,7 +19587,7 @@
                 <a:ea typeface="Calibri" pitchFamily="34" charset="-122"/>
                 <a:cs typeface="Calibri" pitchFamily="34" charset="-120"/>
               </a:rPr>
-              <a:t>engage in fun activity</a:t>
+              <a:t>to engage in fun activity</a:t>
             </a:r>
             <a:endParaRPr lang="en-US" sz="850" dirty="0"/>
           </a:p>
@@ -19726,7 +19660,7 @@
                 <a:ea typeface="Trebuchet MS" pitchFamily="34" charset="-122"/>
                 <a:cs typeface="Trebuchet MS" pitchFamily="34" charset="-120"/>
               </a:rPr>
-              <a:t>ing</a:t>
+              <a:t>wright</a:t>
             </a:r>
             <a:endParaRPr lang="en-US" sz="1300" dirty="0"/>
           </a:p>
@@ -19765,7 +19699,7 @@
                 <a:ea typeface="Calibri" pitchFamily="34" charset="-122"/>
                 <a:cs typeface="Calibri" pitchFamily="34" charset="-120"/>
               </a:rPr>
-              <a:t>action happening now</a:t>
+              <a:t>a maker or builder of something</a:t>
             </a:r>
             <a:endParaRPr lang="en-US" sz="850" dirty="0"/>
           </a:p>
@@ -20029,7 +19963,7 @@
                 <a:ea typeface="Trebuchet MS" pitchFamily="34" charset="-122"/>
                 <a:cs typeface="Trebuchet MS" pitchFamily="34" charset="-120"/>
               </a:rPr>
-              <a:t>ing</a:t>
+              <a:t>wright</a:t>
             </a:r>
             <a:endParaRPr lang="en-US" sz="1400" dirty="0"/>
           </a:p>
@@ -20453,7 +20387,7 @@
                 <a:ea typeface="Calibri" pitchFamily="34" charset="-122"/>
                 <a:cs typeface="Calibri" pitchFamily="34" charset="-120"/>
               </a:rPr>
-              <a:t>Word Labs  •  wordlabs.app  •  Root: 'play' = engage in fun activity</a:t>
+              <a:t>Word Labs  •  wordlabs.app  •  Root: 'play' = to engage in fun activity</a:t>
             </a:r>
             <a:endParaRPr lang="en-US" sz="800" dirty="0"/>
           </a:p>
@@ -20592,7 +20526,7 @@
                 <a:ea typeface="Trebuchet MS" pitchFamily="34" charset="-122"/>
                 <a:cs typeface="Trebuchet MS" pitchFamily="34" charset="-120"/>
               </a:rPr>
-              <a:t>playing</a:t>
+              <a:t>playwright</a:t>
             </a:r>
             <a:endParaRPr lang="en-US" sz="2800" dirty="0"/>
           </a:p>
@@ -20770,7 +20704,7 @@
                 <a:ea typeface="Calibri" pitchFamily="34" charset="-122"/>
                 <a:cs typeface="Calibri" pitchFamily="34" charset="-120"/>
               </a:rPr>
-              <a:t>engage in fun activity</a:t>
+              <a:t>to engage in fun activity</a:t>
             </a:r>
             <a:endParaRPr lang="en-US" sz="850" dirty="0"/>
           </a:p>
@@ -20843,7 +20777,7 @@
                 <a:ea typeface="Trebuchet MS" pitchFamily="34" charset="-122"/>
                 <a:cs typeface="Trebuchet MS" pitchFamily="34" charset="-120"/>
               </a:rPr>
-              <a:t>ing</a:t>
+              <a:t>wright</a:t>
             </a:r>
             <a:endParaRPr lang="en-US" sz="1300" dirty="0"/>
           </a:p>
@@ -20882,7 +20816,7 @@
                 <a:ea typeface="Calibri" pitchFamily="34" charset="-122"/>
                 <a:cs typeface="Calibri" pitchFamily="34" charset="-120"/>
               </a:rPr>
-              <a:t>action happening now</a:t>
+              <a:t>a maker or builder of something</a:t>
             </a:r>
             <a:endParaRPr lang="en-US" sz="850" dirty="0"/>
           </a:p>
@@ -21146,7 +21080,7 @@
                 <a:ea typeface="Trebuchet MS" pitchFamily="34" charset="-122"/>
                 <a:cs typeface="Trebuchet MS" pitchFamily="34" charset="-120"/>
               </a:rPr>
-              <a:t>ing</a:t>
+              <a:t>wright</a:t>
             </a:r>
             <a:endParaRPr lang="en-US" sz="1400" dirty="0"/>
           </a:p>
@@ -21227,11 +21161,11 @@
         <p:spPr>
           <a:xfrm>
             <a:off x="1874520" y="4096512"/>
-            <a:ext cx="6903720" cy="658368"/>
+            <a:ext cx="6903720" cy="804672"/>
           </a:xfrm>
           <a:prstGeom prst="rect">
             <a:avLst>
-              <a:gd name="adj" fmla="val 8333"/>
+              <a:gd name="adj" fmla="val 6818"/>
             </a:avLst>
           </a:prstGeom>
           <a:solidFill>
@@ -21253,12 +21187,12 @@
         </p:nvSpPr>
         <p:spPr>
           <a:xfrm>
-            <a:off x="2670048" y="4169664"/>
-            <a:ext cx="685800" cy="475488"/>
+            <a:off x="2427732" y="4169664"/>
+            <a:ext cx="685800" cy="384048"/>
           </a:xfrm>
           <a:prstGeom prst="rect">
             <a:avLst>
-              <a:gd name="adj" fmla="val 7692"/>
+              <a:gd name="adj" fmla="val 9524"/>
             </a:avLst>
           </a:prstGeom>
           <a:solidFill>
@@ -21280,8 +21214,8 @@
         </p:nvSpPr>
         <p:spPr>
           <a:xfrm>
-            <a:off x="2670048" y="4169664"/>
-            <a:ext cx="685800" cy="475488"/>
+            <a:off x="2427732" y="4169664"/>
+            <a:ext cx="685800" cy="384048"/>
           </a:xfrm>
           <a:prstGeom prst="rect">
             <a:avLst/>
@@ -21319,12 +21253,12 @@
         </p:nvSpPr>
         <p:spPr>
           <a:xfrm>
-            <a:off x="4123944" y="4169664"/>
-            <a:ext cx="685800" cy="475488"/>
+            <a:off x="3639312" y="4169664"/>
+            <a:ext cx="685800" cy="384048"/>
           </a:xfrm>
           <a:prstGeom prst="rect">
             <a:avLst>
-              <a:gd name="adj" fmla="val 7692"/>
+              <a:gd name="adj" fmla="val 9524"/>
             </a:avLst>
           </a:prstGeom>
           <a:solidFill>
@@ -21346,8 +21280,8 @@
         </p:nvSpPr>
         <p:spPr>
           <a:xfrm>
-            <a:off x="4123944" y="4169664"/>
-            <a:ext cx="685800" cy="475488"/>
+            <a:off x="3639312" y="4169664"/>
+            <a:ext cx="685800" cy="384048"/>
           </a:xfrm>
           <a:prstGeom prst="rect">
             <a:avLst/>
@@ -21385,12 +21319,12 @@
         </p:nvSpPr>
         <p:spPr>
           <a:xfrm>
-            <a:off x="5577840" y="4169664"/>
-            <a:ext cx="685800" cy="475488"/>
+            <a:off x="4850892" y="4169664"/>
+            <a:ext cx="685800" cy="384048"/>
           </a:xfrm>
           <a:prstGeom prst="rect">
             <a:avLst>
-              <a:gd name="adj" fmla="val 7692"/>
+              <a:gd name="adj" fmla="val 9524"/>
             </a:avLst>
           </a:prstGeom>
           <a:solidFill>
@@ -21412,8 +21346,8 @@
         </p:nvSpPr>
         <p:spPr>
           <a:xfrm>
-            <a:off x="5577840" y="4169664"/>
-            <a:ext cx="685800" cy="475488"/>
+            <a:off x="4850892" y="4169664"/>
+            <a:ext cx="685800" cy="384048"/>
           </a:xfrm>
           <a:prstGeom prst="rect">
             <a:avLst/>
@@ -21437,7 +21371,7 @@
                 <a:ea typeface="Trebuchet MS" pitchFamily="34" charset="-122"/>
                 <a:cs typeface="Trebuchet MS" pitchFamily="34" charset="-120"/>
               </a:rPr>
-              <a:t>i</a:t>
+              <a:t>wr</a:t>
             </a:r>
             <a:endParaRPr lang="en-US" sz="900" dirty="0"/>
           </a:p>
@@ -21445,18 +21379,57 @@
       </p:sp>
       <p:sp>
         <p:nvSpPr>
-          <p:cNvPr id="39" name="Shape 37"/>
-          <p:cNvSpPr/>
-          <p:nvPr/>
-        </p:nvSpPr>
-        <p:spPr>
-          <a:xfrm>
-            <a:off x="7031736" y="4169664"/>
-            <a:ext cx="685800" cy="475488"/>
+          <p:cNvPr id="39" name="Text 37"/>
+          <p:cNvSpPr/>
+          <p:nvPr/>
+        </p:nvSpPr>
+        <p:spPr>
+          <a:xfrm>
+            <a:off x="4850892" y="4572000"/>
+            <a:ext cx="685800" cy="219456"/>
+          </a:xfrm>
+          <a:prstGeom prst="rect">
+            <a:avLst/>
+          </a:prstGeom>
+          <a:noFill/>
+          <a:ln/>
+        </p:spPr>
+        <p:txBody>
+          <a:bodyPr wrap="square" lIns="0" tIns="0" rIns="0" bIns="0" rtlCol="0" anchor="t"/>
+          <a:lstStyle/>
+          <a:p>
+            <a:pPr algn="ctr" indent="0" marL="0">
+              <a:buNone/>
+            </a:pPr>
+            <a:r>
+              <a:rPr lang="en-US" sz="750" i="1" dirty="0">
+                <a:solidFill>
+                  <a:srgbClr val="94A3B8"/>
+                </a:solidFill>
+                <a:latin typeface="Calibri" pitchFamily="34" charset="0"/>
+                <a:ea typeface="Calibri" pitchFamily="34" charset="-122"/>
+                <a:cs typeface="Calibri" pitchFamily="34" charset="-120"/>
+              </a:rPr>
+              <a:t>/r/</a:t>
+            </a:r>
+            <a:endParaRPr lang="en-US" sz="750" dirty="0"/>
+          </a:p>
+        </p:txBody>
+      </p:sp>
+      <p:sp>
+        <p:nvSpPr>
+          <p:cNvPr id="40" name="Shape 38"/>
+          <p:cNvSpPr/>
+          <p:nvPr/>
+        </p:nvSpPr>
+        <p:spPr>
+          <a:xfrm>
+            <a:off x="6062472" y="4169664"/>
+            <a:ext cx="685800" cy="384048"/>
           </a:xfrm>
           <a:prstGeom prst="rect">
             <a:avLst>
-              <a:gd name="adj" fmla="val 7692"/>
+              <a:gd name="adj" fmla="val 9524"/>
             </a:avLst>
           </a:prstGeom>
           <a:solidFill>
@@ -21472,14 +21445,14 @@
       </p:sp>
       <p:sp>
         <p:nvSpPr>
-          <p:cNvPr id="40" name="Text 38"/>
-          <p:cNvSpPr/>
-          <p:nvPr/>
-        </p:nvSpPr>
-        <p:spPr>
-          <a:xfrm>
-            <a:off x="7031736" y="4169664"/>
-            <a:ext cx="685800" cy="475488"/>
+          <p:cNvPr id="41" name="Text 39"/>
+          <p:cNvSpPr/>
+          <p:nvPr/>
+        </p:nvSpPr>
+        <p:spPr>
+          <a:xfrm>
+            <a:off x="6062472" y="4169664"/>
+            <a:ext cx="685800" cy="384048"/>
           </a:xfrm>
           <a:prstGeom prst="rect">
             <a:avLst/>
@@ -21503,7 +21476,112 @@
                 <a:ea typeface="Trebuchet MS" pitchFamily="34" charset="-122"/>
                 <a:cs typeface="Trebuchet MS" pitchFamily="34" charset="-120"/>
               </a:rPr>
-              <a:t>ng</a:t>
+              <a:t>igh</a:t>
+            </a:r>
+            <a:endParaRPr lang="en-US" sz="900" dirty="0"/>
+          </a:p>
+        </p:txBody>
+      </p:sp>
+      <p:sp>
+        <p:nvSpPr>
+          <p:cNvPr id="42" name="Text 40"/>
+          <p:cNvSpPr/>
+          <p:nvPr/>
+        </p:nvSpPr>
+        <p:spPr>
+          <a:xfrm>
+            <a:off x="6062472" y="4572000"/>
+            <a:ext cx="685800" cy="219456"/>
+          </a:xfrm>
+          <a:prstGeom prst="rect">
+            <a:avLst/>
+          </a:prstGeom>
+          <a:noFill/>
+          <a:ln/>
+        </p:spPr>
+        <p:txBody>
+          <a:bodyPr wrap="square" lIns="0" tIns="0" rIns="0" bIns="0" rtlCol="0" anchor="t"/>
+          <a:lstStyle/>
+          <a:p>
+            <a:pPr algn="ctr" indent="0" marL="0">
+              <a:buNone/>
+            </a:pPr>
+            <a:r>
+              <a:rPr lang="en-US" sz="750" i="1" dirty="0">
+                <a:solidFill>
+                  <a:srgbClr val="94A3B8"/>
+                </a:solidFill>
+                <a:latin typeface="Calibri" pitchFamily="34" charset="0"/>
+                <a:ea typeface="Calibri" pitchFamily="34" charset="-122"/>
+                <a:cs typeface="Calibri" pitchFamily="34" charset="-120"/>
+              </a:rPr>
+              <a:t>/eye/</a:t>
+            </a:r>
+            <a:endParaRPr lang="en-US" sz="750" dirty="0"/>
+          </a:p>
+        </p:txBody>
+      </p:sp>
+      <p:sp>
+        <p:nvSpPr>
+          <p:cNvPr id="43" name="Shape 41"/>
+          <p:cNvSpPr/>
+          <p:nvPr/>
+        </p:nvSpPr>
+        <p:spPr>
+          <a:xfrm>
+            <a:off x="7274052" y="4169664"/>
+            <a:ext cx="685800" cy="384048"/>
+          </a:xfrm>
+          <a:prstGeom prst="rect">
+            <a:avLst>
+              <a:gd name="adj" fmla="val 9524"/>
+            </a:avLst>
+          </a:prstGeom>
+          <a:solidFill>
+            <a:srgbClr val="FFFFFF"/>
+          </a:solidFill>
+          <a:ln w="12700">
+            <a:solidFill>
+              <a:srgbClr val="DB2777"/>
+            </a:solidFill>
+            <a:prstDash val="solid"/>
+          </a:ln>
+        </p:spPr>
+      </p:sp>
+      <p:sp>
+        <p:nvSpPr>
+          <p:cNvPr id="44" name="Text 42"/>
+          <p:cNvSpPr/>
+          <p:nvPr/>
+        </p:nvSpPr>
+        <p:spPr>
+          <a:xfrm>
+            <a:off x="7274052" y="4169664"/>
+            <a:ext cx="685800" cy="384048"/>
+          </a:xfrm>
+          <a:prstGeom prst="rect">
+            <a:avLst/>
+          </a:prstGeom>
+          <a:noFill/>
+          <a:ln/>
+        </p:spPr>
+        <p:txBody>
+          <a:bodyPr wrap="square" lIns="0" tIns="0" rIns="0" bIns="0" rtlCol="0" anchor="ctr"/>
+          <a:lstStyle/>
+          <a:p>
+            <a:pPr algn="ctr" indent="0" marL="0">
+              <a:buNone/>
+            </a:pPr>
+            <a:r>
+              <a:rPr lang="en-US" sz="900" b="1" dirty="0">
+                <a:solidFill>
+                  <a:srgbClr val="9D174D"/>
+                </a:solidFill>
+                <a:latin typeface="Trebuchet MS" pitchFamily="34" charset="0"/>
+                <a:ea typeface="Trebuchet MS" pitchFamily="34" charset="-122"/>
+                <a:cs typeface="Trebuchet MS" pitchFamily="34" charset="-120"/>
+              </a:rPr>
+              <a:t>t</a:t>
             </a:r>
             <a:endParaRPr lang="en-US" sz="900" dirty="0"/>
           </a:p>
@@ -21795,7 +21873,7 @@
                 <a:ea typeface="Calibri" pitchFamily="34" charset="-122"/>
                 <a:cs typeface="Calibri" pitchFamily="34" charset="-120"/>
               </a:rPr>
-              <a:t>Word Labs  •  wordlabs.app  •  Root: 'play' = engage in fun activity</a:t>
+              <a:t>Word Labs  •  wordlabs.app  •  Root: 'play' = to engage in fun activity</a:t>
             </a:r>
             <a:endParaRPr lang="en-US" sz="800" dirty="0"/>
           </a:p>
@@ -22622,7 +22700,7 @@
                 <a:ea typeface="Calibri" pitchFamily="34" charset="-122"/>
                 <a:cs typeface="Calibri" pitchFamily="34" charset="-120"/>
               </a:rPr>
-              <a:t>Word Labs  •  wordlabs.app  •  Root: 'play' = engage in fun activity</a:t>
+              <a:t>Word Labs  •  wordlabs.app  •  Root: 'play' = to engage in fun activity</a:t>
             </a:r>
             <a:endParaRPr lang="en-US" sz="800" dirty="0"/>
           </a:p>
@@ -22939,7 +23017,7 @@
                 <a:ea typeface="Calibri" pitchFamily="34" charset="-122"/>
                 <a:cs typeface="Calibri" pitchFamily="34" charset="-120"/>
               </a:rPr>
-              <a:t>engage in fun activity</a:t>
+              <a:t>to engage in fun activity</a:t>
             </a:r>
             <a:endParaRPr lang="en-US" sz="850" dirty="0"/>
           </a:p>
@@ -23051,7 +23129,7 @@
                 <a:ea typeface="Calibri" pitchFamily="34" charset="-122"/>
                 <a:cs typeface="Calibri" pitchFamily="34" charset="-120"/>
               </a:rPr>
-              <a:t>a person who does</a:t>
+              <a:t>a person who does something</a:t>
             </a:r>
             <a:endParaRPr lang="en-US" sz="850" dirty="0"/>
           </a:p>
@@ -23719,7 +23797,7 @@
                 <a:ea typeface="Calibri" pitchFamily="34" charset="-122"/>
                 <a:cs typeface="Calibri" pitchFamily="34" charset="-120"/>
               </a:rPr>
-              <a:t>Word Labs  •  wordlabs.app  •  Root: 'play' = engage in fun activity</a:t>
+              <a:t>Word Labs  •  wordlabs.app  •  Root: 'play' = to engage in fun activity</a:t>
             </a:r>
             <a:endParaRPr lang="en-US" sz="800" dirty="0"/>
           </a:p>
@@ -23792,7 +23870,7 @@
                 <a:ea typeface="Trebuchet MS" pitchFamily="34" charset="-122"/>
                 <a:cs typeface="Trebuchet MS" pitchFamily="34" charset="-120"/>
               </a:rPr>
-              <a:t>We are learning that the root 'play' means 'engage in fun activity'.</a:t>
+              <a:t>We are learning that the root 'play' means 'to engage in fun activity'.</a:t>
             </a:r>
             <a:endParaRPr lang="en-US" sz="2000" dirty="0"/>
           </a:p>
@@ -24438,7 +24516,7 @@
                 <a:ea typeface="Calibri" pitchFamily="34" charset="-122"/>
                 <a:cs typeface="Calibri" pitchFamily="34" charset="-120"/>
               </a:rPr>
-              <a:t>Word Labs  •  wordlabs.app  •  Root: 'play' = engage in fun activity</a:t>
+              <a:t>Word Labs  •  wordlabs.app  •  Root: 'play' = to engage in fun activity</a:t>
             </a:r>
             <a:endParaRPr lang="en-US" sz="800" dirty="0"/>
           </a:p>
@@ -24755,7 +24833,7 @@
                 <a:ea typeface="Calibri" pitchFamily="34" charset="-122"/>
                 <a:cs typeface="Calibri" pitchFamily="34" charset="-120"/>
               </a:rPr>
-              <a:t>engage in fun activity</a:t>
+              <a:t>to engage in fun activity</a:t>
             </a:r>
             <a:endParaRPr lang="en-US" sz="850" dirty="0"/>
           </a:p>
@@ -24867,7 +24945,7 @@
                 <a:ea typeface="Calibri" pitchFamily="34" charset="-122"/>
                 <a:cs typeface="Calibri" pitchFamily="34" charset="-120"/>
               </a:rPr>
-              <a:t>a person who does</a:t>
+              <a:t>a person who does something</a:t>
             </a:r>
             <a:endParaRPr lang="en-US" sz="850" dirty="0"/>
           </a:p>
@@ -25667,7 +25745,7 @@
                 <a:ea typeface="Calibri" pitchFamily="34" charset="-122"/>
                 <a:cs typeface="Calibri" pitchFamily="34" charset="-120"/>
               </a:rPr>
-              <a:t>Word Labs  •  wordlabs.app  •  Root: 'play' = engage in fun activity</a:t>
+              <a:t>Word Labs  •  wordlabs.app  •  Root: 'play' = to engage in fun activity</a:t>
             </a:r>
             <a:endParaRPr lang="en-US" sz="800" dirty="0"/>
           </a:p>
@@ -25984,7 +26062,7 @@
                 <a:ea typeface="Calibri" pitchFamily="34" charset="-122"/>
                 <a:cs typeface="Calibri" pitchFamily="34" charset="-120"/>
               </a:rPr>
-              <a:t>engage in fun activity</a:t>
+              <a:t>to engage in fun activity</a:t>
             </a:r>
             <a:endParaRPr lang="en-US" sz="850" dirty="0"/>
           </a:p>
@@ -26096,7 +26174,7 @@
                 <a:ea typeface="Calibri" pitchFamily="34" charset="-122"/>
                 <a:cs typeface="Calibri" pitchFamily="34" charset="-120"/>
               </a:rPr>
-              <a:t>a person who does</a:t>
+              <a:t>a person who does something</a:t>
             </a:r>
             <a:endParaRPr lang="en-US" sz="850" dirty="0"/>
           </a:p>
@@ -26553,11 +26631,11 @@
         <p:spPr>
           <a:xfrm>
             <a:off x="1874520" y="4096512"/>
-            <a:ext cx="6903720" cy="804672"/>
+            <a:ext cx="6903720" cy="658368"/>
           </a:xfrm>
           <a:prstGeom prst="rect">
             <a:avLst>
-              <a:gd name="adj" fmla="val 6818"/>
+              <a:gd name="adj" fmla="val 8333"/>
             </a:avLst>
           </a:prstGeom>
           <a:solidFill>
@@ -26580,11 +26658,11 @@
         <p:spPr>
           <a:xfrm>
             <a:off x="2670048" y="4169664"/>
-            <a:ext cx="685800" cy="384048"/>
+            <a:ext cx="685800" cy="475488"/>
           </a:xfrm>
           <a:prstGeom prst="rect">
             <a:avLst>
-              <a:gd name="adj" fmla="val 9524"/>
+              <a:gd name="adj" fmla="val 7692"/>
             </a:avLst>
           </a:prstGeom>
           <a:solidFill>
@@ -26607,7 +26685,7 @@
         <p:spPr>
           <a:xfrm>
             <a:off x="2670048" y="4169664"/>
-            <a:ext cx="685800" cy="384048"/>
+            <a:ext cx="685800" cy="475488"/>
           </a:xfrm>
           <a:prstGeom prst="rect">
             <a:avLst/>
@@ -26646,11 +26724,11 @@
         <p:spPr>
           <a:xfrm>
             <a:off x="4123944" y="4169664"/>
-            <a:ext cx="685800" cy="384048"/>
+            <a:ext cx="685800" cy="475488"/>
           </a:xfrm>
           <a:prstGeom prst="rect">
             <a:avLst>
-              <a:gd name="adj" fmla="val 9524"/>
+              <a:gd name="adj" fmla="val 7692"/>
             </a:avLst>
           </a:prstGeom>
           <a:solidFill>
@@ -26673,7 +26751,7 @@
         <p:spPr>
           <a:xfrm>
             <a:off x="4123944" y="4169664"/>
-            <a:ext cx="685800" cy="384048"/>
+            <a:ext cx="685800" cy="475488"/>
           </a:xfrm>
           <a:prstGeom prst="rect">
             <a:avLst/>
@@ -26712,11 +26790,11 @@
         <p:spPr>
           <a:xfrm>
             <a:off x="5577840" y="4169664"/>
-            <a:ext cx="685800" cy="384048"/>
+            <a:ext cx="685800" cy="475488"/>
           </a:xfrm>
           <a:prstGeom prst="rect">
             <a:avLst>
-              <a:gd name="adj" fmla="val 9524"/>
+              <a:gd name="adj" fmla="val 7692"/>
             </a:avLst>
           </a:prstGeom>
           <a:solidFill>
@@ -26739,7 +26817,7 @@
         <p:spPr>
           <a:xfrm>
             <a:off x="5577840" y="4169664"/>
-            <a:ext cx="685800" cy="384048"/>
+            <a:ext cx="685800" cy="475488"/>
           </a:xfrm>
           <a:prstGeom prst="rect">
             <a:avLst/>
@@ -26778,11 +26856,11 @@
         <p:spPr>
           <a:xfrm>
             <a:off x="7031736" y="4169664"/>
-            <a:ext cx="685800" cy="384048"/>
+            <a:ext cx="685800" cy="475488"/>
           </a:xfrm>
           <a:prstGeom prst="rect">
             <a:avLst>
-              <a:gd name="adj" fmla="val 9524"/>
+              <a:gd name="adj" fmla="val 7692"/>
             </a:avLst>
           </a:prstGeom>
           <a:solidFill>
@@ -26805,7 +26883,7 @@
         <p:spPr>
           <a:xfrm>
             <a:off x="7031736" y="4169664"/>
-            <a:ext cx="685800" cy="384048"/>
+            <a:ext cx="685800" cy="475488"/>
           </a:xfrm>
           <a:prstGeom prst="rect">
             <a:avLst/>
@@ -26829,48 +26907,9 @@
                 <a:ea typeface="Trebuchet MS" pitchFamily="34" charset="-122"/>
                 <a:cs typeface="Trebuchet MS" pitchFamily="34" charset="-120"/>
               </a:rPr>
-              <a:t>z</a:t>
+              <a:t>s</a:t>
             </a:r>
             <a:endParaRPr lang="en-US" sz="900" dirty="0"/>
-          </a:p>
-        </p:txBody>
-      </p:sp>
-      <p:sp>
-        <p:nvSpPr>
-          <p:cNvPr id="44" name="Text 42"/>
-          <p:cNvSpPr/>
-          <p:nvPr/>
-        </p:nvSpPr>
-        <p:spPr>
-          <a:xfrm>
-            <a:off x="7031736" y="4572000"/>
-            <a:ext cx="685800" cy="219456"/>
-          </a:xfrm>
-          <a:prstGeom prst="rect">
-            <a:avLst/>
-          </a:prstGeom>
-          <a:noFill/>
-          <a:ln/>
-        </p:spPr>
-        <p:txBody>
-          <a:bodyPr wrap="square" lIns="0" tIns="0" rIns="0" bIns="0" rtlCol="0" anchor="t"/>
-          <a:lstStyle/>
-          <a:p>
-            <a:pPr algn="ctr" indent="0" marL="0">
-              <a:buNone/>
-            </a:pPr>
-            <a:r>
-              <a:rPr lang="en-US" sz="750" i="1" dirty="0">
-                <a:solidFill>
-                  <a:srgbClr val="94A3B8"/>
-                </a:solidFill>
-                <a:latin typeface="Calibri" pitchFamily="34" charset="0"/>
-                <a:ea typeface="Calibri" pitchFamily="34" charset="-122"/>
-                <a:cs typeface="Calibri" pitchFamily="34" charset="-120"/>
-              </a:rPr>
-              <a:t>/z/</a:t>
-            </a:r>
-            <a:endParaRPr lang="en-US" sz="750" dirty="0"/>
           </a:p>
         </p:txBody>
       </p:sp>
@@ -27160,7 +27199,7 @@
                 <a:ea typeface="Calibri" pitchFamily="34" charset="-122"/>
                 <a:cs typeface="Calibri" pitchFamily="34" charset="-120"/>
               </a:rPr>
-              <a:t>Word Labs  •  wordlabs.app  •  Root: 'play' = engage in fun activity</a:t>
+              <a:t>Word Labs  •  wordlabs.app  •  Root: 'play' = to engage in fun activity</a:t>
             </a:r>
             <a:endParaRPr lang="en-US" sz="800" dirty="0"/>
           </a:p>
@@ -27987,7 +28026,7 @@
                 <a:ea typeface="Calibri" pitchFamily="34" charset="-122"/>
                 <a:cs typeface="Calibri" pitchFamily="34" charset="-120"/>
               </a:rPr>
-              <a:t>Word Labs  •  wordlabs.app  •  Root: 'play' = engage in fun activity</a:t>
+              <a:t>Word Labs  •  wordlabs.app  •  Root: 'play' = to engage in fun activity</a:t>
             </a:r>
             <a:endParaRPr lang="en-US" sz="800" dirty="0"/>
           </a:p>
@@ -28304,7 +28343,7 @@
                 <a:ea typeface="Calibri" pitchFamily="34" charset="-122"/>
                 <a:cs typeface="Calibri" pitchFamily="34" charset="-120"/>
               </a:rPr>
-              <a:t>engage in fun activity</a:t>
+              <a:t>to engage in fun activity</a:t>
             </a:r>
             <a:endParaRPr lang="en-US" sz="850" dirty="0"/>
           </a:p>
@@ -28416,7 +28455,7 @@
                 <a:ea typeface="Calibri" pitchFamily="34" charset="-122"/>
                 <a:cs typeface="Calibri" pitchFamily="34" charset="-120"/>
               </a:rPr>
-              <a:t>area of land</a:t>
+              <a:t>an area of land used for a purpose</a:t>
             </a:r>
             <a:endParaRPr lang="en-US" sz="850" dirty="0"/>
           </a:p>
@@ -28972,7 +29011,7 @@
                 <a:ea typeface="Calibri" pitchFamily="34" charset="-122"/>
                 <a:cs typeface="Calibri" pitchFamily="34" charset="-120"/>
               </a:rPr>
-              <a:t>Word Labs  •  wordlabs.app  •  Root: 'play' = engage in fun activity</a:t>
+              <a:t>Word Labs  •  wordlabs.app  •  Root: 'play' = to engage in fun activity</a:t>
             </a:r>
             <a:endParaRPr lang="en-US" sz="800" dirty="0"/>
           </a:p>
@@ -29289,7 +29328,7 @@
                 <a:ea typeface="Calibri" pitchFamily="34" charset="-122"/>
                 <a:cs typeface="Calibri" pitchFamily="34" charset="-120"/>
               </a:rPr>
-              <a:t>engage in fun activity</a:t>
+              <a:t>to engage in fun activity</a:t>
             </a:r>
             <a:endParaRPr lang="en-US" sz="850" dirty="0"/>
           </a:p>
@@ -29401,7 +29440,7 @@
                 <a:ea typeface="Calibri" pitchFamily="34" charset="-122"/>
                 <a:cs typeface="Calibri" pitchFamily="34" charset="-120"/>
               </a:rPr>
-              <a:t>area of land</a:t>
+              <a:t>an area of land used for a purpose</a:t>
             </a:r>
             <a:endParaRPr lang="en-US" sz="850" dirty="0"/>
           </a:p>
@@ -30089,7 +30128,7 @@
                 <a:ea typeface="Calibri" pitchFamily="34" charset="-122"/>
                 <a:cs typeface="Calibri" pitchFamily="34" charset="-120"/>
               </a:rPr>
-              <a:t>Word Labs  •  wordlabs.app  •  Root: 'play' = engage in fun activity</a:t>
+              <a:t>Word Labs  •  wordlabs.app  •  Root: 'play' = to engage in fun activity</a:t>
             </a:r>
             <a:endParaRPr lang="en-US" sz="800" dirty="0"/>
           </a:p>
@@ -30406,7 +30445,7 @@
                 <a:ea typeface="Calibri" pitchFamily="34" charset="-122"/>
                 <a:cs typeface="Calibri" pitchFamily="34" charset="-120"/>
               </a:rPr>
-              <a:t>engage in fun activity</a:t>
+              <a:t>to engage in fun activity</a:t>
             </a:r>
             <a:endParaRPr lang="en-US" sz="850" dirty="0"/>
           </a:p>
@@ -30518,7 +30557,7 @@
                 <a:ea typeface="Calibri" pitchFamily="34" charset="-122"/>
                 <a:cs typeface="Calibri" pitchFamily="34" charset="-120"/>
               </a:rPr>
-              <a:t>area of land</a:t>
+              <a:t>an area of land used for a purpose</a:t>
             </a:r>
             <a:endParaRPr lang="en-US" sz="850" dirty="0"/>
           </a:p>
@@ -30889,7 +30928,7 @@
         </p:nvSpPr>
         <p:spPr>
           <a:xfrm>
-            <a:off x="2254649" y="4169664"/>
+            <a:off x="2427732" y="4169664"/>
             <a:ext cx="685800" cy="475488"/>
           </a:xfrm>
           <a:prstGeom prst="rect">
@@ -30916,7 +30955,7 @@
         </p:nvSpPr>
         <p:spPr>
           <a:xfrm>
-            <a:off x="2254649" y="4169664"/>
+            <a:off x="2427732" y="4169664"/>
             <a:ext cx="685800" cy="475488"/>
           </a:xfrm>
           <a:prstGeom prst="rect">
@@ -30955,7 +30994,7 @@
         </p:nvSpPr>
         <p:spPr>
           <a:xfrm>
-            <a:off x="3293146" y="4169664"/>
+            <a:off x="3639312" y="4169664"/>
             <a:ext cx="685800" cy="475488"/>
           </a:xfrm>
           <a:prstGeom prst="rect">
@@ -30982,7 +31021,7 @@
         </p:nvSpPr>
         <p:spPr>
           <a:xfrm>
-            <a:off x="3293146" y="4169664"/>
+            <a:off x="3639312" y="4169664"/>
             <a:ext cx="685800" cy="475488"/>
           </a:xfrm>
           <a:prstGeom prst="rect">
@@ -31021,7 +31060,7 @@
         </p:nvSpPr>
         <p:spPr>
           <a:xfrm>
-            <a:off x="4331643" y="4169664"/>
+            <a:off x="4850892" y="4169664"/>
             <a:ext cx="685800" cy="475488"/>
           </a:xfrm>
           <a:prstGeom prst="rect">
@@ -31048,7 +31087,7 @@
         </p:nvSpPr>
         <p:spPr>
           <a:xfrm>
-            <a:off x="4331643" y="4169664"/>
+            <a:off x="4850892" y="4169664"/>
             <a:ext cx="685800" cy="475488"/>
           </a:xfrm>
           <a:prstGeom prst="rect">
@@ -31087,7 +31126,7 @@
         </p:nvSpPr>
         <p:spPr>
           <a:xfrm>
-            <a:off x="5370141" y="4169664"/>
+            <a:off x="6062472" y="4169664"/>
             <a:ext cx="685800" cy="475488"/>
           </a:xfrm>
           <a:prstGeom prst="rect">
@@ -31114,7 +31153,7 @@
         </p:nvSpPr>
         <p:spPr>
           <a:xfrm>
-            <a:off x="5370141" y="4169664"/>
+            <a:off x="6062472" y="4169664"/>
             <a:ext cx="685800" cy="475488"/>
           </a:xfrm>
           <a:prstGeom prst="rect">
@@ -31139,7 +31178,7 @@
                 <a:ea typeface="Trebuchet MS" pitchFamily="34" charset="-122"/>
                 <a:cs typeface="Trebuchet MS" pitchFamily="34" charset="-120"/>
               </a:rPr>
-              <a:t>ow</a:t>
+              <a:t>ou</a:t>
             </a:r>
             <a:endParaRPr lang="en-US" sz="900" dirty="0"/>
           </a:p>
@@ -31153,7 +31192,7 @@
         </p:nvSpPr>
         <p:spPr>
           <a:xfrm>
-            <a:off x="6408638" y="4169664"/>
+            <a:off x="7274052" y="4169664"/>
             <a:ext cx="685800" cy="475488"/>
           </a:xfrm>
           <a:prstGeom prst="rect">
@@ -31180,7 +31219,7 @@
         </p:nvSpPr>
         <p:spPr>
           <a:xfrm>
-            <a:off x="6408638" y="4169664"/>
+            <a:off x="7274052" y="4169664"/>
             <a:ext cx="685800" cy="475488"/>
           </a:xfrm>
           <a:prstGeom prst="rect">
@@ -31205,73 +31244,7 @@
                 <a:ea typeface="Trebuchet MS" pitchFamily="34" charset="-122"/>
                 <a:cs typeface="Trebuchet MS" pitchFamily="34" charset="-120"/>
               </a:rPr>
-              <a:t>n</a:t>
-            </a:r>
-            <a:endParaRPr lang="en-US" sz="900" dirty="0"/>
-          </a:p>
-        </p:txBody>
-      </p:sp>
-      <p:sp>
-        <p:nvSpPr>
-          <p:cNvPr id="43" name="Shape 41"/>
-          <p:cNvSpPr/>
-          <p:nvPr/>
-        </p:nvSpPr>
-        <p:spPr>
-          <a:xfrm>
-            <a:off x="7447135" y="4169664"/>
-            <a:ext cx="685800" cy="475488"/>
-          </a:xfrm>
-          <a:prstGeom prst="rect">
-            <a:avLst>
-              <a:gd name="adj" fmla="val 7692"/>
-            </a:avLst>
-          </a:prstGeom>
-          <a:solidFill>
-            <a:srgbClr val="FFFFFF"/>
-          </a:solidFill>
-          <a:ln w="12700">
-            <a:solidFill>
-              <a:srgbClr val="DB2777"/>
-            </a:solidFill>
-            <a:prstDash val="solid"/>
-          </a:ln>
-        </p:spPr>
-      </p:sp>
-      <p:sp>
-        <p:nvSpPr>
-          <p:cNvPr id="44" name="Text 42"/>
-          <p:cNvSpPr/>
-          <p:nvPr/>
-        </p:nvSpPr>
-        <p:spPr>
-          <a:xfrm>
-            <a:off x="7447135" y="4169664"/>
-            <a:ext cx="685800" cy="475488"/>
-          </a:xfrm>
-          <a:prstGeom prst="rect">
-            <a:avLst/>
-          </a:prstGeom>
-          <a:noFill/>
-          <a:ln/>
-        </p:spPr>
-        <p:txBody>
-          <a:bodyPr wrap="square" lIns="0" tIns="0" rIns="0" bIns="0" rtlCol="0" anchor="ctr"/>
-          <a:lstStyle/>
-          <a:p>
-            <a:pPr algn="ctr" indent="0" marL="0">
-              <a:buNone/>
-            </a:pPr>
-            <a:r>
-              <a:rPr lang="en-US" sz="900" b="1" dirty="0">
-                <a:solidFill>
-                  <a:srgbClr val="9D174D"/>
-                </a:solidFill>
-                <a:latin typeface="Trebuchet MS" pitchFamily="34" charset="0"/>
-                <a:ea typeface="Trebuchet MS" pitchFamily="34" charset="-122"/>
-                <a:cs typeface="Trebuchet MS" pitchFamily="34" charset="-120"/>
-              </a:rPr>
-              <a:t>d</a:t>
+              <a:t>nd</a:t>
             </a:r>
             <a:endParaRPr lang="en-US" sz="900" dirty="0"/>
           </a:p>
@@ -31563,7 +31536,7 @@
                 <a:ea typeface="Calibri" pitchFamily="34" charset="-122"/>
                 <a:cs typeface="Calibri" pitchFamily="34" charset="-120"/>
               </a:rPr>
-              <a:t>Word Labs  •  wordlabs.app  •  Root: 'play' = engage in fun activity</a:t>
+              <a:t>Word Labs  •  wordlabs.app  •  Root: 'play' = to engage in fun activity</a:t>
             </a:r>
             <a:endParaRPr lang="en-US" sz="800" dirty="0"/>
           </a:p>
@@ -32732,7 +32705,7 @@
                 <a:ea typeface="Calibri" pitchFamily="34" charset="-122"/>
                 <a:cs typeface="Calibri" pitchFamily="34" charset="-120"/>
               </a:rPr>
-              <a:t>Word Labs  •  wordlabs.app  •  Root: 'play' = engage in fun activity</a:t>
+              <a:t>Word Labs  •  wordlabs.app  •  Root: 'play' = to engage in fun activity</a:t>
             </a:r>
             <a:endParaRPr lang="en-US" sz="800" dirty="0"/>
           </a:p>
@@ -33378,7 +33351,7 @@
                 <a:ea typeface="Trebuchet MS" pitchFamily="34" charset="-122"/>
                 <a:cs typeface="Trebuchet MS" pitchFamily="34" charset="-120"/>
               </a:rPr>
-              <a:t>fair-</a:t>
+              <a:t>sword-</a:t>
             </a:r>
             <a:endParaRPr lang="en-US" sz="1300" dirty="0"/>
           </a:p>
@@ -33467,7 +33440,7 @@
                 <a:ea typeface="Trebuchet MS" pitchFamily="34" charset="-122"/>
                 <a:cs typeface="Trebuchet MS" pitchFamily="34" charset="-120"/>
               </a:rPr>
-              <a:t>-ground</a:t>
+              <a:t>-ing</a:t>
             </a:r>
             <a:endParaRPr lang="en-US" sz="1300" dirty="0"/>
           </a:p>
@@ -33620,7 +33593,7 @@
                 <a:ea typeface="Trebuchet MS" pitchFamily="34" charset="-122"/>
                 <a:cs typeface="Trebuchet MS" pitchFamily="34" charset="-120"/>
               </a:rPr>
-              <a:t>-ing</a:t>
+              <a:t>-ed</a:t>
             </a:r>
             <a:endParaRPr lang="en-US" sz="1300" dirty="0"/>
           </a:p>
@@ -33684,7 +33657,7 @@
                 <a:ea typeface="Trebuchet MS" pitchFamily="34" charset="-122"/>
                 <a:cs typeface="Trebuchet MS" pitchFamily="34" charset="-120"/>
               </a:rPr>
-              <a:t>role-</a:t>
+              <a:t>fair-</a:t>
             </a:r>
             <a:endParaRPr lang="en-US" sz="1300" dirty="0"/>
           </a:p>
@@ -33773,7 +33746,7 @@
                 <a:ea typeface="Trebuchet MS" pitchFamily="34" charset="-122"/>
                 <a:cs typeface="Trebuchet MS" pitchFamily="34" charset="-120"/>
               </a:rPr>
-              <a:t>-mate</a:t>
+              <a:t>-ground</a:t>
             </a:r>
             <a:endParaRPr lang="en-US" sz="1300" dirty="0"/>
           </a:p>
@@ -33944,7 +33917,7 @@
                 <a:ea typeface="Trebuchet MS" pitchFamily="34" charset="-122"/>
                 <a:cs typeface="Trebuchet MS" pitchFamily="34" charset="-120"/>
               </a:rPr>
-              <a:t>playground</a:t>
+              <a:t>player</a:t>
             </a:r>
             <a:endParaRPr lang="en-US" sz="1200" dirty="0"/>
           </a:p>
@@ -34010,7 +33983,7 @@
                 <a:ea typeface="Trebuchet MS" pitchFamily="34" charset="-122"/>
                 <a:cs typeface="Trebuchet MS" pitchFamily="34" charset="-120"/>
               </a:rPr>
-              <a:t>player</a:t>
+              <a:t>playground</a:t>
             </a:r>
             <a:endParaRPr lang="en-US" sz="1200" dirty="0"/>
           </a:p>
@@ -34208,7 +34181,7 @@
                 <a:ea typeface="Trebuchet MS" pitchFamily="34" charset="-122"/>
                 <a:cs typeface="Trebuchet MS" pitchFamily="34" charset="-120"/>
               </a:rPr>
-              <a:t>playmate</a:t>
+              <a:t>playwright</a:t>
             </a:r>
             <a:endParaRPr lang="en-US" sz="1200" dirty="0"/>
           </a:p>
@@ -34274,7 +34247,7 @@
                 <a:ea typeface="Trebuchet MS" pitchFamily="34" charset="-122"/>
                 <a:cs typeface="Trebuchet MS" pitchFamily="34" charset="-120"/>
               </a:rPr>
-              <a:t>wordplay</a:t>
+              <a:t>swordplay</a:t>
             </a:r>
             <a:endParaRPr lang="en-US" sz="1200" dirty="0"/>
           </a:p>
@@ -34340,7 +34313,7 @@
                 <a:ea typeface="Trebuchet MS" pitchFamily="34" charset="-122"/>
                 <a:cs typeface="Trebuchet MS" pitchFamily="34" charset="-120"/>
               </a:rPr>
-              <a:t>playing</a:t>
+              <a:t>wordplay</a:t>
             </a:r>
             <a:endParaRPr lang="en-US" sz="1200" dirty="0"/>
           </a:p>
@@ -34632,7 +34605,7 @@
                 <a:ea typeface="Calibri" pitchFamily="34" charset="-122"/>
                 <a:cs typeface="Calibri" pitchFamily="34" charset="-120"/>
               </a:rPr>
-              <a:t>Word Labs  •  wordlabs.app  •  Root: 'play' = engage in fun activity</a:t>
+              <a:t>Word Labs  •  wordlabs.app  •  Root: 'play' = to engage in fun activity</a:t>
             </a:r>
             <a:endParaRPr lang="en-US" sz="800" dirty="0"/>
           </a:p>
@@ -34796,7 +34769,7 @@
                 <a:ea typeface="Calibri" pitchFamily="34" charset="-122"/>
                 <a:cs typeface="Calibri" pitchFamily="34" charset="-120"/>
               </a:rPr>
-              <a:t>The core part of a word carrying its basic meaning. For example, 'play' means 'engage in fun activity'.</a:t>
+              <a:t>The core part of a word carrying its basic meaning. For example, 'play' means 'to engage in fun activity'.</a:t>
             </a:r>
             <a:endParaRPr lang="en-US" sz="1350" dirty="0"/>
           </a:p>
@@ -35416,7 +35389,7 @@
                 <a:ea typeface="Calibri" pitchFamily="34" charset="-122"/>
                 <a:cs typeface="Calibri" pitchFamily="34" charset="-120"/>
               </a:rPr>
-              <a:t>Word Labs  •  wordlabs.app  •  Root: 'play' = engage in fun activity</a:t>
+              <a:t>Word Labs  •  wordlabs.app  •  Root: 'play' = to engage in fun activity</a:t>
             </a:r>
             <a:endParaRPr lang="en-US" sz="800" dirty="0"/>
           </a:p>
@@ -35528,7 +35501,7 @@
                 <a:ea typeface="Calibri" pitchFamily="34" charset="-122"/>
                 <a:cs typeface="Calibri" pitchFamily="34" charset="-120"/>
               </a:rPr>
-              <a:t>1.  The word 'playful' contains the root 'play' and the suffix '-ful'.</a:t>
+              <a:t>1.  The word 'display' contains the root 'play'.</a:t>
             </a:r>
             <a:endParaRPr lang="en-US" sz="1300" dirty="0"/>
           </a:p>
@@ -35667,7 +35640,7 @@
                 <a:ea typeface="Calibri" pitchFamily="34" charset="-122"/>
                 <a:cs typeface="Calibri" pitchFamily="34" charset="-120"/>
               </a:rPr>
-              <a:t>2.  The word 'display' has nothing to do with the root 'play'.</a:t>
+              <a:t>2.  A 'playwright' is someone who writes plays for the stage.</a:t>
             </a:r>
             <a:endParaRPr lang="en-US" sz="1300" dirty="0"/>
           </a:p>
@@ -35690,11 +35663,11 @@
             </a:avLst>
           </a:prstGeom>
           <a:solidFill>
-            <a:srgbClr val="FEE2E2"/>
-          </a:solidFill>
-          <a:ln w="12700">
-            <a:solidFill>
-              <a:srgbClr val="DC2626"/>
+            <a:srgbClr val="DCFCE7"/>
+          </a:solidFill>
+          <a:ln w="12700">
+            <a:solidFill>
+              <a:srgbClr val="16A34A"/>
             </a:solidFill>
             <a:prstDash val="solid"/>
           </a:ln>
@@ -35727,13 +35700,13 @@
             <a:r>
               <a:rPr lang="en-US" sz="1100" b="1" dirty="0">
                 <a:solidFill>
-                  <a:srgbClr val="DC2626"/>
+                  <a:srgbClr val="16A34A"/>
                 </a:solidFill>
                 <a:latin typeface="Trebuchet MS" pitchFamily="34" charset="0"/>
                 <a:ea typeface="Trebuchet MS" pitchFamily="34" charset="-122"/>
                 <a:cs typeface="Trebuchet MS" pitchFamily="34" charset="-120"/>
               </a:rPr>
-              <a:t>FALSE</a:t>
+              <a:t>TRUE</a:t>
             </a:r>
             <a:endParaRPr lang="en-US" sz="1100" dirty="0"/>
           </a:p>
@@ -35806,7 +35779,7 @@
                 <a:ea typeface="Calibri" pitchFamily="34" charset="-122"/>
                 <a:cs typeface="Calibri" pitchFamily="34" charset="-120"/>
               </a:rPr>
-              <a:t>3.  A 'playground' is a compound word that includes the root 'play'.</a:t>
+              <a:t>3.  The word 'playground' contains the root 'play'.</a:t>
             </a:r>
             <a:endParaRPr lang="en-US" sz="1300" dirty="0"/>
           </a:p>
@@ -35945,7 +35918,7 @@
                 <a:ea typeface="Calibri" pitchFamily="34" charset="-122"/>
                 <a:cs typeface="Calibri" pitchFamily="34" charset="-120"/>
               </a:rPr>
-              <a:t>4.  A 'playmate' is someone you play with.</a:t>
+              <a:t>4.  The root 'play' comes from a Greek word meaning 'to sing'.</a:t>
             </a:r>
             <a:endParaRPr lang="en-US" sz="1300" dirty="0"/>
           </a:p>
@@ -35968,11 +35941,11 @@
             </a:avLst>
           </a:prstGeom>
           <a:solidFill>
-            <a:srgbClr val="DCFCE7"/>
-          </a:solidFill>
-          <a:ln w="12700">
-            <a:solidFill>
-              <a:srgbClr val="16A34A"/>
+            <a:srgbClr val="FEE2E2"/>
+          </a:solidFill>
+          <a:ln w="12700">
+            <a:solidFill>
+              <a:srgbClr val="DC2626"/>
             </a:solidFill>
             <a:prstDash val="solid"/>
           </a:ln>
@@ -36005,13 +35978,13 @@
             <a:r>
               <a:rPr lang="en-US" sz="1100" b="1" dirty="0">
                 <a:solidFill>
-                  <a:srgbClr val="16A34A"/>
+                  <a:srgbClr val="DC2626"/>
                 </a:solidFill>
                 <a:latin typeface="Trebuchet MS" pitchFamily="34" charset="0"/>
                 <a:ea typeface="Trebuchet MS" pitchFamily="34" charset="-122"/>
                 <a:cs typeface="Trebuchet MS" pitchFamily="34" charset="-120"/>
               </a:rPr>
-              <a:t>TRUE</a:t>
+              <a:t>FALSE</a:t>
             </a:r>
             <a:endParaRPr lang="en-US" sz="1100" dirty="0"/>
           </a:p>
@@ -36084,7 +36057,7 @@
                 <a:ea typeface="Calibri" pitchFamily="34" charset="-122"/>
                 <a:cs typeface="Calibri" pitchFamily="34" charset="-120"/>
               </a:rPr>
-              <a:t>5.  The suffix '-ful' in 'playful' means 'without'.</a:t>
+              <a:t>5.  The prefix 'mis' can be added to 'play' to make a real English word.</a:t>
             </a:r>
             <a:endParaRPr lang="en-US" sz="1300" dirty="0"/>
           </a:p>
@@ -36442,7 +36415,7 @@
                 <a:ea typeface="Calibri" pitchFamily="34" charset="-122"/>
                 <a:cs typeface="Calibri" pitchFamily="34" charset="-120"/>
               </a:rPr>
-              <a:t>Word Labs  •  wordlabs.app  •  Root: 'play' = engage in fun activity</a:t>
+              <a:t>Word Labs  •  wordlabs.app  •  Root: 'play' = to engage in fun activity</a:t>
             </a:r>
             <a:endParaRPr lang="en-US" sz="800" dirty="0"/>
           </a:p>
@@ -36579,7 +36552,7 @@
                 <a:ea typeface="Trebuchet MS" pitchFamily="34" charset="-122"/>
                 <a:cs typeface="Trebuchet MS" pitchFamily="34" charset="-120"/>
               </a:rPr>
-              <a:t>engage in fun activity</a:t>
+              <a:t>to engage in fun activity</a:t>
             </a:r>
             <a:endParaRPr lang="en-US" sz="2000" dirty="0"/>
           </a:p>
@@ -36618,7 +36591,7 @@
                 <a:ea typeface="Calibri" pitchFamily="34" charset="-122"/>
                 <a:cs typeface="Calibri" pitchFamily="34" charset="-120"/>
               </a:rPr>
-              <a:t>Origin: Latin: placere</a:t>
+              <a:t>Origin: Latin: plagiare</a:t>
             </a:r>
             <a:endParaRPr lang="en-US" sz="1100" dirty="0"/>
           </a:p>
@@ -36789,7 +36762,7 @@
                 <a:ea typeface="Trebuchet MS" pitchFamily="34" charset="-122"/>
                 <a:cs typeface="Trebuchet MS" pitchFamily="34" charset="-120"/>
               </a:rPr>
-              <a:t>playground</a:t>
+              <a:t>player</a:t>
             </a:r>
             <a:endParaRPr lang="en-US" sz="1300" dirty="0"/>
           </a:p>
@@ -36855,7 +36828,7 @@
                 <a:ea typeface="Trebuchet MS" pitchFamily="34" charset="-122"/>
                 <a:cs typeface="Trebuchet MS" pitchFamily="34" charset="-120"/>
               </a:rPr>
-              <a:t>player</a:t>
+              <a:t>playground</a:t>
             </a:r>
             <a:endParaRPr lang="en-US" sz="1300" dirty="0"/>
           </a:p>
@@ -37053,7 +37026,7 @@
                 <a:ea typeface="Trebuchet MS" pitchFamily="34" charset="-122"/>
                 <a:cs typeface="Trebuchet MS" pitchFamily="34" charset="-120"/>
               </a:rPr>
-              <a:t>playmate</a:t>
+              <a:t>playwright</a:t>
             </a:r>
             <a:endParaRPr lang="en-US" sz="1300" dirty="0"/>
           </a:p>
@@ -37119,7 +37092,7 @@
                 <a:ea typeface="Trebuchet MS" pitchFamily="34" charset="-122"/>
                 <a:cs typeface="Trebuchet MS" pitchFamily="34" charset="-120"/>
               </a:rPr>
-              <a:t>wordplay</a:t>
+              <a:t>swordplay</a:t>
             </a:r>
             <a:endParaRPr lang="en-US" sz="1300" dirty="0"/>
           </a:p>
@@ -37411,7 +37384,7 @@
                 <a:ea typeface="Calibri" pitchFamily="34" charset="-122"/>
                 <a:cs typeface="Calibri" pitchFamily="34" charset="-120"/>
               </a:rPr>
-              <a:t>Word Labs  •  wordlabs.app  •  Root: 'play' = engage in fun activity</a:t>
+              <a:t>Word Labs  •  wordlabs.app  •  Root: 'play' = to engage in fun activity</a:t>
             </a:r>
             <a:endParaRPr lang="en-US" sz="800" dirty="0"/>
           </a:p>
@@ -38057,7 +38030,7 @@
                 <a:ea typeface="Trebuchet MS" pitchFamily="34" charset="-122"/>
                 <a:cs typeface="Trebuchet MS" pitchFamily="34" charset="-120"/>
               </a:rPr>
-              <a:t>fair-</a:t>
+              <a:t>sword-</a:t>
             </a:r>
             <a:endParaRPr lang="en-US" sz="1300" dirty="0"/>
           </a:p>
@@ -38146,7 +38119,7 @@
                 <a:ea typeface="Trebuchet MS" pitchFamily="34" charset="-122"/>
                 <a:cs typeface="Trebuchet MS" pitchFamily="34" charset="-120"/>
               </a:rPr>
-              <a:t>-ground</a:t>
+              <a:t>-ing</a:t>
             </a:r>
             <a:endParaRPr lang="en-US" sz="1300" dirty="0"/>
           </a:p>
@@ -38299,7 +38272,7 @@
                 <a:ea typeface="Trebuchet MS" pitchFamily="34" charset="-122"/>
                 <a:cs typeface="Trebuchet MS" pitchFamily="34" charset="-120"/>
               </a:rPr>
-              <a:t>-ing</a:t>
+              <a:t>-ed</a:t>
             </a:r>
             <a:endParaRPr lang="en-US" sz="1300" dirty="0"/>
           </a:p>
@@ -38363,7 +38336,7 @@
                 <a:ea typeface="Trebuchet MS" pitchFamily="34" charset="-122"/>
                 <a:cs typeface="Trebuchet MS" pitchFamily="34" charset="-120"/>
               </a:rPr>
-              <a:t>role-</a:t>
+              <a:t>fair-</a:t>
             </a:r>
             <a:endParaRPr lang="en-US" sz="1300" dirty="0"/>
           </a:p>
@@ -38452,7 +38425,7 @@
                 <a:ea typeface="Trebuchet MS" pitchFamily="34" charset="-122"/>
                 <a:cs typeface="Trebuchet MS" pitchFamily="34" charset="-120"/>
               </a:rPr>
-              <a:t>-mate</a:t>
+              <a:t>-ground</a:t>
             </a:r>
             <a:endParaRPr lang="en-US" sz="1300" dirty="0"/>
           </a:p>
@@ -39185,7 +39158,7 @@
                 <a:ea typeface="Calibri" pitchFamily="34" charset="-122"/>
                 <a:cs typeface="Calibri" pitchFamily="34" charset="-120"/>
               </a:rPr>
-              <a:t>Word Labs  •  wordlabs.app  •  Root: 'play' = engage in fun activity</a:t>
+              <a:t>Word Labs  •  wordlabs.app  •  Root: 'play' = to engage in fun activity</a:t>
             </a:r>
             <a:endParaRPr lang="en-US" sz="800" dirty="0"/>
           </a:p>
@@ -39363,7 +39336,7 @@
                 <a:ea typeface="Calibri" pitchFamily="34" charset="-122"/>
                 <a:cs typeface="Calibri" pitchFamily="34" charset="-120"/>
               </a:rPr>
-              <a:t>A person who takes part in a game or sport.</a:t>
+              <a:t>An outdoor area with equipment where children can run and play.</a:t>
             </a:r>
             <a:endParaRPr lang="en-US" sz="1200" dirty="0"/>
           </a:p>
@@ -39436,7 +39409,7 @@
                 <a:ea typeface="Trebuchet MS" pitchFamily="34" charset="-122"/>
                 <a:cs typeface="Trebuchet MS" pitchFamily="34" charset="-120"/>
               </a:rPr>
-              <a:t>playground</a:t>
+              <a:t>player</a:t>
             </a:r>
             <a:endParaRPr lang="en-US" sz="1200" dirty="0"/>
           </a:p>
@@ -39502,7 +39475,7 @@
                 <a:ea typeface="Calibri" pitchFamily="34" charset="-122"/>
                 <a:cs typeface="Calibri" pitchFamily="34" charset="-120"/>
               </a:rPr>
-              <a:t>To show something so others can see it clearly.</a:t>
+              <a:t>To show something so others can see it, like putting artwork on the wall.</a:t>
             </a:r>
             <a:endParaRPr lang="en-US" sz="1200" dirty="0"/>
           </a:p>
@@ -39575,7 +39548,7 @@
                 <a:ea typeface="Trebuchet MS" pitchFamily="34" charset="-122"/>
                 <a:cs typeface="Trebuchet MS" pitchFamily="34" charset="-120"/>
               </a:rPr>
-              <a:t>player</a:t>
+              <a:t>playground</a:t>
             </a:r>
             <a:endParaRPr lang="en-US" sz="1200" dirty="0"/>
           </a:p>
@@ -39641,7 +39614,7 @@
                 <a:ea typeface="Calibri" pitchFamily="34" charset="-122"/>
                 <a:cs typeface="Calibri" pitchFamily="34" charset="-120"/>
               </a:rPr>
-              <a:t>When someone is fun, lively, and likes to joke around.</a:t>
+              <a:t>When someone is lively and loves to have fun, like a puppy chasing its tail.</a:t>
             </a:r>
             <a:endParaRPr lang="en-US" sz="1200" dirty="0"/>
           </a:p>
@@ -39780,7 +39753,7 @@
                 <a:ea typeface="Calibri" pitchFamily="34" charset="-122"/>
                 <a:cs typeface="Calibri" pitchFamily="34" charset="-120"/>
               </a:rPr>
-              <a:t>A friend you play games or activities with.</a:t>
+              <a:t>A person who writes plays and stories performed on stage.</a:t>
             </a:r>
             <a:endParaRPr lang="en-US" sz="1200" dirty="0"/>
           </a:p>
@@ -39919,7 +39892,7 @@
                 <a:ea typeface="Calibri" pitchFamily="34" charset="-122"/>
                 <a:cs typeface="Calibri" pitchFamily="34" charset="-120"/>
               </a:rPr>
-              <a:t>Using words in a clever or funny way, like puns or riddles.</a:t>
+              <a:t>The skill of fighting or performing with swords, often seen in movies.</a:t>
             </a:r>
             <a:endParaRPr lang="en-US" sz="1200" dirty="0"/>
           </a:p>
@@ -39992,7 +39965,7 @@
                 <a:ea typeface="Trebuchet MS" pitchFamily="34" charset="-122"/>
                 <a:cs typeface="Trebuchet MS" pitchFamily="34" charset="-120"/>
               </a:rPr>
-              <a:t>playmate</a:t>
+              <a:t>playwright</a:t>
             </a:r>
             <a:endParaRPr lang="en-US" sz="1200" dirty="0"/>
           </a:p>
@@ -40058,7 +40031,7 @@
                 <a:ea typeface="Calibri" pitchFamily="34" charset="-122"/>
                 <a:cs typeface="Calibri" pitchFamily="34" charset="-120"/>
               </a:rPr>
-              <a:t>To play something again, like watching a sports moment a second time.</a:t>
+              <a:t>To play something again, like watching a funny video clip a second time.</a:t>
             </a:r>
             <a:endParaRPr lang="en-US" sz="1200" dirty="0"/>
           </a:p>
@@ -40131,7 +40104,7 @@
                 <a:ea typeface="Trebuchet MS" pitchFamily="34" charset="-122"/>
                 <a:cs typeface="Trebuchet MS" pitchFamily="34" charset="-120"/>
               </a:rPr>
-              <a:t>wordplay</a:t>
+              <a:t>swordplay</a:t>
             </a:r>
             <a:endParaRPr lang="en-US" sz="1200" dirty="0"/>
           </a:p>
@@ -40197,7 +40170,7 @@
                 <a:ea typeface="Calibri" pitchFamily="34" charset="-122"/>
                 <a:cs typeface="Calibri" pitchFamily="34" charset="-120"/>
               </a:rPr>
-              <a:t>An outdoor area with equipment where children can play.</a:t>
+              <a:t>A person who takes part in a game or sport.</a:t>
             </a:r>
             <a:endParaRPr lang="en-US" sz="1200" dirty="0"/>
           </a:p>
@@ -40489,7 +40462,7 @@
                 <a:ea typeface="Calibri" pitchFamily="34" charset="-122"/>
                 <a:cs typeface="Calibri" pitchFamily="34" charset="-120"/>
               </a:rPr>
-              <a:t>Word Labs  •  wordlabs.app  •  Root: 'play' = engage in fun activity</a:t>
+              <a:t>Word Labs  •  wordlabs.app  •  Root: 'play' = to engage in fun activity</a:t>
             </a:r>
             <a:endParaRPr lang="en-US" sz="800" dirty="0"/>
           </a:p>
@@ -40692,7 +40665,7 @@
                 <a:ea typeface="Calibri" pitchFamily="34" charset="-122"/>
                 <a:cs typeface="Calibri" pitchFamily="34" charset="-120"/>
               </a:rPr>
-              <a:t>The playful puppy chased its tail around the backyard all afternoon.</a:t>
+              <a:t>The children were playful during recess, chasing each other around the oval.</a:t>
             </a:r>
             <a:endParaRPr lang="en-US" sz="1500" dirty="0"/>
           </a:p>
@@ -40856,7 +40829,7 @@
                 <a:ea typeface="Calibri" pitchFamily="34" charset="-122"/>
                 <a:cs typeface="Calibri" pitchFamily="34" charset="-120"/>
               </a:rPr>
-              <a:t>We watched a replay of the winning goal at least five times after the match.</a:t>
+              <a:t>Our class will replay the video about the water cycle so everyone understands it.</a:t>
             </a:r>
             <a:endParaRPr lang="en-US" sz="1500" dirty="0"/>
           </a:p>
@@ -41020,7 +40993,7 @@
                 <a:ea typeface="Calibri" pitchFamily="34" charset="-122"/>
                 <a:cs typeface="Calibri" pitchFamily="34" charset="-120"/>
               </a:rPr>
-              <a:t>The students created a colourful display of their artwork in the hallway.</a:t>
+              <a:t>The school decided to display the students' artwork in the main hallway for everyone to admire.</a:t>
             </a:r>
             <a:endParaRPr lang="en-US" sz="1500" dirty="0"/>
           </a:p>

--- a/output/wordlabs-play-3day.pptx
+++ b/output/wordlabs-play-3day.pptx
@@ -4240,7 +4240,7 @@
                 <a:ea typeface="Calibri" pitchFamily="34" charset="-122"/>
                 <a:cs typeface="Calibri" pitchFamily="34" charset="-120"/>
               </a:rPr>
-              <a:t>"to engage in fun activity"</a:t>
+              <a:t>"to take part in a game; to have fun"</a:t>
             </a:r>
             <a:endParaRPr lang="en-US" sz="2200" dirty="0"/>
           </a:p>
@@ -4279,7 +4279,7 @@
                 <a:ea typeface="Calibri" pitchFamily="34" charset="-122"/>
                 <a:cs typeface="Calibri" pitchFamily="34" charset="-120"/>
               </a:rPr>
-              <a:t>Origin: Latin: plagiare</a:t>
+              <a:t>Origin: Anglo-Saxon (Old English) root</a:t>
             </a:r>
             <a:endParaRPr lang="en-US" sz="1300" dirty="0"/>
           </a:p>
@@ -5288,7 +5288,7 @@
                 <a:ea typeface="Calibri" pitchFamily="34" charset="-122"/>
                 <a:cs typeface="Calibri" pitchFamily="34" charset="-120"/>
               </a:rPr>
-              <a:t>Word Labs  •  wordlabs.app  •  Root: 'play' = to engage in fun activity</a:t>
+              <a:t>Word Labs  •  wordlabs.app  •  Root: 'play' = to take part in a game; to have fun</a:t>
             </a:r>
             <a:endParaRPr lang="en-US" sz="800" dirty="0"/>
           </a:p>
@@ -5622,7 +5622,7 @@
                 <a:ea typeface="Trebuchet MS" pitchFamily="34" charset="-122"/>
                 <a:cs typeface="Trebuchet MS" pitchFamily="34" charset="-120"/>
               </a:rPr>
-              <a:t>1</a:t>
+              <a:t>0</a:t>
             </a:r>
             <a:pPr algn="ctr" indent="0" marL="0">
               <a:buNone/>
@@ -5928,7 +5928,7 @@
                 <a:ea typeface="Calibri" pitchFamily="34" charset="-122"/>
                 <a:cs typeface="Calibri" pitchFamily="34" charset="-120"/>
               </a:rPr>
-              <a:t>Word Labs  •  wordlabs.app  •  Root: 'play' = to engage in fun activity</a:t>
+              <a:t>Word Labs  •  wordlabs.app  •  Root: 'play' = to take part in a game; to have fun</a:t>
             </a:r>
             <a:endParaRPr lang="en-US" sz="800" dirty="0"/>
           </a:p>
@@ -6040,7 +6040,7 @@
                 <a:ea typeface="Calibri" pitchFamily="34" charset="-122"/>
                 <a:cs typeface="Calibri" pitchFamily="34" charset="-120"/>
               </a:rPr>
-              <a:t>The </a:t>
+              <a:t>The dog's </a:t>
             </a:r>
             <a:pPr algn="l" indent="0" marL="0">
               <a:buNone/>
@@ -6057,7 +6057,7 @@
                 <a:ea typeface="Calibri" pitchFamily="34" charset="-122"/>
                 <a:cs typeface="Calibri" pitchFamily="34" charset="-120"/>
               </a:rPr>
-              <a:t>playful</a:t>
+              <a:t>playfulness</a:t>
             </a:r>
             <a:pPr algn="l" indent="0" marL="0">
               <a:buNone/>
@@ -6071,7 +6071,7 @@
                 <a:ea typeface="Calibri" pitchFamily="34" charset="-122"/>
                 <a:cs typeface="Calibri" pitchFamily="34" charset="-120"/>
               </a:rPr>
-              <a:t> kitten entertained the crowd, and the trainer asked everyone to </a:t>
+              <a:t> made everyone smile. The news reporter tended to </a:t>
             </a:r>
             <a:pPr algn="l" indent="0" marL="0">
               <a:buNone/>
@@ -6088,7 +6088,7 @@
                 <a:ea typeface="Calibri" pitchFamily="34" charset="-122"/>
                 <a:cs typeface="Calibri" pitchFamily="34" charset="-120"/>
               </a:rPr>
-              <a:t>replay</a:t>
+              <a:t>overplay</a:t>
             </a:r>
             <a:pPr algn="l" indent="0" marL="0">
               <a:buNone/>
@@ -6102,7 +6102,7 @@
                 <a:ea typeface="Calibri" pitchFamily="34" charset="-122"/>
                 <a:cs typeface="Calibri" pitchFamily="34" charset="-120"/>
               </a:rPr>
-              <a:t> the trick.</a:t>
+              <a:t> every minor storm.</a:t>
             </a:r>
             <a:endParaRPr lang="en-US" sz="1800" dirty="0"/>
           </a:p>
@@ -6257,7 +6257,7 @@
                 <a:ea typeface="Trebuchet MS" pitchFamily="34" charset="-122"/>
                 <a:cs typeface="Trebuchet MS" pitchFamily="34" charset="-120"/>
               </a:rPr>
-              <a:t>playful</a:t>
+              <a:t>playfulness</a:t>
             </a:r>
             <a:endParaRPr lang="en-US" sz="1400" dirty="0"/>
           </a:p>
@@ -6385,7 +6385,7 @@
                 <a:ea typeface="Trebuchet MS" pitchFamily="34" charset="-122"/>
                 <a:cs typeface="Trebuchet MS" pitchFamily="34" charset="-120"/>
               </a:rPr>
-              <a:t>replay</a:t>
+              <a:t>overplay</a:t>
             </a:r>
             <a:endParaRPr lang="en-US" sz="1400" dirty="0"/>
           </a:p>
@@ -6716,7 +6716,7 @@
                 <a:ea typeface="Calibri" pitchFamily="34" charset="-122"/>
                 <a:cs typeface="Calibri" pitchFamily="34" charset="-120"/>
               </a:rPr>
-              <a:t>Word Labs  •  wordlabs.app  •  Root: 'play' = to engage in fun activity</a:t>
+              <a:t>Word Labs  •  wordlabs.app  •  Root: 'play' = to take part in a game; to have fun</a:t>
             </a:r>
             <a:endParaRPr lang="en-US" sz="800" dirty="0"/>
           </a:p>
@@ -6855,7 +6855,7 @@
                 <a:ea typeface="Trebuchet MS" pitchFamily="34" charset="-122"/>
                 <a:cs typeface="Trebuchet MS" pitchFamily="34" charset="-120"/>
               </a:rPr>
-              <a:t>playful</a:t>
+              <a:t>playfulness</a:t>
             </a:r>
             <a:endParaRPr lang="en-US" sz="2800" dirty="0"/>
           </a:p>
@@ -7543,7 +7543,7 @@
                 <a:ea typeface="Calibri" pitchFamily="34" charset="-122"/>
                 <a:cs typeface="Calibri" pitchFamily="34" charset="-120"/>
               </a:rPr>
-              <a:t>Word Labs  •  wordlabs.app  •  Root: 'play' = to engage in fun activity</a:t>
+              <a:t>Word Labs  •  wordlabs.app  •  Root: 'play' = to take part in a game; to have fun</a:t>
             </a:r>
             <a:endParaRPr lang="en-US" sz="800" dirty="0"/>
           </a:p>
@@ -7682,7 +7682,7 @@
                 <a:ea typeface="Trebuchet MS" pitchFamily="34" charset="-122"/>
                 <a:cs typeface="Trebuchet MS" pitchFamily="34" charset="-120"/>
               </a:rPr>
-              <a:t>playful</a:t>
+              <a:t>playfulness</a:t>
             </a:r>
             <a:endParaRPr lang="en-US" sz="2800" dirty="0"/>
           </a:p>
@@ -7762,7 +7762,7 @@
         </p:nvSpPr>
         <p:spPr>
           <a:xfrm>
-            <a:off x="2938272" y="2258568"/>
+            <a:off x="2221992" y="2258568"/>
             <a:ext cx="1828800" cy="292608"/>
           </a:xfrm>
           <a:prstGeom prst="rect">
@@ -7796,7 +7796,7 @@
         </p:nvSpPr>
         <p:spPr>
           <a:xfrm>
-            <a:off x="2938272" y="2258568"/>
+            <a:off x="2221992" y="2258568"/>
             <a:ext cx="1828800" cy="292608"/>
           </a:xfrm>
           <a:prstGeom prst="rect">
@@ -7835,7 +7835,7 @@
         </p:nvSpPr>
         <p:spPr>
           <a:xfrm>
-            <a:off x="2938272" y="2569464"/>
+            <a:off x="2221992" y="2569464"/>
             <a:ext cx="1828800" cy="201168"/>
           </a:xfrm>
           <a:prstGeom prst="rect">
@@ -7860,7 +7860,7 @@
                 <a:ea typeface="Calibri" pitchFamily="34" charset="-122"/>
                 <a:cs typeface="Calibri" pitchFamily="34" charset="-120"/>
               </a:rPr>
-              <a:t>to engage in fun activity</a:t>
+              <a:t>to take part in a game; to have fun</a:t>
             </a:r>
             <a:endParaRPr lang="en-US" sz="850" dirty="0"/>
           </a:p>
@@ -7874,7 +7874,7 @@
         </p:nvSpPr>
         <p:spPr>
           <a:xfrm>
-            <a:off x="5803392" y="2258568"/>
+            <a:off x="4370832" y="2258568"/>
             <a:ext cx="1828800" cy="292608"/>
           </a:xfrm>
           <a:prstGeom prst="rect">
@@ -7908,7 +7908,7 @@
         </p:nvSpPr>
         <p:spPr>
           <a:xfrm>
-            <a:off x="5803392" y="2258568"/>
+            <a:off x="4370832" y="2258568"/>
             <a:ext cx="1828800" cy="292608"/>
           </a:xfrm>
           <a:prstGeom prst="rect">
@@ -7947,7 +7947,7 @@
         </p:nvSpPr>
         <p:spPr>
           <a:xfrm>
-            <a:off x="5803392" y="2569464"/>
+            <a:off x="4370832" y="2569464"/>
             <a:ext cx="1828800" cy="201168"/>
           </a:xfrm>
           <a:prstGeom prst="rect">
@@ -7972,7 +7972,7 @@
                 <a:ea typeface="Calibri" pitchFamily="34" charset="-122"/>
                 <a:cs typeface="Calibri" pitchFamily="34" charset="-120"/>
               </a:rPr>
-              <a:t>full of, having the quality of</a:t>
+              <a:t>full of</a:t>
             </a:r>
             <a:endParaRPr lang="en-US" sz="850" dirty="0"/>
           </a:p>
@@ -7981,6 +7981,118 @@
       <p:sp>
         <p:nvSpPr>
           <p:cNvPr id="22" name="Shape 20"/>
+          <p:cNvSpPr/>
+          <p:nvPr/>
+        </p:nvSpPr>
+        <p:spPr>
+          <a:xfrm>
+            <a:off x="6519672" y="2258568"/>
+            <a:ext cx="1828800" cy="292608"/>
+          </a:xfrm>
+          <a:prstGeom prst="rect">
+            <a:avLst>
+              <a:gd name="adj" fmla="val 25000"/>
+            </a:avLst>
+          </a:prstGeom>
+          <a:solidFill>
+            <a:srgbClr val="FCE7F3"/>
+          </a:solidFill>
+          <a:ln w="19050">
+            <a:solidFill>
+              <a:srgbClr val="DB2777"/>
+            </a:solidFill>
+            <a:prstDash val="solid"/>
+          </a:ln>
+          <a:effectLst>
+            <a:outerShdw sx="100000" sy="100000" kx="0" ky="0" algn="bl" rotWithShape="0" blurRad="101600" dist="38100" dir="8100000">
+              <a:srgbClr val="000000">
+                <a:alpha val="12000"/>
+              </a:srgbClr>
+            </a:outerShdw>
+          </a:effectLst>
+        </p:spPr>
+      </p:sp>
+      <p:sp>
+        <p:nvSpPr>
+          <p:cNvPr id="23" name="Text 21"/>
+          <p:cNvSpPr/>
+          <p:nvPr/>
+        </p:nvSpPr>
+        <p:spPr>
+          <a:xfrm>
+            <a:off x="6519672" y="2258568"/>
+            <a:ext cx="1828800" cy="292608"/>
+          </a:xfrm>
+          <a:prstGeom prst="rect">
+            <a:avLst/>
+          </a:prstGeom>
+          <a:noFill/>
+          <a:ln/>
+        </p:spPr>
+        <p:txBody>
+          <a:bodyPr wrap="square" lIns="0" tIns="0" rIns="0" bIns="0" rtlCol="0" anchor="ctr"/>
+          <a:lstStyle/>
+          <a:p>
+            <a:pPr algn="ctr" indent="0" marL="0">
+              <a:buNone/>
+            </a:pPr>
+            <a:r>
+              <a:rPr lang="en-US" sz="1300" b="1" dirty="0">
+                <a:solidFill>
+                  <a:srgbClr val="9D174D"/>
+                </a:solidFill>
+                <a:latin typeface="Trebuchet MS" pitchFamily="34" charset="0"/>
+                <a:ea typeface="Trebuchet MS" pitchFamily="34" charset="-122"/>
+                <a:cs typeface="Trebuchet MS" pitchFamily="34" charset="-120"/>
+              </a:rPr>
+              <a:t>ness</a:t>
+            </a:r>
+            <a:endParaRPr lang="en-US" sz="1300" dirty="0"/>
+          </a:p>
+        </p:txBody>
+      </p:sp>
+      <p:sp>
+        <p:nvSpPr>
+          <p:cNvPr id="24" name="Text 22"/>
+          <p:cNvSpPr/>
+          <p:nvPr/>
+        </p:nvSpPr>
+        <p:spPr>
+          <a:xfrm>
+            <a:off x="6519672" y="2569464"/>
+            <a:ext cx="1828800" cy="201168"/>
+          </a:xfrm>
+          <a:prstGeom prst="rect">
+            <a:avLst/>
+          </a:prstGeom>
+          <a:noFill/>
+          <a:ln/>
+        </p:spPr>
+        <p:txBody>
+          <a:bodyPr wrap="square" lIns="0" tIns="0" rIns="0" bIns="0" rtlCol="0" anchor="t"/>
+          <a:lstStyle/>
+          <a:p>
+            <a:pPr algn="ctr" indent="0" marL="0">
+              <a:buNone/>
+            </a:pPr>
+            <a:r>
+              <a:rPr lang="en-US" sz="850" dirty="0">
+                <a:solidFill>
+                  <a:srgbClr val="475569"/>
+                </a:solidFill>
+                <a:latin typeface="Calibri" pitchFamily="34" charset="0"/>
+                <a:ea typeface="Calibri" pitchFamily="34" charset="-122"/>
+                <a:cs typeface="Calibri" pitchFamily="34" charset="-120"/>
+              </a:rPr>
+              <a:t>state of</a:t>
+            </a:r>
+            <a:endParaRPr lang="en-US" sz="850" dirty="0"/>
+          </a:p>
+        </p:txBody>
+      </p:sp>
+      <p:sp>
+        <p:nvSpPr>
+          <p:cNvPr id="25" name="Shape 23"/>
           <p:cNvSpPr/>
           <p:nvPr/>
         </p:nvSpPr>
@@ -8007,7 +8119,7 @@
       </p:sp>
       <p:sp>
         <p:nvSpPr>
-          <p:cNvPr id="23" name="Text 21"/>
+          <p:cNvPr id="26" name="Text 24"/>
           <p:cNvSpPr/>
           <p:nvPr/>
         </p:nvSpPr>
@@ -8046,7 +8158,7 @@
       </p:sp>
       <p:sp>
         <p:nvSpPr>
-          <p:cNvPr id="24" name="Shape 22"/>
+          <p:cNvPr id="27" name="Shape 25"/>
           <p:cNvSpPr/>
           <p:nvPr/>
         </p:nvSpPr>
@@ -8073,7 +8185,7 @@
       </p:sp>
       <p:sp>
         <p:nvSpPr>
-          <p:cNvPr id="25" name="Text 23"/>
+          <p:cNvPr id="28" name="Text 26"/>
           <p:cNvSpPr/>
           <p:nvPr/>
         </p:nvSpPr>
@@ -8112,7 +8224,7 @@
       </p:sp>
       <p:sp>
         <p:nvSpPr>
-          <p:cNvPr id="26" name="Shape 24"/>
+          <p:cNvPr id="29" name="Shape 27"/>
           <p:cNvSpPr/>
           <p:nvPr/>
         </p:nvSpPr>
@@ -8139,7 +8251,7 @@
       </p:sp>
       <p:sp>
         <p:nvSpPr>
-          <p:cNvPr id="27" name="Text 25"/>
+          <p:cNvPr id="30" name="Text 28"/>
           <p:cNvSpPr/>
           <p:nvPr/>
         </p:nvSpPr>
@@ -8178,7 +8290,7 @@
       </p:sp>
       <p:sp>
         <p:nvSpPr>
-          <p:cNvPr id="28" name="Shape 26"/>
+          <p:cNvPr id="31" name="Shape 29"/>
           <p:cNvSpPr/>
           <p:nvPr/>
         </p:nvSpPr>
@@ -8205,7 +8317,7 @@
       </p:sp>
       <p:sp>
         <p:nvSpPr>
-          <p:cNvPr id="29" name="Text 27"/>
+          <p:cNvPr id="32" name="Text 30"/>
           <p:cNvSpPr/>
           <p:nvPr/>
         </p:nvSpPr>
@@ -8528,7 +8640,7 @@
                 <a:ea typeface="Calibri" pitchFamily="34" charset="-122"/>
                 <a:cs typeface="Calibri" pitchFamily="34" charset="-120"/>
               </a:rPr>
-              <a:t>Word Labs  •  wordlabs.app  •  Root: 'play' = to engage in fun activity</a:t>
+              <a:t>Word Labs  •  wordlabs.app  •  Root: 'play' = to take part in a game; to have fun</a:t>
             </a:r>
             <a:endParaRPr lang="en-US" sz="800" dirty="0"/>
           </a:p>
@@ -8667,7 +8779,7 @@
                 <a:ea typeface="Trebuchet MS" pitchFamily="34" charset="-122"/>
                 <a:cs typeface="Trebuchet MS" pitchFamily="34" charset="-120"/>
               </a:rPr>
-              <a:t>playful</a:t>
+              <a:t>playfulness</a:t>
             </a:r>
             <a:endParaRPr lang="en-US" sz="2800" dirty="0"/>
           </a:p>
@@ -8747,7 +8859,7 @@
         </p:nvSpPr>
         <p:spPr>
           <a:xfrm>
-            <a:off x="2938272" y="2258568"/>
+            <a:off x="2221992" y="2258568"/>
             <a:ext cx="1828800" cy="292608"/>
           </a:xfrm>
           <a:prstGeom prst="rect">
@@ -8781,7 +8893,7 @@
         </p:nvSpPr>
         <p:spPr>
           <a:xfrm>
-            <a:off x="2938272" y="2258568"/>
+            <a:off x="2221992" y="2258568"/>
             <a:ext cx="1828800" cy="292608"/>
           </a:xfrm>
           <a:prstGeom prst="rect">
@@ -8820,7 +8932,7 @@
         </p:nvSpPr>
         <p:spPr>
           <a:xfrm>
-            <a:off x="2938272" y="2569464"/>
+            <a:off x="2221992" y="2569464"/>
             <a:ext cx="1828800" cy="201168"/>
           </a:xfrm>
           <a:prstGeom prst="rect">
@@ -8845,7 +8957,7 @@
                 <a:ea typeface="Calibri" pitchFamily="34" charset="-122"/>
                 <a:cs typeface="Calibri" pitchFamily="34" charset="-120"/>
               </a:rPr>
-              <a:t>to engage in fun activity</a:t>
+              <a:t>to take part in a game; to have fun</a:t>
             </a:r>
             <a:endParaRPr lang="en-US" sz="850" dirty="0"/>
           </a:p>
@@ -8859,7 +8971,7 @@
         </p:nvSpPr>
         <p:spPr>
           <a:xfrm>
-            <a:off x="5803392" y="2258568"/>
+            <a:off x="4370832" y="2258568"/>
             <a:ext cx="1828800" cy="292608"/>
           </a:xfrm>
           <a:prstGeom prst="rect">
@@ -8893,7 +9005,7 @@
         </p:nvSpPr>
         <p:spPr>
           <a:xfrm>
-            <a:off x="5803392" y="2258568"/>
+            <a:off x="4370832" y="2258568"/>
             <a:ext cx="1828800" cy="292608"/>
           </a:xfrm>
           <a:prstGeom prst="rect">
@@ -8932,7 +9044,7 @@
         </p:nvSpPr>
         <p:spPr>
           <a:xfrm>
-            <a:off x="5803392" y="2569464"/>
+            <a:off x="4370832" y="2569464"/>
             <a:ext cx="1828800" cy="201168"/>
           </a:xfrm>
           <a:prstGeom prst="rect">
@@ -8957,7 +9069,7 @@
                 <a:ea typeface="Calibri" pitchFamily="34" charset="-122"/>
                 <a:cs typeface="Calibri" pitchFamily="34" charset="-120"/>
               </a:rPr>
-              <a:t>full of, having the quality of</a:t>
+              <a:t>full of</a:t>
             </a:r>
             <a:endParaRPr lang="en-US" sz="850" dirty="0"/>
           </a:p>
@@ -8966,6 +9078,118 @@
       <p:sp>
         <p:nvSpPr>
           <p:cNvPr id="22" name="Shape 20"/>
+          <p:cNvSpPr/>
+          <p:nvPr/>
+        </p:nvSpPr>
+        <p:spPr>
+          <a:xfrm>
+            <a:off x="6519672" y="2258568"/>
+            <a:ext cx="1828800" cy="292608"/>
+          </a:xfrm>
+          <a:prstGeom prst="rect">
+            <a:avLst>
+              <a:gd name="adj" fmla="val 25000"/>
+            </a:avLst>
+          </a:prstGeom>
+          <a:solidFill>
+            <a:srgbClr val="FCE7F3"/>
+          </a:solidFill>
+          <a:ln w="19050">
+            <a:solidFill>
+              <a:srgbClr val="DB2777"/>
+            </a:solidFill>
+            <a:prstDash val="solid"/>
+          </a:ln>
+          <a:effectLst>
+            <a:outerShdw sx="100000" sy="100000" kx="0" ky="0" algn="bl" rotWithShape="0" blurRad="101600" dist="38100" dir="8100000">
+              <a:srgbClr val="000000">
+                <a:alpha val="12000"/>
+              </a:srgbClr>
+            </a:outerShdw>
+          </a:effectLst>
+        </p:spPr>
+      </p:sp>
+      <p:sp>
+        <p:nvSpPr>
+          <p:cNvPr id="23" name="Text 21"/>
+          <p:cNvSpPr/>
+          <p:nvPr/>
+        </p:nvSpPr>
+        <p:spPr>
+          <a:xfrm>
+            <a:off x="6519672" y="2258568"/>
+            <a:ext cx="1828800" cy="292608"/>
+          </a:xfrm>
+          <a:prstGeom prst="rect">
+            <a:avLst/>
+          </a:prstGeom>
+          <a:noFill/>
+          <a:ln/>
+        </p:spPr>
+        <p:txBody>
+          <a:bodyPr wrap="square" lIns="0" tIns="0" rIns="0" bIns="0" rtlCol="0" anchor="ctr"/>
+          <a:lstStyle/>
+          <a:p>
+            <a:pPr algn="ctr" indent="0" marL="0">
+              <a:buNone/>
+            </a:pPr>
+            <a:r>
+              <a:rPr lang="en-US" sz="1300" b="1" dirty="0">
+                <a:solidFill>
+                  <a:srgbClr val="9D174D"/>
+                </a:solidFill>
+                <a:latin typeface="Trebuchet MS" pitchFamily="34" charset="0"/>
+                <a:ea typeface="Trebuchet MS" pitchFamily="34" charset="-122"/>
+                <a:cs typeface="Trebuchet MS" pitchFamily="34" charset="-120"/>
+              </a:rPr>
+              <a:t>ness</a:t>
+            </a:r>
+            <a:endParaRPr lang="en-US" sz="1300" dirty="0"/>
+          </a:p>
+        </p:txBody>
+      </p:sp>
+      <p:sp>
+        <p:nvSpPr>
+          <p:cNvPr id="24" name="Text 22"/>
+          <p:cNvSpPr/>
+          <p:nvPr/>
+        </p:nvSpPr>
+        <p:spPr>
+          <a:xfrm>
+            <a:off x="6519672" y="2569464"/>
+            <a:ext cx="1828800" cy="201168"/>
+          </a:xfrm>
+          <a:prstGeom prst="rect">
+            <a:avLst/>
+          </a:prstGeom>
+          <a:noFill/>
+          <a:ln/>
+        </p:spPr>
+        <p:txBody>
+          <a:bodyPr wrap="square" lIns="0" tIns="0" rIns="0" bIns="0" rtlCol="0" anchor="t"/>
+          <a:lstStyle/>
+          <a:p>
+            <a:pPr algn="ctr" indent="0" marL="0">
+              <a:buNone/>
+            </a:pPr>
+            <a:r>
+              <a:rPr lang="en-US" sz="850" dirty="0">
+                <a:solidFill>
+                  <a:srgbClr val="475569"/>
+                </a:solidFill>
+                <a:latin typeface="Calibri" pitchFamily="34" charset="0"/>
+                <a:ea typeface="Calibri" pitchFamily="34" charset="-122"/>
+                <a:cs typeface="Calibri" pitchFamily="34" charset="-120"/>
+              </a:rPr>
+              <a:t>state of</a:t>
+            </a:r>
+            <a:endParaRPr lang="en-US" sz="850" dirty="0"/>
+          </a:p>
+        </p:txBody>
+      </p:sp>
+      <p:sp>
+        <p:nvSpPr>
+          <p:cNvPr id="25" name="Shape 23"/>
           <p:cNvSpPr/>
           <p:nvPr/>
         </p:nvSpPr>
@@ -8992,7 +9216,7 @@
       </p:sp>
       <p:sp>
         <p:nvSpPr>
-          <p:cNvPr id="23" name="Text 21"/>
+          <p:cNvPr id="26" name="Text 24"/>
           <p:cNvSpPr/>
           <p:nvPr/>
         </p:nvSpPr>
@@ -9031,7 +9255,7 @@
       </p:sp>
       <p:sp>
         <p:nvSpPr>
-          <p:cNvPr id="24" name="Shape 22"/>
+          <p:cNvPr id="27" name="Shape 25"/>
           <p:cNvSpPr/>
           <p:nvPr/>
         </p:nvSpPr>
@@ -9058,13 +9282,13 @@
       </p:sp>
       <p:sp>
         <p:nvSpPr>
-          <p:cNvPr id="25" name="Shape 23"/>
-          <p:cNvSpPr/>
-          <p:nvPr/>
-        </p:nvSpPr>
-        <p:spPr>
-          <a:xfrm>
-            <a:off x="2999232" y="3364992"/>
+          <p:cNvPr id="28" name="Shape 26"/>
+          <p:cNvSpPr/>
+          <p:nvPr/>
+        </p:nvSpPr>
+        <p:spPr>
+          <a:xfrm>
+            <a:off x="2313432" y="3364992"/>
             <a:ext cx="1645920" cy="475488"/>
           </a:xfrm>
           <a:prstGeom prst="rect">
@@ -9085,13 +9309,13 @@
       </p:sp>
       <p:sp>
         <p:nvSpPr>
-          <p:cNvPr id="26" name="Text 24"/>
-          <p:cNvSpPr/>
-          <p:nvPr/>
-        </p:nvSpPr>
-        <p:spPr>
-          <a:xfrm>
-            <a:off x="2999232" y="3364992"/>
+          <p:cNvPr id="29" name="Text 27"/>
+          <p:cNvSpPr/>
+          <p:nvPr/>
+        </p:nvSpPr>
+        <p:spPr>
+          <a:xfrm>
+            <a:off x="2313432" y="3364992"/>
             <a:ext cx="1645920" cy="475488"/>
           </a:xfrm>
           <a:prstGeom prst="rect">
@@ -9124,14 +9348,14 @@
       </p:sp>
       <p:sp>
         <p:nvSpPr>
-          <p:cNvPr id="27" name="Text 25"/>
-          <p:cNvSpPr/>
-          <p:nvPr/>
-        </p:nvSpPr>
-        <p:spPr>
-          <a:xfrm>
-            <a:off x="4645152" y="3364992"/>
-            <a:ext cx="1097280" cy="475488"/>
+          <p:cNvPr id="30" name="Text 28"/>
+          <p:cNvSpPr/>
+          <p:nvPr/>
+        </p:nvSpPr>
+        <p:spPr>
+          <a:xfrm>
+            <a:off x="3959352" y="3364992"/>
+            <a:ext cx="411480" cy="475488"/>
           </a:xfrm>
           <a:prstGeom prst="rect">
             <a:avLst/>
@@ -9163,13 +9387,13 @@
       </p:sp>
       <p:sp>
         <p:nvSpPr>
-          <p:cNvPr id="28" name="Shape 26"/>
-          <p:cNvSpPr/>
-          <p:nvPr/>
-        </p:nvSpPr>
-        <p:spPr>
-          <a:xfrm>
-            <a:off x="5742432" y="3364992"/>
+          <p:cNvPr id="31" name="Shape 29"/>
+          <p:cNvSpPr/>
+          <p:nvPr/>
+        </p:nvSpPr>
+        <p:spPr>
+          <a:xfrm>
+            <a:off x="4370832" y="3364992"/>
             <a:ext cx="1645920" cy="475488"/>
           </a:xfrm>
           <a:prstGeom prst="rect">
@@ -9190,13 +9414,13 @@
       </p:sp>
       <p:sp>
         <p:nvSpPr>
-          <p:cNvPr id="29" name="Text 27"/>
-          <p:cNvSpPr/>
-          <p:nvPr/>
-        </p:nvSpPr>
-        <p:spPr>
-          <a:xfrm>
-            <a:off x="5742432" y="3364992"/>
+          <p:cNvPr id="32" name="Text 30"/>
+          <p:cNvSpPr/>
+          <p:nvPr/>
+        </p:nvSpPr>
+        <p:spPr>
+          <a:xfrm>
+            <a:off x="4370832" y="3364992"/>
             <a:ext cx="1645920" cy="475488"/>
           </a:xfrm>
           <a:prstGeom prst="rect">
@@ -9229,7 +9453,112 @@
       </p:sp>
       <p:sp>
         <p:nvSpPr>
-          <p:cNvPr id="30" name="Shape 28"/>
+          <p:cNvPr id="33" name="Text 31"/>
+          <p:cNvSpPr/>
+          <p:nvPr/>
+        </p:nvSpPr>
+        <p:spPr>
+          <a:xfrm>
+            <a:off x="6016752" y="3364992"/>
+            <a:ext cx="411480" cy="475488"/>
+          </a:xfrm>
+          <a:prstGeom prst="rect">
+            <a:avLst/>
+          </a:prstGeom>
+          <a:noFill/>
+          <a:ln/>
+        </p:spPr>
+        <p:txBody>
+          <a:bodyPr wrap="square" lIns="0" tIns="0" rIns="0" bIns="0" rtlCol="0" anchor="ctr"/>
+          <a:lstStyle/>
+          <a:p>
+            <a:pPr algn="ctr" indent="0" marL="0">
+              <a:buNone/>
+            </a:pPr>
+            <a:r>
+              <a:rPr lang="en-US" sz="1600" b="1" dirty="0">
+                <a:solidFill>
+                  <a:srgbClr val="0D9488"/>
+                </a:solidFill>
+                <a:latin typeface="Trebuchet MS" pitchFamily="34" charset="0"/>
+                <a:ea typeface="Trebuchet MS" pitchFamily="34" charset="-122"/>
+                <a:cs typeface="Trebuchet MS" pitchFamily="34" charset="-120"/>
+              </a:rPr>
+              <a:t>·</a:t>
+            </a:r>
+            <a:endParaRPr lang="en-US" sz="1600" dirty="0"/>
+          </a:p>
+        </p:txBody>
+      </p:sp>
+      <p:sp>
+        <p:nvSpPr>
+          <p:cNvPr id="34" name="Shape 32"/>
+          <p:cNvSpPr/>
+          <p:nvPr/>
+        </p:nvSpPr>
+        <p:spPr>
+          <a:xfrm>
+            <a:off x="6428232" y="3364992"/>
+            <a:ext cx="1645920" cy="475488"/>
+          </a:xfrm>
+          <a:prstGeom prst="rect">
+            <a:avLst>
+              <a:gd name="adj" fmla="val 9615"/>
+            </a:avLst>
+          </a:prstGeom>
+          <a:solidFill>
+            <a:srgbClr val="FFFFFF"/>
+          </a:solidFill>
+          <a:ln w="12700">
+            <a:solidFill>
+              <a:srgbClr val="0D9488"/>
+            </a:solidFill>
+            <a:prstDash val="solid"/>
+          </a:ln>
+        </p:spPr>
+      </p:sp>
+      <p:sp>
+        <p:nvSpPr>
+          <p:cNvPr id="35" name="Text 33"/>
+          <p:cNvSpPr/>
+          <p:nvPr/>
+        </p:nvSpPr>
+        <p:spPr>
+          <a:xfrm>
+            <a:off x="6428232" y="3364992"/>
+            <a:ext cx="1645920" cy="475488"/>
+          </a:xfrm>
+          <a:prstGeom prst="rect">
+            <a:avLst/>
+          </a:prstGeom>
+          <a:noFill/>
+          <a:ln/>
+        </p:spPr>
+        <p:txBody>
+          <a:bodyPr wrap="square" lIns="0" tIns="0" rIns="0" bIns="0" rtlCol="0" anchor="ctr"/>
+          <a:lstStyle/>
+          <a:p>
+            <a:pPr algn="ctr" indent="0" marL="0">
+              <a:buNone/>
+            </a:pPr>
+            <a:r>
+              <a:rPr lang="en-US" sz="1400" b="1" dirty="0">
+                <a:solidFill>
+                  <a:srgbClr val="0D9488"/>
+                </a:solidFill>
+                <a:latin typeface="Trebuchet MS" pitchFamily="34" charset="0"/>
+                <a:ea typeface="Trebuchet MS" pitchFamily="34" charset="-122"/>
+                <a:cs typeface="Trebuchet MS" pitchFamily="34" charset="-120"/>
+              </a:rPr>
+              <a:t>ness</a:t>
+            </a:r>
+            <a:endParaRPr lang="en-US" sz="1400" dirty="0"/>
+          </a:p>
+        </p:txBody>
+      </p:sp>
+      <p:sp>
+        <p:nvSpPr>
+          <p:cNvPr id="36" name="Shape 34"/>
           <p:cNvSpPr/>
           <p:nvPr/>
         </p:nvSpPr>
@@ -9256,7 +9585,7 @@
       </p:sp>
       <p:sp>
         <p:nvSpPr>
-          <p:cNvPr id="31" name="Text 29"/>
+          <p:cNvPr id="37" name="Text 35"/>
           <p:cNvSpPr/>
           <p:nvPr/>
         </p:nvSpPr>
@@ -9295,7 +9624,7 @@
       </p:sp>
       <p:sp>
         <p:nvSpPr>
-          <p:cNvPr id="32" name="Shape 30"/>
+          <p:cNvPr id="38" name="Shape 36"/>
           <p:cNvSpPr/>
           <p:nvPr/>
         </p:nvSpPr>
@@ -9322,7 +9651,7 @@
       </p:sp>
       <p:sp>
         <p:nvSpPr>
-          <p:cNvPr id="33" name="Text 31"/>
+          <p:cNvPr id="39" name="Text 37"/>
           <p:cNvSpPr/>
           <p:nvPr/>
         </p:nvSpPr>
@@ -9645,7 +9974,7 @@
                 <a:ea typeface="Calibri" pitchFamily="34" charset="-122"/>
                 <a:cs typeface="Calibri" pitchFamily="34" charset="-120"/>
               </a:rPr>
-              <a:t>Word Labs  •  wordlabs.app  •  Root: 'play' = to engage in fun activity</a:t>
+              <a:t>Word Labs  •  wordlabs.app  •  Root: 'play' = to take part in a game; to have fun</a:t>
             </a:r>
             <a:endParaRPr lang="en-US" sz="800" dirty="0"/>
           </a:p>
@@ -9784,7 +10113,7 @@
                 <a:ea typeface="Trebuchet MS" pitchFamily="34" charset="-122"/>
                 <a:cs typeface="Trebuchet MS" pitchFamily="34" charset="-120"/>
               </a:rPr>
-              <a:t>playful</a:t>
+              <a:t>playfulness</a:t>
             </a:r>
             <a:endParaRPr lang="en-US" sz="2800" dirty="0"/>
           </a:p>
@@ -9864,7 +10193,7 @@
         </p:nvSpPr>
         <p:spPr>
           <a:xfrm>
-            <a:off x="2938272" y="2258568"/>
+            <a:off x="2221992" y="2258568"/>
             <a:ext cx="1828800" cy="292608"/>
           </a:xfrm>
           <a:prstGeom prst="rect">
@@ -9898,7 +10227,7 @@
         </p:nvSpPr>
         <p:spPr>
           <a:xfrm>
-            <a:off x="2938272" y="2258568"/>
+            <a:off x="2221992" y="2258568"/>
             <a:ext cx="1828800" cy="292608"/>
           </a:xfrm>
           <a:prstGeom prst="rect">
@@ -9937,7 +10266,7 @@
         </p:nvSpPr>
         <p:spPr>
           <a:xfrm>
-            <a:off x="2938272" y="2569464"/>
+            <a:off x="2221992" y="2569464"/>
             <a:ext cx="1828800" cy="201168"/>
           </a:xfrm>
           <a:prstGeom prst="rect">
@@ -9962,7 +10291,7 @@
                 <a:ea typeface="Calibri" pitchFamily="34" charset="-122"/>
                 <a:cs typeface="Calibri" pitchFamily="34" charset="-120"/>
               </a:rPr>
-              <a:t>to engage in fun activity</a:t>
+              <a:t>to take part in a game; to have fun</a:t>
             </a:r>
             <a:endParaRPr lang="en-US" sz="850" dirty="0"/>
           </a:p>
@@ -9976,7 +10305,7 @@
         </p:nvSpPr>
         <p:spPr>
           <a:xfrm>
-            <a:off x="5803392" y="2258568"/>
+            <a:off x="4370832" y="2258568"/>
             <a:ext cx="1828800" cy="292608"/>
           </a:xfrm>
           <a:prstGeom prst="rect">
@@ -10010,7 +10339,7 @@
         </p:nvSpPr>
         <p:spPr>
           <a:xfrm>
-            <a:off x="5803392" y="2258568"/>
+            <a:off x="4370832" y="2258568"/>
             <a:ext cx="1828800" cy="292608"/>
           </a:xfrm>
           <a:prstGeom prst="rect">
@@ -10049,7 +10378,7 @@
         </p:nvSpPr>
         <p:spPr>
           <a:xfrm>
-            <a:off x="5803392" y="2569464"/>
+            <a:off x="4370832" y="2569464"/>
             <a:ext cx="1828800" cy="201168"/>
           </a:xfrm>
           <a:prstGeom prst="rect">
@@ -10074,7 +10403,7 @@
                 <a:ea typeface="Calibri" pitchFamily="34" charset="-122"/>
                 <a:cs typeface="Calibri" pitchFamily="34" charset="-120"/>
               </a:rPr>
-              <a:t>full of, having the quality of</a:t>
+              <a:t>full of</a:t>
             </a:r>
             <a:endParaRPr lang="en-US" sz="850" dirty="0"/>
           </a:p>
@@ -10083,6 +10412,118 @@
       <p:sp>
         <p:nvSpPr>
           <p:cNvPr id="22" name="Shape 20"/>
+          <p:cNvSpPr/>
+          <p:nvPr/>
+        </p:nvSpPr>
+        <p:spPr>
+          <a:xfrm>
+            <a:off x="6519672" y="2258568"/>
+            <a:ext cx="1828800" cy="292608"/>
+          </a:xfrm>
+          <a:prstGeom prst="rect">
+            <a:avLst>
+              <a:gd name="adj" fmla="val 25000"/>
+            </a:avLst>
+          </a:prstGeom>
+          <a:solidFill>
+            <a:srgbClr val="FCE7F3"/>
+          </a:solidFill>
+          <a:ln w="19050">
+            <a:solidFill>
+              <a:srgbClr val="DB2777"/>
+            </a:solidFill>
+            <a:prstDash val="solid"/>
+          </a:ln>
+          <a:effectLst>
+            <a:outerShdw sx="100000" sy="100000" kx="0" ky="0" algn="bl" rotWithShape="0" blurRad="101600" dist="38100" dir="8100000">
+              <a:srgbClr val="000000">
+                <a:alpha val="12000"/>
+              </a:srgbClr>
+            </a:outerShdw>
+          </a:effectLst>
+        </p:spPr>
+      </p:sp>
+      <p:sp>
+        <p:nvSpPr>
+          <p:cNvPr id="23" name="Text 21"/>
+          <p:cNvSpPr/>
+          <p:nvPr/>
+        </p:nvSpPr>
+        <p:spPr>
+          <a:xfrm>
+            <a:off x="6519672" y="2258568"/>
+            <a:ext cx="1828800" cy="292608"/>
+          </a:xfrm>
+          <a:prstGeom prst="rect">
+            <a:avLst/>
+          </a:prstGeom>
+          <a:noFill/>
+          <a:ln/>
+        </p:spPr>
+        <p:txBody>
+          <a:bodyPr wrap="square" lIns="0" tIns="0" rIns="0" bIns="0" rtlCol="0" anchor="ctr"/>
+          <a:lstStyle/>
+          <a:p>
+            <a:pPr algn="ctr" indent="0" marL="0">
+              <a:buNone/>
+            </a:pPr>
+            <a:r>
+              <a:rPr lang="en-US" sz="1300" b="1" dirty="0">
+                <a:solidFill>
+                  <a:srgbClr val="9D174D"/>
+                </a:solidFill>
+                <a:latin typeface="Trebuchet MS" pitchFamily="34" charset="0"/>
+                <a:ea typeface="Trebuchet MS" pitchFamily="34" charset="-122"/>
+                <a:cs typeface="Trebuchet MS" pitchFamily="34" charset="-120"/>
+              </a:rPr>
+              <a:t>ness</a:t>
+            </a:r>
+            <a:endParaRPr lang="en-US" sz="1300" dirty="0"/>
+          </a:p>
+        </p:txBody>
+      </p:sp>
+      <p:sp>
+        <p:nvSpPr>
+          <p:cNvPr id="24" name="Text 22"/>
+          <p:cNvSpPr/>
+          <p:nvPr/>
+        </p:nvSpPr>
+        <p:spPr>
+          <a:xfrm>
+            <a:off x="6519672" y="2569464"/>
+            <a:ext cx="1828800" cy="201168"/>
+          </a:xfrm>
+          <a:prstGeom prst="rect">
+            <a:avLst/>
+          </a:prstGeom>
+          <a:noFill/>
+          <a:ln/>
+        </p:spPr>
+        <p:txBody>
+          <a:bodyPr wrap="square" lIns="0" tIns="0" rIns="0" bIns="0" rtlCol="0" anchor="t"/>
+          <a:lstStyle/>
+          <a:p>
+            <a:pPr algn="ctr" indent="0" marL="0">
+              <a:buNone/>
+            </a:pPr>
+            <a:r>
+              <a:rPr lang="en-US" sz="850" dirty="0">
+                <a:solidFill>
+                  <a:srgbClr val="475569"/>
+                </a:solidFill>
+                <a:latin typeface="Calibri" pitchFamily="34" charset="0"/>
+                <a:ea typeface="Calibri" pitchFamily="34" charset="-122"/>
+                <a:cs typeface="Calibri" pitchFamily="34" charset="-120"/>
+              </a:rPr>
+              <a:t>state of</a:t>
+            </a:r>
+            <a:endParaRPr lang="en-US" sz="850" dirty="0"/>
+          </a:p>
+        </p:txBody>
+      </p:sp>
+      <p:sp>
+        <p:nvSpPr>
+          <p:cNvPr id="25" name="Shape 23"/>
           <p:cNvSpPr/>
           <p:nvPr/>
         </p:nvSpPr>
@@ -10109,7 +10550,7 @@
       </p:sp>
       <p:sp>
         <p:nvSpPr>
-          <p:cNvPr id="23" name="Text 21"/>
+          <p:cNvPr id="26" name="Text 24"/>
           <p:cNvSpPr/>
           <p:nvPr/>
         </p:nvSpPr>
@@ -10148,7 +10589,7 @@
       </p:sp>
       <p:sp>
         <p:nvSpPr>
-          <p:cNvPr id="24" name="Shape 22"/>
+          <p:cNvPr id="27" name="Shape 25"/>
           <p:cNvSpPr/>
           <p:nvPr/>
         </p:nvSpPr>
@@ -10175,13 +10616,13 @@
       </p:sp>
       <p:sp>
         <p:nvSpPr>
-          <p:cNvPr id="25" name="Shape 23"/>
-          <p:cNvSpPr/>
-          <p:nvPr/>
-        </p:nvSpPr>
-        <p:spPr>
-          <a:xfrm>
-            <a:off x="2999232" y="3364992"/>
+          <p:cNvPr id="28" name="Shape 26"/>
+          <p:cNvSpPr/>
+          <p:nvPr/>
+        </p:nvSpPr>
+        <p:spPr>
+          <a:xfrm>
+            <a:off x="2313432" y="3364992"/>
             <a:ext cx="1645920" cy="475488"/>
           </a:xfrm>
           <a:prstGeom prst="rect">
@@ -10202,13 +10643,13 @@
       </p:sp>
       <p:sp>
         <p:nvSpPr>
-          <p:cNvPr id="26" name="Text 24"/>
-          <p:cNvSpPr/>
-          <p:nvPr/>
-        </p:nvSpPr>
-        <p:spPr>
-          <a:xfrm>
-            <a:off x="2999232" y="3364992"/>
+          <p:cNvPr id="29" name="Text 27"/>
+          <p:cNvSpPr/>
+          <p:nvPr/>
+        </p:nvSpPr>
+        <p:spPr>
+          <a:xfrm>
+            <a:off x="2313432" y="3364992"/>
             <a:ext cx="1645920" cy="475488"/>
           </a:xfrm>
           <a:prstGeom prst="rect">
@@ -10241,14 +10682,14 @@
       </p:sp>
       <p:sp>
         <p:nvSpPr>
-          <p:cNvPr id="27" name="Text 25"/>
-          <p:cNvSpPr/>
-          <p:nvPr/>
-        </p:nvSpPr>
-        <p:spPr>
-          <a:xfrm>
-            <a:off x="4645152" y="3364992"/>
-            <a:ext cx="1097280" cy="475488"/>
+          <p:cNvPr id="30" name="Text 28"/>
+          <p:cNvSpPr/>
+          <p:nvPr/>
+        </p:nvSpPr>
+        <p:spPr>
+          <a:xfrm>
+            <a:off x="3959352" y="3364992"/>
+            <a:ext cx="411480" cy="475488"/>
           </a:xfrm>
           <a:prstGeom prst="rect">
             <a:avLst/>
@@ -10280,13 +10721,13 @@
       </p:sp>
       <p:sp>
         <p:nvSpPr>
-          <p:cNvPr id="28" name="Shape 26"/>
-          <p:cNvSpPr/>
-          <p:nvPr/>
-        </p:nvSpPr>
-        <p:spPr>
-          <a:xfrm>
-            <a:off x="5742432" y="3364992"/>
+          <p:cNvPr id="31" name="Shape 29"/>
+          <p:cNvSpPr/>
+          <p:nvPr/>
+        </p:nvSpPr>
+        <p:spPr>
+          <a:xfrm>
+            <a:off x="4370832" y="3364992"/>
             <a:ext cx="1645920" cy="475488"/>
           </a:xfrm>
           <a:prstGeom prst="rect">
@@ -10307,13 +10748,13 @@
       </p:sp>
       <p:sp>
         <p:nvSpPr>
-          <p:cNvPr id="29" name="Text 27"/>
-          <p:cNvSpPr/>
-          <p:nvPr/>
-        </p:nvSpPr>
-        <p:spPr>
-          <a:xfrm>
-            <a:off x="5742432" y="3364992"/>
+          <p:cNvPr id="32" name="Text 30"/>
+          <p:cNvSpPr/>
+          <p:nvPr/>
+        </p:nvSpPr>
+        <p:spPr>
+          <a:xfrm>
+            <a:off x="4370832" y="3364992"/>
             <a:ext cx="1645920" cy="475488"/>
           </a:xfrm>
           <a:prstGeom prst="rect">
@@ -10346,7 +10787,112 @@
       </p:sp>
       <p:sp>
         <p:nvSpPr>
-          <p:cNvPr id="30" name="Shape 28"/>
+          <p:cNvPr id="33" name="Text 31"/>
+          <p:cNvSpPr/>
+          <p:nvPr/>
+        </p:nvSpPr>
+        <p:spPr>
+          <a:xfrm>
+            <a:off x="6016752" y="3364992"/>
+            <a:ext cx="411480" cy="475488"/>
+          </a:xfrm>
+          <a:prstGeom prst="rect">
+            <a:avLst/>
+          </a:prstGeom>
+          <a:noFill/>
+          <a:ln/>
+        </p:spPr>
+        <p:txBody>
+          <a:bodyPr wrap="square" lIns="0" tIns="0" rIns="0" bIns="0" rtlCol="0" anchor="ctr"/>
+          <a:lstStyle/>
+          <a:p>
+            <a:pPr algn="ctr" indent="0" marL="0">
+              <a:buNone/>
+            </a:pPr>
+            <a:r>
+              <a:rPr lang="en-US" sz="1600" b="1" dirty="0">
+                <a:solidFill>
+                  <a:srgbClr val="0D9488"/>
+                </a:solidFill>
+                <a:latin typeface="Trebuchet MS" pitchFamily="34" charset="0"/>
+                <a:ea typeface="Trebuchet MS" pitchFamily="34" charset="-122"/>
+                <a:cs typeface="Trebuchet MS" pitchFamily="34" charset="-120"/>
+              </a:rPr>
+              <a:t>·</a:t>
+            </a:r>
+            <a:endParaRPr lang="en-US" sz="1600" dirty="0"/>
+          </a:p>
+        </p:txBody>
+      </p:sp>
+      <p:sp>
+        <p:nvSpPr>
+          <p:cNvPr id="34" name="Shape 32"/>
+          <p:cNvSpPr/>
+          <p:nvPr/>
+        </p:nvSpPr>
+        <p:spPr>
+          <a:xfrm>
+            <a:off x="6428232" y="3364992"/>
+            <a:ext cx="1645920" cy="475488"/>
+          </a:xfrm>
+          <a:prstGeom prst="rect">
+            <a:avLst>
+              <a:gd name="adj" fmla="val 9615"/>
+            </a:avLst>
+          </a:prstGeom>
+          <a:solidFill>
+            <a:srgbClr val="FFFFFF"/>
+          </a:solidFill>
+          <a:ln w="12700">
+            <a:solidFill>
+              <a:srgbClr val="0D9488"/>
+            </a:solidFill>
+            <a:prstDash val="solid"/>
+          </a:ln>
+        </p:spPr>
+      </p:sp>
+      <p:sp>
+        <p:nvSpPr>
+          <p:cNvPr id="35" name="Text 33"/>
+          <p:cNvSpPr/>
+          <p:nvPr/>
+        </p:nvSpPr>
+        <p:spPr>
+          <a:xfrm>
+            <a:off x="6428232" y="3364992"/>
+            <a:ext cx="1645920" cy="475488"/>
+          </a:xfrm>
+          <a:prstGeom prst="rect">
+            <a:avLst/>
+          </a:prstGeom>
+          <a:noFill/>
+          <a:ln/>
+        </p:spPr>
+        <p:txBody>
+          <a:bodyPr wrap="square" lIns="0" tIns="0" rIns="0" bIns="0" rtlCol="0" anchor="ctr"/>
+          <a:lstStyle/>
+          <a:p>
+            <a:pPr algn="ctr" indent="0" marL="0">
+              <a:buNone/>
+            </a:pPr>
+            <a:r>
+              <a:rPr lang="en-US" sz="1400" b="1" dirty="0">
+                <a:solidFill>
+                  <a:srgbClr val="0D9488"/>
+                </a:solidFill>
+                <a:latin typeface="Trebuchet MS" pitchFamily="34" charset="0"/>
+                <a:ea typeface="Trebuchet MS" pitchFamily="34" charset="-122"/>
+                <a:cs typeface="Trebuchet MS" pitchFamily="34" charset="-120"/>
+              </a:rPr>
+              <a:t>ness</a:t>
+            </a:r>
+            <a:endParaRPr lang="en-US" sz="1400" dirty="0"/>
+          </a:p>
+        </p:txBody>
+      </p:sp>
+      <p:sp>
+        <p:nvSpPr>
+          <p:cNvPr id="36" name="Shape 34"/>
           <p:cNvSpPr/>
           <p:nvPr/>
         </p:nvSpPr>
@@ -10373,7 +10919,7 @@
       </p:sp>
       <p:sp>
         <p:nvSpPr>
-          <p:cNvPr id="31" name="Text 29"/>
+          <p:cNvPr id="37" name="Text 35"/>
           <p:cNvSpPr/>
           <p:nvPr/>
         </p:nvSpPr>
@@ -10412,7 +10958,7 @@
       </p:sp>
       <p:sp>
         <p:nvSpPr>
-          <p:cNvPr id="32" name="Shape 30"/>
+          <p:cNvPr id="38" name="Shape 36"/>
           <p:cNvSpPr/>
           <p:nvPr/>
         </p:nvSpPr>
@@ -10439,14 +10985,14 @@
       </p:sp>
       <p:sp>
         <p:nvSpPr>
-          <p:cNvPr id="33" name="Shape 31"/>
-          <p:cNvSpPr/>
-          <p:nvPr/>
-        </p:nvSpPr>
-        <p:spPr>
-          <a:xfrm>
-            <a:off x="2427732" y="4169664"/>
-            <a:ext cx="685800" cy="475488"/>
+          <p:cNvPr id="39" name="Shape 37"/>
+          <p:cNvSpPr/>
+          <p:nvPr/>
+        </p:nvSpPr>
+        <p:spPr>
+          <a:xfrm>
+            <a:off x="1951330" y="4169664"/>
+            <a:ext cx="676656" cy="475488"/>
           </a:xfrm>
           <a:prstGeom prst="rect">
             <a:avLst>
@@ -10466,14 +11012,14 @@
       </p:sp>
       <p:sp>
         <p:nvSpPr>
-          <p:cNvPr id="34" name="Text 32"/>
-          <p:cNvSpPr/>
-          <p:nvPr/>
-        </p:nvSpPr>
-        <p:spPr>
-          <a:xfrm>
-            <a:off x="2427732" y="4169664"/>
-            <a:ext cx="685800" cy="475488"/>
+          <p:cNvPr id="40" name="Text 38"/>
+          <p:cNvSpPr/>
+          <p:nvPr/>
+        </p:nvSpPr>
+        <p:spPr>
+          <a:xfrm>
+            <a:off x="1951330" y="4169664"/>
+            <a:ext cx="676656" cy="475488"/>
           </a:xfrm>
           <a:prstGeom prst="rect">
             <a:avLst/>
@@ -10497,7 +11043,7 @@
                 <a:ea typeface="Trebuchet MS" pitchFamily="34" charset="-122"/>
                 <a:cs typeface="Trebuchet MS" pitchFamily="34" charset="-120"/>
               </a:rPr>
-              <a:t>pl</a:t>
+              <a:t>p</a:t>
             </a:r>
             <a:endParaRPr lang="en-US" sz="900" dirty="0"/>
           </a:p>
@@ -10505,14 +11051,14 @@
       </p:sp>
       <p:sp>
         <p:nvSpPr>
-          <p:cNvPr id="35" name="Shape 33"/>
-          <p:cNvSpPr/>
-          <p:nvPr/>
-        </p:nvSpPr>
-        <p:spPr>
-          <a:xfrm>
-            <a:off x="3639312" y="4169664"/>
-            <a:ext cx="685800" cy="475488"/>
+          <p:cNvPr id="41" name="Shape 39"/>
+          <p:cNvSpPr/>
+          <p:nvPr/>
+        </p:nvSpPr>
+        <p:spPr>
+          <a:xfrm>
+            <a:off x="2677363" y="4169664"/>
+            <a:ext cx="676656" cy="475488"/>
           </a:xfrm>
           <a:prstGeom prst="rect">
             <a:avLst>
@@ -10532,14 +11078,14 @@
       </p:sp>
       <p:sp>
         <p:nvSpPr>
-          <p:cNvPr id="36" name="Text 34"/>
-          <p:cNvSpPr/>
-          <p:nvPr/>
-        </p:nvSpPr>
-        <p:spPr>
-          <a:xfrm>
-            <a:off x="3639312" y="4169664"/>
-            <a:ext cx="685800" cy="475488"/>
+          <p:cNvPr id="42" name="Text 40"/>
+          <p:cNvSpPr/>
+          <p:nvPr/>
+        </p:nvSpPr>
+        <p:spPr>
+          <a:xfrm>
+            <a:off x="2677363" y="4169664"/>
+            <a:ext cx="676656" cy="475488"/>
           </a:xfrm>
           <a:prstGeom prst="rect">
             <a:avLst/>
@@ -10563,7 +11109,7 @@
                 <a:ea typeface="Trebuchet MS" pitchFamily="34" charset="-122"/>
                 <a:cs typeface="Trebuchet MS" pitchFamily="34" charset="-120"/>
               </a:rPr>
-              <a:t>ay</a:t>
+              <a:t>l</a:t>
             </a:r>
             <a:endParaRPr lang="en-US" sz="900" dirty="0"/>
           </a:p>
@@ -10571,14 +11117,14 @@
       </p:sp>
       <p:sp>
         <p:nvSpPr>
-          <p:cNvPr id="37" name="Shape 35"/>
-          <p:cNvSpPr/>
-          <p:nvPr/>
-        </p:nvSpPr>
-        <p:spPr>
-          <a:xfrm>
-            <a:off x="4850892" y="4169664"/>
-            <a:ext cx="685800" cy="475488"/>
+          <p:cNvPr id="43" name="Shape 41"/>
+          <p:cNvSpPr/>
+          <p:nvPr/>
+        </p:nvSpPr>
+        <p:spPr>
+          <a:xfrm>
+            <a:off x="3403397" y="4169664"/>
+            <a:ext cx="676656" cy="475488"/>
           </a:xfrm>
           <a:prstGeom prst="rect">
             <a:avLst>
@@ -10598,14 +11144,14 @@
       </p:sp>
       <p:sp>
         <p:nvSpPr>
-          <p:cNvPr id="38" name="Text 36"/>
-          <p:cNvSpPr/>
-          <p:nvPr/>
-        </p:nvSpPr>
-        <p:spPr>
-          <a:xfrm>
-            <a:off x="4850892" y="4169664"/>
-            <a:ext cx="685800" cy="475488"/>
+          <p:cNvPr id="44" name="Text 42"/>
+          <p:cNvSpPr/>
+          <p:nvPr/>
+        </p:nvSpPr>
+        <p:spPr>
+          <a:xfrm>
+            <a:off x="3403397" y="4169664"/>
+            <a:ext cx="676656" cy="475488"/>
           </a:xfrm>
           <a:prstGeom prst="rect">
             <a:avLst/>
@@ -10629,7 +11175,7 @@
                 <a:ea typeface="Trebuchet MS" pitchFamily="34" charset="-122"/>
                 <a:cs typeface="Trebuchet MS" pitchFamily="34" charset="-120"/>
               </a:rPr>
-              <a:t>f</a:t>
+              <a:t>ay</a:t>
             </a:r>
             <a:endParaRPr lang="en-US" sz="900" dirty="0"/>
           </a:p>
@@ -10637,14 +11183,14 @@
       </p:sp>
       <p:sp>
         <p:nvSpPr>
-          <p:cNvPr id="39" name="Shape 37"/>
-          <p:cNvSpPr/>
-          <p:nvPr/>
-        </p:nvSpPr>
-        <p:spPr>
-          <a:xfrm>
-            <a:off x="6062472" y="4169664"/>
-            <a:ext cx="685800" cy="475488"/>
+          <p:cNvPr id="45" name="Shape 43"/>
+          <p:cNvSpPr/>
+          <p:nvPr/>
+        </p:nvSpPr>
+        <p:spPr>
+          <a:xfrm>
+            <a:off x="4129430" y="4169664"/>
+            <a:ext cx="676656" cy="475488"/>
           </a:xfrm>
           <a:prstGeom prst="rect">
             <a:avLst>
@@ -10664,14 +11210,14 @@
       </p:sp>
       <p:sp>
         <p:nvSpPr>
-          <p:cNvPr id="40" name="Text 38"/>
-          <p:cNvSpPr/>
-          <p:nvPr/>
-        </p:nvSpPr>
-        <p:spPr>
-          <a:xfrm>
-            <a:off x="6062472" y="4169664"/>
-            <a:ext cx="685800" cy="475488"/>
+          <p:cNvPr id="46" name="Text 44"/>
+          <p:cNvSpPr/>
+          <p:nvPr/>
+        </p:nvSpPr>
+        <p:spPr>
+          <a:xfrm>
+            <a:off x="4129430" y="4169664"/>
+            <a:ext cx="676656" cy="475488"/>
           </a:xfrm>
           <a:prstGeom prst="rect">
             <a:avLst/>
@@ -10695,7 +11241,7 @@
                 <a:ea typeface="Trebuchet MS" pitchFamily="34" charset="-122"/>
                 <a:cs typeface="Trebuchet MS" pitchFamily="34" charset="-120"/>
               </a:rPr>
-              <a:t>u</a:t>
+              <a:t>f</a:t>
             </a:r>
             <a:endParaRPr lang="en-US" sz="900" dirty="0"/>
           </a:p>
@@ -10703,14 +11249,14 @@
       </p:sp>
       <p:sp>
         <p:nvSpPr>
-          <p:cNvPr id="41" name="Shape 39"/>
-          <p:cNvSpPr/>
-          <p:nvPr/>
-        </p:nvSpPr>
-        <p:spPr>
-          <a:xfrm>
-            <a:off x="7274052" y="4169664"/>
-            <a:ext cx="685800" cy="475488"/>
+          <p:cNvPr id="47" name="Shape 45"/>
+          <p:cNvSpPr/>
+          <p:nvPr/>
+        </p:nvSpPr>
+        <p:spPr>
+          <a:xfrm>
+            <a:off x="4855464" y="4169664"/>
+            <a:ext cx="676656" cy="475488"/>
           </a:xfrm>
           <a:prstGeom prst="rect">
             <a:avLst>
@@ -10730,14 +11276,14 @@
       </p:sp>
       <p:sp>
         <p:nvSpPr>
-          <p:cNvPr id="42" name="Text 40"/>
-          <p:cNvSpPr/>
-          <p:nvPr/>
-        </p:nvSpPr>
-        <p:spPr>
-          <a:xfrm>
-            <a:off x="7274052" y="4169664"/>
-            <a:ext cx="685800" cy="475488"/>
+          <p:cNvPr id="48" name="Text 46"/>
+          <p:cNvSpPr/>
+          <p:nvPr/>
+        </p:nvSpPr>
+        <p:spPr>
+          <a:xfrm>
+            <a:off x="4855464" y="4169664"/>
+            <a:ext cx="676656" cy="475488"/>
           </a:xfrm>
           <a:prstGeom prst="rect">
             <a:avLst/>
@@ -10761,7 +11307,271 @@
                 <a:ea typeface="Trebuchet MS" pitchFamily="34" charset="-122"/>
                 <a:cs typeface="Trebuchet MS" pitchFamily="34" charset="-120"/>
               </a:rPr>
+              <a:t>u</a:t>
+            </a:r>
+            <a:endParaRPr lang="en-US" sz="900" dirty="0"/>
+          </a:p>
+        </p:txBody>
+      </p:sp>
+      <p:sp>
+        <p:nvSpPr>
+          <p:cNvPr id="49" name="Shape 47"/>
+          <p:cNvSpPr/>
+          <p:nvPr/>
+        </p:nvSpPr>
+        <p:spPr>
+          <a:xfrm>
+            <a:off x="5581498" y="4169664"/>
+            <a:ext cx="676656" cy="475488"/>
+          </a:xfrm>
+          <a:prstGeom prst="rect">
+            <a:avLst>
+              <a:gd name="adj" fmla="val 7692"/>
+            </a:avLst>
+          </a:prstGeom>
+          <a:solidFill>
+            <a:srgbClr val="FFFFFF"/>
+          </a:solidFill>
+          <a:ln w="12700">
+            <a:solidFill>
+              <a:srgbClr val="DB2777"/>
+            </a:solidFill>
+            <a:prstDash val="solid"/>
+          </a:ln>
+        </p:spPr>
+      </p:sp>
+      <p:sp>
+        <p:nvSpPr>
+          <p:cNvPr id="50" name="Text 48"/>
+          <p:cNvSpPr/>
+          <p:nvPr/>
+        </p:nvSpPr>
+        <p:spPr>
+          <a:xfrm>
+            <a:off x="5581498" y="4169664"/>
+            <a:ext cx="676656" cy="475488"/>
+          </a:xfrm>
+          <a:prstGeom prst="rect">
+            <a:avLst/>
+          </a:prstGeom>
+          <a:noFill/>
+          <a:ln/>
+        </p:spPr>
+        <p:txBody>
+          <a:bodyPr wrap="square" lIns="0" tIns="0" rIns="0" bIns="0" rtlCol="0" anchor="ctr"/>
+          <a:lstStyle/>
+          <a:p>
+            <a:pPr algn="ctr" indent="0" marL="0">
+              <a:buNone/>
+            </a:pPr>
+            <a:r>
+              <a:rPr lang="en-US" sz="900" b="1" dirty="0">
+                <a:solidFill>
+                  <a:srgbClr val="9D174D"/>
+                </a:solidFill>
+                <a:latin typeface="Trebuchet MS" pitchFamily="34" charset="0"/>
+                <a:ea typeface="Trebuchet MS" pitchFamily="34" charset="-122"/>
+                <a:cs typeface="Trebuchet MS" pitchFamily="34" charset="-120"/>
+              </a:rPr>
               <a:t>l</a:t>
+            </a:r>
+            <a:endParaRPr lang="en-US" sz="900" dirty="0"/>
+          </a:p>
+        </p:txBody>
+      </p:sp>
+      <p:sp>
+        <p:nvSpPr>
+          <p:cNvPr id="51" name="Shape 49"/>
+          <p:cNvSpPr/>
+          <p:nvPr/>
+        </p:nvSpPr>
+        <p:spPr>
+          <a:xfrm>
+            <a:off x="6307531" y="4169664"/>
+            <a:ext cx="676656" cy="475488"/>
+          </a:xfrm>
+          <a:prstGeom prst="rect">
+            <a:avLst>
+              <a:gd name="adj" fmla="val 7692"/>
+            </a:avLst>
+          </a:prstGeom>
+          <a:solidFill>
+            <a:srgbClr val="FFFFFF"/>
+          </a:solidFill>
+          <a:ln w="12700">
+            <a:solidFill>
+              <a:srgbClr val="DB2777"/>
+            </a:solidFill>
+            <a:prstDash val="solid"/>
+          </a:ln>
+        </p:spPr>
+      </p:sp>
+      <p:sp>
+        <p:nvSpPr>
+          <p:cNvPr id="52" name="Text 50"/>
+          <p:cNvSpPr/>
+          <p:nvPr/>
+        </p:nvSpPr>
+        <p:spPr>
+          <a:xfrm>
+            <a:off x="6307531" y="4169664"/>
+            <a:ext cx="676656" cy="475488"/>
+          </a:xfrm>
+          <a:prstGeom prst="rect">
+            <a:avLst/>
+          </a:prstGeom>
+          <a:noFill/>
+          <a:ln/>
+        </p:spPr>
+        <p:txBody>
+          <a:bodyPr wrap="square" lIns="0" tIns="0" rIns="0" bIns="0" rtlCol="0" anchor="ctr"/>
+          <a:lstStyle/>
+          <a:p>
+            <a:pPr algn="ctr" indent="0" marL="0">
+              <a:buNone/>
+            </a:pPr>
+            <a:r>
+              <a:rPr lang="en-US" sz="900" b="1" dirty="0">
+                <a:solidFill>
+                  <a:srgbClr val="9D174D"/>
+                </a:solidFill>
+                <a:latin typeface="Trebuchet MS" pitchFamily="34" charset="0"/>
+                <a:ea typeface="Trebuchet MS" pitchFamily="34" charset="-122"/>
+                <a:cs typeface="Trebuchet MS" pitchFamily="34" charset="-120"/>
+              </a:rPr>
+              <a:t>n</a:t>
+            </a:r>
+            <a:endParaRPr lang="en-US" sz="900" dirty="0"/>
+          </a:p>
+        </p:txBody>
+      </p:sp>
+      <p:sp>
+        <p:nvSpPr>
+          <p:cNvPr id="53" name="Shape 51"/>
+          <p:cNvSpPr/>
+          <p:nvPr/>
+        </p:nvSpPr>
+        <p:spPr>
+          <a:xfrm>
+            <a:off x="7033565" y="4169664"/>
+            <a:ext cx="676656" cy="475488"/>
+          </a:xfrm>
+          <a:prstGeom prst="rect">
+            <a:avLst>
+              <a:gd name="adj" fmla="val 7692"/>
+            </a:avLst>
+          </a:prstGeom>
+          <a:solidFill>
+            <a:srgbClr val="FFFFFF"/>
+          </a:solidFill>
+          <a:ln w="12700">
+            <a:solidFill>
+              <a:srgbClr val="DB2777"/>
+            </a:solidFill>
+            <a:prstDash val="solid"/>
+          </a:ln>
+        </p:spPr>
+      </p:sp>
+      <p:sp>
+        <p:nvSpPr>
+          <p:cNvPr id="54" name="Text 52"/>
+          <p:cNvSpPr/>
+          <p:nvPr/>
+        </p:nvSpPr>
+        <p:spPr>
+          <a:xfrm>
+            <a:off x="7033565" y="4169664"/>
+            <a:ext cx="676656" cy="475488"/>
+          </a:xfrm>
+          <a:prstGeom prst="rect">
+            <a:avLst/>
+          </a:prstGeom>
+          <a:noFill/>
+          <a:ln/>
+        </p:spPr>
+        <p:txBody>
+          <a:bodyPr wrap="square" lIns="0" tIns="0" rIns="0" bIns="0" rtlCol="0" anchor="ctr"/>
+          <a:lstStyle/>
+          <a:p>
+            <a:pPr algn="ctr" indent="0" marL="0">
+              <a:buNone/>
+            </a:pPr>
+            <a:r>
+              <a:rPr lang="en-US" sz="900" b="1" dirty="0">
+                <a:solidFill>
+                  <a:srgbClr val="9D174D"/>
+                </a:solidFill>
+                <a:latin typeface="Trebuchet MS" pitchFamily="34" charset="0"/>
+                <a:ea typeface="Trebuchet MS" pitchFamily="34" charset="-122"/>
+                <a:cs typeface="Trebuchet MS" pitchFamily="34" charset="-120"/>
+              </a:rPr>
+              <a:t>e</a:t>
+            </a:r>
+            <a:endParaRPr lang="en-US" sz="900" dirty="0"/>
+          </a:p>
+        </p:txBody>
+      </p:sp>
+      <p:sp>
+        <p:nvSpPr>
+          <p:cNvPr id="55" name="Shape 53"/>
+          <p:cNvSpPr/>
+          <p:nvPr/>
+        </p:nvSpPr>
+        <p:spPr>
+          <a:xfrm>
+            <a:off x="7759598" y="4169664"/>
+            <a:ext cx="676656" cy="475488"/>
+          </a:xfrm>
+          <a:prstGeom prst="rect">
+            <a:avLst>
+              <a:gd name="adj" fmla="val 7692"/>
+            </a:avLst>
+          </a:prstGeom>
+          <a:solidFill>
+            <a:srgbClr val="FFFFFF"/>
+          </a:solidFill>
+          <a:ln w="12700">
+            <a:solidFill>
+              <a:srgbClr val="DB2777"/>
+            </a:solidFill>
+            <a:prstDash val="solid"/>
+          </a:ln>
+        </p:spPr>
+      </p:sp>
+      <p:sp>
+        <p:nvSpPr>
+          <p:cNvPr id="56" name="Text 54"/>
+          <p:cNvSpPr/>
+          <p:nvPr/>
+        </p:nvSpPr>
+        <p:spPr>
+          <a:xfrm>
+            <a:off x="7759598" y="4169664"/>
+            <a:ext cx="676656" cy="475488"/>
+          </a:xfrm>
+          <a:prstGeom prst="rect">
+            <a:avLst/>
+          </a:prstGeom>
+          <a:noFill/>
+          <a:ln/>
+        </p:spPr>
+        <p:txBody>
+          <a:bodyPr wrap="square" lIns="0" tIns="0" rIns="0" bIns="0" rtlCol="0" anchor="ctr"/>
+          <a:lstStyle/>
+          <a:p>
+            <a:pPr algn="ctr" indent="0" marL="0">
+              <a:buNone/>
+            </a:pPr>
+            <a:r>
+              <a:rPr lang="en-US" sz="900" b="1" dirty="0">
+                <a:solidFill>
+                  <a:srgbClr val="9D174D"/>
+                </a:solidFill>
+                <a:latin typeface="Trebuchet MS" pitchFamily="34" charset="0"/>
+                <a:ea typeface="Trebuchet MS" pitchFamily="34" charset="-122"/>
+                <a:cs typeface="Trebuchet MS" pitchFamily="34" charset="-120"/>
+              </a:rPr>
+              <a:t>ss</a:t>
             </a:r>
             <a:endParaRPr lang="en-US" sz="900" dirty="0"/>
           </a:p>
@@ -11053,7 +11863,7 @@
                 <a:ea typeface="Calibri" pitchFamily="34" charset="-122"/>
                 <a:cs typeface="Calibri" pitchFamily="34" charset="-120"/>
               </a:rPr>
-              <a:t>Word Labs  •  wordlabs.app  •  Root: 'play' = to engage in fun activity</a:t>
+              <a:t>Word Labs  •  wordlabs.app  •  Root: 'play' = to take part in a game; to have fun</a:t>
             </a:r>
             <a:endParaRPr lang="en-US" sz="800" dirty="0"/>
           </a:p>
@@ -11192,7 +12002,7 @@
                 <a:ea typeface="Trebuchet MS" pitchFamily="34" charset="-122"/>
                 <a:cs typeface="Trebuchet MS" pitchFamily="34" charset="-120"/>
               </a:rPr>
-              <a:t>replay</a:t>
+              <a:t>overplay</a:t>
             </a:r>
             <a:endParaRPr lang="en-US" sz="2800" dirty="0"/>
           </a:p>
@@ -11880,7 +12690,7 @@
                 <a:ea typeface="Calibri" pitchFamily="34" charset="-122"/>
                 <a:cs typeface="Calibri" pitchFamily="34" charset="-120"/>
               </a:rPr>
-              <a:t>Word Labs  •  wordlabs.app  •  Root: 'play' = to engage in fun activity</a:t>
+              <a:t>Word Labs  •  wordlabs.app  •  Root: 'play' = to take part in a game; to have fun</a:t>
             </a:r>
             <a:endParaRPr lang="en-US" sz="800" dirty="0"/>
           </a:p>
@@ -12019,7 +12829,7 @@
                 <a:ea typeface="Trebuchet MS" pitchFamily="34" charset="-122"/>
                 <a:cs typeface="Trebuchet MS" pitchFamily="34" charset="-120"/>
               </a:rPr>
-              <a:t>replay</a:t>
+              <a:t>overplay</a:t>
             </a:r>
             <a:endParaRPr lang="en-US" sz="2800" dirty="0"/>
           </a:p>
@@ -12158,7 +12968,7 @@
                 <a:ea typeface="Trebuchet MS" pitchFamily="34" charset="-122"/>
                 <a:cs typeface="Trebuchet MS" pitchFamily="34" charset="-120"/>
               </a:rPr>
-              <a:t>re</a:t>
+              <a:t>over</a:t>
             </a:r>
             <a:endParaRPr lang="en-US" sz="1300" dirty="0"/>
           </a:p>
@@ -12197,7 +13007,7 @@
                 <a:ea typeface="Calibri" pitchFamily="34" charset="-122"/>
                 <a:cs typeface="Calibri" pitchFamily="34" charset="-120"/>
               </a:rPr>
-              <a:t>again</a:t>
+              <a:t>too much</a:t>
             </a:r>
             <a:endParaRPr lang="en-US" sz="850" dirty="0"/>
           </a:p>
@@ -12309,7 +13119,7 @@
                 <a:ea typeface="Calibri" pitchFamily="34" charset="-122"/>
                 <a:cs typeface="Calibri" pitchFamily="34" charset="-120"/>
               </a:rPr>
-              <a:t>to engage in fun activity</a:t>
+              <a:t>to take part in a game; to have fun</a:t>
             </a:r>
             <a:endParaRPr lang="en-US" sz="850" dirty="0"/>
           </a:p>
@@ -12865,7 +13675,7 @@
                 <a:ea typeface="Calibri" pitchFamily="34" charset="-122"/>
                 <a:cs typeface="Calibri" pitchFamily="34" charset="-120"/>
               </a:rPr>
-              <a:t>Word Labs  •  wordlabs.app  •  Root: 'play' = to engage in fun activity</a:t>
+              <a:t>Word Labs  •  wordlabs.app  •  Root: 'play' = to take part in a game; to have fun</a:t>
             </a:r>
             <a:endParaRPr lang="en-US" sz="800" dirty="0"/>
           </a:p>
@@ -13004,7 +13814,7 @@
                 <a:ea typeface="Trebuchet MS" pitchFamily="34" charset="-122"/>
                 <a:cs typeface="Trebuchet MS" pitchFamily="34" charset="-120"/>
               </a:rPr>
-              <a:t>replay</a:t>
+              <a:t>overplay</a:t>
             </a:r>
             <a:endParaRPr lang="en-US" sz="2800" dirty="0"/>
           </a:p>
@@ -13143,7 +13953,7 @@
                 <a:ea typeface="Trebuchet MS" pitchFamily="34" charset="-122"/>
                 <a:cs typeface="Trebuchet MS" pitchFamily="34" charset="-120"/>
               </a:rPr>
-              <a:t>re</a:t>
+              <a:t>over</a:t>
             </a:r>
             <a:endParaRPr lang="en-US" sz="1300" dirty="0"/>
           </a:p>
@@ -13182,7 +13992,7 @@
                 <a:ea typeface="Calibri" pitchFamily="34" charset="-122"/>
                 <a:cs typeface="Calibri" pitchFamily="34" charset="-120"/>
               </a:rPr>
-              <a:t>again</a:t>
+              <a:t>too much</a:t>
             </a:r>
             <a:endParaRPr lang="en-US" sz="850" dirty="0"/>
           </a:p>
@@ -13294,7 +14104,7 @@
                 <a:ea typeface="Calibri" pitchFamily="34" charset="-122"/>
                 <a:cs typeface="Calibri" pitchFamily="34" charset="-120"/>
               </a:rPr>
-              <a:t>to engage in fun activity</a:t>
+              <a:t>to take part in a game; to have fun</a:t>
             </a:r>
             <a:endParaRPr lang="en-US" sz="850" dirty="0"/>
           </a:p>
@@ -13401,7 +14211,7 @@
         </p:nvSpPr>
         <p:spPr>
           <a:xfrm>
-            <a:off x="2999232" y="3364992"/>
+            <a:off x="2313432" y="3364992"/>
             <a:ext cx="1645920" cy="475488"/>
           </a:xfrm>
           <a:prstGeom prst="rect">
@@ -13428,7 +14238,7 @@
         </p:nvSpPr>
         <p:spPr>
           <a:xfrm>
-            <a:off x="2999232" y="3364992"/>
+            <a:off x="2313432" y="3364992"/>
             <a:ext cx="1645920" cy="475488"/>
           </a:xfrm>
           <a:prstGeom prst="rect">
@@ -13453,7 +14263,7 @@
                 <a:ea typeface="Trebuchet MS" pitchFamily="34" charset="-122"/>
                 <a:cs typeface="Trebuchet MS" pitchFamily="34" charset="-120"/>
               </a:rPr>
-              <a:t>re</a:t>
+              <a:t>o</a:t>
             </a:r>
             <a:endParaRPr lang="en-US" sz="1400" dirty="0"/>
           </a:p>
@@ -13467,8 +14277,8 @@
         </p:nvSpPr>
         <p:spPr>
           <a:xfrm>
-            <a:off x="4645152" y="3364992"/>
-            <a:ext cx="1097280" cy="475488"/>
+            <a:off x="3959352" y="3364992"/>
+            <a:ext cx="411480" cy="475488"/>
           </a:xfrm>
           <a:prstGeom prst="rect">
             <a:avLst/>
@@ -13506,7 +14316,7 @@
         </p:nvSpPr>
         <p:spPr>
           <a:xfrm>
-            <a:off x="5742432" y="3364992"/>
+            <a:off x="4370832" y="3364992"/>
             <a:ext cx="1645920" cy="475488"/>
           </a:xfrm>
           <a:prstGeom prst="rect">
@@ -13533,7 +14343,7 @@
         </p:nvSpPr>
         <p:spPr>
           <a:xfrm>
-            <a:off x="5742432" y="3364992"/>
+            <a:off x="4370832" y="3364992"/>
             <a:ext cx="1645920" cy="475488"/>
           </a:xfrm>
           <a:prstGeom prst="rect">
@@ -13558,6 +14368,111 @@
                 <a:ea typeface="Trebuchet MS" pitchFamily="34" charset="-122"/>
                 <a:cs typeface="Trebuchet MS" pitchFamily="34" charset="-120"/>
               </a:rPr>
+              <a:t>ver</a:t>
+            </a:r>
+            <a:endParaRPr lang="en-US" sz="1400" dirty="0"/>
+          </a:p>
+        </p:txBody>
+      </p:sp>
+      <p:sp>
+        <p:nvSpPr>
+          <p:cNvPr id="30" name="Text 28"/>
+          <p:cNvSpPr/>
+          <p:nvPr/>
+        </p:nvSpPr>
+        <p:spPr>
+          <a:xfrm>
+            <a:off x="6016752" y="3364992"/>
+            <a:ext cx="411480" cy="475488"/>
+          </a:xfrm>
+          <a:prstGeom prst="rect">
+            <a:avLst/>
+          </a:prstGeom>
+          <a:noFill/>
+          <a:ln/>
+        </p:spPr>
+        <p:txBody>
+          <a:bodyPr wrap="square" lIns="0" tIns="0" rIns="0" bIns="0" rtlCol="0" anchor="ctr"/>
+          <a:lstStyle/>
+          <a:p>
+            <a:pPr algn="ctr" indent="0" marL="0">
+              <a:buNone/>
+            </a:pPr>
+            <a:r>
+              <a:rPr lang="en-US" sz="1600" b="1" dirty="0">
+                <a:solidFill>
+                  <a:srgbClr val="0D9488"/>
+                </a:solidFill>
+                <a:latin typeface="Trebuchet MS" pitchFamily="34" charset="0"/>
+                <a:ea typeface="Trebuchet MS" pitchFamily="34" charset="-122"/>
+                <a:cs typeface="Trebuchet MS" pitchFamily="34" charset="-120"/>
+              </a:rPr>
+              <a:t>·</a:t>
+            </a:r>
+            <a:endParaRPr lang="en-US" sz="1600" dirty="0"/>
+          </a:p>
+        </p:txBody>
+      </p:sp>
+      <p:sp>
+        <p:nvSpPr>
+          <p:cNvPr id="31" name="Shape 29"/>
+          <p:cNvSpPr/>
+          <p:nvPr/>
+        </p:nvSpPr>
+        <p:spPr>
+          <a:xfrm>
+            <a:off x="6428232" y="3364992"/>
+            <a:ext cx="1645920" cy="475488"/>
+          </a:xfrm>
+          <a:prstGeom prst="rect">
+            <a:avLst>
+              <a:gd name="adj" fmla="val 9615"/>
+            </a:avLst>
+          </a:prstGeom>
+          <a:solidFill>
+            <a:srgbClr val="FFFFFF"/>
+          </a:solidFill>
+          <a:ln w="12700">
+            <a:solidFill>
+              <a:srgbClr val="0D9488"/>
+            </a:solidFill>
+            <a:prstDash val="solid"/>
+          </a:ln>
+        </p:spPr>
+      </p:sp>
+      <p:sp>
+        <p:nvSpPr>
+          <p:cNvPr id="32" name="Text 30"/>
+          <p:cNvSpPr/>
+          <p:nvPr/>
+        </p:nvSpPr>
+        <p:spPr>
+          <a:xfrm>
+            <a:off x="6428232" y="3364992"/>
+            <a:ext cx="1645920" cy="475488"/>
+          </a:xfrm>
+          <a:prstGeom prst="rect">
+            <a:avLst/>
+          </a:prstGeom>
+          <a:noFill/>
+          <a:ln/>
+        </p:spPr>
+        <p:txBody>
+          <a:bodyPr wrap="square" lIns="0" tIns="0" rIns="0" bIns="0" rtlCol="0" anchor="ctr"/>
+          <a:lstStyle/>
+          <a:p>
+            <a:pPr algn="ctr" indent="0" marL="0">
+              <a:buNone/>
+            </a:pPr>
+            <a:r>
+              <a:rPr lang="en-US" sz="1400" b="1" dirty="0">
+                <a:solidFill>
+                  <a:srgbClr val="0D9488"/>
+                </a:solidFill>
+                <a:latin typeface="Trebuchet MS" pitchFamily="34" charset="0"/>
+                <a:ea typeface="Trebuchet MS" pitchFamily="34" charset="-122"/>
+                <a:cs typeface="Trebuchet MS" pitchFamily="34" charset="-120"/>
+              </a:rPr>
               <a:t>play</a:t>
             </a:r>
             <a:endParaRPr lang="en-US" sz="1400" dirty="0"/>
@@ -13566,7 +14481,7 @@
       </p:sp>
       <p:sp>
         <p:nvSpPr>
-          <p:cNvPr id="30" name="Shape 28"/>
+          <p:cNvPr id="33" name="Shape 31"/>
           <p:cNvSpPr/>
           <p:nvPr/>
         </p:nvSpPr>
@@ -13593,7 +14508,7 @@
       </p:sp>
       <p:sp>
         <p:nvSpPr>
-          <p:cNvPr id="31" name="Text 29"/>
+          <p:cNvPr id="34" name="Text 32"/>
           <p:cNvSpPr/>
           <p:nvPr/>
         </p:nvSpPr>
@@ -13632,7 +14547,7 @@
       </p:sp>
       <p:sp>
         <p:nvSpPr>
-          <p:cNvPr id="32" name="Shape 30"/>
+          <p:cNvPr id="35" name="Shape 33"/>
           <p:cNvSpPr/>
           <p:nvPr/>
         </p:nvSpPr>
@@ -13659,7 +14574,7 @@
       </p:sp>
       <p:sp>
         <p:nvSpPr>
-          <p:cNvPr id="33" name="Text 31"/>
+          <p:cNvPr id="36" name="Text 34"/>
           <p:cNvSpPr/>
           <p:nvPr/>
         </p:nvSpPr>
@@ -13891,7 +14806,7 @@
                 <a:ea typeface="Calibri" pitchFamily="34" charset="-122"/>
                 <a:cs typeface="Calibri" pitchFamily="34" charset="-120"/>
               </a:rPr>
-              <a:t>Root 'play' — to engage in fun activity</a:t>
+              <a:t>Root 'play' — to take part in a game; to have fun</a:t>
             </a:r>
             <a:endParaRPr lang="en-US" sz="1600" dirty="0"/>
           </a:p>
@@ -14247,7 +15162,7 @@
                 <a:ea typeface="Calibri" pitchFamily="34" charset="-122"/>
                 <a:cs typeface="Calibri" pitchFamily="34" charset="-120"/>
               </a:rPr>
-              <a:t>Word Labs  •  wordlabs.app  •  Root: 'play' = to engage in fun activity</a:t>
+              <a:t>Word Labs  •  wordlabs.app  •  Root: 'play' = to take part in a game; to have fun</a:t>
             </a:r>
             <a:endParaRPr lang="en-US" sz="800" dirty="0"/>
           </a:p>
@@ -14386,7 +15301,7 @@
                 <a:ea typeface="Trebuchet MS" pitchFamily="34" charset="-122"/>
                 <a:cs typeface="Trebuchet MS" pitchFamily="34" charset="-120"/>
               </a:rPr>
-              <a:t>replay</a:t>
+              <a:t>overplay</a:t>
             </a:r>
             <a:endParaRPr lang="en-US" sz="2800" dirty="0"/>
           </a:p>
@@ -14525,7 +15440,7 @@
                 <a:ea typeface="Trebuchet MS" pitchFamily="34" charset="-122"/>
                 <a:cs typeface="Trebuchet MS" pitchFamily="34" charset="-120"/>
               </a:rPr>
-              <a:t>re</a:t>
+              <a:t>over</a:t>
             </a:r>
             <a:endParaRPr lang="en-US" sz="1300" dirty="0"/>
           </a:p>
@@ -14564,7 +15479,7 @@
                 <a:ea typeface="Calibri" pitchFamily="34" charset="-122"/>
                 <a:cs typeface="Calibri" pitchFamily="34" charset="-120"/>
               </a:rPr>
-              <a:t>again</a:t>
+              <a:t>too much</a:t>
             </a:r>
             <a:endParaRPr lang="en-US" sz="850" dirty="0"/>
           </a:p>
@@ -14676,7 +15591,7 @@
                 <a:ea typeface="Calibri" pitchFamily="34" charset="-122"/>
                 <a:cs typeface="Calibri" pitchFamily="34" charset="-120"/>
               </a:rPr>
-              <a:t>to engage in fun activity</a:t>
+              <a:t>to take part in a game; to have fun</a:t>
             </a:r>
             <a:endParaRPr lang="en-US" sz="850" dirty="0"/>
           </a:p>
@@ -14783,7 +15698,7 @@
         </p:nvSpPr>
         <p:spPr>
           <a:xfrm>
-            <a:off x="2999232" y="3364992"/>
+            <a:off x="2313432" y="3364992"/>
             <a:ext cx="1645920" cy="475488"/>
           </a:xfrm>
           <a:prstGeom prst="rect">
@@ -14810,7 +15725,7 @@
         </p:nvSpPr>
         <p:spPr>
           <a:xfrm>
-            <a:off x="2999232" y="3364992"/>
+            <a:off x="2313432" y="3364992"/>
             <a:ext cx="1645920" cy="475488"/>
           </a:xfrm>
           <a:prstGeom prst="rect">
@@ -14835,7 +15750,7 @@
                 <a:ea typeface="Trebuchet MS" pitchFamily="34" charset="-122"/>
                 <a:cs typeface="Trebuchet MS" pitchFamily="34" charset="-120"/>
               </a:rPr>
-              <a:t>re</a:t>
+              <a:t>o</a:t>
             </a:r>
             <a:endParaRPr lang="en-US" sz="1400" dirty="0"/>
           </a:p>
@@ -14849,8 +15764,8 @@
         </p:nvSpPr>
         <p:spPr>
           <a:xfrm>
-            <a:off x="4645152" y="3364992"/>
-            <a:ext cx="1097280" cy="475488"/>
+            <a:off x="3959352" y="3364992"/>
+            <a:ext cx="411480" cy="475488"/>
           </a:xfrm>
           <a:prstGeom prst="rect">
             <a:avLst/>
@@ -14888,7 +15803,7 @@
         </p:nvSpPr>
         <p:spPr>
           <a:xfrm>
-            <a:off x="5742432" y="3364992"/>
+            <a:off x="4370832" y="3364992"/>
             <a:ext cx="1645920" cy="475488"/>
           </a:xfrm>
           <a:prstGeom prst="rect">
@@ -14915,7 +15830,7 @@
         </p:nvSpPr>
         <p:spPr>
           <a:xfrm>
-            <a:off x="5742432" y="3364992"/>
+            <a:off x="4370832" y="3364992"/>
             <a:ext cx="1645920" cy="475488"/>
           </a:xfrm>
           <a:prstGeom prst="rect">
@@ -14940,6 +15855,111 @@
                 <a:ea typeface="Trebuchet MS" pitchFamily="34" charset="-122"/>
                 <a:cs typeface="Trebuchet MS" pitchFamily="34" charset="-120"/>
               </a:rPr>
+              <a:t>ver</a:t>
+            </a:r>
+            <a:endParaRPr lang="en-US" sz="1400" dirty="0"/>
+          </a:p>
+        </p:txBody>
+      </p:sp>
+      <p:sp>
+        <p:nvSpPr>
+          <p:cNvPr id="30" name="Text 28"/>
+          <p:cNvSpPr/>
+          <p:nvPr/>
+        </p:nvSpPr>
+        <p:spPr>
+          <a:xfrm>
+            <a:off x="6016752" y="3364992"/>
+            <a:ext cx="411480" cy="475488"/>
+          </a:xfrm>
+          <a:prstGeom prst="rect">
+            <a:avLst/>
+          </a:prstGeom>
+          <a:noFill/>
+          <a:ln/>
+        </p:spPr>
+        <p:txBody>
+          <a:bodyPr wrap="square" lIns="0" tIns="0" rIns="0" bIns="0" rtlCol="0" anchor="ctr"/>
+          <a:lstStyle/>
+          <a:p>
+            <a:pPr algn="ctr" indent="0" marL="0">
+              <a:buNone/>
+            </a:pPr>
+            <a:r>
+              <a:rPr lang="en-US" sz="1600" b="1" dirty="0">
+                <a:solidFill>
+                  <a:srgbClr val="0D9488"/>
+                </a:solidFill>
+                <a:latin typeface="Trebuchet MS" pitchFamily="34" charset="0"/>
+                <a:ea typeface="Trebuchet MS" pitchFamily="34" charset="-122"/>
+                <a:cs typeface="Trebuchet MS" pitchFamily="34" charset="-120"/>
+              </a:rPr>
+              <a:t>·</a:t>
+            </a:r>
+            <a:endParaRPr lang="en-US" sz="1600" dirty="0"/>
+          </a:p>
+        </p:txBody>
+      </p:sp>
+      <p:sp>
+        <p:nvSpPr>
+          <p:cNvPr id="31" name="Shape 29"/>
+          <p:cNvSpPr/>
+          <p:nvPr/>
+        </p:nvSpPr>
+        <p:spPr>
+          <a:xfrm>
+            <a:off x="6428232" y="3364992"/>
+            <a:ext cx="1645920" cy="475488"/>
+          </a:xfrm>
+          <a:prstGeom prst="rect">
+            <a:avLst>
+              <a:gd name="adj" fmla="val 9615"/>
+            </a:avLst>
+          </a:prstGeom>
+          <a:solidFill>
+            <a:srgbClr val="FFFFFF"/>
+          </a:solidFill>
+          <a:ln w="12700">
+            <a:solidFill>
+              <a:srgbClr val="0D9488"/>
+            </a:solidFill>
+            <a:prstDash val="solid"/>
+          </a:ln>
+        </p:spPr>
+      </p:sp>
+      <p:sp>
+        <p:nvSpPr>
+          <p:cNvPr id="32" name="Text 30"/>
+          <p:cNvSpPr/>
+          <p:nvPr/>
+        </p:nvSpPr>
+        <p:spPr>
+          <a:xfrm>
+            <a:off x="6428232" y="3364992"/>
+            <a:ext cx="1645920" cy="475488"/>
+          </a:xfrm>
+          <a:prstGeom prst="rect">
+            <a:avLst/>
+          </a:prstGeom>
+          <a:noFill/>
+          <a:ln/>
+        </p:spPr>
+        <p:txBody>
+          <a:bodyPr wrap="square" lIns="0" tIns="0" rIns="0" bIns="0" rtlCol="0" anchor="ctr"/>
+          <a:lstStyle/>
+          <a:p>
+            <a:pPr algn="ctr" indent="0" marL="0">
+              <a:buNone/>
+            </a:pPr>
+            <a:r>
+              <a:rPr lang="en-US" sz="1400" b="1" dirty="0">
+                <a:solidFill>
+                  <a:srgbClr val="0D9488"/>
+                </a:solidFill>
+                <a:latin typeface="Trebuchet MS" pitchFamily="34" charset="0"/>
+                <a:ea typeface="Trebuchet MS" pitchFamily="34" charset="-122"/>
+                <a:cs typeface="Trebuchet MS" pitchFamily="34" charset="-120"/>
+              </a:rPr>
               <a:t>play</a:t>
             </a:r>
             <a:endParaRPr lang="en-US" sz="1400" dirty="0"/>
@@ -14948,7 +15968,7 @@
       </p:sp>
       <p:sp>
         <p:nvSpPr>
-          <p:cNvPr id="30" name="Shape 28"/>
+          <p:cNvPr id="33" name="Shape 31"/>
           <p:cNvSpPr/>
           <p:nvPr/>
         </p:nvSpPr>
@@ -14975,7 +15995,7 @@
       </p:sp>
       <p:sp>
         <p:nvSpPr>
-          <p:cNvPr id="31" name="Text 29"/>
+          <p:cNvPr id="34" name="Text 32"/>
           <p:cNvSpPr/>
           <p:nvPr/>
         </p:nvSpPr>
@@ -15014,7 +16034,7 @@
       </p:sp>
       <p:sp>
         <p:nvSpPr>
-          <p:cNvPr id="32" name="Shape 30"/>
+          <p:cNvPr id="35" name="Shape 33"/>
           <p:cNvSpPr/>
           <p:nvPr/>
         </p:nvSpPr>
@@ -15041,13 +16061,13 @@
       </p:sp>
       <p:sp>
         <p:nvSpPr>
-          <p:cNvPr id="33" name="Shape 31"/>
-          <p:cNvSpPr/>
-          <p:nvPr/>
-        </p:nvSpPr>
-        <p:spPr>
-          <a:xfrm>
-            <a:off x="2670048" y="4169664"/>
+          <p:cNvPr id="36" name="Shape 34"/>
+          <p:cNvSpPr/>
+          <p:nvPr/>
+        </p:nvSpPr>
+        <p:spPr>
+          <a:xfrm>
+            <a:off x="2254649" y="4169664"/>
             <a:ext cx="685800" cy="475488"/>
           </a:xfrm>
           <a:prstGeom prst="rect">
@@ -15068,13 +16088,13 @@
       </p:sp>
       <p:sp>
         <p:nvSpPr>
-          <p:cNvPr id="34" name="Text 32"/>
-          <p:cNvSpPr/>
-          <p:nvPr/>
-        </p:nvSpPr>
-        <p:spPr>
-          <a:xfrm>
-            <a:off x="2670048" y="4169664"/>
+          <p:cNvPr id="37" name="Text 35"/>
+          <p:cNvSpPr/>
+          <p:nvPr/>
+        </p:nvSpPr>
+        <p:spPr>
+          <a:xfrm>
+            <a:off x="2254649" y="4169664"/>
             <a:ext cx="685800" cy="475488"/>
           </a:xfrm>
           <a:prstGeom prst="rect">
@@ -15099,7 +16119,7 @@
                 <a:ea typeface="Trebuchet MS" pitchFamily="34" charset="-122"/>
                 <a:cs typeface="Trebuchet MS" pitchFamily="34" charset="-120"/>
               </a:rPr>
-              <a:t>r</a:t>
+              <a:t>o</a:t>
             </a:r>
             <a:endParaRPr lang="en-US" sz="900" dirty="0"/>
           </a:p>
@@ -15107,13 +16127,13 @@
       </p:sp>
       <p:sp>
         <p:nvSpPr>
-          <p:cNvPr id="35" name="Shape 33"/>
-          <p:cNvSpPr/>
-          <p:nvPr/>
-        </p:nvSpPr>
-        <p:spPr>
-          <a:xfrm>
-            <a:off x="4123944" y="4169664"/>
+          <p:cNvPr id="38" name="Shape 36"/>
+          <p:cNvSpPr/>
+          <p:nvPr/>
+        </p:nvSpPr>
+        <p:spPr>
+          <a:xfrm>
+            <a:off x="3293146" y="4169664"/>
             <a:ext cx="685800" cy="475488"/>
           </a:xfrm>
           <a:prstGeom prst="rect">
@@ -15134,13 +16154,13 @@
       </p:sp>
       <p:sp>
         <p:nvSpPr>
-          <p:cNvPr id="36" name="Text 34"/>
-          <p:cNvSpPr/>
-          <p:nvPr/>
-        </p:nvSpPr>
-        <p:spPr>
-          <a:xfrm>
-            <a:off x="4123944" y="4169664"/>
+          <p:cNvPr id="39" name="Text 37"/>
+          <p:cNvSpPr/>
+          <p:nvPr/>
+        </p:nvSpPr>
+        <p:spPr>
+          <a:xfrm>
+            <a:off x="3293146" y="4169664"/>
             <a:ext cx="685800" cy="475488"/>
           </a:xfrm>
           <a:prstGeom prst="rect">
@@ -15165,7 +16185,7 @@
                 <a:ea typeface="Trebuchet MS" pitchFamily="34" charset="-122"/>
                 <a:cs typeface="Trebuchet MS" pitchFamily="34" charset="-120"/>
               </a:rPr>
-              <a:t>e</a:t>
+              <a:t>v</a:t>
             </a:r>
             <a:endParaRPr lang="en-US" sz="900" dirty="0"/>
           </a:p>
@@ -15173,13 +16193,13 @@
       </p:sp>
       <p:sp>
         <p:nvSpPr>
-          <p:cNvPr id="37" name="Shape 35"/>
-          <p:cNvSpPr/>
-          <p:nvPr/>
-        </p:nvSpPr>
-        <p:spPr>
-          <a:xfrm>
-            <a:off x="5577840" y="4169664"/>
+          <p:cNvPr id="40" name="Shape 38"/>
+          <p:cNvSpPr/>
+          <p:nvPr/>
+        </p:nvSpPr>
+        <p:spPr>
+          <a:xfrm>
+            <a:off x="4331643" y="4169664"/>
             <a:ext cx="685800" cy="475488"/>
           </a:xfrm>
           <a:prstGeom prst="rect">
@@ -15200,13 +16220,13 @@
       </p:sp>
       <p:sp>
         <p:nvSpPr>
-          <p:cNvPr id="38" name="Text 36"/>
-          <p:cNvSpPr/>
-          <p:nvPr/>
-        </p:nvSpPr>
-        <p:spPr>
-          <a:xfrm>
-            <a:off x="5577840" y="4169664"/>
+          <p:cNvPr id="41" name="Text 39"/>
+          <p:cNvSpPr/>
+          <p:nvPr/>
+        </p:nvSpPr>
+        <p:spPr>
+          <a:xfrm>
+            <a:off x="4331643" y="4169664"/>
             <a:ext cx="685800" cy="475488"/>
           </a:xfrm>
           <a:prstGeom prst="rect">
@@ -15231,7 +16251,7 @@
                 <a:ea typeface="Trebuchet MS" pitchFamily="34" charset="-122"/>
                 <a:cs typeface="Trebuchet MS" pitchFamily="34" charset="-120"/>
               </a:rPr>
-              <a:t>pl</a:t>
+              <a:t>er</a:t>
             </a:r>
             <a:endParaRPr lang="en-US" sz="900" dirty="0"/>
           </a:p>
@@ -15239,13 +16259,13 @@
       </p:sp>
       <p:sp>
         <p:nvSpPr>
-          <p:cNvPr id="39" name="Shape 37"/>
-          <p:cNvSpPr/>
-          <p:nvPr/>
-        </p:nvSpPr>
-        <p:spPr>
-          <a:xfrm>
-            <a:off x="7031736" y="4169664"/>
+          <p:cNvPr id="42" name="Shape 40"/>
+          <p:cNvSpPr/>
+          <p:nvPr/>
+        </p:nvSpPr>
+        <p:spPr>
+          <a:xfrm>
+            <a:off x="5370141" y="4169664"/>
             <a:ext cx="685800" cy="475488"/>
           </a:xfrm>
           <a:prstGeom prst="rect">
@@ -15266,13 +16286,145 @@
       </p:sp>
       <p:sp>
         <p:nvSpPr>
-          <p:cNvPr id="40" name="Text 38"/>
-          <p:cNvSpPr/>
-          <p:nvPr/>
-        </p:nvSpPr>
-        <p:spPr>
-          <a:xfrm>
-            <a:off x="7031736" y="4169664"/>
+          <p:cNvPr id="43" name="Text 41"/>
+          <p:cNvSpPr/>
+          <p:nvPr/>
+        </p:nvSpPr>
+        <p:spPr>
+          <a:xfrm>
+            <a:off x="5370141" y="4169664"/>
+            <a:ext cx="685800" cy="475488"/>
+          </a:xfrm>
+          <a:prstGeom prst="rect">
+            <a:avLst/>
+          </a:prstGeom>
+          <a:noFill/>
+          <a:ln/>
+        </p:spPr>
+        <p:txBody>
+          <a:bodyPr wrap="square" lIns="0" tIns="0" rIns="0" bIns="0" rtlCol="0" anchor="ctr"/>
+          <a:lstStyle/>
+          <a:p>
+            <a:pPr algn="ctr" indent="0" marL="0">
+              <a:buNone/>
+            </a:pPr>
+            <a:r>
+              <a:rPr lang="en-US" sz="900" b="1" dirty="0">
+                <a:solidFill>
+                  <a:srgbClr val="9D174D"/>
+                </a:solidFill>
+                <a:latin typeface="Trebuchet MS" pitchFamily="34" charset="0"/>
+                <a:ea typeface="Trebuchet MS" pitchFamily="34" charset="-122"/>
+                <a:cs typeface="Trebuchet MS" pitchFamily="34" charset="-120"/>
+              </a:rPr>
+              <a:t>p</a:t>
+            </a:r>
+            <a:endParaRPr lang="en-US" sz="900" dirty="0"/>
+          </a:p>
+        </p:txBody>
+      </p:sp>
+      <p:sp>
+        <p:nvSpPr>
+          <p:cNvPr id="44" name="Shape 42"/>
+          <p:cNvSpPr/>
+          <p:nvPr/>
+        </p:nvSpPr>
+        <p:spPr>
+          <a:xfrm>
+            <a:off x="6408638" y="4169664"/>
+            <a:ext cx="685800" cy="475488"/>
+          </a:xfrm>
+          <a:prstGeom prst="rect">
+            <a:avLst>
+              <a:gd name="adj" fmla="val 7692"/>
+            </a:avLst>
+          </a:prstGeom>
+          <a:solidFill>
+            <a:srgbClr val="FFFFFF"/>
+          </a:solidFill>
+          <a:ln w="12700">
+            <a:solidFill>
+              <a:srgbClr val="DB2777"/>
+            </a:solidFill>
+            <a:prstDash val="solid"/>
+          </a:ln>
+        </p:spPr>
+      </p:sp>
+      <p:sp>
+        <p:nvSpPr>
+          <p:cNvPr id="45" name="Text 43"/>
+          <p:cNvSpPr/>
+          <p:nvPr/>
+        </p:nvSpPr>
+        <p:spPr>
+          <a:xfrm>
+            <a:off x="6408638" y="4169664"/>
+            <a:ext cx="685800" cy="475488"/>
+          </a:xfrm>
+          <a:prstGeom prst="rect">
+            <a:avLst/>
+          </a:prstGeom>
+          <a:noFill/>
+          <a:ln/>
+        </p:spPr>
+        <p:txBody>
+          <a:bodyPr wrap="square" lIns="0" tIns="0" rIns="0" bIns="0" rtlCol="0" anchor="ctr"/>
+          <a:lstStyle/>
+          <a:p>
+            <a:pPr algn="ctr" indent="0" marL="0">
+              <a:buNone/>
+            </a:pPr>
+            <a:r>
+              <a:rPr lang="en-US" sz="900" b="1" dirty="0">
+                <a:solidFill>
+                  <a:srgbClr val="9D174D"/>
+                </a:solidFill>
+                <a:latin typeface="Trebuchet MS" pitchFamily="34" charset="0"/>
+                <a:ea typeface="Trebuchet MS" pitchFamily="34" charset="-122"/>
+                <a:cs typeface="Trebuchet MS" pitchFamily="34" charset="-120"/>
+              </a:rPr>
+              <a:t>l</a:t>
+            </a:r>
+            <a:endParaRPr lang="en-US" sz="900" dirty="0"/>
+          </a:p>
+        </p:txBody>
+      </p:sp>
+      <p:sp>
+        <p:nvSpPr>
+          <p:cNvPr id="46" name="Shape 44"/>
+          <p:cNvSpPr/>
+          <p:nvPr/>
+        </p:nvSpPr>
+        <p:spPr>
+          <a:xfrm>
+            <a:off x="7447135" y="4169664"/>
+            <a:ext cx="685800" cy="475488"/>
+          </a:xfrm>
+          <a:prstGeom prst="rect">
+            <a:avLst>
+              <a:gd name="adj" fmla="val 7692"/>
+            </a:avLst>
+          </a:prstGeom>
+          <a:solidFill>
+            <a:srgbClr val="FFFFFF"/>
+          </a:solidFill>
+          <a:ln w="12700">
+            <a:solidFill>
+              <a:srgbClr val="DB2777"/>
+            </a:solidFill>
+            <a:prstDash val="solid"/>
+          </a:ln>
+        </p:spPr>
+      </p:sp>
+      <p:sp>
+        <p:nvSpPr>
+          <p:cNvPr id="47" name="Text 45"/>
+          <p:cNvSpPr/>
+          <p:nvPr/>
+        </p:nvSpPr>
+        <p:spPr>
+          <a:xfrm>
+            <a:off x="7447135" y="4169664"/>
             <a:ext cx="685800" cy="475488"/>
           </a:xfrm>
           <a:prstGeom prst="rect">
@@ -15871,7 +17023,7 @@
                 <a:ea typeface="Calibri" pitchFamily="34" charset="-122"/>
                 <a:cs typeface="Calibri" pitchFamily="34" charset="-120"/>
               </a:rPr>
-              <a:t>Word Labs  •  wordlabs.app  •  Root: 'play' = to engage in fun activity</a:t>
+              <a:t>Word Labs  •  wordlabs.app  •  Root: 'play' = to take part in a game; to have fun</a:t>
             </a:r>
             <a:endParaRPr lang="en-US" sz="800" dirty="0"/>
           </a:p>
@@ -16205,7 +17357,7 @@
                 <a:ea typeface="Trebuchet MS" pitchFamily="34" charset="-122"/>
                 <a:cs typeface="Trebuchet MS" pitchFamily="34" charset="-120"/>
               </a:rPr>
-              <a:t>2</a:t>
+              <a:t>1</a:t>
             </a:r>
             <a:pPr algn="ctr" indent="0" marL="0">
               <a:buNone/>
@@ -16219,7 +17371,7 @@
                 <a:ea typeface="Trebuchet MS" pitchFamily="34" charset="-122"/>
                 <a:cs typeface="Trebuchet MS" pitchFamily="34" charset="-120"/>
               </a:rPr>
-              <a:t>  punctuation marks</a:t>
+              <a:t>  punctuation mark</a:t>
             </a:r>
             <a:endParaRPr lang="en-US" sz="2800" dirty="0"/>
           </a:p>
@@ -16511,7 +17663,7 @@
                 <a:ea typeface="Calibri" pitchFamily="34" charset="-122"/>
                 <a:cs typeface="Calibri" pitchFamily="34" charset="-120"/>
               </a:rPr>
-              <a:t>Word Labs  •  wordlabs.app  •  Root: 'play' = to engage in fun activity</a:t>
+              <a:t>Word Labs  •  wordlabs.app  •  Root: 'play' = to take part in a game; to have fun</a:t>
             </a:r>
             <a:endParaRPr lang="en-US" sz="800" dirty="0"/>
           </a:p>
@@ -16623,7 +17775,7 @@
                 <a:ea typeface="Calibri" pitchFamily="34" charset="-122"/>
                 <a:cs typeface="Calibri" pitchFamily="34" charset="-120"/>
               </a:rPr>
-              <a:t>The </a:t>
+              <a:t>After the rain stopped, the pitch was </a:t>
             </a:r>
             <a:pPr algn="l" indent="0" marL="0">
               <a:buNone/>
@@ -16640,7 +17792,7 @@
                 <a:ea typeface="Calibri" pitchFamily="34" charset="-122"/>
                 <a:cs typeface="Calibri" pitchFamily="34" charset="-120"/>
               </a:rPr>
-              <a:t>playwright</a:t>
+              <a:t>playable</a:t>
             </a:r>
             <a:pPr algn="l" indent="0" marL="0">
               <a:buNone/>
@@ -16654,7 +17806,7 @@
                 <a:ea typeface="Calibri" pitchFamily="34" charset="-122"/>
                 <a:cs typeface="Calibri" pitchFamily="34" charset="-120"/>
               </a:rPr>
-              <a:t> wrote a scene where the </a:t>
+              <a:t> again. The danger of the storm was </a:t>
             </a:r>
             <a:pPr algn="l" indent="0" marL="0">
               <a:buNone/>
@@ -16671,7 +17823,7 @@
                 <a:ea typeface="Calibri" pitchFamily="34" charset="-122"/>
                 <a:cs typeface="Calibri" pitchFamily="34" charset="-120"/>
               </a:rPr>
-              <a:t>players</a:t>
+              <a:t>overplayed</a:t>
             </a:r>
             <a:pPr algn="l" indent="0" marL="0">
               <a:buNone/>
@@ -16685,7 +17837,7 @@
                 <a:ea typeface="Calibri" pitchFamily="34" charset="-122"/>
                 <a:cs typeface="Calibri" pitchFamily="34" charset="-120"/>
               </a:rPr>
-              <a:t> performed on the school's new </a:t>
+              <a:t> by some newspapers. We spent the afternoon playing a </a:t>
             </a:r>
             <a:pPr algn="l" indent="0" marL="0">
               <a:buNone/>
@@ -16702,7 +17854,7 @@
                 <a:ea typeface="Calibri" pitchFamily="34" charset="-122"/>
                 <a:cs typeface="Calibri" pitchFamily="34" charset="-120"/>
               </a:rPr>
-              <a:t>playground</a:t>
+              <a:t>multiplayer</a:t>
             </a:r>
             <a:pPr algn="l" indent="0" marL="0">
               <a:buNone/>
@@ -16716,7 +17868,7 @@
                 <a:ea typeface="Calibri" pitchFamily="34" charset="-122"/>
                 <a:cs typeface="Calibri" pitchFamily="34" charset="-120"/>
               </a:rPr>
-              <a:t>.</a:t>
+              <a:t> video game together.</a:t>
             </a:r>
             <a:endParaRPr lang="en-US" sz="1800" dirty="0"/>
           </a:p>
@@ -16871,7 +18023,7 @@
                 <a:ea typeface="Trebuchet MS" pitchFamily="34" charset="-122"/>
                 <a:cs typeface="Trebuchet MS" pitchFamily="34" charset="-120"/>
               </a:rPr>
-              <a:t>playwright</a:t>
+              <a:t>playable</a:t>
             </a:r>
             <a:endParaRPr lang="en-US" sz="1400" dirty="0"/>
           </a:p>
@@ -16999,7 +18151,7 @@
                 <a:ea typeface="Trebuchet MS" pitchFamily="34" charset="-122"/>
                 <a:cs typeface="Trebuchet MS" pitchFamily="34" charset="-120"/>
               </a:rPr>
-              <a:t>players</a:t>
+              <a:t>overplayed</a:t>
             </a:r>
             <a:endParaRPr lang="en-US" sz="1400" dirty="0"/>
           </a:p>
@@ -17127,7 +18279,7 @@
                 <a:ea typeface="Trebuchet MS" pitchFamily="34" charset="-122"/>
                 <a:cs typeface="Trebuchet MS" pitchFamily="34" charset="-120"/>
               </a:rPr>
-              <a:t>playground</a:t>
+              <a:t>multiplayer</a:t>
             </a:r>
             <a:endParaRPr lang="en-US" sz="1400" dirty="0"/>
           </a:p>
@@ -17458,7 +18610,7 @@
                 <a:ea typeface="Calibri" pitchFamily="34" charset="-122"/>
                 <a:cs typeface="Calibri" pitchFamily="34" charset="-120"/>
               </a:rPr>
-              <a:t>Word Labs  •  wordlabs.app  •  Root: 'play' = to engage in fun activity</a:t>
+              <a:t>Word Labs  •  wordlabs.app  •  Root: 'play' = to take part in a game; to have fun</a:t>
             </a:r>
             <a:endParaRPr lang="en-US" sz="800" dirty="0"/>
           </a:p>
@@ -17597,7 +18749,7 @@
                 <a:ea typeface="Trebuchet MS" pitchFamily="34" charset="-122"/>
                 <a:cs typeface="Trebuchet MS" pitchFamily="34" charset="-120"/>
               </a:rPr>
-              <a:t>playwright</a:t>
+              <a:t>playable</a:t>
             </a:r>
             <a:endParaRPr lang="en-US" sz="2800" dirty="0"/>
           </a:p>
@@ -18285,7 +19437,7 @@
                 <a:ea typeface="Calibri" pitchFamily="34" charset="-122"/>
                 <a:cs typeface="Calibri" pitchFamily="34" charset="-120"/>
               </a:rPr>
-              <a:t>Word Labs  •  wordlabs.app  •  Root: 'play' = to engage in fun activity</a:t>
+              <a:t>Word Labs  •  wordlabs.app  •  Root: 'play' = to take part in a game; to have fun</a:t>
             </a:r>
             <a:endParaRPr lang="en-US" sz="800" dirty="0"/>
           </a:p>
@@ -18424,7 +19576,7 @@
                 <a:ea typeface="Trebuchet MS" pitchFamily="34" charset="-122"/>
                 <a:cs typeface="Trebuchet MS" pitchFamily="34" charset="-120"/>
               </a:rPr>
-              <a:t>playwright</a:t>
+              <a:t>playable</a:t>
             </a:r>
             <a:endParaRPr lang="en-US" sz="2800" dirty="0"/>
           </a:p>
@@ -18602,7 +19754,7 @@
                 <a:ea typeface="Calibri" pitchFamily="34" charset="-122"/>
                 <a:cs typeface="Calibri" pitchFamily="34" charset="-120"/>
               </a:rPr>
-              <a:t>to engage in fun activity</a:t>
+              <a:t>to take part in a game; to have fun</a:t>
             </a:r>
             <a:endParaRPr lang="en-US" sz="850" dirty="0"/>
           </a:p>
@@ -18675,7 +19827,7 @@
                 <a:ea typeface="Trebuchet MS" pitchFamily="34" charset="-122"/>
                 <a:cs typeface="Trebuchet MS" pitchFamily="34" charset="-120"/>
               </a:rPr>
-              <a:t>wright</a:t>
+              <a:t>able</a:t>
             </a:r>
             <a:endParaRPr lang="en-US" sz="1300" dirty="0"/>
           </a:p>
@@ -18714,7 +19866,7 @@
                 <a:ea typeface="Calibri" pitchFamily="34" charset="-122"/>
                 <a:cs typeface="Calibri" pitchFamily="34" charset="-120"/>
               </a:rPr>
-              <a:t>a maker or builder of something</a:t>
+              <a:t>able to</a:t>
             </a:r>
             <a:endParaRPr lang="en-US" sz="850" dirty="0"/>
           </a:p>
@@ -19270,7 +20422,7 @@
                 <a:ea typeface="Calibri" pitchFamily="34" charset="-122"/>
                 <a:cs typeface="Calibri" pitchFamily="34" charset="-120"/>
               </a:rPr>
-              <a:t>Word Labs  •  wordlabs.app  •  Root: 'play' = to engage in fun activity</a:t>
+              <a:t>Word Labs  •  wordlabs.app  •  Root: 'play' = to take part in a game; to have fun</a:t>
             </a:r>
             <a:endParaRPr lang="en-US" sz="800" dirty="0"/>
           </a:p>
@@ -19409,7 +20561,7 @@
                 <a:ea typeface="Trebuchet MS" pitchFamily="34" charset="-122"/>
                 <a:cs typeface="Trebuchet MS" pitchFamily="34" charset="-120"/>
               </a:rPr>
-              <a:t>playwright</a:t>
+              <a:t>playable</a:t>
             </a:r>
             <a:endParaRPr lang="en-US" sz="2800" dirty="0"/>
           </a:p>
@@ -19587,7 +20739,7 @@
                 <a:ea typeface="Calibri" pitchFamily="34" charset="-122"/>
                 <a:cs typeface="Calibri" pitchFamily="34" charset="-120"/>
               </a:rPr>
-              <a:t>to engage in fun activity</a:t>
+              <a:t>to take part in a game; to have fun</a:t>
             </a:r>
             <a:endParaRPr lang="en-US" sz="850" dirty="0"/>
           </a:p>
@@ -19660,7 +20812,7 @@
                 <a:ea typeface="Trebuchet MS" pitchFamily="34" charset="-122"/>
                 <a:cs typeface="Trebuchet MS" pitchFamily="34" charset="-120"/>
               </a:rPr>
-              <a:t>wright</a:t>
+              <a:t>able</a:t>
             </a:r>
             <a:endParaRPr lang="en-US" sz="1300" dirty="0"/>
           </a:p>
@@ -19699,7 +20851,7 @@
                 <a:ea typeface="Calibri" pitchFamily="34" charset="-122"/>
                 <a:cs typeface="Calibri" pitchFamily="34" charset="-120"/>
               </a:rPr>
-              <a:t>a maker or builder of something</a:t>
+              <a:t>able to</a:t>
             </a:r>
             <a:endParaRPr lang="en-US" sz="850" dirty="0"/>
           </a:p>
@@ -19806,7 +20958,7 @@
         </p:nvSpPr>
         <p:spPr>
           <a:xfrm>
-            <a:off x="2999232" y="3364992"/>
+            <a:off x="2313432" y="3364992"/>
             <a:ext cx="1645920" cy="475488"/>
           </a:xfrm>
           <a:prstGeom prst="rect">
@@ -19833,7 +20985,7 @@
         </p:nvSpPr>
         <p:spPr>
           <a:xfrm>
-            <a:off x="2999232" y="3364992"/>
+            <a:off x="2313432" y="3364992"/>
             <a:ext cx="1645920" cy="475488"/>
           </a:xfrm>
           <a:prstGeom prst="rect">
@@ -19872,8 +21024,8 @@
         </p:nvSpPr>
         <p:spPr>
           <a:xfrm>
-            <a:off x="4645152" y="3364992"/>
-            <a:ext cx="1097280" cy="475488"/>
+            <a:off x="3959352" y="3364992"/>
+            <a:ext cx="411480" cy="475488"/>
           </a:xfrm>
           <a:prstGeom prst="rect">
             <a:avLst/>
@@ -19911,7 +21063,7 @@
         </p:nvSpPr>
         <p:spPr>
           <a:xfrm>
-            <a:off x="5742432" y="3364992"/>
+            <a:off x="4370832" y="3364992"/>
             <a:ext cx="1645920" cy="475488"/>
           </a:xfrm>
           <a:prstGeom prst="rect">
@@ -19938,7 +21090,7 @@
         </p:nvSpPr>
         <p:spPr>
           <a:xfrm>
-            <a:off x="5742432" y="3364992"/>
+            <a:off x="4370832" y="3364992"/>
             <a:ext cx="1645920" cy="475488"/>
           </a:xfrm>
           <a:prstGeom prst="rect">
@@ -19963,7 +21115,7 @@
                 <a:ea typeface="Trebuchet MS" pitchFamily="34" charset="-122"/>
                 <a:cs typeface="Trebuchet MS" pitchFamily="34" charset="-120"/>
               </a:rPr>
-              <a:t>wright</a:t>
+              <a:t>a</a:t>
             </a:r>
             <a:endParaRPr lang="en-US" sz="1400" dirty="0"/>
           </a:p>
@@ -19971,7 +21123,112 @@
       </p:sp>
       <p:sp>
         <p:nvSpPr>
-          <p:cNvPr id="30" name="Shape 28"/>
+          <p:cNvPr id="30" name="Text 28"/>
+          <p:cNvSpPr/>
+          <p:nvPr/>
+        </p:nvSpPr>
+        <p:spPr>
+          <a:xfrm>
+            <a:off x="6016752" y="3364992"/>
+            <a:ext cx="411480" cy="475488"/>
+          </a:xfrm>
+          <a:prstGeom prst="rect">
+            <a:avLst/>
+          </a:prstGeom>
+          <a:noFill/>
+          <a:ln/>
+        </p:spPr>
+        <p:txBody>
+          <a:bodyPr wrap="square" lIns="0" tIns="0" rIns="0" bIns="0" rtlCol="0" anchor="ctr"/>
+          <a:lstStyle/>
+          <a:p>
+            <a:pPr algn="ctr" indent="0" marL="0">
+              <a:buNone/>
+            </a:pPr>
+            <a:r>
+              <a:rPr lang="en-US" sz="1600" b="1" dirty="0">
+                <a:solidFill>
+                  <a:srgbClr val="0D9488"/>
+                </a:solidFill>
+                <a:latin typeface="Trebuchet MS" pitchFamily="34" charset="0"/>
+                <a:ea typeface="Trebuchet MS" pitchFamily="34" charset="-122"/>
+                <a:cs typeface="Trebuchet MS" pitchFamily="34" charset="-120"/>
+              </a:rPr>
+              <a:t>·</a:t>
+            </a:r>
+            <a:endParaRPr lang="en-US" sz="1600" dirty="0"/>
+          </a:p>
+        </p:txBody>
+      </p:sp>
+      <p:sp>
+        <p:nvSpPr>
+          <p:cNvPr id="31" name="Shape 29"/>
+          <p:cNvSpPr/>
+          <p:nvPr/>
+        </p:nvSpPr>
+        <p:spPr>
+          <a:xfrm>
+            <a:off x="6428232" y="3364992"/>
+            <a:ext cx="1645920" cy="475488"/>
+          </a:xfrm>
+          <a:prstGeom prst="rect">
+            <a:avLst>
+              <a:gd name="adj" fmla="val 9615"/>
+            </a:avLst>
+          </a:prstGeom>
+          <a:solidFill>
+            <a:srgbClr val="FFFFFF"/>
+          </a:solidFill>
+          <a:ln w="12700">
+            <a:solidFill>
+              <a:srgbClr val="0D9488"/>
+            </a:solidFill>
+            <a:prstDash val="solid"/>
+          </a:ln>
+        </p:spPr>
+      </p:sp>
+      <p:sp>
+        <p:nvSpPr>
+          <p:cNvPr id="32" name="Text 30"/>
+          <p:cNvSpPr/>
+          <p:nvPr/>
+        </p:nvSpPr>
+        <p:spPr>
+          <a:xfrm>
+            <a:off x="6428232" y="3364992"/>
+            <a:ext cx="1645920" cy="475488"/>
+          </a:xfrm>
+          <a:prstGeom prst="rect">
+            <a:avLst/>
+          </a:prstGeom>
+          <a:noFill/>
+          <a:ln/>
+        </p:spPr>
+        <p:txBody>
+          <a:bodyPr wrap="square" lIns="0" tIns="0" rIns="0" bIns="0" rtlCol="0" anchor="ctr"/>
+          <a:lstStyle/>
+          <a:p>
+            <a:pPr algn="ctr" indent="0" marL="0">
+              <a:buNone/>
+            </a:pPr>
+            <a:r>
+              <a:rPr lang="en-US" sz="1400" b="1" dirty="0">
+                <a:solidFill>
+                  <a:srgbClr val="0D9488"/>
+                </a:solidFill>
+                <a:latin typeface="Trebuchet MS" pitchFamily="34" charset="0"/>
+                <a:ea typeface="Trebuchet MS" pitchFamily="34" charset="-122"/>
+                <a:cs typeface="Trebuchet MS" pitchFamily="34" charset="-120"/>
+              </a:rPr>
+              <a:t>ble</a:t>
+            </a:r>
+            <a:endParaRPr lang="en-US" sz="1400" dirty="0"/>
+          </a:p>
+        </p:txBody>
+      </p:sp>
+      <p:sp>
+        <p:nvSpPr>
+          <p:cNvPr id="33" name="Shape 31"/>
           <p:cNvSpPr/>
           <p:nvPr/>
         </p:nvSpPr>
@@ -19998,7 +21255,7 @@
       </p:sp>
       <p:sp>
         <p:nvSpPr>
-          <p:cNvPr id="31" name="Text 29"/>
+          <p:cNvPr id="34" name="Text 32"/>
           <p:cNvSpPr/>
           <p:nvPr/>
         </p:nvSpPr>
@@ -20037,7 +21294,7 @@
       </p:sp>
       <p:sp>
         <p:nvSpPr>
-          <p:cNvPr id="32" name="Shape 30"/>
+          <p:cNvPr id="35" name="Shape 33"/>
           <p:cNvSpPr/>
           <p:nvPr/>
         </p:nvSpPr>
@@ -20064,7 +21321,7 @@
       </p:sp>
       <p:sp>
         <p:nvSpPr>
-          <p:cNvPr id="33" name="Text 31"/>
+          <p:cNvPr id="36" name="Text 34"/>
           <p:cNvSpPr/>
           <p:nvPr/>
         </p:nvSpPr>
@@ -20387,7 +21644,7 @@
                 <a:ea typeface="Calibri" pitchFamily="34" charset="-122"/>
                 <a:cs typeface="Calibri" pitchFamily="34" charset="-120"/>
               </a:rPr>
-              <a:t>Word Labs  •  wordlabs.app  •  Root: 'play' = to engage in fun activity</a:t>
+              <a:t>Word Labs  •  wordlabs.app  •  Root: 'play' = to take part in a game; to have fun</a:t>
             </a:r>
             <a:endParaRPr lang="en-US" sz="800" dirty="0"/>
           </a:p>
@@ -20526,7 +21783,7 @@
                 <a:ea typeface="Trebuchet MS" pitchFamily="34" charset="-122"/>
                 <a:cs typeface="Trebuchet MS" pitchFamily="34" charset="-120"/>
               </a:rPr>
-              <a:t>playwright</a:t>
+              <a:t>playable</a:t>
             </a:r>
             <a:endParaRPr lang="en-US" sz="2800" dirty="0"/>
           </a:p>
@@ -20704,7 +21961,7 @@
                 <a:ea typeface="Calibri" pitchFamily="34" charset="-122"/>
                 <a:cs typeface="Calibri" pitchFamily="34" charset="-120"/>
               </a:rPr>
-              <a:t>to engage in fun activity</a:t>
+              <a:t>to take part in a game; to have fun</a:t>
             </a:r>
             <a:endParaRPr lang="en-US" sz="850" dirty="0"/>
           </a:p>
@@ -20777,7 +22034,7 @@
                 <a:ea typeface="Trebuchet MS" pitchFamily="34" charset="-122"/>
                 <a:cs typeface="Trebuchet MS" pitchFamily="34" charset="-120"/>
               </a:rPr>
-              <a:t>wright</a:t>
+              <a:t>able</a:t>
             </a:r>
             <a:endParaRPr lang="en-US" sz="1300" dirty="0"/>
           </a:p>
@@ -20816,7 +22073,7 @@
                 <a:ea typeface="Calibri" pitchFamily="34" charset="-122"/>
                 <a:cs typeface="Calibri" pitchFamily="34" charset="-120"/>
               </a:rPr>
-              <a:t>a maker or builder of something</a:t>
+              <a:t>able to</a:t>
             </a:r>
             <a:endParaRPr lang="en-US" sz="850" dirty="0"/>
           </a:p>
@@ -20923,7 +22180,7 @@
         </p:nvSpPr>
         <p:spPr>
           <a:xfrm>
-            <a:off x="2999232" y="3364992"/>
+            <a:off x="2313432" y="3364992"/>
             <a:ext cx="1645920" cy="475488"/>
           </a:xfrm>
           <a:prstGeom prst="rect">
@@ -20950,7 +22207,7 @@
         </p:nvSpPr>
         <p:spPr>
           <a:xfrm>
-            <a:off x="2999232" y="3364992"/>
+            <a:off x="2313432" y="3364992"/>
             <a:ext cx="1645920" cy="475488"/>
           </a:xfrm>
           <a:prstGeom prst="rect">
@@ -20989,8 +22246,8 @@
         </p:nvSpPr>
         <p:spPr>
           <a:xfrm>
-            <a:off x="4645152" y="3364992"/>
-            <a:ext cx="1097280" cy="475488"/>
+            <a:off x="3959352" y="3364992"/>
+            <a:ext cx="411480" cy="475488"/>
           </a:xfrm>
           <a:prstGeom prst="rect">
             <a:avLst/>
@@ -21028,7 +22285,7 @@
         </p:nvSpPr>
         <p:spPr>
           <a:xfrm>
-            <a:off x="5742432" y="3364992"/>
+            <a:off x="4370832" y="3364992"/>
             <a:ext cx="1645920" cy="475488"/>
           </a:xfrm>
           <a:prstGeom prst="rect">
@@ -21055,7 +22312,7 @@
         </p:nvSpPr>
         <p:spPr>
           <a:xfrm>
-            <a:off x="5742432" y="3364992"/>
+            <a:off x="4370832" y="3364992"/>
             <a:ext cx="1645920" cy="475488"/>
           </a:xfrm>
           <a:prstGeom prst="rect">
@@ -21080,7 +22337,7 @@
                 <a:ea typeface="Trebuchet MS" pitchFamily="34" charset="-122"/>
                 <a:cs typeface="Trebuchet MS" pitchFamily="34" charset="-120"/>
               </a:rPr>
-              <a:t>wright</a:t>
+              <a:t>a</a:t>
             </a:r>
             <a:endParaRPr lang="en-US" sz="1400" dirty="0"/>
           </a:p>
@@ -21088,7 +22345,112 @@
       </p:sp>
       <p:sp>
         <p:nvSpPr>
-          <p:cNvPr id="30" name="Shape 28"/>
+          <p:cNvPr id="30" name="Text 28"/>
+          <p:cNvSpPr/>
+          <p:nvPr/>
+        </p:nvSpPr>
+        <p:spPr>
+          <a:xfrm>
+            <a:off x="6016752" y="3364992"/>
+            <a:ext cx="411480" cy="475488"/>
+          </a:xfrm>
+          <a:prstGeom prst="rect">
+            <a:avLst/>
+          </a:prstGeom>
+          <a:noFill/>
+          <a:ln/>
+        </p:spPr>
+        <p:txBody>
+          <a:bodyPr wrap="square" lIns="0" tIns="0" rIns="0" bIns="0" rtlCol="0" anchor="ctr"/>
+          <a:lstStyle/>
+          <a:p>
+            <a:pPr algn="ctr" indent="0" marL="0">
+              <a:buNone/>
+            </a:pPr>
+            <a:r>
+              <a:rPr lang="en-US" sz="1600" b="1" dirty="0">
+                <a:solidFill>
+                  <a:srgbClr val="0D9488"/>
+                </a:solidFill>
+                <a:latin typeface="Trebuchet MS" pitchFamily="34" charset="0"/>
+                <a:ea typeface="Trebuchet MS" pitchFamily="34" charset="-122"/>
+                <a:cs typeface="Trebuchet MS" pitchFamily="34" charset="-120"/>
+              </a:rPr>
+              <a:t>·</a:t>
+            </a:r>
+            <a:endParaRPr lang="en-US" sz="1600" dirty="0"/>
+          </a:p>
+        </p:txBody>
+      </p:sp>
+      <p:sp>
+        <p:nvSpPr>
+          <p:cNvPr id="31" name="Shape 29"/>
+          <p:cNvSpPr/>
+          <p:nvPr/>
+        </p:nvSpPr>
+        <p:spPr>
+          <a:xfrm>
+            <a:off x="6428232" y="3364992"/>
+            <a:ext cx="1645920" cy="475488"/>
+          </a:xfrm>
+          <a:prstGeom prst="rect">
+            <a:avLst>
+              <a:gd name="adj" fmla="val 9615"/>
+            </a:avLst>
+          </a:prstGeom>
+          <a:solidFill>
+            <a:srgbClr val="FFFFFF"/>
+          </a:solidFill>
+          <a:ln w="12700">
+            <a:solidFill>
+              <a:srgbClr val="0D9488"/>
+            </a:solidFill>
+            <a:prstDash val="solid"/>
+          </a:ln>
+        </p:spPr>
+      </p:sp>
+      <p:sp>
+        <p:nvSpPr>
+          <p:cNvPr id="32" name="Text 30"/>
+          <p:cNvSpPr/>
+          <p:nvPr/>
+        </p:nvSpPr>
+        <p:spPr>
+          <a:xfrm>
+            <a:off x="6428232" y="3364992"/>
+            <a:ext cx="1645920" cy="475488"/>
+          </a:xfrm>
+          <a:prstGeom prst="rect">
+            <a:avLst/>
+          </a:prstGeom>
+          <a:noFill/>
+          <a:ln/>
+        </p:spPr>
+        <p:txBody>
+          <a:bodyPr wrap="square" lIns="0" tIns="0" rIns="0" bIns="0" rtlCol="0" anchor="ctr"/>
+          <a:lstStyle/>
+          <a:p>
+            <a:pPr algn="ctr" indent="0" marL="0">
+              <a:buNone/>
+            </a:pPr>
+            <a:r>
+              <a:rPr lang="en-US" sz="1400" b="1" dirty="0">
+                <a:solidFill>
+                  <a:srgbClr val="0D9488"/>
+                </a:solidFill>
+                <a:latin typeface="Trebuchet MS" pitchFamily="34" charset="0"/>
+                <a:ea typeface="Trebuchet MS" pitchFamily="34" charset="-122"/>
+                <a:cs typeface="Trebuchet MS" pitchFamily="34" charset="-120"/>
+              </a:rPr>
+              <a:t>ble</a:t>
+            </a:r>
+            <a:endParaRPr lang="en-US" sz="1400" dirty="0"/>
+          </a:p>
+        </p:txBody>
+      </p:sp>
+      <p:sp>
+        <p:nvSpPr>
+          <p:cNvPr id="33" name="Shape 31"/>
           <p:cNvSpPr/>
           <p:nvPr/>
         </p:nvSpPr>
@@ -21115,7 +22477,7 @@
       </p:sp>
       <p:sp>
         <p:nvSpPr>
-          <p:cNvPr id="31" name="Text 29"/>
+          <p:cNvPr id="34" name="Text 32"/>
           <p:cNvSpPr/>
           <p:nvPr/>
         </p:nvSpPr>
@@ -21154,18 +22516,18 @@
       </p:sp>
       <p:sp>
         <p:nvSpPr>
-          <p:cNvPr id="32" name="Shape 30"/>
+          <p:cNvPr id="35" name="Shape 33"/>
           <p:cNvSpPr/>
           <p:nvPr/>
         </p:nvSpPr>
         <p:spPr>
           <a:xfrm>
             <a:off x="1874520" y="4096512"/>
-            <a:ext cx="6903720" cy="804672"/>
+            <a:ext cx="6903720" cy="658368"/>
           </a:xfrm>
           <a:prstGeom prst="rect">
             <a:avLst>
-              <a:gd name="adj" fmla="val 6818"/>
+              <a:gd name="adj" fmla="val 8333"/>
             </a:avLst>
           </a:prstGeom>
           <a:solidFill>
@@ -21181,18 +22543,18 @@
       </p:sp>
       <p:sp>
         <p:nvSpPr>
-          <p:cNvPr id="33" name="Shape 31"/>
-          <p:cNvSpPr/>
-          <p:nvPr/>
-        </p:nvSpPr>
-        <p:spPr>
-          <a:xfrm>
-            <a:off x="2427732" y="4169664"/>
-            <a:ext cx="685800" cy="384048"/>
+          <p:cNvPr id="36" name="Shape 34"/>
+          <p:cNvSpPr/>
+          <p:nvPr/>
+        </p:nvSpPr>
+        <p:spPr>
+          <a:xfrm>
+            <a:off x="2254649" y="4169664"/>
+            <a:ext cx="685800" cy="475488"/>
           </a:xfrm>
           <a:prstGeom prst="rect">
             <a:avLst>
-              <a:gd name="adj" fmla="val 9524"/>
+              <a:gd name="adj" fmla="val 7692"/>
             </a:avLst>
           </a:prstGeom>
           <a:solidFill>
@@ -21208,14 +22570,14 @@
       </p:sp>
       <p:sp>
         <p:nvSpPr>
-          <p:cNvPr id="34" name="Text 32"/>
-          <p:cNvSpPr/>
-          <p:nvPr/>
-        </p:nvSpPr>
-        <p:spPr>
-          <a:xfrm>
-            <a:off x="2427732" y="4169664"/>
-            <a:ext cx="685800" cy="384048"/>
+          <p:cNvPr id="37" name="Text 35"/>
+          <p:cNvSpPr/>
+          <p:nvPr/>
+        </p:nvSpPr>
+        <p:spPr>
+          <a:xfrm>
+            <a:off x="2254649" y="4169664"/>
+            <a:ext cx="685800" cy="475488"/>
           </a:xfrm>
           <a:prstGeom prst="rect">
             <a:avLst/>
@@ -21239,7 +22601,7 @@
                 <a:ea typeface="Trebuchet MS" pitchFamily="34" charset="-122"/>
                 <a:cs typeface="Trebuchet MS" pitchFamily="34" charset="-120"/>
               </a:rPr>
-              <a:t>pl</a:t>
+              <a:t>p</a:t>
             </a:r>
             <a:endParaRPr lang="en-US" sz="900" dirty="0"/>
           </a:p>
@@ -21247,18 +22609,18 @@
       </p:sp>
       <p:sp>
         <p:nvSpPr>
-          <p:cNvPr id="35" name="Shape 33"/>
-          <p:cNvSpPr/>
-          <p:nvPr/>
-        </p:nvSpPr>
-        <p:spPr>
-          <a:xfrm>
-            <a:off x="3639312" y="4169664"/>
-            <a:ext cx="685800" cy="384048"/>
+          <p:cNvPr id="38" name="Shape 36"/>
+          <p:cNvSpPr/>
+          <p:nvPr/>
+        </p:nvSpPr>
+        <p:spPr>
+          <a:xfrm>
+            <a:off x="3293146" y="4169664"/>
+            <a:ext cx="685800" cy="475488"/>
           </a:xfrm>
           <a:prstGeom prst="rect">
             <a:avLst>
-              <a:gd name="adj" fmla="val 9524"/>
+              <a:gd name="adj" fmla="val 7692"/>
             </a:avLst>
           </a:prstGeom>
           <a:solidFill>
@@ -21274,14 +22636,14 @@
       </p:sp>
       <p:sp>
         <p:nvSpPr>
-          <p:cNvPr id="36" name="Text 34"/>
-          <p:cNvSpPr/>
-          <p:nvPr/>
-        </p:nvSpPr>
-        <p:spPr>
-          <a:xfrm>
-            <a:off x="3639312" y="4169664"/>
-            <a:ext cx="685800" cy="384048"/>
+          <p:cNvPr id="39" name="Text 37"/>
+          <p:cNvSpPr/>
+          <p:nvPr/>
+        </p:nvSpPr>
+        <p:spPr>
+          <a:xfrm>
+            <a:off x="3293146" y="4169664"/>
+            <a:ext cx="685800" cy="475488"/>
           </a:xfrm>
           <a:prstGeom prst="rect">
             <a:avLst/>
@@ -21305,7 +22667,7 @@
                 <a:ea typeface="Trebuchet MS" pitchFamily="34" charset="-122"/>
                 <a:cs typeface="Trebuchet MS" pitchFamily="34" charset="-120"/>
               </a:rPr>
-              <a:t>ay</a:t>
+              <a:t>l</a:t>
             </a:r>
             <a:endParaRPr lang="en-US" sz="900" dirty="0"/>
           </a:p>
@@ -21313,18 +22675,18 @@
       </p:sp>
       <p:sp>
         <p:nvSpPr>
-          <p:cNvPr id="37" name="Shape 35"/>
-          <p:cNvSpPr/>
-          <p:nvPr/>
-        </p:nvSpPr>
-        <p:spPr>
-          <a:xfrm>
-            <a:off x="4850892" y="4169664"/>
-            <a:ext cx="685800" cy="384048"/>
+          <p:cNvPr id="40" name="Shape 38"/>
+          <p:cNvSpPr/>
+          <p:nvPr/>
+        </p:nvSpPr>
+        <p:spPr>
+          <a:xfrm>
+            <a:off x="4331643" y="4169664"/>
+            <a:ext cx="685800" cy="475488"/>
           </a:xfrm>
           <a:prstGeom prst="rect">
             <a:avLst>
-              <a:gd name="adj" fmla="val 9524"/>
+              <a:gd name="adj" fmla="val 7692"/>
             </a:avLst>
           </a:prstGeom>
           <a:solidFill>
@@ -21340,14 +22702,14 @@
       </p:sp>
       <p:sp>
         <p:nvSpPr>
-          <p:cNvPr id="38" name="Text 36"/>
-          <p:cNvSpPr/>
-          <p:nvPr/>
-        </p:nvSpPr>
-        <p:spPr>
-          <a:xfrm>
-            <a:off x="4850892" y="4169664"/>
-            <a:ext cx="685800" cy="384048"/>
+          <p:cNvPr id="41" name="Text 39"/>
+          <p:cNvSpPr/>
+          <p:nvPr/>
+        </p:nvSpPr>
+        <p:spPr>
+          <a:xfrm>
+            <a:off x="4331643" y="4169664"/>
+            <a:ext cx="685800" cy="475488"/>
           </a:xfrm>
           <a:prstGeom prst="rect">
             <a:avLst/>
@@ -21371,7 +22733,7 @@
                 <a:ea typeface="Trebuchet MS" pitchFamily="34" charset="-122"/>
                 <a:cs typeface="Trebuchet MS" pitchFamily="34" charset="-120"/>
               </a:rPr>
-              <a:t>wr</a:t>
+              <a:t>ay</a:t>
             </a:r>
             <a:endParaRPr lang="en-US" sz="900" dirty="0"/>
           </a:p>
@@ -21379,57 +22741,18 @@
       </p:sp>
       <p:sp>
         <p:nvSpPr>
-          <p:cNvPr id="39" name="Text 37"/>
-          <p:cNvSpPr/>
-          <p:nvPr/>
-        </p:nvSpPr>
-        <p:spPr>
-          <a:xfrm>
-            <a:off x="4850892" y="4572000"/>
-            <a:ext cx="685800" cy="219456"/>
-          </a:xfrm>
-          <a:prstGeom prst="rect">
-            <a:avLst/>
-          </a:prstGeom>
-          <a:noFill/>
-          <a:ln/>
-        </p:spPr>
-        <p:txBody>
-          <a:bodyPr wrap="square" lIns="0" tIns="0" rIns="0" bIns="0" rtlCol="0" anchor="t"/>
-          <a:lstStyle/>
-          <a:p>
-            <a:pPr algn="ctr" indent="0" marL="0">
-              <a:buNone/>
-            </a:pPr>
-            <a:r>
-              <a:rPr lang="en-US" sz="750" i="1" dirty="0">
-                <a:solidFill>
-                  <a:srgbClr val="94A3B8"/>
-                </a:solidFill>
-                <a:latin typeface="Calibri" pitchFamily="34" charset="0"/>
-                <a:ea typeface="Calibri" pitchFamily="34" charset="-122"/>
-                <a:cs typeface="Calibri" pitchFamily="34" charset="-120"/>
-              </a:rPr>
-              <a:t>/r/</a:t>
-            </a:r>
-            <a:endParaRPr lang="en-US" sz="750" dirty="0"/>
-          </a:p>
-        </p:txBody>
-      </p:sp>
-      <p:sp>
-        <p:nvSpPr>
-          <p:cNvPr id="40" name="Shape 38"/>
-          <p:cNvSpPr/>
-          <p:nvPr/>
-        </p:nvSpPr>
-        <p:spPr>
-          <a:xfrm>
-            <a:off x="6062472" y="4169664"/>
-            <a:ext cx="685800" cy="384048"/>
+          <p:cNvPr id="42" name="Shape 40"/>
+          <p:cNvSpPr/>
+          <p:nvPr/>
+        </p:nvSpPr>
+        <p:spPr>
+          <a:xfrm>
+            <a:off x="5370141" y="4169664"/>
+            <a:ext cx="685800" cy="475488"/>
           </a:xfrm>
           <a:prstGeom prst="rect">
             <a:avLst>
-              <a:gd name="adj" fmla="val 9524"/>
+              <a:gd name="adj" fmla="val 7692"/>
             </a:avLst>
           </a:prstGeom>
           <a:solidFill>
@@ -21445,14 +22768,14 @@
       </p:sp>
       <p:sp>
         <p:nvSpPr>
-          <p:cNvPr id="41" name="Text 39"/>
-          <p:cNvSpPr/>
-          <p:nvPr/>
-        </p:nvSpPr>
-        <p:spPr>
-          <a:xfrm>
-            <a:off x="6062472" y="4169664"/>
-            <a:ext cx="685800" cy="384048"/>
+          <p:cNvPr id="43" name="Text 41"/>
+          <p:cNvSpPr/>
+          <p:nvPr/>
+        </p:nvSpPr>
+        <p:spPr>
+          <a:xfrm>
+            <a:off x="5370141" y="4169664"/>
+            <a:ext cx="685800" cy="475488"/>
           </a:xfrm>
           <a:prstGeom prst="rect">
             <a:avLst/>
@@ -21476,7 +22799,7 @@
                 <a:ea typeface="Trebuchet MS" pitchFamily="34" charset="-122"/>
                 <a:cs typeface="Trebuchet MS" pitchFamily="34" charset="-120"/>
               </a:rPr>
-              <a:t>igh</a:t>
+              <a:t>a</a:t>
             </a:r>
             <a:endParaRPr lang="en-US" sz="900" dirty="0"/>
           </a:p>
@@ -21484,57 +22807,18 @@
       </p:sp>
       <p:sp>
         <p:nvSpPr>
-          <p:cNvPr id="42" name="Text 40"/>
-          <p:cNvSpPr/>
-          <p:nvPr/>
-        </p:nvSpPr>
-        <p:spPr>
-          <a:xfrm>
-            <a:off x="6062472" y="4572000"/>
-            <a:ext cx="685800" cy="219456"/>
-          </a:xfrm>
-          <a:prstGeom prst="rect">
-            <a:avLst/>
-          </a:prstGeom>
-          <a:noFill/>
-          <a:ln/>
-        </p:spPr>
-        <p:txBody>
-          <a:bodyPr wrap="square" lIns="0" tIns="0" rIns="0" bIns="0" rtlCol="0" anchor="t"/>
-          <a:lstStyle/>
-          <a:p>
-            <a:pPr algn="ctr" indent="0" marL="0">
-              <a:buNone/>
-            </a:pPr>
-            <a:r>
-              <a:rPr lang="en-US" sz="750" i="1" dirty="0">
-                <a:solidFill>
-                  <a:srgbClr val="94A3B8"/>
-                </a:solidFill>
-                <a:latin typeface="Calibri" pitchFamily="34" charset="0"/>
-                <a:ea typeface="Calibri" pitchFamily="34" charset="-122"/>
-                <a:cs typeface="Calibri" pitchFamily="34" charset="-120"/>
-              </a:rPr>
-              <a:t>/eye/</a:t>
-            </a:r>
-            <a:endParaRPr lang="en-US" sz="750" dirty="0"/>
-          </a:p>
-        </p:txBody>
-      </p:sp>
-      <p:sp>
-        <p:nvSpPr>
-          <p:cNvPr id="43" name="Shape 41"/>
-          <p:cNvSpPr/>
-          <p:nvPr/>
-        </p:nvSpPr>
-        <p:spPr>
-          <a:xfrm>
-            <a:off x="7274052" y="4169664"/>
-            <a:ext cx="685800" cy="384048"/>
+          <p:cNvPr id="44" name="Shape 42"/>
+          <p:cNvSpPr/>
+          <p:nvPr/>
+        </p:nvSpPr>
+        <p:spPr>
+          <a:xfrm>
+            <a:off x="6408638" y="4169664"/>
+            <a:ext cx="685800" cy="475488"/>
           </a:xfrm>
           <a:prstGeom prst="rect">
             <a:avLst>
-              <a:gd name="adj" fmla="val 9524"/>
+              <a:gd name="adj" fmla="val 7692"/>
             </a:avLst>
           </a:prstGeom>
           <a:solidFill>
@@ -21550,14 +22834,14 @@
       </p:sp>
       <p:sp>
         <p:nvSpPr>
-          <p:cNvPr id="44" name="Text 42"/>
-          <p:cNvSpPr/>
-          <p:nvPr/>
-        </p:nvSpPr>
-        <p:spPr>
-          <a:xfrm>
-            <a:off x="7274052" y="4169664"/>
-            <a:ext cx="685800" cy="384048"/>
+          <p:cNvPr id="45" name="Text 43"/>
+          <p:cNvSpPr/>
+          <p:nvPr/>
+        </p:nvSpPr>
+        <p:spPr>
+          <a:xfrm>
+            <a:off x="6408638" y="4169664"/>
+            <a:ext cx="685800" cy="475488"/>
           </a:xfrm>
           <a:prstGeom prst="rect">
             <a:avLst/>
@@ -21581,7 +22865,73 @@
                 <a:ea typeface="Trebuchet MS" pitchFamily="34" charset="-122"/>
                 <a:cs typeface="Trebuchet MS" pitchFamily="34" charset="-120"/>
               </a:rPr>
-              <a:t>t</a:t>
+              <a:t>b</a:t>
+            </a:r>
+            <a:endParaRPr lang="en-US" sz="900" dirty="0"/>
+          </a:p>
+        </p:txBody>
+      </p:sp>
+      <p:sp>
+        <p:nvSpPr>
+          <p:cNvPr id="46" name="Shape 44"/>
+          <p:cNvSpPr/>
+          <p:nvPr/>
+        </p:nvSpPr>
+        <p:spPr>
+          <a:xfrm>
+            <a:off x="7447135" y="4169664"/>
+            <a:ext cx="685800" cy="475488"/>
+          </a:xfrm>
+          <a:prstGeom prst="rect">
+            <a:avLst>
+              <a:gd name="adj" fmla="val 7692"/>
+            </a:avLst>
+          </a:prstGeom>
+          <a:solidFill>
+            <a:srgbClr val="FFFFFF"/>
+          </a:solidFill>
+          <a:ln w="12700">
+            <a:solidFill>
+              <a:srgbClr val="DB2777"/>
+            </a:solidFill>
+            <a:prstDash val="solid"/>
+          </a:ln>
+        </p:spPr>
+      </p:sp>
+      <p:sp>
+        <p:nvSpPr>
+          <p:cNvPr id="47" name="Text 45"/>
+          <p:cNvSpPr/>
+          <p:nvPr/>
+        </p:nvSpPr>
+        <p:spPr>
+          <a:xfrm>
+            <a:off x="7447135" y="4169664"/>
+            <a:ext cx="685800" cy="475488"/>
+          </a:xfrm>
+          <a:prstGeom prst="rect">
+            <a:avLst/>
+          </a:prstGeom>
+          <a:noFill/>
+          <a:ln/>
+        </p:spPr>
+        <p:txBody>
+          <a:bodyPr wrap="square" lIns="0" tIns="0" rIns="0" bIns="0" rtlCol="0" anchor="ctr"/>
+          <a:lstStyle/>
+          <a:p>
+            <a:pPr algn="ctr" indent="0" marL="0">
+              <a:buNone/>
+            </a:pPr>
+            <a:r>
+              <a:rPr lang="en-US" sz="900" b="1" dirty="0">
+                <a:solidFill>
+                  <a:srgbClr val="9D174D"/>
+                </a:solidFill>
+                <a:latin typeface="Trebuchet MS" pitchFamily="34" charset="0"/>
+                <a:ea typeface="Trebuchet MS" pitchFamily="34" charset="-122"/>
+                <a:cs typeface="Trebuchet MS" pitchFamily="34" charset="-120"/>
+              </a:rPr>
+              <a:t>le</a:t>
             </a:r>
             <a:endParaRPr lang="en-US" sz="900" dirty="0"/>
           </a:p>
@@ -21873,7 +23223,7 @@
                 <a:ea typeface="Calibri" pitchFamily="34" charset="-122"/>
                 <a:cs typeface="Calibri" pitchFamily="34" charset="-120"/>
               </a:rPr>
-              <a:t>Word Labs  •  wordlabs.app  •  Root: 'play' = to engage in fun activity</a:t>
+              <a:t>Word Labs  •  wordlabs.app  •  Root: 'play' = to take part in a game; to have fun</a:t>
             </a:r>
             <a:endParaRPr lang="en-US" sz="800" dirty="0"/>
           </a:p>
@@ -22012,7 +23362,7 @@
                 <a:ea typeface="Trebuchet MS" pitchFamily="34" charset="-122"/>
                 <a:cs typeface="Trebuchet MS" pitchFamily="34" charset="-120"/>
               </a:rPr>
-              <a:t>players</a:t>
+              <a:t>overplayed</a:t>
             </a:r>
             <a:endParaRPr lang="en-US" sz="2800" dirty="0"/>
           </a:p>
@@ -22700,7 +24050,7 @@
                 <a:ea typeface="Calibri" pitchFamily="34" charset="-122"/>
                 <a:cs typeface="Calibri" pitchFamily="34" charset="-120"/>
               </a:rPr>
-              <a:t>Word Labs  •  wordlabs.app  •  Root: 'play' = to engage in fun activity</a:t>
+              <a:t>Word Labs  •  wordlabs.app  •  Root: 'play' = to take part in a game; to have fun</a:t>
             </a:r>
             <a:endParaRPr lang="en-US" sz="800" dirty="0"/>
           </a:p>
@@ -22839,7 +24189,7 @@
                 <a:ea typeface="Trebuchet MS" pitchFamily="34" charset="-122"/>
                 <a:cs typeface="Trebuchet MS" pitchFamily="34" charset="-120"/>
               </a:rPr>
-              <a:t>players</a:t>
+              <a:t>overplayed</a:t>
             </a:r>
             <a:endParaRPr lang="en-US" sz="2800" dirty="0"/>
           </a:p>
@@ -22928,11 +24278,11 @@
             </a:avLst>
           </a:prstGeom>
           <a:solidFill>
-            <a:srgbClr val="CCFBF1"/>
+            <a:srgbClr val="DDD6FE"/>
           </a:solidFill>
           <a:ln w="19050">
             <a:solidFill>
-              <a:srgbClr val="0D9488"/>
+              <a:srgbClr val="7C3AED"/>
             </a:solidFill>
             <a:prstDash val="solid"/>
           </a:ln>
@@ -22972,13 +24322,13 @@
             <a:r>
               <a:rPr lang="en-US" sz="1300" b="1" dirty="0">
                 <a:solidFill>
-                  <a:srgbClr val="0F766E"/>
+                  <a:srgbClr val="4C1D95"/>
                 </a:solidFill>
                 <a:latin typeface="Trebuchet MS" pitchFamily="34" charset="0"/>
                 <a:ea typeface="Trebuchet MS" pitchFamily="34" charset="-122"/>
                 <a:cs typeface="Trebuchet MS" pitchFamily="34" charset="-120"/>
               </a:rPr>
-              <a:t>play</a:t>
+              <a:t>over</a:t>
             </a:r>
             <a:endParaRPr lang="en-US" sz="1300" dirty="0"/>
           </a:p>
@@ -23017,7 +24367,7 @@
                 <a:ea typeface="Calibri" pitchFamily="34" charset="-122"/>
                 <a:cs typeface="Calibri" pitchFamily="34" charset="-120"/>
               </a:rPr>
-              <a:t>to engage in fun activity</a:t>
+              <a:t>too much</a:t>
             </a:r>
             <a:endParaRPr lang="en-US" sz="850" dirty="0"/>
           </a:p>
@@ -23040,11 +24390,11 @@
             </a:avLst>
           </a:prstGeom>
           <a:solidFill>
-            <a:srgbClr val="FCE7F3"/>
+            <a:srgbClr val="CCFBF1"/>
           </a:solidFill>
           <a:ln w="19050">
             <a:solidFill>
-              <a:srgbClr val="DB2777"/>
+              <a:srgbClr val="0D9488"/>
             </a:solidFill>
             <a:prstDash val="solid"/>
           </a:ln>
@@ -23084,13 +24434,13 @@
             <a:r>
               <a:rPr lang="en-US" sz="1300" b="1" dirty="0">
                 <a:solidFill>
-                  <a:srgbClr val="9D174D"/>
+                  <a:srgbClr val="0F766E"/>
                 </a:solidFill>
                 <a:latin typeface="Trebuchet MS" pitchFamily="34" charset="0"/>
                 <a:ea typeface="Trebuchet MS" pitchFamily="34" charset="-122"/>
                 <a:cs typeface="Trebuchet MS" pitchFamily="34" charset="-120"/>
               </a:rPr>
-              <a:t>er</a:t>
+              <a:t>play</a:t>
             </a:r>
             <a:endParaRPr lang="en-US" sz="1300" dirty="0"/>
           </a:p>
@@ -23129,7 +24479,7 @@
                 <a:ea typeface="Calibri" pitchFamily="34" charset="-122"/>
                 <a:cs typeface="Calibri" pitchFamily="34" charset="-120"/>
               </a:rPr>
-              <a:t>a person who does something</a:t>
+              <a:t>to take part in a game; to have fun</a:t>
             </a:r>
             <a:endParaRPr lang="en-US" sz="850" dirty="0"/>
           </a:p>
@@ -23202,7 +24552,7 @@
                 <a:ea typeface="Trebuchet MS" pitchFamily="34" charset="-122"/>
                 <a:cs typeface="Trebuchet MS" pitchFamily="34" charset="-120"/>
               </a:rPr>
-              <a:t>s</a:t>
+              <a:t>ed</a:t>
             </a:r>
             <a:endParaRPr lang="en-US" sz="1300" dirty="0"/>
           </a:p>
@@ -23241,7 +24591,7 @@
                 <a:ea typeface="Calibri" pitchFamily="34" charset="-122"/>
                 <a:cs typeface="Calibri" pitchFamily="34" charset="-120"/>
               </a:rPr>
-              <a:t>more than one</a:t>
+              <a:t>past tense</a:t>
             </a:r>
             <a:endParaRPr lang="en-US" sz="850" dirty="0"/>
           </a:p>
@@ -23797,7 +25147,7 @@
                 <a:ea typeface="Calibri" pitchFamily="34" charset="-122"/>
                 <a:cs typeface="Calibri" pitchFamily="34" charset="-120"/>
               </a:rPr>
-              <a:t>Word Labs  •  wordlabs.app  •  Root: 'play' = to engage in fun activity</a:t>
+              <a:t>Word Labs  •  wordlabs.app  •  Root: 'play' = to take part in a game; to have fun</a:t>
             </a:r>
             <a:endParaRPr lang="en-US" sz="800" dirty="0"/>
           </a:p>
@@ -23870,7 +25220,7 @@
                 <a:ea typeface="Trebuchet MS" pitchFamily="34" charset="-122"/>
                 <a:cs typeface="Trebuchet MS" pitchFamily="34" charset="-120"/>
               </a:rPr>
-              <a:t>We are learning that the root 'play' means 'to engage in fun activity'.</a:t>
+              <a:t>We are learning that the root 'play' means 'to take part in a game; to have fun'.</a:t>
             </a:r>
             <a:endParaRPr lang="en-US" sz="2000" dirty="0"/>
           </a:p>
@@ -24516,7 +25866,7 @@
                 <a:ea typeface="Calibri" pitchFamily="34" charset="-122"/>
                 <a:cs typeface="Calibri" pitchFamily="34" charset="-120"/>
               </a:rPr>
-              <a:t>Word Labs  •  wordlabs.app  •  Root: 'play' = to engage in fun activity</a:t>
+              <a:t>Word Labs  •  wordlabs.app  •  Root: 'play' = to take part in a game; to have fun</a:t>
             </a:r>
             <a:endParaRPr lang="en-US" sz="800" dirty="0"/>
           </a:p>
@@ -24655,7 +26005,7 @@
                 <a:ea typeface="Trebuchet MS" pitchFamily="34" charset="-122"/>
                 <a:cs typeface="Trebuchet MS" pitchFamily="34" charset="-120"/>
               </a:rPr>
-              <a:t>players</a:t>
+              <a:t>overplayed</a:t>
             </a:r>
             <a:endParaRPr lang="en-US" sz="2800" dirty="0"/>
           </a:p>
@@ -24744,11 +26094,11 @@
             </a:avLst>
           </a:prstGeom>
           <a:solidFill>
-            <a:srgbClr val="CCFBF1"/>
+            <a:srgbClr val="DDD6FE"/>
           </a:solidFill>
           <a:ln w="19050">
             <a:solidFill>
-              <a:srgbClr val="0D9488"/>
+              <a:srgbClr val="7C3AED"/>
             </a:solidFill>
             <a:prstDash val="solid"/>
           </a:ln>
@@ -24788,13 +26138,13 @@
             <a:r>
               <a:rPr lang="en-US" sz="1300" b="1" dirty="0">
                 <a:solidFill>
-                  <a:srgbClr val="0F766E"/>
+                  <a:srgbClr val="4C1D95"/>
                 </a:solidFill>
                 <a:latin typeface="Trebuchet MS" pitchFamily="34" charset="0"/>
                 <a:ea typeface="Trebuchet MS" pitchFamily="34" charset="-122"/>
                 <a:cs typeface="Trebuchet MS" pitchFamily="34" charset="-120"/>
               </a:rPr>
-              <a:t>play</a:t>
+              <a:t>over</a:t>
             </a:r>
             <a:endParaRPr lang="en-US" sz="1300" dirty="0"/>
           </a:p>
@@ -24833,7 +26183,7 @@
                 <a:ea typeface="Calibri" pitchFamily="34" charset="-122"/>
                 <a:cs typeface="Calibri" pitchFamily="34" charset="-120"/>
               </a:rPr>
-              <a:t>to engage in fun activity</a:t>
+              <a:t>too much</a:t>
             </a:r>
             <a:endParaRPr lang="en-US" sz="850" dirty="0"/>
           </a:p>
@@ -24856,11 +26206,11 @@
             </a:avLst>
           </a:prstGeom>
           <a:solidFill>
-            <a:srgbClr val="FCE7F3"/>
+            <a:srgbClr val="CCFBF1"/>
           </a:solidFill>
           <a:ln w="19050">
             <a:solidFill>
-              <a:srgbClr val="DB2777"/>
+              <a:srgbClr val="0D9488"/>
             </a:solidFill>
             <a:prstDash val="solid"/>
           </a:ln>
@@ -24900,13 +26250,13 @@
             <a:r>
               <a:rPr lang="en-US" sz="1300" b="1" dirty="0">
                 <a:solidFill>
-                  <a:srgbClr val="9D174D"/>
+                  <a:srgbClr val="0F766E"/>
                 </a:solidFill>
                 <a:latin typeface="Trebuchet MS" pitchFamily="34" charset="0"/>
                 <a:ea typeface="Trebuchet MS" pitchFamily="34" charset="-122"/>
                 <a:cs typeface="Trebuchet MS" pitchFamily="34" charset="-120"/>
               </a:rPr>
-              <a:t>er</a:t>
+              <a:t>play</a:t>
             </a:r>
             <a:endParaRPr lang="en-US" sz="1300" dirty="0"/>
           </a:p>
@@ -24945,7 +26295,7 @@
                 <a:ea typeface="Calibri" pitchFamily="34" charset="-122"/>
                 <a:cs typeface="Calibri" pitchFamily="34" charset="-120"/>
               </a:rPr>
-              <a:t>a person who does something</a:t>
+              <a:t>to take part in a game; to have fun</a:t>
             </a:r>
             <a:endParaRPr lang="en-US" sz="850" dirty="0"/>
           </a:p>
@@ -25018,7 +26368,7 @@
                 <a:ea typeface="Trebuchet MS" pitchFamily="34" charset="-122"/>
                 <a:cs typeface="Trebuchet MS" pitchFamily="34" charset="-120"/>
               </a:rPr>
-              <a:t>s</a:t>
+              <a:t>ed</a:t>
             </a:r>
             <a:endParaRPr lang="en-US" sz="1300" dirty="0"/>
           </a:p>
@@ -25057,7 +26407,7 @@
                 <a:ea typeface="Calibri" pitchFamily="34" charset="-122"/>
                 <a:cs typeface="Calibri" pitchFamily="34" charset="-120"/>
               </a:rPr>
-              <a:t>more than one</a:t>
+              <a:t>past tense</a:t>
             </a:r>
             <a:endParaRPr lang="en-US" sz="850" dirty="0"/>
           </a:p>
@@ -25164,7 +26514,7 @@
         </p:nvSpPr>
         <p:spPr>
           <a:xfrm>
-            <a:off x="2999232" y="3364992"/>
+            <a:off x="2313432" y="3364992"/>
             <a:ext cx="1645920" cy="475488"/>
           </a:xfrm>
           <a:prstGeom prst="rect">
@@ -25191,7 +26541,7 @@
         </p:nvSpPr>
         <p:spPr>
           <a:xfrm>
-            <a:off x="2999232" y="3364992"/>
+            <a:off x="2313432" y="3364992"/>
             <a:ext cx="1645920" cy="475488"/>
           </a:xfrm>
           <a:prstGeom prst="rect">
@@ -25216,7 +26566,7 @@
                 <a:ea typeface="Trebuchet MS" pitchFamily="34" charset="-122"/>
                 <a:cs typeface="Trebuchet MS" pitchFamily="34" charset="-120"/>
               </a:rPr>
-              <a:t>play</a:t>
+              <a:t>o</a:t>
             </a:r>
             <a:endParaRPr lang="en-US" sz="1400" dirty="0"/>
           </a:p>
@@ -25230,8 +26580,8 @@
         </p:nvSpPr>
         <p:spPr>
           <a:xfrm>
-            <a:off x="4645152" y="3364992"/>
-            <a:ext cx="1097280" cy="475488"/>
+            <a:off x="3959352" y="3364992"/>
+            <a:ext cx="411480" cy="475488"/>
           </a:xfrm>
           <a:prstGeom prst="rect">
             <a:avLst/>
@@ -25269,7 +26619,7 @@
         </p:nvSpPr>
         <p:spPr>
           <a:xfrm>
-            <a:off x="5742432" y="3364992"/>
+            <a:off x="4370832" y="3364992"/>
             <a:ext cx="1645920" cy="475488"/>
           </a:xfrm>
           <a:prstGeom prst="rect">
@@ -25296,7 +26646,7 @@
         </p:nvSpPr>
         <p:spPr>
           <a:xfrm>
-            <a:off x="5742432" y="3364992"/>
+            <a:off x="4370832" y="3364992"/>
             <a:ext cx="1645920" cy="475488"/>
           </a:xfrm>
           <a:prstGeom prst="rect">
@@ -25321,7 +26671,7 @@
                 <a:ea typeface="Trebuchet MS" pitchFamily="34" charset="-122"/>
                 <a:cs typeface="Trebuchet MS" pitchFamily="34" charset="-120"/>
               </a:rPr>
-              <a:t>ers</a:t>
+              <a:t>ver</a:t>
             </a:r>
             <a:endParaRPr lang="en-US" sz="1400" dirty="0"/>
           </a:p>
@@ -25329,7 +26679,112 @@
       </p:sp>
       <p:sp>
         <p:nvSpPr>
-          <p:cNvPr id="33" name="Shape 31"/>
+          <p:cNvPr id="33" name="Text 31"/>
+          <p:cNvSpPr/>
+          <p:nvPr/>
+        </p:nvSpPr>
+        <p:spPr>
+          <a:xfrm>
+            <a:off x="6016752" y="3364992"/>
+            <a:ext cx="411480" cy="475488"/>
+          </a:xfrm>
+          <a:prstGeom prst="rect">
+            <a:avLst/>
+          </a:prstGeom>
+          <a:noFill/>
+          <a:ln/>
+        </p:spPr>
+        <p:txBody>
+          <a:bodyPr wrap="square" lIns="0" tIns="0" rIns="0" bIns="0" rtlCol="0" anchor="ctr"/>
+          <a:lstStyle/>
+          <a:p>
+            <a:pPr algn="ctr" indent="0" marL="0">
+              <a:buNone/>
+            </a:pPr>
+            <a:r>
+              <a:rPr lang="en-US" sz="1600" b="1" dirty="0">
+                <a:solidFill>
+                  <a:srgbClr val="0D9488"/>
+                </a:solidFill>
+                <a:latin typeface="Trebuchet MS" pitchFamily="34" charset="0"/>
+                <a:ea typeface="Trebuchet MS" pitchFamily="34" charset="-122"/>
+                <a:cs typeface="Trebuchet MS" pitchFamily="34" charset="-120"/>
+              </a:rPr>
+              <a:t>·</a:t>
+            </a:r>
+            <a:endParaRPr lang="en-US" sz="1600" dirty="0"/>
+          </a:p>
+        </p:txBody>
+      </p:sp>
+      <p:sp>
+        <p:nvSpPr>
+          <p:cNvPr id="34" name="Shape 32"/>
+          <p:cNvSpPr/>
+          <p:nvPr/>
+        </p:nvSpPr>
+        <p:spPr>
+          <a:xfrm>
+            <a:off x="6428232" y="3364992"/>
+            <a:ext cx="1645920" cy="475488"/>
+          </a:xfrm>
+          <a:prstGeom prst="rect">
+            <a:avLst>
+              <a:gd name="adj" fmla="val 9615"/>
+            </a:avLst>
+          </a:prstGeom>
+          <a:solidFill>
+            <a:srgbClr val="FFFFFF"/>
+          </a:solidFill>
+          <a:ln w="12700">
+            <a:solidFill>
+              <a:srgbClr val="0D9488"/>
+            </a:solidFill>
+            <a:prstDash val="solid"/>
+          </a:ln>
+        </p:spPr>
+      </p:sp>
+      <p:sp>
+        <p:nvSpPr>
+          <p:cNvPr id="35" name="Text 33"/>
+          <p:cNvSpPr/>
+          <p:nvPr/>
+        </p:nvSpPr>
+        <p:spPr>
+          <a:xfrm>
+            <a:off x="6428232" y="3364992"/>
+            <a:ext cx="1645920" cy="475488"/>
+          </a:xfrm>
+          <a:prstGeom prst="rect">
+            <a:avLst/>
+          </a:prstGeom>
+          <a:noFill/>
+          <a:ln/>
+        </p:spPr>
+        <p:txBody>
+          <a:bodyPr wrap="square" lIns="0" tIns="0" rIns="0" bIns="0" rtlCol="0" anchor="ctr"/>
+          <a:lstStyle/>
+          <a:p>
+            <a:pPr algn="ctr" indent="0" marL="0">
+              <a:buNone/>
+            </a:pPr>
+            <a:r>
+              <a:rPr lang="en-US" sz="1400" b="1" dirty="0">
+                <a:solidFill>
+                  <a:srgbClr val="0D9488"/>
+                </a:solidFill>
+                <a:latin typeface="Trebuchet MS" pitchFamily="34" charset="0"/>
+                <a:ea typeface="Trebuchet MS" pitchFamily="34" charset="-122"/>
+                <a:cs typeface="Trebuchet MS" pitchFamily="34" charset="-120"/>
+              </a:rPr>
+              <a:t>played</a:t>
+            </a:r>
+            <a:endParaRPr lang="en-US" sz="1400" dirty="0"/>
+          </a:p>
+        </p:txBody>
+      </p:sp>
+      <p:sp>
+        <p:nvSpPr>
+          <p:cNvPr id="36" name="Shape 34"/>
           <p:cNvSpPr/>
           <p:nvPr/>
         </p:nvSpPr>
@@ -25356,7 +26811,7 @@
       </p:sp>
       <p:sp>
         <p:nvSpPr>
-          <p:cNvPr id="34" name="Text 32"/>
+          <p:cNvPr id="37" name="Text 35"/>
           <p:cNvSpPr/>
           <p:nvPr/>
         </p:nvSpPr>
@@ -25395,7 +26850,7 @@
       </p:sp>
       <p:sp>
         <p:nvSpPr>
-          <p:cNvPr id="35" name="Shape 33"/>
+          <p:cNvPr id="38" name="Shape 36"/>
           <p:cNvSpPr/>
           <p:nvPr/>
         </p:nvSpPr>
@@ -25422,7 +26877,7 @@
       </p:sp>
       <p:sp>
         <p:nvSpPr>
-          <p:cNvPr id="36" name="Text 34"/>
+          <p:cNvPr id="39" name="Text 37"/>
           <p:cNvSpPr/>
           <p:nvPr/>
         </p:nvSpPr>
@@ -25745,7 +27200,7 @@
                 <a:ea typeface="Calibri" pitchFamily="34" charset="-122"/>
                 <a:cs typeface="Calibri" pitchFamily="34" charset="-120"/>
               </a:rPr>
-              <a:t>Word Labs  •  wordlabs.app  •  Root: 'play' = to engage in fun activity</a:t>
+              <a:t>Word Labs  •  wordlabs.app  •  Root: 'play' = to take part in a game; to have fun</a:t>
             </a:r>
             <a:endParaRPr lang="en-US" sz="800" dirty="0"/>
           </a:p>
@@ -25884,7 +27339,7 @@
                 <a:ea typeface="Trebuchet MS" pitchFamily="34" charset="-122"/>
                 <a:cs typeface="Trebuchet MS" pitchFamily="34" charset="-120"/>
               </a:rPr>
-              <a:t>players</a:t>
+              <a:t>overplayed</a:t>
             </a:r>
             <a:endParaRPr lang="en-US" sz="2800" dirty="0"/>
           </a:p>
@@ -25973,11 +27428,11 @@
             </a:avLst>
           </a:prstGeom>
           <a:solidFill>
-            <a:srgbClr val="CCFBF1"/>
+            <a:srgbClr val="DDD6FE"/>
           </a:solidFill>
           <a:ln w="19050">
             <a:solidFill>
-              <a:srgbClr val="0D9488"/>
+              <a:srgbClr val="7C3AED"/>
             </a:solidFill>
             <a:prstDash val="solid"/>
           </a:ln>
@@ -26017,13 +27472,13 @@
             <a:r>
               <a:rPr lang="en-US" sz="1300" b="1" dirty="0">
                 <a:solidFill>
-                  <a:srgbClr val="0F766E"/>
+                  <a:srgbClr val="4C1D95"/>
                 </a:solidFill>
                 <a:latin typeface="Trebuchet MS" pitchFamily="34" charset="0"/>
                 <a:ea typeface="Trebuchet MS" pitchFamily="34" charset="-122"/>
                 <a:cs typeface="Trebuchet MS" pitchFamily="34" charset="-120"/>
               </a:rPr>
-              <a:t>play</a:t>
+              <a:t>over</a:t>
             </a:r>
             <a:endParaRPr lang="en-US" sz="1300" dirty="0"/>
           </a:p>
@@ -26062,7 +27517,7 @@
                 <a:ea typeface="Calibri" pitchFamily="34" charset="-122"/>
                 <a:cs typeface="Calibri" pitchFamily="34" charset="-120"/>
               </a:rPr>
-              <a:t>to engage in fun activity</a:t>
+              <a:t>too much</a:t>
             </a:r>
             <a:endParaRPr lang="en-US" sz="850" dirty="0"/>
           </a:p>
@@ -26085,11 +27540,11 @@
             </a:avLst>
           </a:prstGeom>
           <a:solidFill>
-            <a:srgbClr val="FCE7F3"/>
+            <a:srgbClr val="CCFBF1"/>
           </a:solidFill>
           <a:ln w="19050">
             <a:solidFill>
-              <a:srgbClr val="DB2777"/>
+              <a:srgbClr val="0D9488"/>
             </a:solidFill>
             <a:prstDash val="solid"/>
           </a:ln>
@@ -26129,13 +27584,13 @@
             <a:r>
               <a:rPr lang="en-US" sz="1300" b="1" dirty="0">
                 <a:solidFill>
-                  <a:srgbClr val="9D174D"/>
+                  <a:srgbClr val="0F766E"/>
                 </a:solidFill>
                 <a:latin typeface="Trebuchet MS" pitchFamily="34" charset="0"/>
                 <a:ea typeface="Trebuchet MS" pitchFamily="34" charset="-122"/>
                 <a:cs typeface="Trebuchet MS" pitchFamily="34" charset="-120"/>
               </a:rPr>
-              <a:t>er</a:t>
+              <a:t>play</a:t>
             </a:r>
             <a:endParaRPr lang="en-US" sz="1300" dirty="0"/>
           </a:p>
@@ -26174,7 +27629,7 @@
                 <a:ea typeface="Calibri" pitchFamily="34" charset="-122"/>
                 <a:cs typeface="Calibri" pitchFamily="34" charset="-120"/>
               </a:rPr>
-              <a:t>a person who does something</a:t>
+              <a:t>to take part in a game; to have fun</a:t>
             </a:r>
             <a:endParaRPr lang="en-US" sz="850" dirty="0"/>
           </a:p>
@@ -26247,7 +27702,7 @@
                 <a:ea typeface="Trebuchet MS" pitchFamily="34" charset="-122"/>
                 <a:cs typeface="Trebuchet MS" pitchFamily="34" charset="-120"/>
               </a:rPr>
-              <a:t>s</a:t>
+              <a:t>ed</a:t>
             </a:r>
             <a:endParaRPr lang="en-US" sz="1300" dirty="0"/>
           </a:p>
@@ -26286,7 +27741,7 @@
                 <a:ea typeface="Calibri" pitchFamily="34" charset="-122"/>
                 <a:cs typeface="Calibri" pitchFamily="34" charset="-120"/>
               </a:rPr>
-              <a:t>more than one</a:t>
+              <a:t>past tense</a:t>
             </a:r>
             <a:endParaRPr lang="en-US" sz="850" dirty="0"/>
           </a:p>
@@ -26393,7 +27848,7 @@
         </p:nvSpPr>
         <p:spPr>
           <a:xfrm>
-            <a:off x="2999232" y="3364992"/>
+            <a:off x="2313432" y="3364992"/>
             <a:ext cx="1645920" cy="475488"/>
           </a:xfrm>
           <a:prstGeom prst="rect">
@@ -26420,7 +27875,7 @@
         </p:nvSpPr>
         <p:spPr>
           <a:xfrm>
-            <a:off x="2999232" y="3364992"/>
+            <a:off x="2313432" y="3364992"/>
             <a:ext cx="1645920" cy="475488"/>
           </a:xfrm>
           <a:prstGeom prst="rect">
@@ -26445,7 +27900,7 @@
                 <a:ea typeface="Trebuchet MS" pitchFamily="34" charset="-122"/>
                 <a:cs typeface="Trebuchet MS" pitchFamily="34" charset="-120"/>
               </a:rPr>
-              <a:t>play</a:t>
+              <a:t>o</a:t>
             </a:r>
             <a:endParaRPr lang="en-US" sz="1400" dirty="0"/>
           </a:p>
@@ -26459,8 +27914,8 @@
         </p:nvSpPr>
         <p:spPr>
           <a:xfrm>
-            <a:off x="4645152" y="3364992"/>
-            <a:ext cx="1097280" cy="475488"/>
+            <a:off x="3959352" y="3364992"/>
+            <a:ext cx="411480" cy="475488"/>
           </a:xfrm>
           <a:prstGeom prst="rect">
             <a:avLst/>
@@ -26498,7 +27953,7 @@
         </p:nvSpPr>
         <p:spPr>
           <a:xfrm>
-            <a:off x="5742432" y="3364992"/>
+            <a:off x="4370832" y="3364992"/>
             <a:ext cx="1645920" cy="475488"/>
           </a:xfrm>
           <a:prstGeom prst="rect">
@@ -26525,7 +27980,7 @@
         </p:nvSpPr>
         <p:spPr>
           <a:xfrm>
-            <a:off x="5742432" y="3364992"/>
+            <a:off x="4370832" y="3364992"/>
             <a:ext cx="1645920" cy="475488"/>
           </a:xfrm>
           <a:prstGeom prst="rect">
@@ -26550,7 +28005,7 @@
                 <a:ea typeface="Trebuchet MS" pitchFamily="34" charset="-122"/>
                 <a:cs typeface="Trebuchet MS" pitchFamily="34" charset="-120"/>
               </a:rPr>
-              <a:t>ers</a:t>
+              <a:t>ver</a:t>
             </a:r>
             <a:endParaRPr lang="en-US" sz="1400" dirty="0"/>
           </a:p>
@@ -26558,7 +28013,112 @@
       </p:sp>
       <p:sp>
         <p:nvSpPr>
-          <p:cNvPr id="33" name="Shape 31"/>
+          <p:cNvPr id="33" name="Text 31"/>
+          <p:cNvSpPr/>
+          <p:nvPr/>
+        </p:nvSpPr>
+        <p:spPr>
+          <a:xfrm>
+            <a:off x="6016752" y="3364992"/>
+            <a:ext cx="411480" cy="475488"/>
+          </a:xfrm>
+          <a:prstGeom prst="rect">
+            <a:avLst/>
+          </a:prstGeom>
+          <a:noFill/>
+          <a:ln/>
+        </p:spPr>
+        <p:txBody>
+          <a:bodyPr wrap="square" lIns="0" tIns="0" rIns="0" bIns="0" rtlCol="0" anchor="ctr"/>
+          <a:lstStyle/>
+          <a:p>
+            <a:pPr algn="ctr" indent="0" marL="0">
+              <a:buNone/>
+            </a:pPr>
+            <a:r>
+              <a:rPr lang="en-US" sz="1600" b="1" dirty="0">
+                <a:solidFill>
+                  <a:srgbClr val="0D9488"/>
+                </a:solidFill>
+                <a:latin typeface="Trebuchet MS" pitchFamily="34" charset="0"/>
+                <a:ea typeface="Trebuchet MS" pitchFamily="34" charset="-122"/>
+                <a:cs typeface="Trebuchet MS" pitchFamily="34" charset="-120"/>
+              </a:rPr>
+              <a:t>·</a:t>
+            </a:r>
+            <a:endParaRPr lang="en-US" sz="1600" dirty="0"/>
+          </a:p>
+        </p:txBody>
+      </p:sp>
+      <p:sp>
+        <p:nvSpPr>
+          <p:cNvPr id="34" name="Shape 32"/>
+          <p:cNvSpPr/>
+          <p:nvPr/>
+        </p:nvSpPr>
+        <p:spPr>
+          <a:xfrm>
+            <a:off x="6428232" y="3364992"/>
+            <a:ext cx="1645920" cy="475488"/>
+          </a:xfrm>
+          <a:prstGeom prst="rect">
+            <a:avLst>
+              <a:gd name="adj" fmla="val 9615"/>
+            </a:avLst>
+          </a:prstGeom>
+          <a:solidFill>
+            <a:srgbClr val="FFFFFF"/>
+          </a:solidFill>
+          <a:ln w="12700">
+            <a:solidFill>
+              <a:srgbClr val="0D9488"/>
+            </a:solidFill>
+            <a:prstDash val="solid"/>
+          </a:ln>
+        </p:spPr>
+      </p:sp>
+      <p:sp>
+        <p:nvSpPr>
+          <p:cNvPr id="35" name="Text 33"/>
+          <p:cNvSpPr/>
+          <p:nvPr/>
+        </p:nvSpPr>
+        <p:spPr>
+          <a:xfrm>
+            <a:off x="6428232" y="3364992"/>
+            <a:ext cx="1645920" cy="475488"/>
+          </a:xfrm>
+          <a:prstGeom prst="rect">
+            <a:avLst/>
+          </a:prstGeom>
+          <a:noFill/>
+          <a:ln/>
+        </p:spPr>
+        <p:txBody>
+          <a:bodyPr wrap="square" lIns="0" tIns="0" rIns="0" bIns="0" rtlCol="0" anchor="ctr"/>
+          <a:lstStyle/>
+          <a:p>
+            <a:pPr algn="ctr" indent="0" marL="0">
+              <a:buNone/>
+            </a:pPr>
+            <a:r>
+              <a:rPr lang="en-US" sz="1400" b="1" dirty="0">
+                <a:solidFill>
+                  <a:srgbClr val="0D9488"/>
+                </a:solidFill>
+                <a:latin typeface="Trebuchet MS" pitchFamily="34" charset="0"/>
+                <a:ea typeface="Trebuchet MS" pitchFamily="34" charset="-122"/>
+                <a:cs typeface="Trebuchet MS" pitchFamily="34" charset="-120"/>
+              </a:rPr>
+              <a:t>played</a:t>
+            </a:r>
+            <a:endParaRPr lang="en-US" sz="1400" dirty="0"/>
+          </a:p>
+        </p:txBody>
+      </p:sp>
+      <p:sp>
+        <p:nvSpPr>
+          <p:cNvPr id="36" name="Shape 34"/>
           <p:cNvSpPr/>
           <p:nvPr/>
         </p:nvSpPr>
@@ -26585,7 +28145,7 @@
       </p:sp>
       <p:sp>
         <p:nvSpPr>
-          <p:cNvPr id="34" name="Text 32"/>
+          <p:cNvPr id="37" name="Text 35"/>
           <p:cNvSpPr/>
           <p:nvPr/>
         </p:nvSpPr>
@@ -26624,7 +28184,7 @@
       </p:sp>
       <p:sp>
         <p:nvSpPr>
-          <p:cNvPr id="35" name="Shape 33"/>
+          <p:cNvPr id="38" name="Shape 36"/>
           <p:cNvSpPr/>
           <p:nvPr/>
         </p:nvSpPr>
@@ -26651,13 +28211,13 @@
       </p:sp>
       <p:sp>
         <p:nvSpPr>
-          <p:cNvPr id="36" name="Shape 34"/>
-          <p:cNvSpPr/>
-          <p:nvPr/>
-        </p:nvSpPr>
-        <p:spPr>
-          <a:xfrm>
-            <a:off x="2670048" y="4169664"/>
+          <p:cNvPr id="39" name="Shape 37"/>
+          <p:cNvSpPr/>
+          <p:nvPr/>
+        </p:nvSpPr>
+        <p:spPr>
+          <a:xfrm>
+            <a:off x="2023872" y="4169664"/>
             <a:ext cx="685800" cy="475488"/>
           </a:xfrm>
           <a:prstGeom prst="rect">
@@ -26678,13 +28238,13 @@
       </p:sp>
       <p:sp>
         <p:nvSpPr>
-          <p:cNvPr id="37" name="Text 35"/>
-          <p:cNvSpPr/>
-          <p:nvPr/>
-        </p:nvSpPr>
-        <p:spPr>
-          <a:xfrm>
-            <a:off x="2670048" y="4169664"/>
+          <p:cNvPr id="40" name="Text 38"/>
+          <p:cNvSpPr/>
+          <p:nvPr/>
+        </p:nvSpPr>
+        <p:spPr>
+          <a:xfrm>
+            <a:off x="2023872" y="4169664"/>
             <a:ext cx="685800" cy="475488"/>
           </a:xfrm>
           <a:prstGeom prst="rect">
@@ -26709,7 +28269,7 @@
                 <a:ea typeface="Trebuchet MS" pitchFamily="34" charset="-122"/>
                 <a:cs typeface="Trebuchet MS" pitchFamily="34" charset="-120"/>
               </a:rPr>
-              <a:t>pl</a:t>
+              <a:t>o</a:t>
             </a:r>
             <a:endParaRPr lang="en-US" sz="900" dirty="0"/>
           </a:p>
@@ -26717,13 +28277,13 @@
       </p:sp>
       <p:sp>
         <p:nvSpPr>
-          <p:cNvPr id="38" name="Shape 36"/>
-          <p:cNvSpPr/>
-          <p:nvPr/>
-        </p:nvSpPr>
-        <p:spPr>
-          <a:xfrm>
-            <a:off x="4123944" y="4169664"/>
+          <p:cNvPr id="41" name="Shape 39"/>
+          <p:cNvSpPr/>
+          <p:nvPr/>
+        </p:nvSpPr>
+        <p:spPr>
+          <a:xfrm>
+            <a:off x="2831592" y="4169664"/>
             <a:ext cx="685800" cy="475488"/>
           </a:xfrm>
           <a:prstGeom prst="rect">
@@ -26744,13 +28304,13 @@
       </p:sp>
       <p:sp>
         <p:nvSpPr>
-          <p:cNvPr id="39" name="Text 37"/>
-          <p:cNvSpPr/>
-          <p:nvPr/>
-        </p:nvSpPr>
-        <p:spPr>
-          <a:xfrm>
-            <a:off x="4123944" y="4169664"/>
+          <p:cNvPr id="42" name="Text 40"/>
+          <p:cNvSpPr/>
+          <p:nvPr/>
+        </p:nvSpPr>
+        <p:spPr>
+          <a:xfrm>
+            <a:off x="2831592" y="4169664"/>
             <a:ext cx="685800" cy="475488"/>
           </a:xfrm>
           <a:prstGeom prst="rect">
@@ -26775,7 +28335,7 @@
                 <a:ea typeface="Trebuchet MS" pitchFamily="34" charset="-122"/>
                 <a:cs typeface="Trebuchet MS" pitchFamily="34" charset="-120"/>
               </a:rPr>
-              <a:t>ay</a:t>
+              <a:t>v</a:t>
             </a:r>
             <a:endParaRPr lang="en-US" sz="900" dirty="0"/>
           </a:p>
@@ -26783,13 +28343,13 @@
       </p:sp>
       <p:sp>
         <p:nvSpPr>
-          <p:cNvPr id="40" name="Shape 38"/>
-          <p:cNvSpPr/>
-          <p:nvPr/>
-        </p:nvSpPr>
-        <p:spPr>
-          <a:xfrm>
-            <a:off x="5577840" y="4169664"/>
+          <p:cNvPr id="43" name="Shape 41"/>
+          <p:cNvSpPr/>
+          <p:nvPr/>
+        </p:nvSpPr>
+        <p:spPr>
+          <a:xfrm>
+            <a:off x="3639312" y="4169664"/>
             <a:ext cx="685800" cy="475488"/>
           </a:xfrm>
           <a:prstGeom prst="rect">
@@ -26810,13 +28370,13 @@
       </p:sp>
       <p:sp>
         <p:nvSpPr>
-          <p:cNvPr id="41" name="Text 39"/>
-          <p:cNvSpPr/>
-          <p:nvPr/>
-        </p:nvSpPr>
-        <p:spPr>
-          <a:xfrm>
-            <a:off x="5577840" y="4169664"/>
+          <p:cNvPr id="44" name="Text 42"/>
+          <p:cNvSpPr/>
+          <p:nvPr/>
+        </p:nvSpPr>
+        <p:spPr>
+          <a:xfrm>
+            <a:off x="3639312" y="4169664"/>
             <a:ext cx="685800" cy="475488"/>
           </a:xfrm>
           <a:prstGeom prst="rect">
@@ -26849,13 +28409,13 @@
       </p:sp>
       <p:sp>
         <p:nvSpPr>
-          <p:cNvPr id="42" name="Shape 40"/>
-          <p:cNvSpPr/>
-          <p:nvPr/>
-        </p:nvSpPr>
-        <p:spPr>
-          <a:xfrm>
-            <a:off x="7031736" y="4169664"/>
+          <p:cNvPr id="45" name="Shape 43"/>
+          <p:cNvSpPr/>
+          <p:nvPr/>
+        </p:nvSpPr>
+        <p:spPr>
+          <a:xfrm>
+            <a:off x="4447032" y="4169664"/>
             <a:ext cx="685800" cy="475488"/>
           </a:xfrm>
           <a:prstGeom prst="rect">
@@ -26876,13 +28436,13 @@
       </p:sp>
       <p:sp>
         <p:nvSpPr>
-          <p:cNvPr id="43" name="Text 41"/>
-          <p:cNvSpPr/>
-          <p:nvPr/>
-        </p:nvSpPr>
-        <p:spPr>
-          <a:xfrm>
-            <a:off x="7031736" y="4169664"/>
+          <p:cNvPr id="46" name="Text 44"/>
+          <p:cNvSpPr/>
+          <p:nvPr/>
+        </p:nvSpPr>
+        <p:spPr>
+          <a:xfrm>
+            <a:off x="4447032" y="4169664"/>
             <a:ext cx="685800" cy="475488"/>
           </a:xfrm>
           <a:prstGeom prst="rect">
@@ -26907,7 +28467,271 @@
                 <a:ea typeface="Trebuchet MS" pitchFamily="34" charset="-122"/>
                 <a:cs typeface="Trebuchet MS" pitchFamily="34" charset="-120"/>
               </a:rPr>
-              <a:t>s</a:t>
+              <a:t>p</a:t>
+            </a:r>
+            <a:endParaRPr lang="en-US" sz="900" dirty="0"/>
+          </a:p>
+        </p:txBody>
+      </p:sp>
+      <p:sp>
+        <p:nvSpPr>
+          <p:cNvPr id="47" name="Shape 45"/>
+          <p:cNvSpPr/>
+          <p:nvPr/>
+        </p:nvSpPr>
+        <p:spPr>
+          <a:xfrm>
+            <a:off x="5254752" y="4169664"/>
+            <a:ext cx="685800" cy="475488"/>
+          </a:xfrm>
+          <a:prstGeom prst="rect">
+            <a:avLst>
+              <a:gd name="adj" fmla="val 7692"/>
+            </a:avLst>
+          </a:prstGeom>
+          <a:solidFill>
+            <a:srgbClr val="FFFFFF"/>
+          </a:solidFill>
+          <a:ln w="12700">
+            <a:solidFill>
+              <a:srgbClr val="DB2777"/>
+            </a:solidFill>
+            <a:prstDash val="solid"/>
+          </a:ln>
+        </p:spPr>
+      </p:sp>
+      <p:sp>
+        <p:nvSpPr>
+          <p:cNvPr id="48" name="Text 46"/>
+          <p:cNvSpPr/>
+          <p:nvPr/>
+        </p:nvSpPr>
+        <p:spPr>
+          <a:xfrm>
+            <a:off x="5254752" y="4169664"/>
+            <a:ext cx="685800" cy="475488"/>
+          </a:xfrm>
+          <a:prstGeom prst="rect">
+            <a:avLst/>
+          </a:prstGeom>
+          <a:noFill/>
+          <a:ln/>
+        </p:spPr>
+        <p:txBody>
+          <a:bodyPr wrap="square" lIns="0" tIns="0" rIns="0" bIns="0" rtlCol="0" anchor="ctr"/>
+          <a:lstStyle/>
+          <a:p>
+            <a:pPr algn="ctr" indent="0" marL="0">
+              <a:buNone/>
+            </a:pPr>
+            <a:r>
+              <a:rPr lang="en-US" sz="900" b="1" dirty="0">
+                <a:solidFill>
+                  <a:srgbClr val="9D174D"/>
+                </a:solidFill>
+                <a:latin typeface="Trebuchet MS" pitchFamily="34" charset="0"/>
+                <a:ea typeface="Trebuchet MS" pitchFamily="34" charset="-122"/>
+                <a:cs typeface="Trebuchet MS" pitchFamily="34" charset="-120"/>
+              </a:rPr>
+              <a:t>l</a:t>
+            </a:r>
+            <a:endParaRPr lang="en-US" sz="900" dirty="0"/>
+          </a:p>
+        </p:txBody>
+      </p:sp>
+      <p:sp>
+        <p:nvSpPr>
+          <p:cNvPr id="49" name="Shape 47"/>
+          <p:cNvSpPr/>
+          <p:nvPr/>
+        </p:nvSpPr>
+        <p:spPr>
+          <a:xfrm>
+            <a:off x="6062472" y="4169664"/>
+            <a:ext cx="685800" cy="475488"/>
+          </a:xfrm>
+          <a:prstGeom prst="rect">
+            <a:avLst>
+              <a:gd name="adj" fmla="val 7692"/>
+            </a:avLst>
+          </a:prstGeom>
+          <a:solidFill>
+            <a:srgbClr val="FFFFFF"/>
+          </a:solidFill>
+          <a:ln w="12700">
+            <a:solidFill>
+              <a:srgbClr val="DB2777"/>
+            </a:solidFill>
+            <a:prstDash val="solid"/>
+          </a:ln>
+        </p:spPr>
+      </p:sp>
+      <p:sp>
+        <p:nvSpPr>
+          <p:cNvPr id="50" name="Text 48"/>
+          <p:cNvSpPr/>
+          <p:nvPr/>
+        </p:nvSpPr>
+        <p:spPr>
+          <a:xfrm>
+            <a:off x="6062472" y="4169664"/>
+            <a:ext cx="685800" cy="475488"/>
+          </a:xfrm>
+          <a:prstGeom prst="rect">
+            <a:avLst/>
+          </a:prstGeom>
+          <a:noFill/>
+          <a:ln/>
+        </p:spPr>
+        <p:txBody>
+          <a:bodyPr wrap="square" lIns="0" tIns="0" rIns="0" bIns="0" rtlCol="0" anchor="ctr"/>
+          <a:lstStyle/>
+          <a:p>
+            <a:pPr algn="ctr" indent="0" marL="0">
+              <a:buNone/>
+            </a:pPr>
+            <a:r>
+              <a:rPr lang="en-US" sz="900" b="1" dirty="0">
+                <a:solidFill>
+                  <a:srgbClr val="9D174D"/>
+                </a:solidFill>
+                <a:latin typeface="Trebuchet MS" pitchFamily="34" charset="0"/>
+                <a:ea typeface="Trebuchet MS" pitchFamily="34" charset="-122"/>
+                <a:cs typeface="Trebuchet MS" pitchFamily="34" charset="-120"/>
+              </a:rPr>
+              <a:t>ay</a:t>
+            </a:r>
+            <a:endParaRPr lang="en-US" sz="900" dirty="0"/>
+          </a:p>
+        </p:txBody>
+      </p:sp>
+      <p:sp>
+        <p:nvSpPr>
+          <p:cNvPr id="51" name="Shape 49"/>
+          <p:cNvSpPr/>
+          <p:nvPr/>
+        </p:nvSpPr>
+        <p:spPr>
+          <a:xfrm>
+            <a:off x="6870192" y="4169664"/>
+            <a:ext cx="685800" cy="475488"/>
+          </a:xfrm>
+          <a:prstGeom prst="rect">
+            <a:avLst>
+              <a:gd name="adj" fmla="val 7692"/>
+            </a:avLst>
+          </a:prstGeom>
+          <a:solidFill>
+            <a:srgbClr val="FFFFFF"/>
+          </a:solidFill>
+          <a:ln w="12700">
+            <a:solidFill>
+              <a:srgbClr val="DB2777"/>
+            </a:solidFill>
+            <a:prstDash val="solid"/>
+          </a:ln>
+        </p:spPr>
+      </p:sp>
+      <p:sp>
+        <p:nvSpPr>
+          <p:cNvPr id="52" name="Text 50"/>
+          <p:cNvSpPr/>
+          <p:nvPr/>
+        </p:nvSpPr>
+        <p:spPr>
+          <a:xfrm>
+            <a:off x="6870192" y="4169664"/>
+            <a:ext cx="685800" cy="475488"/>
+          </a:xfrm>
+          <a:prstGeom prst="rect">
+            <a:avLst/>
+          </a:prstGeom>
+          <a:noFill/>
+          <a:ln/>
+        </p:spPr>
+        <p:txBody>
+          <a:bodyPr wrap="square" lIns="0" tIns="0" rIns="0" bIns="0" rtlCol="0" anchor="ctr"/>
+          <a:lstStyle/>
+          <a:p>
+            <a:pPr algn="ctr" indent="0" marL="0">
+              <a:buNone/>
+            </a:pPr>
+            <a:r>
+              <a:rPr lang="en-US" sz="900" b="1" dirty="0">
+                <a:solidFill>
+                  <a:srgbClr val="9D174D"/>
+                </a:solidFill>
+                <a:latin typeface="Trebuchet MS" pitchFamily="34" charset="0"/>
+                <a:ea typeface="Trebuchet MS" pitchFamily="34" charset="-122"/>
+                <a:cs typeface="Trebuchet MS" pitchFamily="34" charset="-120"/>
+              </a:rPr>
+              <a:t>e</a:t>
+            </a:r>
+            <a:endParaRPr lang="en-US" sz="900" dirty="0"/>
+          </a:p>
+        </p:txBody>
+      </p:sp>
+      <p:sp>
+        <p:nvSpPr>
+          <p:cNvPr id="53" name="Shape 51"/>
+          <p:cNvSpPr/>
+          <p:nvPr/>
+        </p:nvSpPr>
+        <p:spPr>
+          <a:xfrm>
+            <a:off x="7677912" y="4169664"/>
+            <a:ext cx="685800" cy="475488"/>
+          </a:xfrm>
+          <a:prstGeom prst="rect">
+            <a:avLst>
+              <a:gd name="adj" fmla="val 7692"/>
+            </a:avLst>
+          </a:prstGeom>
+          <a:solidFill>
+            <a:srgbClr val="FFFFFF"/>
+          </a:solidFill>
+          <a:ln w="12700">
+            <a:solidFill>
+              <a:srgbClr val="DB2777"/>
+            </a:solidFill>
+            <a:prstDash val="solid"/>
+          </a:ln>
+        </p:spPr>
+      </p:sp>
+      <p:sp>
+        <p:nvSpPr>
+          <p:cNvPr id="54" name="Text 52"/>
+          <p:cNvSpPr/>
+          <p:nvPr/>
+        </p:nvSpPr>
+        <p:spPr>
+          <a:xfrm>
+            <a:off x="7677912" y="4169664"/>
+            <a:ext cx="685800" cy="475488"/>
+          </a:xfrm>
+          <a:prstGeom prst="rect">
+            <a:avLst/>
+          </a:prstGeom>
+          <a:noFill/>
+          <a:ln/>
+        </p:spPr>
+        <p:txBody>
+          <a:bodyPr wrap="square" lIns="0" tIns="0" rIns="0" bIns="0" rtlCol="0" anchor="ctr"/>
+          <a:lstStyle/>
+          <a:p>
+            <a:pPr algn="ctr" indent="0" marL="0">
+              <a:buNone/>
+            </a:pPr>
+            <a:r>
+              <a:rPr lang="en-US" sz="900" b="1" dirty="0">
+                <a:solidFill>
+                  <a:srgbClr val="9D174D"/>
+                </a:solidFill>
+                <a:latin typeface="Trebuchet MS" pitchFamily="34" charset="0"/>
+                <a:ea typeface="Trebuchet MS" pitchFamily="34" charset="-122"/>
+                <a:cs typeface="Trebuchet MS" pitchFamily="34" charset="-120"/>
+              </a:rPr>
+              <a:t>d</a:t>
             </a:r>
             <a:endParaRPr lang="en-US" sz="900" dirty="0"/>
           </a:p>
@@ -27199,7 +29023,7 @@
                 <a:ea typeface="Calibri" pitchFamily="34" charset="-122"/>
                 <a:cs typeface="Calibri" pitchFamily="34" charset="-120"/>
               </a:rPr>
-              <a:t>Word Labs  •  wordlabs.app  •  Root: 'play' = to engage in fun activity</a:t>
+              <a:t>Word Labs  •  wordlabs.app  •  Root: 'play' = to take part in a game; to have fun</a:t>
             </a:r>
             <a:endParaRPr lang="en-US" sz="800" dirty="0"/>
           </a:p>
@@ -27338,7 +29162,7 @@
                 <a:ea typeface="Trebuchet MS" pitchFamily="34" charset="-122"/>
                 <a:cs typeface="Trebuchet MS" pitchFamily="34" charset="-120"/>
               </a:rPr>
-              <a:t>playground</a:t>
+              <a:t>multiplayer</a:t>
             </a:r>
             <a:endParaRPr lang="en-US" sz="2800" dirty="0"/>
           </a:p>
@@ -28026,7 +29850,7 @@
                 <a:ea typeface="Calibri" pitchFamily="34" charset="-122"/>
                 <a:cs typeface="Calibri" pitchFamily="34" charset="-120"/>
               </a:rPr>
-              <a:t>Word Labs  •  wordlabs.app  •  Root: 'play' = to engage in fun activity</a:t>
+              <a:t>Word Labs  •  wordlabs.app  •  Root: 'play' = to take part in a game; to have fun</a:t>
             </a:r>
             <a:endParaRPr lang="en-US" sz="800" dirty="0"/>
           </a:p>
@@ -28165,7 +29989,7 @@
                 <a:ea typeface="Trebuchet MS" pitchFamily="34" charset="-122"/>
                 <a:cs typeface="Trebuchet MS" pitchFamily="34" charset="-120"/>
               </a:rPr>
-              <a:t>playground</a:t>
+              <a:t>multiplayer</a:t>
             </a:r>
             <a:endParaRPr lang="en-US" sz="2800" dirty="0"/>
           </a:p>
@@ -28245,7 +30069,7 @@
         </p:nvSpPr>
         <p:spPr>
           <a:xfrm>
-            <a:off x="2938272" y="2258568"/>
+            <a:off x="2221992" y="2258568"/>
             <a:ext cx="1828800" cy="292608"/>
           </a:xfrm>
           <a:prstGeom prst="rect">
@@ -28254,11 +30078,11 @@
             </a:avLst>
           </a:prstGeom>
           <a:solidFill>
-            <a:srgbClr val="CCFBF1"/>
+            <a:srgbClr val="DDD6FE"/>
           </a:solidFill>
           <a:ln w="19050">
             <a:solidFill>
-              <a:srgbClr val="0D9488"/>
+              <a:srgbClr val="7C3AED"/>
             </a:solidFill>
             <a:prstDash val="solid"/>
           </a:ln>
@@ -28279,7 +30103,7 @@
         </p:nvSpPr>
         <p:spPr>
           <a:xfrm>
-            <a:off x="2938272" y="2258568"/>
+            <a:off x="2221992" y="2258568"/>
             <a:ext cx="1828800" cy="292608"/>
           </a:xfrm>
           <a:prstGeom prst="rect">
@@ -28298,13 +30122,13 @@
             <a:r>
               <a:rPr lang="en-US" sz="1300" b="1" dirty="0">
                 <a:solidFill>
-                  <a:srgbClr val="0F766E"/>
+                  <a:srgbClr val="4C1D95"/>
                 </a:solidFill>
                 <a:latin typeface="Trebuchet MS" pitchFamily="34" charset="0"/>
                 <a:ea typeface="Trebuchet MS" pitchFamily="34" charset="-122"/>
                 <a:cs typeface="Trebuchet MS" pitchFamily="34" charset="-120"/>
               </a:rPr>
-              <a:t>play</a:t>
+              <a:t>multi</a:t>
             </a:r>
             <a:endParaRPr lang="en-US" sz="1300" dirty="0"/>
           </a:p>
@@ -28318,7 +30142,7 @@
         </p:nvSpPr>
         <p:spPr>
           <a:xfrm>
-            <a:off x="2938272" y="2569464"/>
+            <a:off x="2221992" y="2569464"/>
             <a:ext cx="1828800" cy="201168"/>
           </a:xfrm>
           <a:prstGeom prst="rect">
@@ -28343,7 +30167,7 @@
                 <a:ea typeface="Calibri" pitchFamily="34" charset="-122"/>
                 <a:cs typeface="Calibri" pitchFamily="34" charset="-120"/>
               </a:rPr>
-              <a:t>to engage in fun activity</a:t>
+              <a:t>many</a:t>
             </a:r>
             <a:endParaRPr lang="en-US" sz="850" dirty="0"/>
           </a:p>
@@ -28357,7 +30181,7 @@
         </p:nvSpPr>
         <p:spPr>
           <a:xfrm>
-            <a:off x="5803392" y="2258568"/>
+            <a:off x="4370832" y="2258568"/>
             <a:ext cx="1828800" cy="292608"/>
           </a:xfrm>
           <a:prstGeom prst="rect">
@@ -28366,11 +30190,11 @@
             </a:avLst>
           </a:prstGeom>
           <a:solidFill>
-            <a:srgbClr val="FCE7F3"/>
+            <a:srgbClr val="CCFBF1"/>
           </a:solidFill>
           <a:ln w="19050">
             <a:solidFill>
-              <a:srgbClr val="DB2777"/>
+              <a:srgbClr val="0D9488"/>
             </a:solidFill>
             <a:prstDash val="solid"/>
           </a:ln>
@@ -28391,7 +30215,7 @@
         </p:nvSpPr>
         <p:spPr>
           <a:xfrm>
-            <a:off x="5803392" y="2258568"/>
+            <a:off x="4370832" y="2258568"/>
             <a:ext cx="1828800" cy="292608"/>
           </a:xfrm>
           <a:prstGeom prst="rect">
@@ -28410,13 +30234,13 @@
             <a:r>
               <a:rPr lang="en-US" sz="1300" b="1" dirty="0">
                 <a:solidFill>
-                  <a:srgbClr val="9D174D"/>
+                  <a:srgbClr val="0F766E"/>
                 </a:solidFill>
                 <a:latin typeface="Trebuchet MS" pitchFamily="34" charset="0"/>
                 <a:ea typeface="Trebuchet MS" pitchFamily="34" charset="-122"/>
                 <a:cs typeface="Trebuchet MS" pitchFamily="34" charset="-120"/>
               </a:rPr>
-              <a:t>ground</a:t>
+              <a:t>play</a:t>
             </a:r>
             <a:endParaRPr lang="en-US" sz="1300" dirty="0"/>
           </a:p>
@@ -28430,7 +30254,7 @@
         </p:nvSpPr>
         <p:spPr>
           <a:xfrm>
-            <a:off x="5803392" y="2569464"/>
+            <a:off x="4370832" y="2569464"/>
             <a:ext cx="1828800" cy="201168"/>
           </a:xfrm>
           <a:prstGeom prst="rect">
@@ -28455,7 +30279,7 @@
                 <a:ea typeface="Calibri" pitchFamily="34" charset="-122"/>
                 <a:cs typeface="Calibri" pitchFamily="34" charset="-120"/>
               </a:rPr>
-              <a:t>an area of land used for a purpose</a:t>
+              <a:t>to take part in a game; to have fun</a:t>
             </a:r>
             <a:endParaRPr lang="en-US" sz="850" dirty="0"/>
           </a:p>
@@ -28464,6 +30288,118 @@
       <p:sp>
         <p:nvSpPr>
           <p:cNvPr id="22" name="Shape 20"/>
+          <p:cNvSpPr/>
+          <p:nvPr/>
+        </p:nvSpPr>
+        <p:spPr>
+          <a:xfrm>
+            <a:off x="6519672" y="2258568"/>
+            <a:ext cx="1828800" cy="292608"/>
+          </a:xfrm>
+          <a:prstGeom prst="rect">
+            <a:avLst>
+              <a:gd name="adj" fmla="val 25000"/>
+            </a:avLst>
+          </a:prstGeom>
+          <a:solidFill>
+            <a:srgbClr val="FCE7F3"/>
+          </a:solidFill>
+          <a:ln w="19050">
+            <a:solidFill>
+              <a:srgbClr val="DB2777"/>
+            </a:solidFill>
+            <a:prstDash val="solid"/>
+          </a:ln>
+          <a:effectLst>
+            <a:outerShdw sx="100000" sy="100000" kx="0" ky="0" algn="bl" rotWithShape="0" blurRad="101600" dist="38100" dir="8100000">
+              <a:srgbClr val="000000">
+                <a:alpha val="12000"/>
+              </a:srgbClr>
+            </a:outerShdw>
+          </a:effectLst>
+        </p:spPr>
+      </p:sp>
+      <p:sp>
+        <p:nvSpPr>
+          <p:cNvPr id="23" name="Text 21"/>
+          <p:cNvSpPr/>
+          <p:nvPr/>
+        </p:nvSpPr>
+        <p:spPr>
+          <a:xfrm>
+            <a:off x="6519672" y="2258568"/>
+            <a:ext cx="1828800" cy="292608"/>
+          </a:xfrm>
+          <a:prstGeom prst="rect">
+            <a:avLst/>
+          </a:prstGeom>
+          <a:noFill/>
+          <a:ln/>
+        </p:spPr>
+        <p:txBody>
+          <a:bodyPr wrap="square" lIns="0" tIns="0" rIns="0" bIns="0" rtlCol="0" anchor="ctr"/>
+          <a:lstStyle/>
+          <a:p>
+            <a:pPr algn="ctr" indent="0" marL="0">
+              <a:buNone/>
+            </a:pPr>
+            <a:r>
+              <a:rPr lang="en-US" sz="1300" b="1" dirty="0">
+                <a:solidFill>
+                  <a:srgbClr val="9D174D"/>
+                </a:solidFill>
+                <a:latin typeface="Trebuchet MS" pitchFamily="34" charset="0"/>
+                <a:ea typeface="Trebuchet MS" pitchFamily="34" charset="-122"/>
+                <a:cs typeface="Trebuchet MS" pitchFamily="34" charset="-120"/>
+              </a:rPr>
+              <a:t>er</a:t>
+            </a:r>
+            <a:endParaRPr lang="en-US" sz="1300" dirty="0"/>
+          </a:p>
+        </p:txBody>
+      </p:sp>
+      <p:sp>
+        <p:nvSpPr>
+          <p:cNvPr id="24" name="Text 22"/>
+          <p:cNvSpPr/>
+          <p:nvPr/>
+        </p:nvSpPr>
+        <p:spPr>
+          <a:xfrm>
+            <a:off x="6519672" y="2569464"/>
+            <a:ext cx="1828800" cy="201168"/>
+          </a:xfrm>
+          <a:prstGeom prst="rect">
+            <a:avLst/>
+          </a:prstGeom>
+          <a:noFill/>
+          <a:ln/>
+        </p:spPr>
+        <p:txBody>
+          <a:bodyPr wrap="square" lIns="0" tIns="0" rIns="0" bIns="0" rtlCol="0" anchor="t"/>
+          <a:lstStyle/>
+          <a:p>
+            <a:pPr algn="ctr" indent="0" marL="0">
+              <a:buNone/>
+            </a:pPr>
+            <a:r>
+              <a:rPr lang="en-US" sz="850" dirty="0">
+                <a:solidFill>
+                  <a:srgbClr val="475569"/>
+                </a:solidFill>
+                <a:latin typeface="Calibri" pitchFamily="34" charset="0"/>
+                <a:ea typeface="Calibri" pitchFamily="34" charset="-122"/>
+                <a:cs typeface="Calibri" pitchFamily="34" charset="-120"/>
+              </a:rPr>
+              <a:t>person who; more</a:t>
+            </a:r>
+            <a:endParaRPr lang="en-US" sz="850" dirty="0"/>
+          </a:p>
+        </p:txBody>
+      </p:sp>
+      <p:sp>
+        <p:nvSpPr>
+          <p:cNvPr id="25" name="Shape 23"/>
           <p:cNvSpPr/>
           <p:nvPr/>
         </p:nvSpPr>
@@ -28490,7 +30426,7 @@
       </p:sp>
       <p:sp>
         <p:nvSpPr>
-          <p:cNvPr id="23" name="Text 21"/>
+          <p:cNvPr id="26" name="Text 24"/>
           <p:cNvSpPr/>
           <p:nvPr/>
         </p:nvSpPr>
@@ -28529,7 +30465,7 @@
       </p:sp>
       <p:sp>
         <p:nvSpPr>
-          <p:cNvPr id="24" name="Shape 22"/>
+          <p:cNvPr id="27" name="Shape 25"/>
           <p:cNvSpPr/>
           <p:nvPr/>
         </p:nvSpPr>
@@ -28556,7 +30492,7 @@
       </p:sp>
       <p:sp>
         <p:nvSpPr>
-          <p:cNvPr id="25" name="Text 23"/>
+          <p:cNvPr id="28" name="Text 26"/>
           <p:cNvSpPr/>
           <p:nvPr/>
         </p:nvSpPr>
@@ -28595,7 +30531,7 @@
       </p:sp>
       <p:sp>
         <p:nvSpPr>
-          <p:cNvPr id="26" name="Shape 24"/>
+          <p:cNvPr id="29" name="Shape 27"/>
           <p:cNvSpPr/>
           <p:nvPr/>
         </p:nvSpPr>
@@ -28622,7 +30558,7 @@
       </p:sp>
       <p:sp>
         <p:nvSpPr>
-          <p:cNvPr id="27" name="Text 25"/>
+          <p:cNvPr id="30" name="Text 28"/>
           <p:cNvSpPr/>
           <p:nvPr/>
         </p:nvSpPr>
@@ -28661,7 +30597,7 @@
       </p:sp>
       <p:sp>
         <p:nvSpPr>
-          <p:cNvPr id="28" name="Shape 26"/>
+          <p:cNvPr id="31" name="Shape 29"/>
           <p:cNvSpPr/>
           <p:nvPr/>
         </p:nvSpPr>
@@ -28688,7 +30624,7 @@
       </p:sp>
       <p:sp>
         <p:nvSpPr>
-          <p:cNvPr id="29" name="Text 27"/>
+          <p:cNvPr id="32" name="Text 30"/>
           <p:cNvSpPr/>
           <p:nvPr/>
         </p:nvSpPr>
@@ -29011,7 +30947,7 @@
                 <a:ea typeface="Calibri" pitchFamily="34" charset="-122"/>
                 <a:cs typeface="Calibri" pitchFamily="34" charset="-120"/>
               </a:rPr>
-              <a:t>Word Labs  •  wordlabs.app  •  Root: 'play' = to engage in fun activity</a:t>
+              <a:t>Word Labs  •  wordlabs.app  •  Root: 'play' = to take part in a game; to have fun</a:t>
             </a:r>
             <a:endParaRPr lang="en-US" sz="800" dirty="0"/>
           </a:p>
@@ -29150,7 +31086,7 @@
                 <a:ea typeface="Trebuchet MS" pitchFamily="34" charset="-122"/>
                 <a:cs typeface="Trebuchet MS" pitchFamily="34" charset="-120"/>
               </a:rPr>
-              <a:t>playground</a:t>
+              <a:t>multiplayer</a:t>
             </a:r>
             <a:endParaRPr lang="en-US" sz="2800" dirty="0"/>
           </a:p>
@@ -29230,7 +31166,7 @@
         </p:nvSpPr>
         <p:spPr>
           <a:xfrm>
-            <a:off x="2938272" y="2258568"/>
+            <a:off x="2221992" y="2258568"/>
             <a:ext cx="1828800" cy="292608"/>
           </a:xfrm>
           <a:prstGeom prst="rect">
@@ -29239,11 +31175,11 @@
             </a:avLst>
           </a:prstGeom>
           <a:solidFill>
-            <a:srgbClr val="CCFBF1"/>
+            <a:srgbClr val="DDD6FE"/>
           </a:solidFill>
           <a:ln w="19050">
             <a:solidFill>
-              <a:srgbClr val="0D9488"/>
+              <a:srgbClr val="7C3AED"/>
             </a:solidFill>
             <a:prstDash val="solid"/>
           </a:ln>
@@ -29264,7 +31200,7 @@
         </p:nvSpPr>
         <p:spPr>
           <a:xfrm>
-            <a:off x="2938272" y="2258568"/>
+            <a:off x="2221992" y="2258568"/>
             <a:ext cx="1828800" cy="292608"/>
           </a:xfrm>
           <a:prstGeom prst="rect">
@@ -29283,13 +31219,13 @@
             <a:r>
               <a:rPr lang="en-US" sz="1300" b="1" dirty="0">
                 <a:solidFill>
-                  <a:srgbClr val="0F766E"/>
+                  <a:srgbClr val="4C1D95"/>
                 </a:solidFill>
                 <a:latin typeface="Trebuchet MS" pitchFamily="34" charset="0"/>
                 <a:ea typeface="Trebuchet MS" pitchFamily="34" charset="-122"/>
                 <a:cs typeface="Trebuchet MS" pitchFamily="34" charset="-120"/>
               </a:rPr>
-              <a:t>play</a:t>
+              <a:t>multi</a:t>
             </a:r>
             <a:endParaRPr lang="en-US" sz="1300" dirty="0"/>
           </a:p>
@@ -29303,7 +31239,7 @@
         </p:nvSpPr>
         <p:spPr>
           <a:xfrm>
-            <a:off x="2938272" y="2569464"/>
+            <a:off x="2221992" y="2569464"/>
             <a:ext cx="1828800" cy="201168"/>
           </a:xfrm>
           <a:prstGeom prst="rect">
@@ -29328,7 +31264,7 @@
                 <a:ea typeface="Calibri" pitchFamily="34" charset="-122"/>
                 <a:cs typeface="Calibri" pitchFamily="34" charset="-120"/>
               </a:rPr>
-              <a:t>to engage in fun activity</a:t>
+              <a:t>many</a:t>
             </a:r>
             <a:endParaRPr lang="en-US" sz="850" dirty="0"/>
           </a:p>
@@ -29342,7 +31278,7 @@
         </p:nvSpPr>
         <p:spPr>
           <a:xfrm>
-            <a:off x="5803392" y="2258568"/>
+            <a:off x="4370832" y="2258568"/>
             <a:ext cx="1828800" cy="292608"/>
           </a:xfrm>
           <a:prstGeom prst="rect">
@@ -29351,11 +31287,11 @@
             </a:avLst>
           </a:prstGeom>
           <a:solidFill>
-            <a:srgbClr val="FCE7F3"/>
+            <a:srgbClr val="CCFBF1"/>
           </a:solidFill>
           <a:ln w="19050">
             <a:solidFill>
-              <a:srgbClr val="DB2777"/>
+              <a:srgbClr val="0D9488"/>
             </a:solidFill>
             <a:prstDash val="solid"/>
           </a:ln>
@@ -29376,7 +31312,7 @@
         </p:nvSpPr>
         <p:spPr>
           <a:xfrm>
-            <a:off x="5803392" y="2258568"/>
+            <a:off x="4370832" y="2258568"/>
             <a:ext cx="1828800" cy="292608"/>
           </a:xfrm>
           <a:prstGeom prst="rect">
@@ -29395,13 +31331,13 @@
             <a:r>
               <a:rPr lang="en-US" sz="1300" b="1" dirty="0">
                 <a:solidFill>
-                  <a:srgbClr val="9D174D"/>
+                  <a:srgbClr val="0F766E"/>
                 </a:solidFill>
                 <a:latin typeface="Trebuchet MS" pitchFamily="34" charset="0"/>
                 <a:ea typeface="Trebuchet MS" pitchFamily="34" charset="-122"/>
                 <a:cs typeface="Trebuchet MS" pitchFamily="34" charset="-120"/>
               </a:rPr>
-              <a:t>ground</a:t>
+              <a:t>play</a:t>
             </a:r>
             <a:endParaRPr lang="en-US" sz="1300" dirty="0"/>
           </a:p>
@@ -29415,7 +31351,7 @@
         </p:nvSpPr>
         <p:spPr>
           <a:xfrm>
-            <a:off x="5803392" y="2569464"/>
+            <a:off x="4370832" y="2569464"/>
             <a:ext cx="1828800" cy="201168"/>
           </a:xfrm>
           <a:prstGeom prst="rect">
@@ -29440,7 +31376,7 @@
                 <a:ea typeface="Calibri" pitchFamily="34" charset="-122"/>
                 <a:cs typeface="Calibri" pitchFamily="34" charset="-120"/>
               </a:rPr>
-              <a:t>an area of land used for a purpose</a:t>
+              <a:t>to take part in a game; to have fun</a:t>
             </a:r>
             <a:endParaRPr lang="en-US" sz="850" dirty="0"/>
           </a:p>
@@ -29449,6 +31385,118 @@
       <p:sp>
         <p:nvSpPr>
           <p:cNvPr id="22" name="Shape 20"/>
+          <p:cNvSpPr/>
+          <p:nvPr/>
+        </p:nvSpPr>
+        <p:spPr>
+          <a:xfrm>
+            <a:off x="6519672" y="2258568"/>
+            <a:ext cx="1828800" cy="292608"/>
+          </a:xfrm>
+          <a:prstGeom prst="rect">
+            <a:avLst>
+              <a:gd name="adj" fmla="val 25000"/>
+            </a:avLst>
+          </a:prstGeom>
+          <a:solidFill>
+            <a:srgbClr val="FCE7F3"/>
+          </a:solidFill>
+          <a:ln w="19050">
+            <a:solidFill>
+              <a:srgbClr val="DB2777"/>
+            </a:solidFill>
+            <a:prstDash val="solid"/>
+          </a:ln>
+          <a:effectLst>
+            <a:outerShdw sx="100000" sy="100000" kx="0" ky="0" algn="bl" rotWithShape="0" blurRad="101600" dist="38100" dir="8100000">
+              <a:srgbClr val="000000">
+                <a:alpha val="12000"/>
+              </a:srgbClr>
+            </a:outerShdw>
+          </a:effectLst>
+        </p:spPr>
+      </p:sp>
+      <p:sp>
+        <p:nvSpPr>
+          <p:cNvPr id="23" name="Text 21"/>
+          <p:cNvSpPr/>
+          <p:nvPr/>
+        </p:nvSpPr>
+        <p:spPr>
+          <a:xfrm>
+            <a:off x="6519672" y="2258568"/>
+            <a:ext cx="1828800" cy="292608"/>
+          </a:xfrm>
+          <a:prstGeom prst="rect">
+            <a:avLst/>
+          </a:prstGeom>
+          <a:noFill/>
+          <a:ln/>
+        </p:spPr>
+        <p:txBody>
+          <a:bodyPr wrap="square" lIns="0" tIns="0" rIns="0" bIns="0" rtlCol="0" anchor="ctr"/>
+          <a:lstStyle/>
+          <a:p>
+            <a:pPr algn="ctr" indent="0" marL="0">
+              <a:buNone/>
+            </a:pPr>
+            <a:r>
+              <a:rPr lang="en-US" sz="1300" b="1" dirty="0">
+                <a:solidFill>
+                  <a:srgbClr val="9D174D"/>
+                </a:solidFill>
+                <a:latin typeface="Trebuchet MS" pitchFamily="34" charset="0"/>
+                <a:ea typeface="Trebuchet MS" pitchFamily="34" charset="-122"/>
+                <a:cs typeface="Trebuchet MS" pitchFamily="34" charset="-120"/>
+              </a:rPr>
+              <a:t>er</a:t>
+            </a:r>
+            <a:endParaRPr lang="en-US" sz="1300" dirty="0"/>
+          </a:p>
+        </p:txBody>
+      </p:sp>
+      <p:sp>
+        <p:nvSpPr>
+          <p:cNvPr id="24" name="Text 22"/>
+          <p:cNvSpPr/>
+          <p:nvPr/>
+        </p:nvSpPr>
+        <p:spPr>
+          <a:xfrm>
+            <a:off x="6519672" y="2569464"/>
+            <a:ext cx="1828800" cy="201168"/>
+          </a:xfrm>
+          <a:prstGeom prst="rect">
+            <a:avLst/>
+          </a:prstGeom>
+          <a:noFill/>
+          <a:ln/>
+        </p:spPr>
+        <p:txBody>
+          <a:bodyPr wrap="square" lIns="0" tIns="0" rIns="0" bIns="0" rtlCol="0" anchor="t"/>
+          <a:lstStyle/>
+          <a:p>
+            <a:pPr algn="ctr" indent="0" marL="0">
+              <a:buNone/>
+            </a:pPr>
+            <a:r>
+              <a:rPr lang="en-US" sz="850" dirty="0">
+                <a:solidFill>
+                  <a:srgbClr val="475569"/>
+                </a:solidFill>
+                <a:latin typeface="Calibri" pitchFamily="34" charset="0"/>
+                <a:ea typeface="Calibri" pitchFamily="34" charset="-122"/>
+                <a:cs typeface="Calibri" pitchFamily="34" charset="-120"/>
+              </a:rPr>
+              <a:t>person who; more</a:t>
+            </a:r>
+            <a:endParaRPr lang="en-US" sz="850" dirty="0"/>
+          </a:p>
+        </p:txBody>
+      </p:sp>
+      <p:sp>
+        <p:nvSpPr>
+          <p:cNvPr id="25" name="Shape 23"/>
           <p:cNvSpPr/>
           <p:nvPr/>
         </p:nvSpPr>
@@ -29475,7 +31523,7 @@
       </p:sp>
       <p:sp>
         <p:nvSpPr>
-          <p:cNvPr id="23" name="Text 21"/>
+          <p:cNvPr id="26" name="Text 24"/>
           <p:cNvSpPr/>
           <p:nvPr/>
         </p:nvSpPr>
@@ -29514,7 +31562,7 @@
       </p:sp>
       <p:sp>
         <p:nvSpPr>
-          <p:cNvPr id="24" name="Shape 22"/>
+          <p:cNvPr id="27" name="Shape 25"/>
           <p:cNvSpPr/>
           <p:nvPr/>
         </p:nvSpPr>
@@ -29541,14 +31589,14 @@
       </p:sp>
       <p:sp>
         <p:nvSpPr>
-          <p:cNvPr id="25" name="Shape 23"/>
-          <p:cNvSpPr/>
-          <p:nvPr/>
-        </p:nvSpPr>
-        <p:spPr>
-          <a:xfrm>
-            <a:off x="2999232" y="3364992"/>
-            <a:ext cx="1645920" cy="475488"/>
+          <p:cNvPr id="28" name="Shape 26"/>
+          <p:cNvSpPr/>
+          <p:nvPr/>
+        </p:nvSpPr>
+        <p:spPr>
+          <a:xfrm>
+            <a:off x="1975104" y="3364992"/>
+            <a:ext cx="1554480" cy="475488"/>
           </a:xfrm>
           <a:prstGeom prst="rect">
             <a:avLst>
@@ -29568,14 +31616,14 @@
       </p:sp>
       <p:sp>
         <p:nvSpPr>
-          <p:cNvPr id="26" name="Text 24"/>
-          <p:cNvSpPr/>
-          <p:nvPr/>
-        </p:nvSpPr>
-        <p:spPr>
-          <a:xfrm>
-            <a:off x="2999232" y="3364992"/>
-            <a:ext cx="1645920" cy="475488"/>
+          <p:cNvPr id="29" name="Text 27"/>
+          <p:cNvSpPr/>
+          <p:nvPr/>
+        </p:nvSpPr>
+        <p:spPr>
+          <a:xfrm>
+            <a:off x="1975104" y="3364992"/>
+            <a:ext cx="1554480" cy="475488"/>
           </a:xfrm>
           <a:prstGeom prst="rect">
             <a:avLst/>
@@ -29599,7 +31647,7 @@
                 <a:ea typeface="Trebuchet MS" pitchFamily="34" charset="-122"/>
                 <a:cs typeface="Trebuchet MS" pitchFamily="34" charset="-120"/>
               </a:rPr>
-              <a:t>play</a:t>
+              <a:t>mul</a:t>
             </a:r>
             <a:endParaRPr lang="en-US" sz="1400" dirty="0"/>
           </a:p>
@@ -29607,14 +31655,14 @@
       </p:sp>
       <p:sp>
         <p:nvSpPr>
-          <p:cNvPr id="27" name="Text 25"/>
-          <p:cNvSpPr/>
-          <p:nvPr/>
-        </p:nvSpPr>
-        <p:spPr>
-          <a:xfrm>
-            <a:off x="4645152" y="3364992"/>
-            <a:ext cx="1097280" cy="475488"/>
+          <p:cNvPr id="30" name="Text 28"/>
+          <p:cNvSpPr/>
+          <p:nvPr/>
+        </p:nvSpPr>
+        <p:spPr>
+          <a:xfrm>
+            <a:off x="3529584" y="3364992"/>
+            <a:ext cx="73152" cy="475488"/>
           </a:xfrm>
           <a:prstGeom prst="rect">
             <a:avLst/>
@@ -29646,14 +31694,14 @@
       </p:sp>
       <p:sp>
         <p:nvSpPr>
-          <p:cNvPr id="28" name="Shape 26"/>
-          <p:cNvSpPr/>
-          <p:nvPr/>
-        </p:nvSpPr>
-        <p:spPr>
-          <a:xfrm>
-            <a:off x="5742432" y="3364992"/>
-            <a:ext cx="1645920" cy="475488"/>
+          <p:cNvPr id="31" name="Shape 29"/>
+          <p:cNvSpPr/>
+          <p:nvPr/>
+        </p:nvSpPr>
+        <p:spPr>
+          <a:xfrm>
+            <a:off x="3602736" y="3364992"/>
+            <a:ext cx="1554480" cy="475488"/>
           </a:xfrm>
           <a:prstGeom prst="rect">
             <a:avLst>
@@ -29673,14 +31721,14 @@
       </p:sp>
       <p:sp>
         <p:nvSpPr>
-          <p:cNvPr id="29" name="Text 27"/>
-          <p:cNvSpPr/>
-          <p:nvPr/>
-        </p:nvSpPr>
-        <p:spPr>
-          <a:xfrm>
-            <a:off x="5742432" y="3364992"/>
-            <a:ext cx="1645920" cy="475488"/>
+          <p:cNvPr id="32" name="Text 30"/>
+          <p:cNvSpPr/>
+          <p:nvPr/>
+        </p:nvSpPr>
+        <p:spPr>
+          <a:xfrm>
+            <a:off x="3602736" y="3364992"/>
+            <a:ext cx="1554480" cy="475488"/>
           </a:xfrm>
           <a:prstGeom prst="rect">
             <a:avLst/>
@@ -29704,7 +31752,7 @@
                 <a:ea typeface="Trebuchet MS" pitchFamily="34" charset="-122"/>
                 <a:cs typeface="Trebuchet MS" pitchFamily="34" charset="-120"/>
               </a:rPr>
-              <a:t>ground</a:t>
+              <a:t>ti</a:t>
             </a:r>
             <a:endParaRPr lang="en-US" sz="1400" dirty="0"/>
           </a:p>
@@ -29712,7 +31760,217 @@
       </p:sp>
       <p:sp>
         <p:nvSpPr>
-          <p:cNvPr id="30" name="Shape 28"/>
+          <p:cNvPr id="33" name="Text 31"/>
+          <p:cNvSpPr/>
+          <p:nvPr/>
+        </p:nvSpPr>
+        <p:spPr>
+          <a:xfrm>
+            <a:off x="5157216" y="3364992"/>
+            <a:ext cx="73152" cy="475488"/>
+          </a:xfrm>
+          <a:prstGeom prst="rect">
+            <a:avLst/>
+          </a:prstGeom>
+          <a:noFill/>
+          <a:ln/>
+        </p:spPr>
+        <p:txBody>
+          <a:bodyPr wrap="square" lIns="0" tIns="0" rIns="0" bIns="0" rtlCol="0" anchor="ctr"/>
+          <a:lstStyle/>
+          <a:p>
+            <a:pPr algn="ctr" indent="0" marL="0">
+              <a:buNone/>
+            </a:pPr>
+            <a:r>
+              <a:rPr lang="en-US" sz="1600" b="1" dirty="0">
+                <a:solidFill>
+                  <a:srgbClr val="0D9488"/>
+                </a:solidFill>
+                <a:latin typeface="Trebuchet MS" pitchFamily="34" charset="0"/>
+                <a:ea typeface="Trebuchet MS" pitchFamily="34" charset="-122"/>
+                <a:cs typeface="Trebuchet MS" pitchFamily="34" charset="-120"/>
+              </a:rPr>
+              <a:t>·</a:t>
+            </a:r>
+            <a:endParaRPr lang="en-US" sz="1600" dirty="0"/>
+          </a:p>
+        </p:txBody>
+      </p:sp>
+      <p:sp>
+        <p:nvSpPr>
+          <p:cNvPr id="34" name="Shape 32"/>
+          <p:cNvSpPr/>
+          <p:nvPr/>
+        </p:nvSpPr>
+        <p:spPr>
+          <a:xfrm>
+            <a:off x="5230368" y="3364992"/>
+            <a:ext cx="1554480" cy="475488"/>
+          </a:xfrm>
+          <a:prstGeom prst="rect">
+            <a:avLst>
+              <a:gd name="adj" fmla="val 9615"/>
+            </a:avLst>
+          </a:prstGeom>
+          <a:solidFill>
+            <a:srgbClr val="FFFFFF"/>
+          </a:solidFill>
+          <a:ln w="12700">
+            <a:solidFill>
+              <a:srgbClr val="0D9488"/>
+            </a:solidFill>
+            <a:prstDash val="solid"/>
+          </a:ln>
+        </p:spPr>
+      </p:sp>
+      <p:sp>
+        <p:nvSpPr>
+          <p:cNvPr id="35" name="Text 33"/>
+          <p:cNvSpPr/>
+          <p:nvPr/>
+        </p:nvSpPr>
+        <p:spPr>
+          <a:xfrm>
+            <a:off x="5230368" y="3364992"/>
+            <a:ext cx="1554480" cy="475488"/>
+          </a:xfrm>
+          <a:prstGeom prst="rect">
+            <a:avLst/>
+          </a:prstGeom>
+          <a:noFill/>
+          <a:ln/>
+        </p:spPr>
+        <p:txBody>
+          <a:bodyPr wrap="square" lIns="0" tIns="0" rIns="0" bIns="0" rtlCol="0" anchor="ctr"/>
+          <a:lstStyle/>
+          <a:p>
+            <a:pPr algn="ctr" indent="0" marL="0">
+              <a:buNone/>
+            </a:pPr>
+            <a:r>
+              <a:rPr lang="en-US" sz="1400" b="1" dirty="0">
+                <a:solidFill>
+                  <a:srgbClr val="0D9488"/>
+                </a:solidFill>
+                <a:latin typeface="Trebuchet MS" pitchFamily="34" charset="0"/>
+                <a:ea typeface="Trebuchet MS" pitchFamily="34" charset="-122"/>
+                <a:cs typeface="Trebuchet MS" pitchFamily="34" charset="-120"/>
+              </a:rPr>
+              <a:t>play</a:t>
+            </a:r>
+            <a:endParaRPr lang="en-US" sz="1400" dirty="0"/>
+          </a:p>
+        </p:txBody>
+      </p:sp>
+      <p:sp>
+        <p:nvSpPr>
+          <p:cNvPr id="36" name="Text 34"/>
+          <p:cNvSpPr/>
+          <p:nvPr/>
+        </p:nvSpPr>
+        <p:spPr>
+          <a:xfrm>
+            <a:off x="6784848" y="3364992"/>
+            <a:ext cx="73152" cy="475488"/>
+          </a:xfrm>
+          <a:prstGeom prst="rect">
+            <a:avLst/>
+          </a:prstGeom>
+          <a:noFill/>
+          <a:ln/>
+        </p:spPr>
+        <p:txBody>
+          <a:bodyPr wrap="square" lIns="0" tIns="0" rIns="0" bIns="0" rtlCol="0" anchor="ctr"/>
+          <a:lstStyle/>
+          <a:p>
+            <a:pPr algn="ctr" indent="0" marL="0">
+              <a:buNone/>
+            </a:pPr>
+            <a:r>
+              <a:rPr lang="en-US" sz="1600" b="1" dirty="0">
+                <a:solidFill>
+                  <a:srgbClr val="0D9488"/>
+                </a:solidFill>
+                <a:latin typeface="Trebuchet MS" pitchFamily="34" charset="0"/>
+                <a:ea typeface="Trebuchet MS" pitchFamily="34" charset="-122"/>
+                <a:cs typeface="Trebuchet MS" pitchFamily="34" charset="-120"/>
+              </a:rPr>
+              <a:t>·</a:t>
+            </a:r>
+            <a:endParaRPr lang="en-US" sz="1600" dirty="0"/>
+          </a:p>
+        </p:txBody>
+      </p:sp>
+      <p:sp>
+        <p:nvSpPr>
+          <p:cNvPr id="37" name="Shape 35"/>
+          <p:cNvSpPr/>
+          <p:nvPr/>
+        </p:nvSpPr>
+        <p:spPr>
+          <a:xfrm>
+            <a:off x="6858000" y="3364992"/>
+            <a:ext cx="1554480" cy="475488"/>
+          </a:xfrm>
+          <a:prstGeom prst="rect">
+            <a:avLst>
+              <a:gd name="adj" fmla="val 9615"/>
+            </a:avLst>
+          </a:prstGeom>
+          <a:solidFill>
+            <a:srgbClr val="FFFFFF"/>
+          </a:solidFill>
+          <a:ln w="12700">
+            <a:solidFill>
+              <a:srgbClr val="0D9488"/>
+            </a:solidFill>
+            <a:prstDash val="solid"/>
+          </a:ln>
+        </p:spPr>
+      </p:sp>
+      <p:sp>
+        <p:nvSpPr>
+          <p:cNvPr id="38" name="Text 36"/>
+          <p:cNvSpPr/>
+          <p:nvPr/>
+        </p:nvSpPr>
+        <p:spPr>
+          <a:xfrm>
+            <a:off x="6858000" y="3364992"/>
+            <a:ext cx="1554480" cy="475488"/>
+          </a:xfrm>
+          <a:prstGeom prst="rect">
+            <a:avLst/>
+          </a:prstGeom>
+          <a:noFill/>
+          <a:ln/>
+        </p:spPr>
+        <p:txBody>
+          <a:bodyPr wrap="square" lIns="0" tIns="0" rIns="0" bIns="0" rtlCol="0" anchor="ctr"/>
+          <a:lstStyle/>
+          <a:p>
+            <a:pPr algn="ctr" indent="0" marL="0">
+              <a:buNone/>
+            </a:pPr>
+            <a:r>
+              <a:rPr lang="en-US" sz="1400" b="1" dirty="0">
+                <a:solidFill>
+                  <a:srgbClr val="0D9488"/>
+                </a:solidFill>
+                <a:latin typeface="Trebuchet MS" pitchFamily="34" charset="0"/>
+                <a:ea typeface="Trebuchet MS" pitchFamily="34" charset="-122"/>
+                <a:cs typeface="Trebuchet MS" pitchFamily="34" charset="-120"/>
+              </a:rPr>
+              <a:t>er</a:t>
+            </a:r>
+            <a:endParaRPr lang="en-US" sz="1400" dirty="0"/>
+          </a:p>
+        </p:txBody>
+      </p:sp>
+      <p:sp>
+        <p:nvSpPr>
+          <p:cNvPr id="39" name="Shape 37"/>
           <p:cNvSpPr/>
           <p:nvPr/>
         </p:nvSpPr>
@@ -29739,7 +31997,7 @@
       </p:sp>
       <p:sp>
         <p:nvSpPr>
-          <p:cNvPr id="31" name="Text 29"/>
+          <p:cNvPr id="40" name="Text 38"/>
           <p:cNvSpPr/>
           <p:nvPr/>
         </p:nvSpPr>
@@ -29778,7 +32036,7 @@
       </p:sp>
       <p:sp>
         <p:nvSpPr>
-          <p:cNvPr id="32" name="Shape 30"/>
+          <p:cNvPr id="41" name="Shape 39"/>
           <p:cNvSpPr/>
           <p:nvPr/>
         </p:nvSpPr>
@@ -29805,7 +32063,7 @@
       </p:sp>
       <p:sp>
         <p:nvSpPr>
-          <p:cNvPr id="33" name="Text 31"/>
+          <p:cNvPr id="42" name="Text 40"/>
           <p:cNvSpPr/>
           <p:nvPr/>
         </p:nvSpPr>
@@ -30128,7 +32386,7 @@
                 <a:ea typeface="Calibri" pitchFamily="34" charset="-122"/>
                 <a:cs typeface="Calibri" pitchFamily="34" charset="-120"/>
               </a:rPr>
-              <a:t>Word Labs  •  wordlabs.app  •  Root: 'play' = to engage in fun activity</a:t>
+              <a:t>Word Labs  •  wordlabs.app  •  Root: 'play' = to take part in a game; to have fun</a:t>
             </a:r>
             <a:endParaRPr lang="en-US" sz="800" dirty="0"/>
           </a:p>
@@ -30267,7 +32525,7 @@
                 <a:ea typeface="Trebuchet MS" pitchFamily="34" charset="-122"/>
                 <a:cs typeface="Trebuchet MS" pitchFamily="34" charset="-120"/>
               </a:rPr>
-              <a:t>playground</a:t>
+              <a:t>multiplayer</a:t>
             </a:r>
             <a:endParaRPr lang="en-US" sz="2800" dirty="0"/>
           </a:p>
@@ -30347,7 +32605,7 @@
         </p:nvSpPr>
         <p:spPr>
           <a:xfrm>
-            <a:off x="2938272" y="2258568"/>
+            <a:off x="2221992" y="2258568"/>
             <a:ext cx="1828800" cy="292608"/>
           </a:xfrm>
           <a:prstGeom prst="rect">
@@ -30356,11 +32614,11 @@
             </a:avLst>
           </a:prstGeom>
           <a:solidFill>
-            <a:srgbClr val="CCFBF1"/>
+            <a:srgbClr val="DDD6FE"/>
           </a:solidFill>
           <a:ln w="19050">
             <a:solidFill>
-              <a:srgbClr val="0D9488"/>
+              <a:srgbClr val="7C3AED"/>
             </a:solidFill>
             <a:prstDash val="solid"/>
           </a:ln>
@@ -30381,7 +32639,7 @@
         </p:nvSpPr>
         <p:spPr>
           <a:xfrm>
-            <a:off x="2938272" y="2258568"/>
+            <a:off x="2221992" y="2258568"/>
             <a:ext cx="1828800" cy="292608"/>
           </a:xfrm>
           <a:prstGeom prst="rect">
@@ -30400,13 +32658,13 @@
             <a:r>
               <a:rPr lang="en-US" sz="1300" b="1" dirty="0">
                 <a:solidFill>
-                  <a:srgbClr val="0F766E"/>
+                  <a:srgbClr val="4C1D95"/>
                 </a:solidFill>
                 <a:latin typeface="Trebuchet MS" pitchFamily="34" charset="0"/>
                 <a:ea typeface="Trebuchet MS" pitchFamily="34" charset="-122"/>
                 <a:cs typeface="Trebuchet MS" pitchFamily="34" charset="-120"/>
               </a:rPr>
-              <a:t>play</a:t>
+              <a:t>multi</a:t>
             </a:r>
             <a:endParaRPr lang="en-US" sz="1300" dirty="0"/>
           </a:p>
@@ -30420,7 +32678,7 @@
         </p:nvSpPr>
         <p:spPr>
           <a:xfrm>
-            <a:off x="2938272" y="2569464"/>
+            <a:off x="2221992" y="2569464"/>
             <a:ext cx="1828800" cy="201168"/>
           </a:xfrm>
           <a:prstGeom prst="rect">
@@ -30445,7 +32703,7 @@
                 <a:ea typeface="Calibri" pitchFamily="34" charset="-122"/>
                 <a:cs typeface="Calibri" pitchFamily="34" charset="-120"/>
               </a:rPr>
-              <a:t>to engage in fun activity</a:t>
+              <a:t>many</a:t>
             </a:r>
             <a:endParaRPr lang="en-US" sz="850" dirty="0"/>
           </a:p>
@@ -30459,7 +32717,7 @@
         </p:nvSpPr>
         <p:spPr>
           <a:xfrm>
-            <a:off x="5803392" y="2258568"/>
+            <a:off x="4370832" y="2258568"/>
             <a:ext cx="1828800" cy="292608"/>
           </a:xfrm>
           <a:prstGeom prst="rect">
@@ -30468,11 +32726,11 @@
             </a:avLst>
           </a:prstGeom>
           <a:solidFill>
-            <a:srgbClr val="FCE7F3"/>
+            <a:srgbClr val="CCFBF1"/>
           </a:solidFill>
           <a:ln w="19050">
             <a:solidFill>
-              <a:srgbClr val="DB2777"/>
+              <a:srgbClr val="0D9488"/>
             </a:solidFill>
             <a:prstDash val="solid"/>
           </a:ln>
@@ -30493,7 +32751,7 @@
         </p:nvSpPr>
         <p:spPr>
           <a:xfrm>
-            <a:off x="5803392" y="2258568"/>
+            <a:off x="4370832" y="2258568"/>
             <a:ext cx="1828800" cy="292608"/>
           </a:xfrm>
           <a:prstGeom prst="rect">
@@ -30512,13 +32770,13 @@
             <a:r>
               <a:rPr lang="en-US" sz="1300" b="1" dirty="0">
                 <a:solidFill>
-                  <a:srgbClr val="9D174D"/>
+                  <a:srgbClr val="0F766E"/>
                 </a:solidFill>
                 <a:latin typeface="Trebuchet MS" pitchFamily="34" charset="0"/>
                 <a:ea typeface="Trebuchet MS" pitchFamily="34" charset="-122"/>
                 <a:cs typeface="Trebuchet MS" pitchFamily="34" charset="-120"/>
               </a:rPr>
-              <a:t>ground</a:t>
+              <a:t>play</a:t>
             </a:r>
             <a:endParaRPr lang="en-US" sz="1300" dirty="0"/>
           </a:p>
@@ -30532,7 +32790,7 @@
         </p:nvSpPr>
         <p:spPr>
           <a:xfrm>
-            <a:off x="5803392" y="2569464"/>
+            <a:off x="4370832" y="2569464"/>
             <a:ext cx="1828800" cy="201168"/>
           </a:xfrm>
           <a:prstGeom prst="rect">
@@ -30557,7 +32815,7 @@
                 <a:ea typeface="Calibri" pitchFamily="34" charset="-122"/>
                 <a:cs typeface="Calibri" pitchFamily="34" charset="-120"/>
               </a:rPr>
-              <a:t>an area of land used for a purpose</a:t>
+              <a:t>to take part in a game; to have fun</a:t>
             </a:r>
             <a:endParaRPr lang="en-US" sz="850" dirty="0"/>
           </a:p>
@@ -30566,6 +32824,118 @@
       <p:sp>
         <p:nvSpPr>
           <p:cNvPr id="22" name="Shape 20"/>
+          <p:cNvSpPr/>
+          <p:nvPr/>
+        </p:nvSpPr>
+        <p:spPr>
+          <a:xfrm>
+            <a:off x="6519672" y="2258568"/>
+            <a:ext cx="1828800" cy="292608"/>
+          </a:xfrm>
+          <a:prstGeom prst="rect">
+            <a:avLst>
+              <a:gd name="adj" fmla="val 25000"/>
+            </a:avLst>
+          </a:prstGeom>
+          <a:solidFill>
+            <a:srgbClr val="FCE7F3"/>
+          </a:solidFill>
+          <a:ln w="19050">
+            <a:solidFill>
+              <a:srgbClr val="DB2777"/>
+            </a:solidFill>
+            <a:prstDash val="solid"/>
+          </a:ln>
+          <a:effectLst>
+            <a:outerShdw sx="100000" sy="100000" kx="0" ky="0" algn="bl" rotWithShape="0" blurRad="101600" dist="38100" dir="8100000">
+              <a:srgbClr val="000000">
+                <a:alpha val="12000"/>
+              </a:srgbClr>
+            </a:outerShdw>
+          </a:effectLst>
+        </p:spPr>
+      </p:sp>
+      <p:sp>
+        <p:nvSpPr>
+          <p:cNvPr id="23" name="Text 21"/>
+          <p:cNvSpPr/>
+          <p:nvPr/>
+        </p:nvSpPr>
+        <p:spPr>
+          <a:xfrm>
+            <a:off x="6519672" y="2258568"/>
+            <a:ext cx="1828800" cy="292608"/>
+          </a:xfrm>
+          <a:prstGeom prst="rect">
+            <a:avLst/>
+          </a:prstGeom>
+          <a:noFill/>
+          <a:ln/>
+        </p:spPr>
+        <p:txBody>
+          <a:bodyPr wrap="square" lIns="0" tIns="0" rIns="0" bIns="0" rtlCol="0" anchor="ctr"/>
+          <a:lstStyle/>
+          <a:p>
+            <a:pPr algn="ctr" indent="0" marL="0">
+              <a:buNone/>
+            </a:pPr>
+            <a:r>
+              <a:rPr lang="en-US" sz="1300" b="1" dirty="0">
+                <a:solidFill>
+                  <a:srgbClr val="9D174D"/>
+                </a:solidFill>
+                <a:latin typeface="Trebuchet MS" pitchFamily="34" charset="0"/>
+                <a:ea typeface="Trebuchet MS" pitchFamily="34" charset="-122"/>
+                <a:cs typeface="Trebuchet MS" pitchFamily="34" charset="-120"/>
+              </a:rPr>
+              <a:t>er</a:t>
+            </a:r>
+            <a:endParaRPr lang="en-US" sz="1300" dirty="0"/>
+          </a:p>
+        </p:txBody>
+      </p:sp>
+      <p:sp>
+        <p:nvSpPr>
+          <p:cNvPr id="24" name="Text 22"/>
+          <p:cNvSpPr/>
+          <p:nvPr/>
+        </p:nvSpPr>
+        <p:spPr>
+          <a:xfrm>
+            <a:off x="6519672" y="2569464"/>
+            <a:ext cx="1828800" cy="201168"/>
+          </a:xfrm>
+          <a:prstGeom prst="rect">
+            <a:avLst/>
+          </a:prstGeom>
+          <a:noFill/>
+          <a:ln/>
+        </p:spPr>
+        <p:txBody>
+          <a:bodyPr wrap="square" lIns="0" tIns="0" rIns="0" bIns="0" rtlCol="0" anchor="t"/>
+          <a:lstStyle/>
+          <a:p>
+            <a:pPr algn="ctr" indent="0" marL="0">
+              <a:buNone/>
+            </a:pPr>
+            <a:r>
+              <a:rPr lang="en-US" sz="850" dirty="0">
+                <a:solidFill>
+                  <a:srgbClr val="475569"/>
+                </a:solidFill>
+                <a:latin typeface="Calibri" pitchFamily="34" charset="0"/>
+                <a:ea typeface="Calibri" pitchFamily="34" charset="-122"/>
+                <a:cs typeface="Calibri" pitchFamily="34" charset="-120"/>
+              </a:rPr>
+              <a:t>person who; more</a:t>
+            </a:r>
+            <a:endParaRPr lang="en-US" sz="850" dirty="0"/>
+          </a:p>
+        </p:txBody>
+      </p:sp>
+      <p:sp>
+        <p:nvSpPr>
+          <p:cNvPr id="25" name="Shape 23"/>
           <p:cNvSpPr/>
           <p:nvPr/>
         </p:nvSpPr>
@@ -30592,7 +32962,7 @@
       </p:sp>
       <p:sp>
         <p:nvSpPr>
-          <p:cNvPr id="23" name="Text 21"/>
+          <p:cNvPr id="26" name="Text 24"/>
           <p:cNvSpPr/>
           <p:nvPr/>
         </p:nvSpPr>
@@ -30631,7 +33001,7 @@
       </p:sp>
       <p:sp>
         <p:nvSpPr>
-          <p:cNvPr id="24" name="Shape 22"/>
+          <p:cNvPr id="27" name="Shape 25"/>
           <p:cNvSpPr/>
           <p:nvPr/>
         </p:nvSpPr>
@@ -30658,14 +33028,14 @@
       </p:sp>
       <p:sp>
         <p:nvSpPr>
-          <p:cNvPr id="25" name="Shape 23"/>
-          <p:cNvSpPr/>
-          <p:nvPr/>
-        </p:nvSpPr>
-        <p:spPr>
-          <a:xfrm>
-            <a:off x="2999232" y="3364992"/>
-            <a:ext cx="1645920" cy="475488"/>
+          <p:cNvPr id="28" name="Shape 26"/>
+          <p:cNvSpPr/>
+          <p:nvPr/>
+        </p:nvSpPr>
+        <p:spPr>
+          <a:xfrm>
+            <a:off x="1975104" y="3364992"/>
+            <a:ext cx="1554480" cy="475488"/>
           </a:xfrm>
           <a:prstGeom prst="rect">
             <a:avLst>
@@ -30685,14 +33055,14 @@
       </p:sp>
       <p:sp>
         <p:nvSpPr>
-          <p:cNvPr id="26" name="Text 24"/>
-          <p:cNvSpPr/>
-          <p:nvPr/>
-        </p:nvSpPr>
-        <p:spPr>
-          <a:xfrm>
-            <a:off x="2999232" y="3364992"/>
-            <a:ext cx="1645920" cy="475488"/>
+          <p:cNvPr id="29" name="Text 27"/>
+          <p:cNvSpPr/>
+          <p:nvPr/>
+        </p:nvSpPr>
+        <p:spPr>
+          <a:xfrm>
+            <a:off x="1975104" y="3364992"/>
+            <a:ext cx="1554480" cy="475488"/>
           </a:xfrm>
           <a:prstGeom prst="rect">
             <a:avLst/>
@@ -30716,7 +33086,7 @@
                 <a:ea typeface="Trebuchet MS" pitchFamily="34" charset="-122"/>
                 <a:cs typeface="Trebuchet MS" pitchFamily="34" charset="-120"/>
               </a:rPr>
-              <a:t>play</a:t>
+              <a:t>mul</a:t>
             </a:r>
             <a:endParaRPr lang="en-US" sz="1400" dirty="0"/>
           </a:p>
@@ -30724,14 +33094,14 @@
       </p:sp>
       <p:sp>
         <p:nvSpPr>
-          <p:cNvPr id="27" name="Text 25"/>
-          <p:cNvSpPr/>
-          <p:nvPr/>
-        </p:nvSpPr>
-        <p:spPr>
-          <a:xfrm>
-            <a:off x="4645152" y="3364992"/>
-            <a:ext cx="1097280" cy="475488"/>
+          <p:cNvPr id="30" name="Text 28"/>
+          <p:cNvSpPr/>
+          <p:nvPr/>
+        </p:nvSpPr>
+        <p:spPr>
+          <a:xfrm>
+            <a:off x="3529584" y="3364992"/>
+            <a:ext cx="73152" cy="475488"/>
           </a:xfrm>
           <a:prstGeom prst="rect">
             <a:avLst/>
@@ -30763,14 +33133,14 @@
       </p:sp>
       <p:sp>
         <p:nvSpPr>
-          <p:cNvPr id="28" name="Shape 26"/>
-          <p:cNvSpPr/>
-          <p:nvPr/>
-        </p:nvSpPr>
-        <p:spPr>
-          <a:xfrm>
-            <a:off x="5742432" y="3364992"/>
-            <a:ext cx="1645920" cy="475488"/>
+          <p:cNvPr id="31" name="Shape 29"/>
+          <p:cNvSpPr/>
+          <p:nvPr/>
+        </p:nvSpPr>
+        <p:spPr>
+          <a:xfrm>
+            <a:off x="3602736" y="3364992"/>
+            <a:ext cx="1554480" cy="475488"/>
           </a:xfrm>
           <a:prstGeom prst="rect">
             <a:avLst>
@@ -30790,14 +33160,14 @@
       </p:sp>
       <p:sp>
         <p:nvSpPr>
-          <p:cNvPr id="29" name="Text 27"/>
-          <p:cNvSpPr/>
-          <p:nvPr/>
-        </p:nvSpPr>
-        <p:spPr>
-          <a:xfrm>
-            <a:off x="5742432" y="3364992"/>
-            <a:ext cx="1645920" cy="475488"/>
+          <p:cNvPr id="32" name="Text 30"/>
+          <p:cNvSpPr/>
+          <p:nvPr/>
+        </p:nvSpPr>
+        <p:spPr>
+          <a:xfrm>
+            <a:off x="3602736" y="3364992"/>
+            <a:ext cx="1554480" cy="475488"/>
           </a:xfrm>
           <a:prstGeom prst="rect">
             <a:avLst/>
@@ -30821,7 +33191,7 @@
                 <a:ea typeface="Trebuchet MS" pitchFamily="34" charset="-122"/>
                 <a:cs typeface="Trebuchet MS" pitchFamily="34" charset="-120"/>
               </a:rPr>
-              <a:t>ground</a:t>
+              <a:t>ti</a:t>
             </a:r>
             <a:endParaRPr lang="en-US" sz="1400" dirty="0"/>
           </a:p>
@@ -30829,7 +33199,217 @@
       </p:sp>
       <p:sp>
         <p:nvSpPr>
-          <p:cNvPr id="30" name="Shape 28"/>
+          <p:cNvPr id="33" name="Text 31"/>
+          <p:cNvSpPr/>
+          <p:nvPr/>
+        </p:nvSpPr>
+        <p:spPr>
+          <a:xfrm>
+            <a:off x="5157216" y="3364992"/>
+            <a:ext cx="73152" cy="475488"/>
+          </a:xfrm>
+          <a:prstGeom prst="rect">
+            <a:avLst/>
+          </a:prstGeom>
+          <a:noFill/>
+          <a:ln/>
+        </p:spPr>
+        <p:txBody>
+          <a:bodyPr wrap="square" lIns="0" tIns="0" rIns="0" bIns="0" rtlCol="0" anchor="ctr"/>
+          <a:lstStyle/>
+          <a:p>
+            <a:pPr algn="ctr" indent="0" marL="0">
+              <a:buNone/>
+            </a:pPr>
+            <a:r>
+              <a:rPr lang="en-US" sz="1600" b="1" dirty="0">
+                <a:solidFill>
+                  <a:srgbClr val="0D9488"/>
+                </a:solidFill>
+                <a:latin typeface="Trebuchet MS" pitchFamily="34" charset="0"/>
+                <a:ea typeface="Trebuchet MS" pitchFamily="34" charset="-122"/>
+                <a:cs typeface="Trebuchet MS" pitchFamily="34" charset="-120"/>
+              </a:rPr>
+              <a:t>·</a:t>
+            </a:r>
+            <a:endParaRPr lang="en-US" sz="1600" dirty="0"/>
+          </a:p>
+        </p:txBody>
+      </p:sp>
+      <p:sp>
+        <p:nvSpPr>
+          <p:cNvPr id="34" name="Shape 32"/>
+          <p:cNvSpPr/>
+          <p:nvPr/>
+        </p:nvSpPr>
+        <p:spPr>
+          <a:xfrm>
+            <a:off x="5230368" y="3364992"/>
+            <a:ext cx="1554480" cy="475488"/>
+          </a:xfrm>
+          <a:prstGeom prst="rect">
+            <a:avLst>
+              <a:gd name="adj" fmla="val 9615"/>
+            </a:avLst>
+          </a:prstGeom>
+          <a:solidFill>
+            <a:srgbClr val="FFFFFF"/>
+          </a:solidFill>
+          <a:ln w="12700">
+            <a:solidFill>
+              <a:srgbClr val="0D9488"/>
+            </a:solidFill>
+            <a:prstDash val="solid"/>
+          </a:ln>
+        </p:spPr>
+      </p:sp>
+      <p:sp>
+        <p:nvSpPr>
+          <p:cNvPr id="35" name="Text 33"/>
+          <p:cNvSpPr/>
+          <p:nvPr/>
+        </p:nvSpPr>
+        <p:spPr>
+          <a:xfrm>
+            <a:off x="5230368" y="3364992"/>
+            <a:ext cx="1554480" cy="475488"/>
+          </a:xfrm>
+          <a:prstGeom prst="rect">
+            <a:avLst/>
+          </a:prstGeom>
+          <a:noFill/>
+          <a:ln/>
+        </p:spPr>
+        <p:txBody>
+          <a:bodyPr wrap="square" lIns="0" tIns="0" rIns="0" bIns="0" rtlCol="0" anchor="ctr"/>
+          <a:lstStyle/>
+          <a:p>
+            <a:pPr algn="ctr" indent="0" marL="0">
+              <a:buNone/>
+            </a:pPr>
+            <a:r>
+              <a:rPr lang="en-US" sz="1400" b="1" dirty="0">
+                <a:solidFill>
+                  <a:srgbClr val="0D9488"/>
+                </a:solidFill>
+                <a:latin typeface="Trebuchet MS" pitchFamily="34" charset="0"/>
+                <a:ea typeface="Trebuchet MS" pitchFamily="34" charset="-122"/>
+                <a:cs typeface="Trebuchet MS" pitchFamily="34" charset="-120"/>
+              </a:rPr>
+              <a:t>play</a:t>
+            </a:r>
+            <a:endParaRPr lang="en-US" sz="1400" dirty="0"/>
+          </a:p>
+        </p:txBody>
+      </p:sp>
+      <p:sp>
+        <p:nvSpPr>
+          <p:cNvPr id="36" name="Text 34"/>
+          <p:cNvSpPr/>
+          <p:nvPr/>
+        </p:nvSpPr>
+        <p:spPr>
+          <a:xfrm>
+            <a:off x="6784848" y="3364992"/>
+            <a:ext cx="73152" cy="475488"/>
+          </a:xfrm>
+          <a:prstGeom prst="rect">
+            <a:avLst/>
+          </a:prstGeom>
+          <a:noFill/>
+          <a:ln/>
+        </p:spPr>
+        <p:txBody>
+          <a:bodyPr wrap="square" lIns="0" tIns="0" rIns="0" bIns="0" rtlCol="0" anchor="ctr"/>
+          <a:lstStyle/>
+          <a:p>
+            <a:pPr algn="ctr" indent="0" marL="0">
+              <a:buNone/>
+            </a:pPr>
+            <a:r>
+              <a:rPr lang="en-US" sz="1600" b="1" dirty="0">
+                <a:solidFill>
+                  <a:srgbClr val="0D9488"/>
+                </a:solidFill>
+                <a:latin typeface="Trebuchet MS" pitchFamily="34" charset="0"/>
+                <a:ea typeface="Trebuchet MS" pitchFamily="34" charset="-122"/>
+                <a:cs typeface="Trebuchet MS" pitchFamily="34" charset="-120"/>
+              </a:rPr>
+              <a:t>·</a:t>
+            </a:r>
+            <a:endParaRPr lang="en-US" sz="1600" dirty="0"/>
+          </a:p>
+        </p:txBody>
+      </p:sp>
+      <p:sp>
+        <p:nvSpPr>
+          <p:cNvPr id="37" name="Shape 35"/>
+          <p:cNvSpPr/>
+          <p:nvPr/>
+        </p:nvSpPr>
+        <p:spPr>
+          <a:xfrm>
+            <a:off x="6858000" y="3364992"/>
+            <a:ext cx="1554480" cy="475488"/>
+          </a:xfrm>
+          <a:prstGeom prst="rect">
+            <a:avLst>
+              <a:gd name="adj" fmla="val 9615"/>
+            </a:avLst>
+          </a:prstGeom>
+          <a:solidFill>
+            <a:srgbClr val="FFFFFF"/>
+          </a:solidFill>
+          <a:ln w="12700">
+            <a:solidFill>
+              <a:srgbClr val="0D9488"/>
+            </a:solidFill>
+            <a:prstDash val="solid"/>
+          </a:ln>
+        </p:spPr>
+      </p:sp>
+      <p:sp>
+        <p:nvSpPr>
+          <p:cNvPr id="38" name="Text 36"/>
+          <p:cNvSpPr/>
+          <p:nvPr/>
+        </p:nvSpPr>
+        <p:spPr>
+          <a:xfrm>
+            <a:off x="6858000" y="3364992"/>
+            <a:ext cx="1554480" cy="475488"/>
+          </a:xfrm>
+          <a:prstGeom prst="rect">
+            <a:avLst/>
+          </a:prstGeom>
+          <a:noFill/>
+          <a:ln/>
+        </p:spPr>
+        <p:txBody>
+          <a:bodyPr wrap="square" lIns="0" tIns="0" rIns="0" bIns="0" rtlCol="0" anchor="ctr"/>
+          <a:lstStyle/>
+          <a:p>
+            <a:pPr algn="ctr" indent="0" marL="0">
+              <a:buNone/>
+            </a:pPr>
+            <a:r>
+              <a:rPr lang="en-US" sz="1400" b="1" dirty="0">
+                <a:solidFill>
+                  <a:srgbClr val="0D9488"/>
+                </a:solidFill>
+                <a:latin typeface="Trebuchet MS" pitchFamily="34" charset="0"/>
+                <a:ea typeface="Trebuchet MS" pitchFamily="34" charset="-122"/>
+                <a:cs typeface="Trebuchet MS" pitchFamily="34" charset="-120"/>
+              </a:rPr>
+              <a:t>er</a:t>
+            </a:r>
+            <a:endParaRPr lang="en-US" sz="1400" dirty="0"/>
+          </a:p>
+        </p:txBody>
+      </p:sp>
+      <p:sp>
+        <p:nvSpPr>
+          <p:cNvPr id="39" name="Shape 37"/>
           <p:cNvSpPr/>
           <p:nvPr/>
         </p:nvSpPr>
@@ -30856,7 +33436,7 @@
       </p:sp>
       <p:sp>
         <p:nvSpPr>
-          <p:cNvPr id="31" name="Text 29"/>
+          <p:cNvPr id="40" name="Text 38"/>
           <p:cNvSpPr/>
           <p:nvPr/>
         </p:nvSpPr>
@@ -30895,7 +33475,7 @@
       </p:sp>
       <p:sp>
         <p:nvSpPr>
-          <p:cNvPr id="32" name="Shape 30"/>
+          <p:cNvPr id="41" name="Shape 39"/>
           <p:cNvSpPr/>
           <p:nvPr/>
         </p:nvSpPr>
@@ -30922,14 +33502,14 @@
       </p:sp>
       <p:sp>
         <p:nvSpPr>
-          <p:cNvPr id="33" name="Shape 31"/>
-          <p:cNvSpPr/>
-          <p:nvPr/>
-        </p:nvSpPr>
-        <p:spPr>
-          <a:xfrm>
-            <a:off x="2427732" y="4169664"/>
-            <a:ext cx="685800" cy="475488"/>
+          <p:cNvPr id="42" name="Shape 40"/>
+          <p:cNvSpPr/>
+          <p:nvPr/>
+        </p:nvSpPr>
+        <p:spPr>
+          <a:xfrm>
+            <a:off x="1951330" y="4169664"/>
+            <a:ext cx="676656" cy="475488"/>
           </a:xfrm>
           <a:prstGeom prst="rect">
             <a:avLst>
@@ -30949,14 +33529,14 @@
       </p:sp>
       <p:sp>
         <p:nvSpPr>
-          <p:cNvPr id="34" name="Text 32"/>
-          <p:cNvSpPr/>
-          <p:nvPr/>
-        </p:nvSpPr>
-        <p:spPr>
-          <a:xfrm>
-            <a:off x="2427732" y="4169664"/>
-            <a:ext cx="685800" cy="475488"/>
+          <p:cNvPr id="43" name="Text 41"/>
+          <p:cNvSpPr/>
+          <p:nvPr/>
+        </p:nvSpPr>
+        <p:spPr>
+          <a:xfrm>
+            <a:off x="1951330" y="4169664"/>
+            <a:ext cx="676656" cy="475488"/>
           </a:xfrm>
           <a:prstGeom prst="rect">
             <a:avLst/>
@@ -30980,7 +33560,7 @@
                 <a:ea typeface="Trebuchet MS" pitchFamily="34" charset="-122"/>
                 <a:cs typeface="Trebuchet MS" pitchFamily="34" charset="-120"/>
               </a:rPr>
-              <a:t>pl</a:t>
+              <a:t>m</a:t>
             </a:r>
             <a:endParaRPr lang="en-US" sz="900" dirty="0"/>
           </a:p>
@@ -30988,14 +33568,14 @@
       </p:sp>
       <p:sp>
         <p:nvSpPr>
-          <p:cNvPr id="35" name="Shape 33"/>
-          <p:cNvSpPr/>
-          <p:nvPr/>
-        </p:nvSpPr>
-        <p:spPr>
-          <a:xfrm>
-            <a:off x="3639312" y="4169664"/>
-            <a:ext cx="685800" cy="475488"/>
+          <p:cNvPr id="44" name="Shape 42"/>
+          <p:cNvSpPr/>
+          <p:nvPr/>
+        </p:nvSpPr>
+        <p:spPr>
+          <a:xfrm>
+            <a:off x="2677363" y="4169664"/>
+            <a:ext cx="676656" cy="475488"/>
           </a:xfrm>
           <a:prstGeom prst="rect">
             <a:avLst>
@@ -31015,14 +33595,14 @@
       </p:sp>
       <p:sp>
         <p:nvSpPr>
-          <p:cNvPr id="36" name="Text 34"/>
-          <p:cNvSpPr/>
-          <p:nvPr/>
-        </p:nvSpPr>
-        <p:spPr>
-          <a:xfrm>
-            <a:off x="3639312" y="4169664"/>
-            <a:ext cx="685800" cy="475488"/>
+          <p:cNvPr id="45" name="Text 43"/>
+          <p:cNvSpPr/>
+          <p:nvPr/>
+        </p:nvSpPr>
+        <p:spPr>
+          <a:xfrm>
+            <a:off x="2677363" y="4169664"/>
+            <a:ext cx="676656" cy="475488"/>
           </a:xfrm>
           <a:prstGeom prst="rect">
             <a:avLst/>
@@ -31046,7 +33626,7 @@
                 <a:ea typeface="Trebuchet MS" pitchFamily="34" charset="-122"/>
                 <a:cs typeface="Trebuchet MS" pitchFamily="34" charset="-120"/>
               </a:rPr>
-              <a:t>ay</a:t>
+              <a:t>u</a:t>
             </a:r>
             <a:endParaRPr lang="en-US" sz="900" dirty="0"/>
           </a:p>
@@ -31054,14 +33634,14 @@
       </p:sp>
       <p:sp>
         <p:nvSpPr>
-          <p:cNvPr id="37" name="Shape 35"/>
-          <p:cNvSpPr/>
-          <p:nvPr/>
-        </p:nvSpPr>
-        <p:spPr>
-          <a:xfrm>
-            <a:off x="4850892" y="4169664"/>
-            <a:ext cx="685800" cy="475488"/>
+          <p:cNvPr id="46" name="Shape 44"/>
+          <p:cNvSpPr/>
+          <p:nvPr/>
+        </p:nvSpPr>
+        <p:spPr>
+          <a:xfrm>
+            <a:off x="3403397" y="4169664"/>
+            <a:ext cx="676656" cy="475488"/>
           </a:xfrm>
           <a:prstGeom prst="rect">
             <a:avLst>
@@ -31081,14 +33661,14 @@
       </p:sp>
       <p:sp>
         <p:nvSpPr>
-          <p:cNvPr id="38" name="Text 36"/>
-          <p:cNvSpPr/>
-          <p:nvPr/>
-        </p:nvSpPr>
-        <p:spPr>
-          <a:xfrm>
-            <a:off x="4850892" y="4169664"/>
-            <a:ext cx="685800" cy="475488"/>
+          <p:cNvPr id="47" name="Text 45"/>
+          <p:cNvSpPr/>
+          <p:nvPr/>
+        </p:nvSpPr>
+        <p:spPr>
+          <a:xfrm>
+            <a:off x="3403397" y="4169664"/>
+            <a:ext cx="676656" cy="475488"/>
           </a:xfrm>
           <a:prstGeom prst="rect">
             <a:avLst/>
@@ -31112,7 +33692,7 @@
                 <a:ea typeface="Trebuchet MS" pitchFamily="34" charset="-122"/>
                 <a:cs typeface="Trebuchet MS" pitchFamily="34" charset="-120"/>
               </a:rPr>
-              <a:t>gr</a:t>
+              <a:t>l</a:t>
             </a:r>
             <a:endParaRPr lang="en-US" sz="900" dirty="0"/>
           </a:p>
@@ -31120,14 +33700,14 @@
       </p:sp>
       <p:sp>
         <p:nvSpPr>
-          <p:cNvPr id="39" name="Shape 37"/>
-          <p:cNvSpPr/>
-          <p:nvPr/>
-        </p:nvSpPr>
-        <p:spPr>
-          <a:xfrm>
-            <a:off x="6062472" y="4169664"/>
-            <a:ext cx="685800" cy="475488"/>
+          <p:cNvPr id="48" name="Shape 46"/>
+          <p:cNvSpPr/>
+          <p:nvPr/>
+        </p:nvSpPr>
+        <p:spPr>
+          <a:xfrm>
+            <a:off x="4129430" y="4169664"/>
+            <a:ext cx="676656" cy="475488"/>
           </a:xfrm>
           <a:prstGeom prst="rect">
             <a:avLst>
@@ -31147,14 +33727,14 @@
       </p:sp>
       <p:sp>
         <p:nvSpPr>
-          <p:cNvPr id="40" name="Text 38"/>
-          <p:cNvSpPr/>
-          <p:nvPr/>
-        </p:nvSpPr>
-        <p:spPr>
-          <a:xfrm>
-            <a:off x="6062472" y="4169664"/>
-            <a:ext cx="685800" cy="475488"/>
+          <p:cNvPr id="49" name="Text 47"/>
+          <p:cNvSpPr/>
+          <p:nvPr/>
+        </p:nvSpPr>
+        <p:spPr>
+          <a:xfrm>
+            <a:off x="4129430" y="4169664"/>
+            <a:ext cx="676656" cy="475488"/>
           </a:xfrm>
           <a:prstGeom prst="rect">
             <a:avLst/>
@@ -31178,7 +33758,7 @@
                 <a:ea typeface="Trebuchet MS" pitchFamily="34" charset="-122"/>
                 <a:cs typeface="Trebuchet MS" pitchFamily="34" charset="-120"/>
               </a:rPr>
-              <a:t>ou</a:t>
+              <a:t>t</a:t>
             </a:r>
             <a:endParaRPr lang="en-US" sz="900" dirty="0"/>
           </a:p>
@@ -31186,14 +33766,14 @@
       </p:sp>
       <p:sp>
         <p:nvSpPr>
-          <p:cNvPr id="41" name="Shape 39"/>
-          <p:cNvSpPr/>
-          <p:nvPr/>
-        </p:nvSpPr>
-        <p:spPr>
-          <a:xfrm>
-            <a:off x="7274052" y="4169664"/>
-            <a:ext cx="685800" cy="475488"/>
+          <p:cNvPr id="50" name="Shape 48"/>
+          <p:cNvSpPr/>
+          <p:nvPr/>
+        </p:nvSpPr>
+        <p:spPr>
+          <a:xfrm>
+            <a:off x="4855464" y="4169664"/>
+            <a:ext cx="676656" cy="475488"/>
           </a:xfrm>
           <a:prstGeom prst="rect">
             <a:avLst>
@@ -31213,14 +33793,14 @@
       </p:sp>
       <p:sp>
         <p:nvSpPr>
-          <p:cNvPr id="42" name="Text 40"/>
-          <p:cNvSpPr/>
-          <p:nvPr/>
-        </p:nvSpPr>
-        <p:spPr>
-          <a:xfrm>
-            <a:off x="7274052" y="4169664"/>
-            <a:ext cx="685800" cy="475488"/>
+          <p:cNvPr id="51" name="Text 49"/>
+          <p:cNvSpPr/>
+          <p:nvPr/>
+        </p:nvSpPr>
+        <p:spPr>
+          <a:xfrm>
+            <a:off x="4855464" y="4169664"/>
+            <a:ext cx="676656" cy="475488"/>
           </a:xfrm>
           <a:prstGeom prst="rect">
             <a:avLst/>
@@ -31244,7 +33824,271 @@
                 <a:ea typeface="Trebuchet MS" pitchFamily="34" charset="-122"/>
                 <a:cs typeface="Trebuchet MS" pitchFamily="34" charset="-120"/>
               </a:rPr>
-              <a:t>nd</a:t>
+              <a:t>i</a:t>
+            </a:r>
+            <a:endParaRPr lang="en-US" sz="900" dirty="0"/>
+          </a:p>
+        </p:txBody>
+      </p:sp>
+      <p:sp>
+        <p:nvSpPr>
+          <p:cNvPr id="52" name="Shape 50"/>
+          <p:cNvSpPr/>
+          <p:nvPr/>
+        </p:nvSpPr>
+        <p:spPr>
+          <a:xfrm>
+            <a:off x="5581498" y="4169664"/>
+            <a:ext cx="676656" cy="475488"/>
+          </a:xfrm>
+          <a:prstGeom prst="rect">
+            <a:avLst>
+              <a:gd name="adj" fmla="val 7692"/>
+            </a:avLst>
+          </a:prstGeom>
+          <a:solidFill>
+            <a:srgbClr val="FFFFFF"/>
+          </a:solidFill>
+          <a:ln w="12700">
+            <a:solidFill>
+              <a:srgbClr val="DB2777"/>
+            </a:solidFill>
+            <a:prstDash val="solid"/>
+          </a:ln>
+        </p:spPr>
+      </p:sp>
+      <p:sp>
+        <p:nvSpPr>
+          <p:cNvPr id="53" name="Text 51"/>
+          <p:cNvSpPr/>
+          <p:nvPr/>
+        </p:nvSpPr>
+        <p:spPr>
+          <a:xfrm>
+            <a:off x="5581498" y="4169664"/>
+            <a:ext cx="676656" cy="475488"/>
+          </a:xfrm>
+          <a:prstGeom prst="rect">
+            <a:avLst/>
+          </a:prstGeom>
+          <a:noFill/>
+          <a:ln/>
+        </p:spPr>
+        <p:txBody>
+          <a:bodyPr wrap="square" lIns="0" tIns="0" rIns="0" bIns="0" rtlCol="0" anchor="ctr"/>
+          <a:lstStyle/>
+          <a:p>
+            <a:pPr algn="ctr" indent="0" marL="0">
+              <a:buNone/>
+            </a:pPr>
+            <a:r>
+              <a:rPr lang="en-US" sz="900" b="1" dirty="0">
+                <a:solidFill>
+                  <a:srgbClr val="9D174D"/>
+                </a:solidFill>
+                <a:latin typeface="Trebuchet MS" pitchFamily="34" charset="0"/>
+                <a:ea typeface="Trebuchet MS" pitchFamily="34" charset="-122"/>
+                <a:cs typeface="Trebuchet MS" pitchFamily="34" charset="-120"/>
+              </a:rPr>
+              <a:t>p</a:t>
+            </a:r>
+            <a:endParaRPr lang="en-US" sz="900" dirty="0"/>
+          </a:p>
+        </p:txBody>
+      </p:sp>
+      <p:sp>
+        <p:nvSpPr>
+          <p:cNvPr id="54" name="Shape 52"/>
+          <p:cNvSpPr/>
+          <p:nvPr/>
+        </p:nvSpPr>
+        <p:spPr>
+          <a:xfrm>
+            <a:off x="6307531" y="4169664"/>
+            <a:ext cx="676656" cy="475488"/>
+          </a:xfrm>
+          <a:prstGeom prst="rect">
+            <a:avLst>
+              <a:gd name="adj" fmla="val 7692"/>
+            </a:avLst>
+          </a:prstGeom>
+          <a:solidFill>
+            <a:srgbClr val="FFFFFF"/>
+          </a:solidFill>
+          <a:ln w="12700">
+            <a:solidFill>
+              <a:srgbClr val="DB2777"/>
+            </a:solidFill>
+            <a:prstDash val="solid"/>
+          </a:ln>
+        </p:spPr>
+      </p:sp>
+      <p:sp>
+        <p:nvSpPr>
+          <p:cNvPr id="55" name="Text 53"/>
+          <p:cNvSpPr/>
+          <p:nvPr/>
+        </p:nvSpPr>
+        <p:spPr>
+          <a:xfrm>
+            <a:off x="6307531" y="4169664"/>
+            <a:ext cx="676656" cy="475488"/>
+          </a:xfrm>
+          <a:prstGeom prst="rect">
+            <a:avLst/>
+          </a:prstGeom>
+          <a:noFill/>
+          <a:ln/>
+        </p:spPr>
+        <p:txBody>
+          <a:bodyPr wrap="square" lIns="0" tIns="0" rIns="0" bIns="0" rtlCol="0" anchor="ctr"/>
+          <a:lstStyle/>
+          <a:p>
+            <a:pPr algn="ctr" indent="0" marL="0">
+              <a:buNone/>
+            </a:pPr>
+            <a:r>
+              <a:rPr lang="en-US" sz="900" b="1" dirty="0">
+                <a:solidFill>
+                  <a:srgbClr val="9D174D"/>
+                </a:solidFill>
+                <a:latin typeface="Trebuchet MS" pitchFamily="34" charset="0"/>
+                <a:ea typeface="Trebuchet MS" pitchFamily="34" charset="-122"/>
+                <a:cs typeface="Trebuchet MS" pitchFamily="34" charset="-120"/>
+              </a:rPr>
+              <a:t>l</a:t>
+            </a:r>
+            <a:endParaRPr lang="en-US" sz="900" dirty="0"/>
+          </a:p>
+        </p:txBody>
+      </p:sp>
+      <p:sp>
+        <p:nvSpPr>
+          <p:cNvPr id="56" name="Shape 54"/>
+          <p:cNvSpPr/>
+          <p:nvPr/>
+        </p:nvSpPr>
+        <p:spPr>
+          <a:xfrm>
+            <a:off x="7033565" y="4169664"/>
+            <a:ext cx="676656" cy="475488"/>
+          </a:xfrm>
+          <a:prstGeom prst="rect">
+            <a:avLst>
+              <a:gd name="adj" fmla="val 7692"/>
+            </a:avLst>
+          </a:prstGeom>
+          <a:solidFill>
+            <a:srgbClr val="FFFFFF"/>
+          </a:solidFill>
+          <a:ln w="12700">
+            <a:solidFill>
+              <a:srgbClr val="DB2777"/>
+            </a:solidFill>
+            <a:prstDash val="solid"/>
+          </a:ln>
+        </p:spPr>
+      </p:sp>
+      <p:sp>
+        <p:nvSpPr>
+          <p:cNvPr id="57" name="Text 55"/>
+          <p:cNvSpPr/>
+          <p:nvPr/>
+        </p:nvSpPr>
+        <p:spPr>
+          <a:xfrm>
+            <a:off x="7033565" y="4169664"/>
+            <a:ext cx="676656" cy="475488"/>
+          </a:xfrm>
+          <a:prstGeom prst="rect">
+            <a:avLst/>
+          </a:prstGeom>
+          <a:noFill/>
+          <a:ln/>
+        </p:spPr>
+        <p:txBody>
+          <a:bodyPr wrap="square" lIns="0" tIns="0" rIns="0" bIns="0" rtlCol="0" anchor="ctr"/>
+          <a:lstStyle/>
+          <a:p>
+            <a:pPr algn="ctr" indent="0" marL="0">
+              <a:buNone/>
+            </a:pPr>
+            <a:r>
+              <a:rPr lang="en-US" sz="900" b="1" dirty="0">
+                <a:solidFill>
+                  <a:srgbClr val="9D174D"/>
+                </a:solidFill>
+                <a:latin typeface="Trebuchet MS" pitchFamily="34" charset="0"/>
+                <a:ea typeface="Trebuchet MS" pitchFamily="34" charset="-122"/>
+                <a:cs typeface="Trebuchet MS" pitchFamily="34" charset="-120"/>
+              </a:rPr>
+              <a:t>ay</a:t>
+            </a:r>
+            <a:endParaRPr lang="en-US" sz="900" dirty="0"/>
+          </a:p>
+        </p:txBody>
+      </p:sp>
+      <p:sp>
+        <p:nvSpPr>
+          <p:cNvPr id="58" name="Shape 56"/>
+          <p:cNvSpPr/>
+          <p:nvPr/>
+        </p:nvSpPr>
+        <p:spPr>
+          <a:xfrm>
+            <a:off x="7759598" y="4169664"/>
+            <a:ext cx="676656" cy="475488"/>
+          </a:xfrm>
+          <a:prstGeom prst="rect">
+            <a:avLst>
+              <a:gd name="adj" fmla="val 7692"/>
+            </a:avLst>
+          </a:prstGeom>
+          <a:solidFill>
+            <a:srgbClr val="FFFFFF"/>
+          </a:solidFill>
+          <a:ln w="12700">
+            <a:solidFill>
+              <a:srgbClr val="DB2777"/>
+            </a:solidFill>
+            <a:prstDash val="solid"/>
+          </a:ln>
+        </p:spPr>
+      </p:sp>
+      <p:sp>
+        <p:nvSpPr>
+          <p:cNvPr id="59" name="Text 57"/>
+          <p:cNvSpPr/>
+          <p:nvPr/>
+        </p:nvSpPr>
+        <p:spPr>
+          <a:xfrm>
+            <a:off x="7759598" y="4169664"/>
+            <a:ext cx="676656" cy="475488"/>
+          </a:xfrm>
+          <a:prstGeom prst="rect">
+            <a:avLst/>
+          </a:prstGeom>
+          <a:noFill/>
+          <a:ln/>
+        </p:spPr>
+        <p:txBody>
+          <a:bodyPr wrap="square" lIns="0" tIns="0" rIns="0" bIns="0" rtlCol="0" anchor="ctr"/>
+          <a:lstStyle/>
+          <a:p>
+            <a:pPr algn="ctr" indent="0" marL="0">
+              <a:buNone/>
+            </a:pPr>
+            <a:r>
+              <a:rPr lang="en-US" sz="900" b="1" dirty="0">
+                <a:solidFill>
+                  <a:srgbClr val="9D174D"/>
+                </a:solidFill>
+                <a:latin typeface="Trebuchet MS" pitchFamily="34" charset="0"/>
+                <a:ea typeface="Trebuchet MS" pitchFamily="34" charset="-122"/>
+                <a:cs typeface="Trebuchet MS" pitchFamily="34" charset="-120"/>
+              </a:rPr>
+              <a:t>er</a:t>
             </a:r>
             <a:endParaRPr lang="en-US" sz="900" dirty="0"/>
           </a:p>
@@ -31536,7 +34380,7 @@
                 <a:ea typeface="Calibri" pitchFamily="34" charset="-122"/>
                 <a:cs typeface="Calibri" pitchFamily="34" charset="-120"/>
               </a:rPr>
-              <a:t>Word Labs  •  wordlabs.app  •  Root: 'play' = to engage in fun activity</a:t>
+              <a:t>Word Labs  •  wordlabs.app  •  Root: 'play' = to take part in a game; to have fun</a:t>
             </a:r>
             <a:endParaRPr lang="en-US" sz="800" dirty="0"/>
           </a:p>
@@ -32705,7 +35549,7 @@
                 <a:ea typeface="Calibri" pitchFamily="34" charset="-122"/>
                 <a:cs typeface="Calibri" pitchFamily="34" charset="-120"/>
               </a:rPr>
-              <a:t>Word Labs  •  wordlabs.app  •  Root: 'play' = to engage in fun activity</a:t>
+              <a:t>Word Labs  •  wordlabs.app  •  Root: 'play' = to take part in a game; to have fun</a:t>
             </a:r>
             <a:endParaRPr lang="en-US" sz="800" dirty="0"/>
           </a:p>
@@ -33134,7 +35978,7 @@
                 <a:ea typeface="Trebuchet MS" pitchFamily="34" charset="-122"/>
                 <a:cs typeface="Trebuchet MS" pitchFamily="34" charset="-120"/>
               </a:rPr>
-              <a:t>-er</a:t>
+              <a:t>-ed</a:t>
             </a:r>
             <a:endParaRPr lang="en-US" sz="1300" dirty="0"/>
           </a:p>
@@ -33198,7 +36042,7 @@
                 <a:ea typeface="Trebuchet MS" pitchFamily="34" charset="-122"/>
                 <a:cs typeface="Trebuchet MS" pitchFamily="34" charset="-120"/>
               </a:rPr>
-              <a:t>re-</a:t>
+              <a:t>mis-</a:t>
             </a:r>
             <a:endParaRPr lang="en-US" sz="1300" dirty="0"/>
           </a:p>
@@ -33287,7 +36131,7 @@
                 <a:ea typeface="Trebuchet MS" pitchFamily="34" charset="-122"/>
                 <a:cs typeface="Trebuchet MS" pitchFamily="34" charset="-120"/>
               </a:rPr>
-              <a:t>-ful</a:t>
+              <a:t>-ing</a:t>
             </a:r>
             <a:endParaRPr lang="en-US" sz="1300" dirty="0"/>
           </a:p>
@@ -33351,7 +36195,7 @@
                 <a:ea typeface="Trebuchet MS" pitchFamily="34" charset="-122"/>
                 <a:cs typeface="Trebuchet MS" pitchFamily="34" charset="-120"/>
               </a:rPr>
-              <a:t>sword-</a:t>
+              <a:t>multi-</a:t>
             </a:r>
             <a:endParaRPr lang="en-US" sz="1300" dirty="0"/>
           </a:p>
@@ -33440,7 +36284,7 @@
                 <a:ea typeface="Trebuchet MS" pitchFamily="34" charset="-122"/>
                 <a:cs typeface="Trebuchet MS" pitchFamily="34" charset="-120"/>
               </a:rPr>
-              <a:t>-ing</a:t>
+              <a:t>-s</a:t>
             </a:r>
             <a:endParaRPr lang="en-US" sz="1300" dirty="0"/>
           </a:p>
@@ -33504,7 +36348,7 @@
                 <a:ea typeface="Trebuchet MS" pitchFamily="34" charset="-122"/>
                 <a:cs typeface="Trebuchet MS" pitchFamily="34" charset="-120"/>
               </a:rPr>
-              <a:t>word-</a:t>
+              <a:t>over-</a:t>
             </a:r>
             <a:endParaRPr lang="en-US" sz="1300" dirty="0"/>
           </a:p>
@@ -33593,7 +36437,7 @@
                 <a:ea typeface="Trebuchet MS" pitchFamily="34" charset="-122"/>
                 <a:cs typeface="Trebuchet MS" pitchFamily="34" charset="-120"/>
               </a:rPr>
-              <a:t>-ed</a:t>
+              <a:t>-er</a:t>
             </a:r>
             <a:endParaRPr lang="en-US" sz="1300" dirty="0"/>
           </a:p>
@@ -33657,7 +36501,7 @@
                 <a:ea typeface="Trebuchet MS" pitchFamily="34" charset="-122"/>
                 <a:cs typeface="Trebuchet MS" pitchFamily="34" charset="-120"/>
               </a:rPr>
-              <a:t>fair-</a:t>
+              <a:t>re-</a:t>
             </a:r>
             <a:endParaRPr lang="en-US" sz="1300" dirty="0"/>
           </a:p>
@@ -33746,7 +36590,7 @@
                 <a:ea typeface="Trebuchet MS" pitchFamily="34" charset="-122"/>
                 <a:cs typeface="Trebuchet MS" pitchFamily="34" charset="-120"/>
               </a:rPr>
-              <a:t>-ground</a:t>
+              <a:t>-able</a:t>
             </a:r>
             <a:endParaRPr lang="en-US" sz="1300" dirty="0"/>
           </a:p>
@@ -33754,37 +36598,151 @@
       </p:sp>
       <p:sp>
         <p:nvSpPr>
-          <p:cNvPr id="43" name="Text 41"/>
-          <p:cNvSpPr/>
-          <p:nvPr/>
-        </p:nvSpPr>
-        <p:spPr>
-          <a:xfrm>
-            <a:off x="365760" y="3611880"/>
-            <a:ext cx="1828800" cy="347472"/>
-          </a:xfrm>
-          <a:prstGeom prst="rect">
-            <a:avLst/>
-          </a:prstGeom>
-          <a:noFill/>
-          <a:ln/>
-        </p:spPr>
-        <p:txBody>
-          <a:bodyPr wrap="square" lIns="0" tIns="0" rIns="0" bIns="0" rtlCol="0" anchor="ctr"/>
-          <a:lstStyle/>
-          <a:p>
-            <a:pPr algn="l" indent="0" marL="0">
-              <a:buNone/>
-            </a:pPr>
-            <a:r>
-              <a:rPr lang="en-US" sz="1200" b="1" dirty="0">
-                <a:solidFill>
-                  <a:srgbClr val="0F172A"/>
+          <p:cNvPr id="43" name="Shape 41"/>
+          <p:cNvSpPr/>
+          <p:nvPr/>
+        </p:nvSpPr>
+        <p:spPr>
+          <a:xfrm>
+            <a:off x="365760" y="3666744"/>
+            <a:ext cx="2468880" cy="402336"/>
+          </a:xfrm>
+          <a:prstGeom prst="rect">
+            <a:avLst/>
+          </a:prstGeom>
+          <a:solidFill>
+            <a:srgbClr val="F1F5F9"/>
+          </a:solidFill>
+          <a:ln w="12700">
+            <a:solidFill>
+              <a:srgbClr val="E2E8F0"/>
+            </a:solidFill>
+            <a:prstDash val="solid"/>
+          </a:ln>
+        </p:spPr>
+      </p:sp>
+      <p:sp>
+        <p:nvSpPr>
+          <p:cNvPr id="44" name="Shape 42"/>
+          <p:cNvSpPr/>
+          <p:nvPr/>
+        </p:nvSpPr>
+        <p:spPr>
+          <a:xfrm>
+            <a:off x="2971800" y="3666744"/>
+            <a:ext cx="2834640" cy="402336"/>
+          </a:xfrm>
+          <a:prstGeom prst="rect">
+            <a:avLst/>
+          </a:prstGeom>
+          <a:solidFill>
+            <a:srgbClr val="F1F5F9"/>
+          </a:solidFill>
+          <a:ln w="12700">
+            <a:solidFill>
+              <a:srgbClr val="E2E8F0"/>
+            </a:solidFill>
+            <a:prstDash val="solid"/>
+          </a:ln>
+        </p:spPr>
+      </p:sp>
+      <p:sp>
+        <p:nvSpPr>
+          <p:cNvPr id="45" name="Shape 43"/>
+          <p:cNvSpPr/>
+          <p:nvPr/>
+        </p:nvSpPr>
+        <p:spPr>
+          <a:xfrm>
+            <a:off x="5943600" y="3666744"/>
+            <a:ext cx="2834640" cy="402336"/>
+          </a:xfrm>
+          <a:prstGeom prst="rect">
+            <a:avLst/>
+          </a:prstGeom>
+          <a:solidFill>
+            <a:srgbClr val="FCE7F3"/>
+          </a:solidFill>
+          <a:ln w="12700">
+            <a:solidFill>
+              <a:srgbClr val="E2E8F0"/>
+            </a:solidFill>
+            <a:prstDash val="solid"/>
+          </a:ln>
+        </p:spPr>
+      </p:sp>
+      <p:sp>
+        <p:nvSpPr>
+          <p:cNvPr id="46" name="Text 44"/>
+          <p:cNvSpPr/>
+          <p:nvPr/>
+        </p:nvSpPr>
+        <p:spPr>
+          <a:xfrm>
+            <a:off x="5943600" y="3666744"/>
+            <a:ext cx="2834640" cy="402336"/>
+          </a:xfrm>
+          <a:prstGeom prst="rect">
+            <a:avLst/>
+          </a:prstGeom>
+          <a:noFill/>
+          <a:ln/>
+        </p:spPr>
+        <p:txBody>
+          <a:bodyPr wrap="square" lIns="0" tIns="0" rIns="0" bIns="0" rtlCol="0" anchor="ctr"/>
+          <a:lstStyle/>
+          <a:p>
+            <a:pPr algn="ctr" indent="0" marL="0">
+              <a:buNone/>
+            </a:pPr>
+            <a:r>
+              <a:rPr lang="en-US" sz="1300" b="1" dirty="0">
+                <a:solidFill>
+                  <a:srgbClr val="9D174D"/>
                 </a:solidFill>
                 <a:latin typeface="Trebuchet MS" pitchFamily="34" charset="0"/>
                 <a:ea typeface="Trebuchet MS" pitchFamily="34" charset="-122"/>
                 <a:cs typeface="Trebuchet MS" pitchFamily="34" charset="-120"/>
               </a:rPr>
+              <a:t>-ful</a:t>
+            </a:r>
+            <a:endParaRPr lang="en-US" sz="1300" dirty="0"/>
+          </a:p>
+        </p:txBody>
+      </p:sp>
+      <p:sp>
+        <p:nvSpPr>
+          <p:cNvPr id="47" name="Text 45"/>
+          <p:cNvSpPr/>
+          <p:nvPr/>
+        </p:nvSpPr>
+        <p:spPr>
+          <a:xfrm>
+            <a:off x="365760" y="3611880"/>
+            <a:ext cx="1828800" cy="347472"/>
+          </a:xfrm>
+          <a:prstGeom prst="rect">
+            <a:avLst/>
+          </a:prstGeom>
+          <a:noFill/>
+          <a:ln/>
+        </p:spPr>
+        <p:txBody>
+          <a:bodyPr wrap="square" lIns="0" tIns="0" rIns="0" bIns="0" rtlCol="0" anchor="ctr"/>
+          <a:lstStyle/>
+          <a:p>
+            <a:pPr algn="l" indent="0" marL="0">
+              <a:buNone/>
+            </a:pPr>
+            <a:r>
+              <a:rPr lang="en-US" sz="1200" b="1" dirty="0">
+                <a:solidFill>
+                  <a:srgbClr val="0F172A"/>
+                </a:solidFill>
+                <a:latin typeface="Trebuchet MS" pitchFamily="34" charset="0"/>
+                <a:ea typeface="Trebuchet MS" pitchFamily="34" charset="-122"/>
+                <a:cs typeface="Trebuchet MS" pitchFamily="34" charset="-120"/>
+              </a:rPr>
               <a:t>Sample words:</a:t>
             </a:r>
             <a:endParaRPr lang="en-US" sz="1200" dirty="0"/>
@@ -33793,7 +36751,7 @@
       </p:sp>
       <p:sp>
         <p:nvSpPr>
-          <p:cNvPr id="44" name="Shape 42"/>
+          <p:cNvPr id="48" name="Shape 46"/>
           <p:cNvSpPr/>
           <p:nvPr/>
         </p:nvSpPr>
@@ -33820,7 +36778,7 @@
       </p:sp>
       <p:sp>
         <p:nvSpPr>
-          <p:cNvPr id="45" name="Text 43"/>
+          <p:cNvPr id="49" name="Text 47"/>
           <p:cNvSpPr/>
           <p:nvPr/>
         </p:nvSpPr>
@@ -33851,7 +36809,7 @@
                 <a:ea typeface="Trebuchet MS" pitchFamily="34" charset="-122"/>
                 <a:cs typeface="Trebuchet MS" pitchFamily="34" charset="-120"/>
               </a:rPr>
-              <a:t>playful</a:t>
+              <a:t>play</a:t>
             </a:r>
             <a:endParaRPr lang="en-US" sz="1200" dirty="0"/>
           </a:p>
@@ -33859,7 +36817,7 @@
       </p:sp>
       <p:sp>
         <p:nvSpPr>
-          <p:cNvPr id="46" name="Shape 44"/>
+          <p:cNvPr id="50" name="Shape 48"/>
           <p:cNvSpPr/>
           <p:nvPr/>
         </p:nvSpPr>
@@ -33886,7 +36844,7 @@
       </p:sp>
       <p:sp>
         <p:nvSpPr>
-          <p:cNvPr id="47" name="Text 45"/>
+          <p:cNvPr id="51" name="Text 49"/>
           <p:cNvSpPr/>
           <p:nvPr/>
         </p:nvSpPr>
@@ -33917,7 +36875,7 @@
                 <a:ea typeface="Trebuchet MS" pitchFamily="34" charset="-122"/>
                 <a:cs typeface="Trebuchet MS" pitchFamily="34" charset="-120"/>
               </a:rPr>
-              <a:t>player</a:t>
+              <a:t>plays</a:t>
             </a:r>
             <a:endParaRPr lang="en-US" sz="1200" dirty="0"/>
           </a:p>
@@ -33925,7 +36883,7 @@
       </p:sp>
       <p:sp>
         <p:nvSpPr>
-          <p:cNvPr id="48" name="Shape 46"/>
+          <p:cNvPr id="52" name="Shape 50"/>
           <p:cNvSpPr/>
           <p:nvPr/>
         </p:nvSpPr>
@@ -33952,7 +36910,7 @@
       </p:sp>
       <p:sp>
         <p:nvSpPr>
-          <p:cNvPr id="49" name="Text 47"/>
+          <p:cNvPr id="53" name="Text 51"/>
           <p:cNvSpPr/>
           <p:nvPr/>
         </p:nvSpPr>
@@ -33983,7 +36941,7 @@
                 <a:ea typeface="Trebuchet MS" pitchFamily="34" charset="-122"/>
                 <a:cs typeface="Trebuchet MS" pitchFamily="34" charset="-120"/>
               </a:rPr>
-              <a:t>playground</a:t>
+              <a:t>played</a:t>
             </a:r>
             <a:endParaRPr lang="en-US" sz="1200" dirty="0"/>
           </a:p>
@@ -33991,7 +36949,7 @@
       </p:sp>
       <p:sp>
         <p:nvSpPr>
-          <p:cNvPr id="50" name="Shape 48"/>
+          <p:cNvPr id="54" name="Shape 52"/>
           <p:cNvSpPr/>
           <p:nvPr/>
         </p:nvSpPr>
@@ -34018,7 +36976,7 @@
       </p:sp>
       <p:sp>
         <p:nvSpPr>
-          <p:cNvPr id="51" name="Text 49"/>
+          <p:cNvPr id="55" name="Text 53"/>
           <p:cNvSpPr/>
           <p:nvPr/>
         </p:nvSpPr>
@@ -34049,7 +37007,7 @@
                 <a:ea typeface="Trebuchet MS" pitchFamily="34" charset="-122"/>
                 <a:cs typeface="Trebuchet MS" pitchFamily="34" charset="-120"/>
               </a:rPr>
-              <a:t>replay</a:t>
+              <a:t>player</a:t>
             </a:r>
             <a:endParaRPr lang="en-US" sz="1200" dirty="0"/>
           </a:p>
@@ -34057,7 +37015,7 @@
       </p:sp>
       <p:sp>
         <p:nvSpPr>
-          <p:cNvPr id="52" name="Shape 50"/>
+          <p:cNvPr id="56" name="Shape 54"/>
           <p:cNvSpPr/>
           <p:nvPr/>
         </p:nvSpPr>
@@ -34084,7 +37042,7 @@
       </p:sp>
       <p:sp>
         <p:nvSpPr>
-          <p:cNvPr id="53" name="Text 51"/>
+          <p:cNvPr id="57" name="Text 55"/>
           <p:cNvSpPr/>
           <p:nvPr/>
         </p:nvSpPr>
@@ -34115,7 +37073,7 @@
                 <a:ea typeface="Trebuchet MS" pitchFamily="34" charset="-122"/>
                 <a:cs typeface="Trebuchet MS" pitchFamily="34" charset="-120"/>
               </a:rPr>
-              <a:t>display</a:t>
+              <a:t>replay</a:t>
             </a:r>
             <a:endParaRPr lang="en-US" sz="1200" dirty="0"/>
           </a:p>
@@ -34123,7 +37081,7 @@
       </p:sp>
       <p:sp>
         <p:nvSpPr>
-          <p:cNvPr id="54" name="Shape 52"/>
+          <p:cNvPr id="58" name="Shape 56"/>
           <p:cNvSpPr/>
           <p:nvPr/>
         </p:nvSpPr>
@@ -34150,7 +37108,7 @@
       </p:sp>
       <p:sp>
         <p:nvSpPr>
-          <p:cNvPr id="55" name="Text 53"/>
+          <p:cNvPr id="59" name="Text 57"/>
           <p:cNvSpPr/>
           <p:nvPr/>
         </p:nvSpPr>
@@ -34181,7 +37139,7 @@
                 <a:ea typeface="Trebuchet MS" pitchFamily="34" charset="-122"/>
                 <a:cs typeface="Trebuchet MS" pitchFamily="34" charset="-120"/>
               </a:rPr>
-              <a:t>playwright</a:t>
+              <a:t>display</a:t>
             </a:r>
             <a:endParaRPr lang="en-US" sz="1200" dirty="0"/>
           </a:p>
@@ -34189,7 +37147,7 @@
       </p:sp>
       <p:sp>
         <p:nvSpPr>
-          <p:cNvPr id="56" name="Shape 54"/>
+          <p:cNvPr id="60" name="Shape 58"/>
           <p:cNvSpPr/>
           <p:nvPr/>
         </p:nvSpPr>
@@ -34216,7 +37174,7 @@
       </p:sp>
       <p:sp>
         <p:nvSpPr>
-          <p:cNvPr id="57" name="Text 55"/>
+          <p:cNvPr id="61" name="Text 59"/>
           <p:cNvSpPr/>
           <p:nvPr/>
         </p:nvSpPr>
@@ -34247,73 +37205,7 @@
                 <a:ea typeface="Trebuchet MS" pitchFamily="34" charset="-122"/>
                 <a:cs typeface="Trebuchet MS" pitchFamily="34" charset="-120"/>
               </a:rPr>
-              <a:t>swordplay</a:t>
-            </a:r>
-            <a:endParaRPr lang="en-US" sz="1200" dirty="0"/>
-          </a:p>
-        </p:txBody>
-      </p:sp>
-      <p:sp>
-        <p:nvSpPr>
-          <p:cNvPr id="58" name="Shape 56"/>
-          <p:cNvSpPr/>
-          <p:nvPr/>
-        </p:nvSpPr>
-        <p:spPr>
-          <a:xfrm>
-            <a:off x="6894576" y="4498848"/>
-            <a:ext cx="2011680" cy="402336"/>
-          </a:xfrm>
-          <a:prstGeom prst="rect">
-            <a:avLst>
-              <a:gd name="adj" fmla="val 13636"/>
-            </a:avLst>
-          </a:prstGeom>
-          <a:solidFill>
-            <a:srgbClr val="EEF2FF"/>
-          </a:solidFill>
-          <a:ln w="12700">
-            <a:solidFill>
-              <a:srgbClr val="6366F1"/>
-            </a:solidFill>
-            <a:prstDash val="solid"/>
-          </a:ln>
-        </p:spPr>
-      </p:sp>
-      <p:sp>
-        <p:nvSpPr>
-          <p:cNvPr id="59" name="Text 57"/>
-          <p:cNvSpPr/>
-          <p:nvPr/>
-        </p:nvSpPr>
-        <p:spPr>
-          <a:xfrm>
-            <a:off x="6894576" y="4498848"/>
-            <a:ext cx="2011680" cy="402336"/>
-          </a:xfrm>
-          <a:prstGeom prst="rect">
-            <a:avLst/>
-          </a:prstGeom>
-          <a:noFill/>
-          <a:ln/>
-        </p:spPr>
-        <p:txBody>
-          <a:bodyPr wrap="square" lIns="0" tIns="0" rIns="0" bIns="0" rtlCol="0" anchor="ctr"/>
-          <a:lstStyle/>
-          <a:p>
-            <a:pPr algn="ctr" indent="0" marL="0">
-              <a:buNone/>
-            </a:pPr>
-            <a:r>
-              <a:rPr lang="en-US" sz="1200" b="1" dirty="0">
-                <a:solidFill>
-                  <a:srgbClr val="4338CA"/>
-                </a:solidFill>
-                <a:latin typeface="Trebuchet MS" pitchFamily="34" charset="0"/>
-                <a:ea typeface="Trebuchet MS" pitchFamily="34" charset="-122"/>
-                <a:cs typeface="Trebuchet MS" pitchFamily="34" charset="-120"/>
-              </a:rPr>
-              <a:t>wordplay</a:t>
+              <a:t>misplay</a:t>
             </a:r>
             <a:endParaRPr lang="en-US" sz="1200" dirty="0"/>
           </a:p>
@@ -34605,7 +37497,7 @@
                 <a:ea typeface="Calibri" pitchFamily="34" charset="-122"/>
                 <a:cs typeface="Calibri" pitchFamily="34" charset="-120"/>
               </a:rPr>
-              <a:t>Word Labs  •  wordlabs.app  •  Root: 'play' = to engage in fun activity</a:t>
+              <a:t>Word Labs  •  wordlabs.app  •  Root: 'play' = to take part in a game; to have fun</a:t>
             </a:r>
             <a:endParaRPr lang="en-US" sz="800" dirty="0"/>
           </a:p>
@@ -34769,7 +37661,7 @@
                 <a:ea typeface="Calibri" pitchFamily="34" charset="-122"/>
                 <a:cs typeface="Calibri" pitchFamily="34" charset="-120"/>
               </a:rPr>
-              <a:t>The core part of a word carrying its basic meaning. For example, 'play' means 'to engage in fun activity'.</a:t>
+              <a:t>The core part of a word carrying its basic meaning. For example, 'play' means 'to take part in a game; to have fun'.</a:t>
             </a:r>
             <a:endParaRPr lang="en-US" sz="1350" dirty="0"/>
           </a:p>
@@ -35389,7 +38281,7 @@
                 <a:ea typeface="Calibri" pitchFamily="34" charset="-122"/>
                 <a:cs typeface="Calibri" pitchFamily="34" charset="-120"/>
               </a:rPr>
-              <a:t>Word Labs  •  wordlabs.app  •  Root: 'play' = to engage in fun activity</a:t>
+              <a:t>Word Labs  •  wordlabs.app  •  Root: 'play' = to take part in a game; to have fun</a:t>
             </a:r>
             <a:endParaRPr lang="en-US" sz="800" dirty="0"/>
           </a:p>
@@ -35501,7 +38393,7 @@
                 <a:ea typeface="Calibri" pitchFamily="34" charset="-122"/>
                 <a:cs typeface="Calibri" pitchFamily="34" charset="-120"/>
               </a:rPr>
-              <a:t>1.  The word 'display' contains the root 'play'.</a:t>
+              <a:t>1.  'plays' means 'takes part in games or fun activities; also, theatrical performances'.</a:t>
             </a:r>
             <a:endParaRPr lang="en-US" sz="1300" dirty="0"/>
           </a:p>
@@ -35640,7 +38532,7 @@
                 <a:ea typeface="Calibri" pitchFamily="34" charset="-122"/>
                 <a:cs typeface="Calibri" pitchFamily="34" charset="-120"/>
               </a:rPr>
-              <a:t>2.  A 'playwright' is someone who writes plays for the stage.</a:t>
+              <a:t>2.  'play' means 'to take part in a game or enjoyable activity'.</a:t>
             </a:r>
             <a:endParaRPr lang="en-US" sz="1300" dirty="0"/>
           </a:p>
@@ -35779,7 +38671,7 @@
                 <a:ea typeface="Calibri" pitchFamily="34" charset="-122"/>
                 <a:cs typeface="Calibri" pitchFamily="34" charset="-120"/>
               </a:rPr>
-              <a:t>3.  The word 'playground' contains the root 'play'.</a:t>
+              <a:t>3.  'play' means 'to bake bread in an oven'.</a:t>
             </a:r>
             <a:endParaRPr lang="en-US" sz="1300" dirty="0"/>
           </a:p>
@@ -35802,11 +38694,11 @@
             </a:avLst>
           </a:prstGeom>
           <a:solidFill>
-            <a:srgbClr val="DCFCE7"/>
-          </a:solidFill>
-          <a:ln w="12700">
-            <a:solidFill>
-              <a:srgbClr val="16A34A"/>
+            <a:srgbClr val="FEE2E2"/>
+          </a:solidFill>
+          <a:ln w="12700">
+            <a:solidFill>
+              <a:srgbClr val="DC2626"/>
             </a:solidFill>
             <a:prstDash val="solid"/>
           </a:ln>
@@ -35839,13 +38731,13 @@
             <a:r>
               <a:rPr lang="en-US" sz="1100" b="1" dirty="0">
                 <a:solidFill>
-                  <a:srgbClr val="16A34A"/>
+                  <a:srgbClr val="DC2626"/>
                 </a:solidFill>
                 <a:latin typeface="Trebuchet MS" pitchFamily="34" charset="0"/>
                 <a:ea typeface="Trebuchet MS" pitchFamily="34" charset="-122"/>
                 <a:cs typeface="Trebuchet MS" pitchFamily="34" charset="-120"/>
               </a:rPr>
-              <a:t>TRUE</a:t>
+              <a:t>FALSE</a:t>
             </a:r>
             <a:endParaRPr lang="en-US" sz="1100" dirty="0"/>
           </a:p>
@@ -35918,7 +38810,7 @@
                 <a:ea typeface="Calibri" pitchFamily="34" charset="-122"/>
                 <a:cs typeface="Calibri" pitchFamily="34" charset="-120"/>
               </a:rPr>
-              <a:t>4.  The root 'play' comes from a Greek word meaning 'to sing'.</a:t>
+              <a:t>4.  'play' means 'to take part in a game; to have fun'.</a:t>
             </a:r>
             <a:endParaRPr lang="en-US" sz="1300" dirty="0"/>
           </a:p>
@@ -35941,11 +38833,11 @@
             </a:avLst>
           </a:prstGeom>
           <a:solidFill>
-            <a:srgbClr val="FEE2E2"/>
-          </a:solidFill>
-          <a:ln w="12700">
-            <a:solidFill>
-              <a:srgbClr val="DC2626"/>
+            <a:srgbClr val="DCFCE7"/>
+          </a:solidFill>
+          <a:ln w="12700">
+            <a:solidFill>
+              <a:srgbClr val="16A34A"/>
             </a:solidFill>
             <a:prstDash val="solid"/>
           </a:ln>
@@ -35978,13 +38870,13 @@
             <a:r>
               <a:rPr lang="en-US" sz="1100" b="1" dirty="0">
                 <a:solidFill>
-                  <a:srgbClr val="DC2626"/>
+                  <a:srgbClr val="16A34A"/>
                 </a:solidFill>
                 <a:latin typeface="Trebuchet MS" pitchFamily="34" charset="0"/>
                 <a:ea typeface="Trebuchet MS" pitchFamily="34" charset="-122"/>
                 <a:cs typeface="Trebuchet MS" pitchFamily="34" charset="-120"/>
               </a:rPr>
-              <a:t>FALSE</a:t>
+              <a:t>TRUE</a:t>
             </a:r>
             <a:endParaRPr lang="en-US" sz="1100" dirty="0"/>
           </a:p>
@@ -36057,7 +38949,7 @@
                 <a:ea typeface="Calibri" pitchFamily="34" charset="-122"/>
                 <a:cs typeface="Calibri" pitchFamily="34" charset="-120"/>
               </a:rPr>
-              <a:t>5.  The prefix 'mis' can be added to 'play' to make a real English word.</a:t>
+              <a:t>5.  'plays' means 'cooks meals in the kitchen'.</a:t>
             </a:r>
             <a:endParaRPr lang="en-US" sz="1300" dirty="0"/>
           </a:p>
@@ -36415,7 +39307,7 @@
                 <a:ea typeface="Calibri" pitchFamily="34" charset="-122"/>
                 <a:cs typeface="Calibri" pitchFamily="34" charset="-120"/>
               </a:rPr>
-              <a:t>Word Labs  •  wordlabs.app  •  Root: 'play' = to engage in fun activity</a:t>
+              <a:t>Word Labs  •  wordlabs.app  •  Root: 'play' = to take part in a game; to have fun</a:t>
             </a:r>
             <a:endParaRPr lang="en-US" sz="800" dirty="0"/>
           </a:p>
@@ -36552,7 +39444,7 @@
                 <a:ea typeface="Trebuchet MS" pitchFamily="34" charset="-122"/>
                 <a:cs typeface="Trebuchet MS" pitchFamily="34" charset="-120"/>
               </a:rPr>
-              <a:t>to engage in fun activity</a:t>
+              <a:t>to take part in a game; to have fun</a:t>
             </a:r>
             <a:endParaRPr lang="en-US" sz="2000" dirty="0"/>
           </a:p>
@@ -36591,7 +39483,7 @@
                 <a:ea typeface="Calibri" pitchFamily="34" charset="-122"/>
                 <a:cs typeface="Calibri" pitchFamily="34" charset="-120"/>
               </a:rPr>
-              <a:t>Origin: Latin: plagiare</a:t>
+              <a:t>Origin: Anglo-Saxon (Old English) root</a:t>
             </a:r>
             <a:endParaRPr lang="en-US" sz="1100" dirty="0"/>
           </a:p>
@@ -36696,7 +39588,7 @@
                 <a:ea typeface="Trebuchet MS" pitchFamily="34" charset="-122"/>
                 <a:cs typeface="Trebuchet MS" pitchFamily="34" charset="-120"/>
               </a:rPr>
-              <a:t>playful</a:t>
+              <a:t>play</a:t>
             </a:r>
             <a:endParaRPr lang="en-US" sz="1300" dirty="0"/>
           </a:p>
@@ -36762,7 +39654,7 @@
                 <a:ea typeface="Trebuchet MS" pitchFamily="34" charset="-122"/>
                 <a:cs typeface="Trebuchet MS" pitchFamily="34" charset="-120"/>
               </a:rPr>
-              <a:t>player</a:t>
+              <a:t>plays</a:t>
             </a:r>
             <a:endParaRPr lang="en-US" sz="1300" dirty="0"/>
           </a:p>
@@ -36828,7 +39720,7 @@
                 <a:ea typeface="Trebuchet MS" pitchFamily="34" charset="-122"/>
                 <a:cs typeface="Trebuchet MS" pitchFamily="34" charset="-120"/>
               </a:rPr>
-              <a:t>playground</a:t>
+              <a:t>played</a:t>
             </a:r>
             <a:endParaRPr lang="en-US" sz="1300" dirty="0"/>
           </a:p>
@@ -36894,7 +39786,7 @@
                 <a:ea typeface="Trebuchet MS" pitchFamily="34" charset="-122"/>
                 <a:cs typeface="Trebuchet MS" pitchFamily="34" charset="-120"/>
               </a:rPr>
-              <a:t>replay</a:t>
+              <a:t>player</a:t>
             </a:r>
             <a:endParaRPr lang="en-US" sz="1300" dirty="0"/>
           </a:p>
@@ -36960,7 +39852,7 @@
                 <a:ea typeface="Trebuchet MS" pitchFamily="34" charset="-122"/>
                 <a:cs typeface="Trebuchet MS" pitchFamily="34" charset="-120"/>
               </a:rPr>
-              <a:t>display</a:t>
+              <a:t>replay</a:t>
             </a:r>
             <a:endParaRPr lang="en-US" sz="1300" dirty="0"/>
           </a:p>
@@ -37026,7 +39918,7 @@
                 <a:ea typeface="Trebuchet MS" pitchFamily="34" charset="-122"/>
                 <a:cs typeface="Trebuchet MS" pitchFamily="34" charset="-120"/>
               </a:rPr>
-              <a:t>playwright</a:t>
+              <a:t>display</a:t>
             </a:r>
             <a:endParaRPr lang="en-US" sz="1300" dirty="0"/>
           </a:p>
@@ -37092,7 +39984,7 @@
                 <a:ea typeface="Trebuchet MS" pitchFamily="34" charset="-122"/>
                 <a:cs typeface="Trebuchet MS" pitchFamily="34" charset="-120"/>
               </a:rPr>
-              <a:t>swordplay</a:t>
+              <a:t>misplay</a:t>
             </a:r>
             <a:endParaRPr lang="en-US" sz="1300" dirty="0"/>
           </a:p>
@@ -37384,7 +40276,7 @@
                 <a:ea typeface="Calibri" pitchFamily="34" charset="-122"/>
                 <a:cs typeface="Calibri" pitchFamily="34" charset="-120"/>
               </a:rPr>
-              <a:t>Word Labs  •  wordlabs.app  •  Root: 'play' = to engage in fun activity</a:t>
+              <a:t>Word Labs  •  wordlabs.app  •  Root: 'play' = to take part in a game; to have fun</a:t>
             </a:r>
             <a:endParaRPr lang="en-US" sz="800" dirty="0"/>
           </a:p>
@@ -37813,7 +40705,7 @@
                 <a:ea typeface="Trebuchet MS" pitchFamily="34" charset="-122"/>
                 <a:cs typeface="Trebuchet MS" pitchFamily="34" charset="-120"/>
               </a:rPr>
-              <a:t>-er</a:t>
+              <a:t>-ed</a:t>
             </a:r>
             <a:endParaRPr lang="en-US" sz="1300" dirty="0"/>
           </a:p>
@@ -37877,7 +40769,7 @@
                 <a:ea typeface="Trebuchet MS" pitchFamily="34" charset="-122"/>
                 <a:cs typeface="Trebuchet MS" pitchFamily="34" charset="-120"/>
               </a:rPr>
-              <a:t>re-</a:t>
+              <a:t>mis-</a:t>
             </a:r>
             <a:endParaRPr lang="en-US" sz="1300" dirty="0"/>
           </a:p>
@@ -37966,7 +40858,7 @@
                 <a:ea typeface="Trebuchet MS" pitchFamily="34" charset="-122"/>
                 <a:cs typeface="Trebuchet MS" pitchFamily="34" charset="-120"/>
               </a:rPr>
-              <a:t>-ful</a:t>
+              <a:t>-ing</a:t>
             </a:r>
             <a:endParaRPr lang="en-US" sz="1300" dirty="0"/>
           </a:p>
@@ -38030,7 +40922,7 @@
                 <a:ea typeface="Trebuchet MS" pitchFamily="34" charset="-122"/>
                 <a:cs typeface="Trebuchet MS" pitchFamily="34" charset="-120"/>
               </a:rPr>
-              <a:t>sword-</a:t>
+              <a:t>multi-</a:t>
             </a:r>
             <a:endParaRPr lang="en-US" sz="1300" dirty="0"/>
           </a:p>
@@ -38119,7 +41011,7 @@
                 <a:ea typeface="Trebuchet MS" pitchFamily="34" charset="-122"/>
                 <a:cs typeface="Trebuchet MS" pitchFamily="34" charset="-120"/>
               </a:rPr>
-              <a:t>-ing</a:t>
+              <a:t>-s</a:t>
             </a:r>
             <a:endParaRPr lang="en-US" sz="1300" dirty="0"/>
           </a:p>
@@ -38183,7 +41075,7 @@
                 <a:ea typeface="Trebuchet MS" pitchFamily="34" charset="-122"/>
                 <a:cs typeface="Trebuchet MS" pitchFamily="34" charset="-120"/>
               </a:rPr>
-              <a:t>word-</a:t>
+              <a:t>over-</a:t>
             </a:r>
             <a:endParaRPr lang="en-US" sz="1300" dirty="0"/>
           </a:p>
@@ -38272,7 +41164,7 @@
                 <a:ea typeface="Trebuchet MS" pitchFamily="34" charset="-122"/>
                 <a:cs typeface="Trebuchet MS" pitchFamily="34" charset="-120"/>
               </a:rPr>
-              <a:t>-ed</a:t>
+              <a:t>-er</a:t>
             </a:r>
             <a:endParaRPr lang="en-US" sz="1300" dirty="0"/>
           </a:p>
@@ -38336,7 +41228,7 @@
                 <a:ea typeface="Trebuchet MS" pitchFamily="34" charset="-122"/>
                 <a:cs typeface="Trebuchet MS" pitchFamily="34" charset="-120"/>
               </a:rPr>
-              <a:t>fair-</a:t>
+              <a:t>re-</a:t>
             </a:r>
             <a:endParaRPr lang="en-US" sz="1300" dirty="0"/>
           </a:p>
@@ -38425,7 +41317,7 @@
                 <a:ea typeface="Trebuchet MS" pitchFamily="34" charset="-122"/>
                 <a:cs typeface="Trebuchet MS" pitchFamily="34" charset="-120"/>
               </a:rPr>
-              <a:t>-ground</a:t>
+              <a:t>-able</a:t>
             </a:r>
             <a:endParaRPr lang="en-US" sz="1300" dirty="0"/>
           </a:p>
@@ -38433,13 +41325,127 @@
       </p:sp>
       <p:sp>
         <p:nvSpPr>
-          <p:cNvPr id="43" name="Text 41"/>
-          <p:cNvSpPr/>
-          <p:nvPr/>
-        </p:nvSpPr>
-        <p:spPr>
-          <a:xfrm>
-            <a:off x="365760" y="4178808"/>
+          <p:cNvPr id="43" name="Shape 41"/>
+          <p:cNvSpPr/>
+          <p:nvPr/>
+        </p:nvSpPr>
+        <p:spPr>
+          <a:xfrm>
+            <a:off x="640080" y="4041648"/>
+            <a:ext cx="1463040" cy="420624"/>
+          </a:xfrm>
+          <a:prstGeom prst="rect">
+            <a:avLst/>
+          </a:prstGeom>
+          <a:solidFill>
+            <a:srgbClr val="F1F5F9"/>
+          </a:solidFill>
+          <a:ln w="12700">
+            <a:solidFill>
+              <a:srgbClr val="E5E7EB"/>
+            </a:solidFill>
+            <a:prstDash val="solid"/>
+          </a:ln>
+        </p:spPr>
+      </p:sp>
+      <p:sp>
+        <p:nvSpPr>
+          <p:cNvPr id="44" name="Shape 42"/>
+          <p:cNvSpPr/>
+          <p:nvPr/>
+        </p:nvSpPr>
+        <p:spPr>
+          <a:xfrm>
+            <a:off x="3291840" y="4041648"/>
+            <a:ext cx="1645920" cy="420624"/>
+          </a:xfrm>
+          <a:prstGeom prst="rect">
+            <a:avLst/>
+          </a:prstGeom>
+          <a:solidFill>
+            <a:srgbClr val="F1F5F9"/>
+          </a:solidFill>
+          <a:ln w="12700">
+            <a:solidFill>
+              <a:srgbClr val="E5E7EB"/>
+            </a:solidFill>
+            <a:prstDash val="solid"/>
+          </a:ln>
+        </p:spPr>
+      </p:sp>
+      <p:sp>
+        <p:nvSpPr>
+          <p:cNvPr id="45" name="Shape 43"/>
+          <p:cNvSpPr/>
+          <p:nvPr/>
+        </p:nvSpPr>
+        <p:spPr>
+          <a:xfrm>
+            <a:off x="5943600" y="4041648"/>
+            <a:ext cx="1463040" cy="420624"/>
+          </a:xfrm>
+          <a:prstGeom prst="rect">
+            <a:avLst/>
+          </a:prstGeom>
+          <a:solidFill>
+            <a:srgbClr val="FCE7F3"/>
+          </a:solidFill>
+          <a:ln w="12700">
+            <a:solidFill>
+              <a:srgbClr val="E5E7EB"/>
+            </a:solidFill>
+            <a:prstDash val="solid"/>
+          </a:ln>
+        </p:spPr>
+      </p:sp>
+      <p:sp>
+        <p:nvSpPr>
+          <p:cNvPr id="46" name="Text 44"/>
+          <p:cNvSpPr/>
+          <p:nvPr/>
+        </p:nvSpPr>
+        <p:spPr>
+          <a:xfrm>
+            <a:off x="5943600" y="4041648"/>
+            <a:ext cx="1463040" cy="420624"/>
+          </a:xfrm>
+          <a:prstGeom prst="rect">
+            <a:avLst/>
+          </a:prstGeom>
+          <a:noFill/>
+          <a:ln/>
+        </p:spPr>
+        <p:txBody>
+          <a:bodyPr wrap="square" lIns="0" tIns="0" rIns="0" bIns="0" rtlCol="0" anchor="ctr"/>
+          <a:lstStyle/>
+          <a:p>
+            <a:pPr algn="ctr" indent="0" marL="0">
+              <a:buNone/>
+            </a:pPr>
+            <a:r>
+              <a:rPr lang="en-US" sz="1300" b="1" dirty="0">
+                <a:solidFill>
+                  <a:srgbClr val="9D174D"/>
+                </a:solidFill>
+                <a:latin typeface="Trebuchet MS" pitchFamily="34" charset="0"/>
+                <a:ea typeface="Trebuchet MS" pitchFamily="34" charset="-122"/>
+                <a:cs typeface="Trebuchet MS" pitchFamily="34" charset="-120"/>
+              </a:rPr>
+              <a:t>-ful</a:t>
+            </a:r>
+            <a:endParaRPr lang="en-US" sz="1300" dirty="0"/>
+          </a:p>
+        </p:txBody>
+      </p:sp>
+      <p:sp>
+        <p:nvSpPr>
+          <p:cNvPr id="47" name="Text 45"/>
+          <p:cNvSpPr/>
+          <p:nvPr/>
+        </p:nvSpPr>
+        <p:spPr>
+          <a:xfrm>
+            <a:off x="365760" y="4636008"/>
             <a:ext cx="1097280" cy="420624"/>
           </a:xfrm>
           <a:prstGeom prst="rect">
@@ -38472,13 +41478,13 @@
       </p:sp>
       <p:sp>
         <p:nvSpPr>
-          <p:cNvPr id="44" name="Shape 42"/>
-          <p:cNvSpPr/>
-          <p:nvPr/>
-        </p:nvSpPr>
-        <p:spPr>
-          <a:xfrm>
-            <a:off x="1508760" y="4178808"/>
+          <p:cNvPr id="48" name="Shape 46"/>
+          <p:cNvSpPr/>
+          <p:nvPr/>
+        </p:nvSpPr>
+        <p:spPr>
+          <a:xfrm>
+            <a:off x="1508760" y="4636008"/>
             <a:ext cx="950976" cy="420624"/>
           </a:xfrm>
           <a:prstGeom prst="rect">
@@ -38506,13 +41512,13 @@
       </p:sp>
       <p:sp>
         <p:nvSpPr>
-          <p:cNvPr id="45" name="Text 43"/>
-          <p:cNvSpPr/>
-          <p:nvPr/>
-        </p:nvSpPr>
-        <p:spPr>
-          <a:xfrm>
-            <a:off x="1508760" y="4178808"/>
+          <p:cNvPr id="49" name="Text 47"/>
+          <p:cNvSpPr/>
+          <p:nvPr/>
+        </p:nvSpPr>
+        <p:spPr>
+          <a:xfrm>
+            <a:off x="1508760" y="4636008"/>
             <a:ext cx="950976" cy="420624"/>
           </a:xfrm>
           <a:prstGeom prst="rect">
@@ -38545,13 +41551,13 @@
       </p:sp>
       <p:sp>
         <p:nvSpPr>
-          <p:cNvPr id="46" name="Text 44"/>
-          <p:cNvSpPr/>
-          <p:nvPr/>
-        </p:nvSpPr>
-        <p:spPr>
-          <a:xfrm>
-            <a:off x="2487168" y="4178808"/>
+          <p:cNvPr id="50" name="Text 48"/>
+          <p:cNvSpPr/>
+          <p:nvPr/>
+        </p:nvSpPr>
+        <p:spPr>
+          <a:xfrm>
+            <a:off x="2487168" y="4636008"/>
             <a:ext cx="320040" cy="420624"/>
           </a:xfrm>
           <a:prstGeom prst="rect">
@@ -38584,13 +41590,13 @@
       </p:sp>
       <p:sp>
         <p:nvSpPr>
-          <p:cNvPr id="47" name="Shape 45"/>
-          <p:cNvSpPr/>
-          <p:nvPr/>
-        </p:nvSpPr>
-        <p:spPr>
-          <a:xfrm>
-            <a:off x="2834640" y="4178808"/>
+          <p:cNvPr id="51" name="Shape 49"/>
+          <p:cNvSpPr/>
+          <p:nvPr/>
+        </p:nvSpPr>
+        <p:spPr>
+          <a:xfrm>
+            <a:off x="2834640" y="4636008"/>
             <a:ext cx="1243584" cy="420624"/>
           </a:xfrm>
           <a:prstGeom prst="rect">
@@ -38618,13 +41624,13 @@
       </p:sp>
       <p:sp>
         <p:nvSpPr>
-          <p:cNvPr id="48" name="Text 46"/>
-          <p:cNvSpPr/>
-          <p:nvPr/>
-        </p:nvSpPr>
-        <p:spPr>
-          <a:xfrm>
-            <a:off x="2834640" y="4178808"/>
+          <p:cNvPr id="52" name="Text 50"/>
+          <p:cNvSpPr/>
+          <p:nvPr/>
+        </p:nvSpPr>
+        <p:spPr>
+          <a:xfrm>
+            <a:off x="2834640" y="4636008"/>
             <a:ext cx="1243584" cy="420624"/>
           </a:xfrm>
           <a:prstGeom prst="rect">
@@ -38657,13 +41663,13 @@
       </p:sp>
       <p:sp>
         <p:nvSpPr>
-          <p:cNvPr id="49" name="Text 47"/>
-          <p:cNvSpPr/>
-          <p:nvPr/>
-        </p:nvSpPr>
-        <p:spPr>
-          <a:xfrm>
-            <a:off x="4105656" y="4178808"/>
+          <p:cNvPr id="53" name="Text 51"/>
+          <p:cNvSpPr/>
+          <p:nvPr/>
+        </p:nvSpPr>
+        <p:spPr>
+          <a:xfrm>
+            <a:off x="4105656" y="4636008"/>
             <a:ext cx="320040" cy="420624"/>
           </a:xfrm>
           <a:prstGeom prst="rect">
@@ -38696,13 +41702,13 @@
       </p:sp>
       <p:sp>
         <p:nvSpPr>
-          <p:cNvPr id="50" name="Shape 48"/>
-          <p:cNvSpPr/>
-          <p:nvPr/>
-        </p:nvSpPr>
-        <p:spPr>
-          <a:xfrm>
-            <a:off x="4453128" y="4178808"/>
+          <p:cNvPr id="54" name="Shape 52"/>
+          <p:cNvSpPr/>
+          <p:nvPr/>
+        </p:nvSpPr>
+        <p:spPr>
+          <a:xfrm>
+            <a:off x="4453128" y="4636008"/>
             <a:ext cx="822960" cy="420624"/>
           </a:xfrm>
           <a:prstGeom prst="rect">
@@ -38730,13 +41736,13 @@
       </p:sp>
       <p:sp>
         <p:nvSpPr>
-          <p:cNvPr id="51" name="Text 49"/>
-          <p:cNvSpPr/>
-          <p:nvPr/>
-        </p:nvSpPr>
-        <p:spPr>
-          <a:xfrm>
-            <a:off x="4453128" y="4178808"/>
+          <p:cNvPr id="55" name="Text 53"/>
+          <p:cNvSpPr/>
+          <p:nvPr/>
+        </p:nvSpPr>
+        <p:spPr>
+          <a:xfrm>
+            <a:off x="4453128" y="4636008"/>
             <a:ext cx="822960" cy="420624"/>
           </a:xfrm>
           <a:prstGeom prst="rect">
@@ -38761,7 +41767,7 @@
                 <a:ea typeface="Trebuchet MS" pitchFamily="34" charset="-122"/>
                 <a:cs typeface="Trebuchet MS" pitchFamily="34" charset="-120"/>
               </a:rPr>
-              <a:t>-er</a:t>
+              <a:t>-ed</a:t>
             </a:r>
             <a:endParaRPr lang="en-US" sz="1300" dirty="0"/>
           </a:p>
@@ -38769,13 +41775,13 @@
       </p:sp>
       <p:sp>
         <p:nvSpPr>
-          <p:cNvPr id="52" name="Text 50"/>
-          <p:cNvSpPr/>
-          <p:nvPr/>
-        </p:nvSpPr>
-        <p:spPr>
-          <a:xfrm>
-            <a:off x="5349240" y="4178808"/>
+          <p:cNvPr id="56" name="Text 54"/>
+          <p:cNvSpPr/>
+          <p:nvPr/>
+        </p:nvSpPr>
+        <p:spPr>
+          <a:xfrm>
+            <a:off x="5349240" y="4636008"/>
             <a:ext cx="365760" cy="420624"/>
           </a:xfrm>
           <a:prstGeom prst="rect">
@@ -38808,13 +41814,13 @@
       </p:sp>
       <p:sp>
         <p:nvSpPr>
-          <p:cNvPr id="53" name="Shape 51"/>
-          <p:cNvSpPr/>
-          <p:nvPr/>
-        </p:nvSpPr>
-        <p:spPr>
-          <a:xfrm>
-            <a:off x="5760720" y="4178808"/>
+          <p:cNvPr id="57" name="Shape 55"/>
+          <p:cNvSpPr/>
+          <p:nvPr/>
+        </p:nvSpPr>
+        <p:spPr>
+          <a:xfrm>
+            <a:off x="5760720" y="4636008"/>
             <a:ext cx="2194560" cy="420624"/>
           </a:xfrm>
           <a:prstGeom prst="rect">
@@ -38835,13 +41841,13 @@
       </p:sp>
       <p:sp>
         <p:nvSpPr>
-          <p:cNvPr id="54" name="Text 52"/>
-          <p:cNvSpPr/>
-          <p:nvPr/>
-        </p:nvSpPr>
-        <p:spPr>
-          <a:xfrm>
-            <a:off x="5760720" y="4178808"/>
+          <p:cNvPr id="58" name="Text 56"/>
+          <p:cNvSpPr/>
+          <p:nvPr/>
+        </p:nvSpPr>
+        <p:spPr>
+          <a:xfrm>
+            <a:off x="5760720" y="4636008"/>
             <a:ext cx="2194560" cy="420624"/>
           </a:xfrm>
           <a:prstGeom prst="rect">
@@ -38866,7 +41872,7 @@
                 <a:ea typeface="Trebuchet MS" pitchFamily="34" charset="-122"/>
                 <a:cs typeface="Trebuchet MS" pitchFamily="34" charset="-120"/>
               </a:rPr>
-              <a:t>playful</a:t>
+              <a:t>play</a:t>
             </a:r>
             <a:endParaRPr lang="en-US" sz="1400" dirty="0"/>
           </a:p>
@@ -39158,7 +42164,7 @@
                 <a:ea typeface="Calibri" pitchFamily="34" charset="-122"/>
                 <a:cs typeface="Calibri" pitchFamily="34" charset="-120"/>
               </a:rPr>
-              <a:t>Word Labs  •  wordlabs.app  •  Root: 'play' = to engage in fun activity</a:t>
+              <a:t>Word Labs  •  wordlabs.app  •  Root: 'play' = to take part in a game; to have fun</a:t>
             </a:r>
             <a:endParaRPr lang="en-US" sz="800" dirty="0"/>
           </a:p>
@@ -39270,7 +42276,7 @@
                 <a:ea typeface="Trebuchet MS" pitchFamily="34" charset="-122"/>
                 <a:cs typeface="Trebuchet MS" pitchFamily="34" charset="-120"/>
               </a:rPr>
-              <a:t>playful</a:t>
+              <a:t>play</a:t>
             </a:r>
             <a:endParaRPr lang="en-US" sz="1200" dirty="0"/>
           </a:p>
@@ -39336,7 +42342,7 @@
                 <a:ea typeface="Calibri" pitchFamily="34" charset="-122"/>
                 <a:cs typeface="Calibri" pitchFamily="34" charset="-120"/>
               </a:rPr>
-              <a:t>An outdoor area with equipment where children can run and play.</a:t>
+              <a:t>took part in a game or activity in the past</a:t>
             </a:r>
             <a:endParaRPr lang="en-US" sz="1200" dirty="0"/>
           </a:p>
@@ -39409,7 +42415,7 @@
                 <a:ea typeface="Trebuchet MS" pitchFamily="34" charset="-122"/>
                 <a:cs typeface="Trebuchet MS" pitchFamily="34" charset="-120"/>
               </a:rPr>
-              <a:t>player</a:t>
+              <a:t>plays</a:t>
             </a:r>
             <a:endParaRPr lang="en-US" sz="1200" dirty="0"/>
           </a:p>
@@ -39475,7 +42481,7 @@
                 <a:ea typeface="Calibri" pitchFamily="34" charset="-122"/>
                 <a:cs typeface="Calibri" pitchFamily="34" charset="-120"/>
               </a:rPr>
-              <a:t>To show something so others can see it, like putting artwork on the wall.</a:t>
+              <a:t>to play something again, such as a recording or a match</a:t>
             </a:r>
             <a:endParaRPr lang="en-US" sz="1200" dirty="0"/>
           </a:p>
@@ -39548,7 +42554,7 @@
                 <a:ea typeface="Trebuchet MS" pitchFamily="34" charset="-122"/>
                 <a:cs typeface="Trebuchet MS" pitchFamily="34" charset="-120"/>
               </a:rPr>
-              <a:t>playground</a:t>
+              <a:t>played</a:t>
             </a:r>
             <a:endParaRPr lang="en-US" sz="1200" dirty="0"/>
           </a:p>
@@ -39614,7 +42620,7 @@
                 <a:ea typeface="Calibri" pitchFamily="34" charset="-122"/>
                 <a:cs typeface="Calibri" pitchFamily="34" charset="-120"/>
               </a:rPr>
-              <a:t>When someone is lively and loves to have fun, like a puppy chasing its tail.</a:t>
+              <a:t>to take part in a game or enjoyable activity</a:t>
             </a:r>
             <a:endParaRPr lang="en-US" sz="1200" dirty="0"/>
           </a:p>
@@ -39687,7 +42693,7 @@
                 <a:ea typeface="Trebuchet MS" pitchFamily="34" charset="-122"/>
                 <a:cs typeface="Trebuchet MS" pitchFamily="34" charset="-120"/>
               </a:rPr>
-              <a:t>replay</a:t>
+              <a:t>player</a:t>
             </a:r>
             <a:endParaRPr lang="en-US" sz="1200" dirty="0"/>
           </a:p>
@@ -39753,7 +42759,7 @@
                 <a:ea typeface="Calibri" pitchFamily="34" charset="-122"/>
                 <a:cs typeface="Calibri" pitchFamily="34" charset="-120"/>
               </a:rPr>
-              <a:t>A person who writes plays and stories performed on stage.</a:t>
+              <a:t>to show something publicly, or an arrangement of things put out to be seen</a:t>
             </a:r>
             <a:endParaRPr lang="en-US" sz="1200" dirty="0"/>
           </a:p>
@@ -39826,7 +42832,7 @@
                 <a:ea typeface="Trebuchet MS" pitchFamily="34" charset="-122"/>
                 <a:cs typeface="Trebuchet MS" pitchFamily="34" charset="-120"/>
               </a:rPr>
-              <a:t>display</a:t>
+              <a:t>replay</a:t>
             </a:r>
             <a:endParaRPr lang="en-US" sz="1200" dirty="0"/>
           </a:p>
@@ -39892,7 +42898,7 @@
                 <a:ea typeface="Calibri" pitchFamily="34" charset="-122"/>
                 <a:cs typeface="Calibri" pitchFamily="34" charset="-120"/>
               </a:rPr>
-              <a:t>The skill of fighting or performing with swords, often seen in movies.</a:t>
+              <a:t>to make a wrong or poor move in a game</a:t>
             </a:r>
             <a:endParaRPr lang="en-US" sz="1200" dirty="0"/>
           </a:p>
@@ -39965,7 +42971,7 @@
                 <a:ea typeface="Trebuchet MS" pitchFamily="34" charset="-122"/>
                 <a:cs typeface="Trebuchet MS" pitchFamily="34" charset="-120"/>
               </a:rPr>
-              <a:t>playwright</a:t>
+              <a:t>display</a:t>
             </a:r>
             <a:endParaRPr lang="en-US" sz="1200" dirty="0"/>
           </a:p>
@@ -40031,7 +43037,7 @@
                 <a:ea typeface="Calibri" pitchFamily="34" charset="-122"/>
                 <a:cs typeface="Calibri" pitchFamily="34" charset="-120"/>
               </a:rPr>
-              <a:t>To play something again, like watching a funny video clip a second time.</a:t>
+              <a:t>a person who takes part in a game or sport</a:t>
             </a:r>
             <a:endParaRPr lang="en-US" sz="1200" dirty="0"/>
           </a:p>
@@ -40104,7 +43110,7 @@
                 <a:ea typeface="Trebuchet MS" pitchFamily="34" charset="-122"/>
                 <a:cs typeface="Trebuchet MS" pitchFamily="34" charset="-120"/>
               </a:rPr>
-              <a:t>swordplay</a:t>
+              <a:t>misplay</a:t>
             </a:r>
             <a:endParaRPr lang="en-US" sz="1200" dirty="0"/>
           </a:p>
@@ -40170,7 +43176,7 @@
                 <a:ea typeface="Calibri" pitchFamily="34" charset="-122"/>
                 <a:cs typeface="Calibri" pitchFamily="34" charset="-120"/>
               </a:rPr>
-              <a:t>A person who takes part in a game or sport.</a:t>
+              <a:t>takes part in games or fun activities; also, theatrical performances</a:t>
             </a:r>
             <a:endParaRPr lang="en-US" sz="1200" dirty="0"/>
           </a:p>
@@ -40462,7 +43468,7 @@
                 <a:ea typeface="Calibri" pitchFamily="34" charset="-122"/>
                 <a:cs typeface="Calibri" pitchFamily="34" charset="-120"/>
               </a:rPr>
-              <a:t>Word Labs  •  wordlabs.app  •  Root: 'play' = to engage in fun activity</a:t>
+              <a:t>Word Labs  •  wordlabs.app  •  Root: 'play' = to take part in a game; to have fun</a:t>
             </a:r>
             <a:endParaRPr lang="en-US" sz="800" dirty="0"/>
           </a:p>
@@ -40665,7 +43671,7 @@
                 <a:ea typeface="Calibri" pitchFamily="34" charset="-122"/>
                 <a:cs typeface="Calibri" pitchFamily="34" charset="-120"/>
               </a:rPr>
-              <a:t>The children were playful during recess, chasing each other around the oval.</a:t>
+              <a:t>The children like to play in the park after school.</a:t>
             </a:r>
             <a:endParaRPr lang="en-US" sz="1500" dirty="0"/>
           </a:p>
@@ -40829,7 +43835,7 @@
                 <a:ea typeface="Calibri" pitchFamily="34" charset="-122"/>
                 <a:cs typeface="Calibri" pitchFamily="34" charset="-120"/>
               </a:rPr>
-              <a:t>Our class will replay the video about the water cycle so everyone understands it.</a:t>
+              <a:t>She plays the piano beautifully every evening.</a:t>
             </a:r>
             <a:endParaRPr lang="en-US" sz="1500" dirty="0"/>
           </a:p>
@@ -40993,7 +43999,7 @@
                 <a:ea typeface="Calibri" pitchFamily="34" charset="-122"/>
                 <a:cs typeface="Calibri" pitchFamily="34" charset="-120"/>
               </a:rPr>
-              <a:t>The school decided to display the students' artwork in the main hallway for everyone to admire.</a:t>
+              <a:t>We played football together every lunchtime.</a:t>
             </a:r>
             <a:endParaRPr lang="en-US" sz="1500" dirty="0"/>
           </a:p>
